--- a/docs/presentation/reachAQ-overview.pptx
+++ b/docs/presentation/reachAQ-overview.pptx
@@ -735,7 +735,7 @@
           </a:p>
           <a:p>
             <a:r>
-              <a:t>2. Show the live camera panels with the pose overlay. Real inference, on played frames.</a:t>
+              <a:t>2. Show the live camera panels. Each view carries its own 2D pose overlay, computed on the GPU from the played frames. This is real inference running now, not a replayed result.</a:t>
             </a:r>
           </a:p>
           <a:p>
@@ -5269,8 +5269,8 @@
         </p:blipFill>
         <p:spPr>
           <a:xfrm>
-            <a:off x="3710555" y="1645920"/>
-            <a:ext cx="4740409" cy="1828800"/>
+            <a:off x="4184596" y="1627632"/>
+            <a:ext cx="3792327" cy="1463040"/>
           </a:xfrm>
           <a:prstGeom prst="rect">
             <a:avLst/>
@@ -5279,7 +5279,7 @@
       </p:pic>
       <p:pic>
         <p:nvPicPr>
-          <p:cNvPr id="5" name="Picture 4" descr="demo_frames.png"/>
+          <p:cNvPr id="5" name="Picture 4" descr="live_overlay.png"/>
           <p:cNvPicPr>
             <a:picLocks noChangeAspect="1"/>
           </p:cNvPicPr>
@@ -5293,14 +5293,48 @@
         </p:blipFill>
         <p:spPr>
           <a:xfrm>
-            <a:off x="3520440" y="3838954"/>
-            <a:ext cx="5120640" cy="2563371"/>
+            <a:off x="2568633" y="3154680"/>
+            <a:ext cx="7024254" cy="2743200"/>
           </a:xfrm>
           <a:prstGeom prst="rect">
             <a:avLst/>
           </a:prstGeom>
         </p:spPr>
       </p:pic>
+      <p:sp>
+        <p:nvSpPr>
+          <p:cNvPr id="6" name="TextBox 5"/>
+          <p:cNvSpPr txBox="1"/>
+          <p:nvPr/>
+        </p:nvSpPr>
+        <p:spPr>
+          <a:xfrm>
+            <a:off x="685800" y="6035040"/>
+            <a:ext cx="10789920" cy="365760"/>
+          </a:xfrm>
+          <a:prstGeom prst="rect">
+            <a:avLst/>
+          </a:prstGeom>
+          <a:noFill/>
+        </p:spPr>
+        <p:txBody>
+          <a:bodyPr wrap="square">
+            <a:spAutoFit/>
+          </a:bodyPr>
+          <a:lstStyle/>
+          <a:p>
+            <a:pPr algn="l"/>
+            <a:r>
+              <a:rPr sz="1200" b="0" i="1">
+                <a:solidFill>
+                  <a:srgbClr val="7A7F87"/>
+                </a:solidFill>
+              </a:rPr>
+              <a:t>Live 2D pose, per view, computed on the GPU from the played frames — captured from the running application on the rig.</a:t>
+            </a:r>
+          </a:p>
+        </p:txBody>
+      </p:sp>
     </p:spTree>
   </p:cSld>
   <p:clrMapOvr>

--- a/docs/presentation/reachAQ-overview.pptx
+++ b/docs/presentation/reachAQ-overview.pptx
@@ -6,7 +6,7 @@
   </p:sldMasterIdLst>
   <p:sldIdLst>
     <p:sldId id="256" r:id="rId7"/>
-    <p:sldId id="257" r:id="rId9"/>
+    <p:sldId id="257" r:id="rId8"/>
     <p:sldId id="258" r:id="rId10"/>
     <p:sldId id="259" r:id="rId11"/>
     <p:sldId id="260" r:id="rId12"/>
@@ -14,11 +14,6 @@
     <p:sldId id="262" r:id="rId14"/>
     <p:sldId id="263" r:id="rId15"/>
     <p:sldId id="264" r:id="rId16"/>
-    <p:sldId id="265" r:id="rId17"/>
-    <p:sldId id="266" r:id="rId18"/>
-    <p:sldId id="267" r:id="rId19"/>
-    <p:sldId id="268" r:id="rId20"/>
-    <p:sldId id="269" r:id="rId21"/>
   </p:sldIdLst>
   <p:sldSz cx="12191695" cy="6858000" type="screen4x3"/>
   <p:notesSz cx="6858000" cy="9144000"/>
@@ -515,403 +510,7 @@
           <a:lstStyle/>
           <a:p>
             <a:r>
-              <a:t>One sentence of welcome. Say that the last slide before backup is a live demo, and that everything in it is real except the video.</a:t>
-            </a:r>
-          </a:p>
-        </p:txBody>
-      </p:sp>
-      <p:sp>
-        <p:nvSpPr>
-          <p:cNvPr id="4" name="Slide Number Placeholder 3"/>
-          <p:cNvSpPr>
-            <a:spLocks noGrp="1"/>
-          </p:cNvSpPr>
-          <p:nvPr>
-            <p:ph type="sldNum" idx="5" sz="quarter"/>
-          </p:nvPr>
-        </p:nvSpPr>
-        <p:spPr/>
-      </p:sp>
-    </p:spTree>
-  </p:cSld>
-  <p:clrMapOvr>
-    <a:masterClrMapping/>
-  </p:clrMapOvr>
-</p:notes>
-</file>
-
-<file path=ppt/notesSlides/notesSlide10.xml><?xml version="1.0" encoding="utf-8"?>
-<p:notes xmlns:a="http://schemas.openxmlformats.org/drawingml/2006/main" xmlns:p="http://schemas.openxmlformats.org/presentationml/2006/main" xmlns:r="http://schemas.openxmlformats.org/officeDocument/2006/relationships">
-  <p:cSld>
-    <p:spTree>
-      <p:nvGrpSpPr>
-        <p:cNvPr id="1" name=""/>
-        <p:cNvGrpSpPr/>
-        <p:nvPr/>
-      </p:nvGrpSpPr>
-      <p:grpSpPr>
-        <a:xfrm>
-          <a:off x="0" y="0"/>
-          <a:ext cx="0" cy="0"/>
-          <a:chOff x="0" y="0"/>
-          <a:chExt cx="0" cy="0"/>
-        </a:xfrm>
-      </p:grpSpPr>
-      <p:sp>
-        <p:nvSpPr>
-          <p:cNvPr id="2" name="Slide Image Placeholder 1"/>
-          <p:cNvSpPr>
-            <a:spLocks noGrp="1"/>
-          </p:cNvSpPr>
-          <p:nvPr>
-            <p:ph type="sldImg" idx="2"/>
-          </p:nvPr>
-        </p:nvSpPr>
-        <p:spPr/>
-      </p:sp>
-      <p:sp>
-        <p:nvSpPr>
-          <p:cNvPr id="3" name="Notes Placeholder 2"/>
-          <p:cNvSpPr>
-            <a:spLocks noGrp="1"/>
-          </p:cNvSpPr>
-          <p:nvPr>
-            <p:ph type="body" idx="3" sz="quarter"/>
-          </p:nvPr>
-        </p:nvSpPr>
-        <p:spPr/>
-        <p:txBody>
-          <a:bodyPr/>
-          <a:lstStyle/>
-          <a:p>
-            <a:r>
-              <a:t>THE 5 MS FIGURE IS A DESIGN TARGET AND A TAIL FIGURE, NOT A MEASURED RESULT. It needs thread pinning, realtime scheduling, and no allocation or logging on the trigger branch, and it is pending rig validation. Do not present it as achieved.</a:t>
-            </a:r>
-          </a:p>
-        </p:txBody>
-      </p:sp>
-      <p:sp>
-        <p:nvSpPr>
-          <p:cNvPr id="4" name="Slide Number Placeholder 3"/>
-          <p:cNvSpPr>
-            <a:spLocks noGrp="1"/>
-          </p:cNvSpPr>
-          <p:nvPr>
-            <p:ph type="sldNum" idx="5" sz="quarter"/>
-          </p:nvPr>
-        </p:nvSpPr>
-        <p:spPr/>
-      </p:sp>
-    </p:spTree>
-  </p:cSld>
-  <p:clrMapOvr>
-    <a:masterClrMapping/>
-  </p:clrMapOvr>
-</p:notes>
-</file>
-
-<file path=ppt/notesSlides/notesSlide11.xml><?xml version="1.0" encoding="utf-8"?>
-<p:notes xmlns:a="http://schemas.openxmlformats.org/drawingml/2006/main" xmlns:p="http://schemas.openxmlformats.org/presentationml/2006/main" xmlns:r="http://schemas.openxmlformats.org/officeDocument/2006/relationships">
-  <p:cSld>
-    <p:spTree>
-      <p:nvGrpSpPr>
-        <p:cNvPr id="1" name=""/>
-        <p:cNvGrpSpPr/>
-        <p:nvPr/>
-      </p:nvGrpSpPr>
-      <p:grpSpPr>
-        <a:xfrm>
-          <a:off x="0" y="0"/>
-          <a:ext cx="0" cy="0"/>
-          <a:chOff x="0" y="0"/>
-          <a:chExt cx="0" cy="0"/>
-        </a:xfrm>
-      </p:grpSpPr>
-      <p:sp>
-        <p:nvSpPr>
-          <p:cNvPr id="2" name="Slide Image Placeholder 1"/>
-          <p:cNvSpPr>
-            <a:spLocks noGrp="1"/>
-          </p:cNvSpPr>
-          <p:nvPr>
-            <p:ph type="sldImg" idx="2"/>
-          </p:nvPr>
-        </p:nvSpPr>
-        <p:spPr/>
-      </p:sp>
-      <p:sp>
-        <p:nvSpPr>
-          <p:cNvPr id="3" name="Notes Placeholder 2"/>
-          <p:cNvSpPr>
-            <a:spLocks noGrp="1"/>
-          </p:cNvSpPr>
-          <p:nvPr>
-            <p:ph type="body" idx="3" sz="quarter"/>
-          </p:nvPr>
-        </p:nvSpPr>
-        <p:spPr/>
-        <p:txBody>
-          <a:bodyPr/>
-          <a:lstStyle/>
-          <a:p>
-            <a:r>
-              <a:t>The embedded configuration means a session can be interpreted years later without the rig notes.</a:t>
-            </a:r>
-          </a:p>
-        </p:txBody>
-      </p:sp>
-      <p:sp>
-        <p:nvSpPr>
-          <p:cNvPr id="4" name="Slide Number Placeholder 3"/>
-          <p:cNvSpPr>
-            <a:spLocks noGrp="1"/>
-          </p:cNvSpPr>
-          <p:nvPr>
-            <p:ph type="sldNum" idx="5" sz="quarter"/>
-          </p:nvPr>
-        </p:nvSpPr>
-        <p:spPr/>
-      </p:sp>
-    </p:spTree>
-  </p:cSld>
-  <p:clrMapOvr>
-    <a:masterClrMapping/>
-  </p:clrMapOvr>
-</p:notes>
-</file>
-
-<file path=ppt/notesSlides/notesSlide12.xml><?xml version="1.0" encoding="utf-8"?>
-<p:notes xmlns:a="http://schemas.openxmlformats.org/drawingml/2006/main" xmlns:p="http://schemas.openxmlformats.org/presentationml/2006/main" xmlns:r="http://schemas.openxmlformats.org/officeDocument/2006/relationships">
-  <p:cSld>
-    <p:spTree>
-      <p:nvGrpSpPr>
-        <p:cNvPr id="1" name=""/>
-        <p:cNvGrpSpPr/>
-        <p:nvPr/>
-      </p:nvGrpSpPr>
-      <p:grpSpPr>
-        <a:xfrm>
-          <a:off x="0" y="0"/>
-          <a:ext cx="0" cy="0"/>
-          <a:chOff x="0" y="0"/>
-          <a:chExt cx="0" cy="0"/>
-        </a:xfrm>
-      </p:grpSpPr>
-      <p:sp>
-        <p:nvSpPr>
-          <p:cNvPr id="2" name="Slide Image Placeholder 1"/>
-          <p:cNvSpPr>
-            <a:spLocks noGrp="1"/>
-          </p:cNvSpPr>
-          <p:nvPr>
-            <p:ph type="sldImg" idx="2"/>
-          </p:nvPr>
-        </p:nvSpPr>
-        <p:spPr/>
-      </p:sp>
-      <p:sp>
-        <p:nvSpPr>
-          <p:cNvPr id="3" name="Notes Placeholder 2"/>
-          <p:cNvSpPr>
-            <a:spLocks noGrp="1"/>
-          </p:cNvSpPr>
-          <p:nvPr>
-            <p:ph type="body" idx="3" sz="quarter"/>
-          </p:nvPr>
-        </p:nvSpPr>
-        <p:spPr/>
-        <p:txBody>
-          <a:bodyPr/>
-          <a:lstStyle/>
-          <a:p>
-            <a:r>
-              <a:t>Run order:</a:t>
-            </a:r>
-          </a:p>
-          <a:p>
-            <a:r>
-              <a:t>1. Launch with --demo, or toggle Tools &gt; Demo Mode while idle, to show both routes.</a:t>
-            </a:r>
-          </a:p>
-          <a:p>
-            <a:r>
-              <a:t>2. Show the live camera panels. Each view carries its own 2D pose overlay, computed on the GPU from the played frames. This is real inference running now, not a replayed result.</a:t>
-            </a:r>
-          </a:p>
-          <a:p>
-            <a:r>
-              <a:t>3. Show the NI-DAQ live signal stream. Genuinely live.</a:t>
-            </a:r>
-          </a:p>
-          <a:p>
-            <a:r>
-              <a:t>4. Drive the pellet device manually. Genuinely live.</a:t>
-            </a:r>
-          </a:p>
-          <a:p>
-            <a:r>
-              <a:t>5. Open the protocol table; show cue timing and trigger profiles. Genuinely live.</a:t>
-            </a:r>
-          </a:p>
-          <a:p>
-            <a:r>
-              <a:t>6. Start a recording session, let trials run, show trial records accumulating.</a:t>
-            </a:r>
-          </a:p>
-          <a:p>
-            <a:r>
-              <a:t>7. Stop, and show the written session directory including its DEMO marker file.</a:t>
-            </a:r>
-          </a:p>
-          <a:p>
-            <a:r>
-              <a:t>8. State explicitly which single element was pre-recorded, and why.</a:t>
-            </a:r>
-          </a:p>
-          <a:p/>
-          <a:p>
-            <a:r>
-              <a:t>Point at the red banner in the status bar. It is there so nobody mistakes a demo session for data.</a:t>
-            </a:r>
-          </a:p>
-        </p:txBody>
-      </p:sp>
-      <p:sp>
-        <p:nvSpPr>
-          <p:cNvPr id="4" name="Slide Number Placeholder 3"/>
-          <p:cNvSpPr>
-            <a:spLocks noGrp="1"/>
-          </p:cNvSpPr>
-          <p:nvPr>
-            <p:ph type="sldNum" idx="5" sz="quarter"/>
-          </p:nvPr>
-        </p:nvSpPr>
-        <p:spPr/>
-      </p:sp>
-    </p:spTree>
-  </p:cSld>
-  <p:clrMapOvr>
-    <a:masterClrMapping/>
-  </p:clrMapOvr>
-</p:notes>
-</file>
-
-<file path=ppt/notesSlides/notesSlide13.xml><?xml version="1.0" encoding="utf-8"?>
-<p:notes xmlns:a="http://schemas.openxmlformats.org/drawingml/2006/main" xmlns:p="http://schemas.openxmlformats.org/presentationml/2006/main" xmlns:r="http://schemas.openxmlformats.org/officeDocument/2006/relationships">
-  <p:cSld>
-    <p:spTree>
-      <p:nvGrpSpPr>
-        <p:cNvPr id="1" name=""/>
-        <p:cNvGrpSpPr/>
-        <p:nvPr/>
-      </p:nvGrpSpPr>
-      <p:grpSpPr>
-        <a:xfrm>
-          <a:off x="0" y="0"/>
-          <a:ext cx="0" cy="0"/>
-          <a:chOff x="0" y="0"/>
-          <a:chExt cx="0" cy="0"/>
-        </a:xfrm>
-      </p:grpSpPr>
-      <p:sp>
-        <p:nvSpPr>
-          <p:cNvPr id="2" name="Slide Image Placeholder 1"/>
-          <p:cNvSpPr>
-            <a:spLocks noGrp="1"/>
-          </p:cNvSpPr>
-          <p:nvPr>
-            <p:ph type="sldImg" idx="2"/>
-          </p:nvPr>
-        </p:nvSpPr>
-        <p:spPr/>
-      </p:sp>
-      <p:sp>
-        <p:nvSpPr>
-          <p:cNvPr id="3" name="Notes Placeholder 2"/>
-          <p:cNvSpPr>
-            <a:spLocks noGrp="1"/>
-          </p:cNvSpPr>
-          <p:nvPr>
-            <p:ph type="body" idx="3" sz="quarter"/>
-          </p:nvPr>
-        </p:nvSpPr>
-        <p:spPr/>
-        <p:txBody>
-          <a:bodyPr/>
-          <a:lstStyle/>
-          <a:p>
-            <a:r>
-              <a:t>Be honest here. This audience will run experiments on this system, and a surprise later costs far more than a caveat now.</a:t>
-            </a:r>
-          </a:p>
-        </p:txBody>
-      </p:sp>
-      <p:sp>
-        <p:nvSpPr>
-          <p:cNvPr id="4" name="Slide Number Placeholder 3"/>
-          <p:cNvSpPr>
-            <a:spLocks noGrp="1"/>
-          </p:cNvSpPr>
-          <p:nvPr>
-            <p:ph type="sldNum" idx="5" sz="quarter"/>
-          </p:nvPr>
-        </p:nvSpPr>
-        <p:spPr/>
-      </p:sp>
-    </p:spTree>
-  </p:cSld>
-  <p:clrMapOvr>
-    <a:masterClrMapping/>
-  </p:clrMapOvr>
-</p:notes>
-</file>
-
-<file path=ppt/notesSlides/notesSlide14.xml><?xml version="1.0" encoding="utf-8"?>
-<p:notes xmlns:a="http://schemas.openxmlformats.org/drawingml/2006/main" xmlns:p="http://schemas.openxmlformats.org/presentationml/2006/main" xmlns:r="http://schemas.openxmlformats.org/officeDocument/2006/relationships">
-  <p:cSld>
-    <p:spTree>
-      <p:nvGrpSpPr>
-        <p:cNvPr id="1" name=""/>
-        <p:cNvGrpSpPr/>
-        <p:nvPr/>
-      </p:nvGrpSpPr>
-      <p:grpSpPr>
-        <a:xfrm>
-          <a:off x="0" y="0"/>
-          <a:ext cx="0" cy="0"/>
-          <a:chOff x="0" y="0"/>
-          <a:chExt cx="0" cy="0"/>
-        </a:xfrm>
-      </p:grpSpPr>
-      <p:sp>
-        <p:nvSpPr>
-          <p:cNvPr id="2" name="Slide Image Placeholder 1"/>
-          <p:cNvSpPr>
-            <a:spLocks noGrp="1"/>
-          </p:cNvSpPr>
-          <p:nvPr>
-            <p:ph type="sldImg" idx="2"/>
-          </p:nvPr>
-        </p:nvSpPr>
-        <p:spPr/>
-      </p:sp>
-      <p:sp>
-        <p:nvSpPr>
-          <p:cNvPr id="3" name="Notes Placeholder 2"/>
-          <p:cNvSpPr>
-            <a:spLocks noGrp="1"/>
-          </p:cNvSpPr>
-          <p:nvPr>
-            <p:ph type="body" idx="3" sz="quarter"/>
-          </p:nvPr>
-        </p:nvSpPr>
-        <p:spPr/>
-        <p:txBody>
-          <a:bodyPr/>
-          <a:lstStyle/>
-          <a:p>
-            <a:r>
-              <a:t>Leave this up while taking questions.</a:t>
+              <a:t>Keep this at the level of what the operator notices. The detail is on the slides that follow. The single sentence worth landing: reach-training watched and recorded, reachAQ decides and acts inside the same reach.</a:t>
             </a:r>
           </a:p>
         </p:txBody>
@@ -981,7 +580,7 @@
           <a:lstStyle/>
           <a:p>
             <a:r>
-              <a:t>No architecture yet. The point is the closed loop: the system is a participant in the experiment, not a recorder of it. Everything after this slide is how that is achieved.</a:t>
+              <a:t>Say plainly that we did not start over. reachAQ changed the hardware target, added stimulation and signal visualisation, and put pose in the control loop. Everything underneath it is auto-trainer's design.</a:t>
             </a:r>
           </a:p>
         </p:txBody>
@@ -1051,25 +650,7 @@
           <a:lstStyle/>
           <a:p>
             <a:r>
-              <a:t>reach-training was the original working rig: Python 3.8, PySpin cameras, an Arduino for the pellet, reach detection by camera ROI threshold, DeepLabCut offline afterwards, then manual curation.</a:t>
-            </a:r>
-          </a:p>
-          <a:p/>
-          <a:p>
-            <a:r>
-              <a:t>auto-trainer is the modular platform reachAQ is built from: core, video, device, inference, behavior, model and pyside packages, synchronized multi-process capture, integrated pose inference, stereo calibration, a CAN pellet device, and the session and metadata structure.</a:t>
-            </a:r>
-          </a:p>
-          <a:p/>
-          <a:p>
-            <a:r>
-              <a:t>reachAQ is this system: new hardware target, new stimulation subsystem, live 3D pose in the control loop, and a protocol engine.</a:t>
-            </a:r>
-          </a:p>
-          <a:p/>
-          <a:p>
-            <a:r>
-              <a:t>Say plainly: we did not start over, and we did not just rename someone else's code.</a:t>
+              <a:t>The numbers that matter: under 16 competing processes, SCHED_OTHER reaches 6.05 ms max and misses 13 deadlines; SCHED_FIFO holds p99 at 0.059 ms and max at 0.155 ms with zero misses, and restores the full 900 Hz cadence. That is roughly 32x headroom under a load harsher than real acquisition. Worth stating: a PREEMPT_RT kernel is not required. Stock Linux already preempts SCHED_OTHER for SCHED_FIFO.</a:t>
             </a:r>
           </a:p>
         </p:txBody>
@@ -1139,7 +720,7 @@
           <a:lstStyle/>
           <a:p>
             <a:r>
-              <a:t>The shared frame index is what makes 3D possible at all. Frame N on left must be the same instant as frame N on right.</a:t>
+              <a:t>This is the measurement that makes pose-driven gating viable at all. At ~11 ms p99 the behaviour loop has room inside a 150 FPS frame budget. It also shows why the install script sets the governor: the default cost more than half the win.</a:t>
             </a:r>
           </a:p>
         </p:txBody>
@@ -1209,7 +790,7 @@
           <a:lstStyle/>
           <a:p>
             <a:r>
-              <a:t>The firmware capability check matters because a protocol feature that needs a newer board must refuse rather than silently misbehave.</a:t>
+              <a:t>Four sync modes: auto, backplane, external, independent. Compatible PXI cards share PXI_CLK10, a backplane start trigger and a routed master sample clock. Devices resolve by product and serial, so a changed NI-DAQmx alias never silently rebinds to the wrong card. Tone confirmation cross-checks commanded tones against the pulses actually observed.</a:t>
             </a:r>
           </a:p>
         </p:txBody>
@@ -1279,7 +860,7 @@
           <a:lstStyle/>
           <a:p>
             <a:r>
-              <a:t>The image shows four candidate backbones on one frame with how many keypoints each put above threshold. That spread is exactly why the confidence gate is calibrated per model: a cspnext_s never scores above 0.33, so a single global threshold would hold the reach flag permanently false.</a:t>
+              <a:t>The point for a new user is that this replaces post-hoc plotting. A decimated FSR trace is useless for behavioural analysis, so samples are forwarded unthrottled and an armed session gains roughly 166 rows a second. Worth flagging out loud: there is no microphone channel in the system today.</a:t>
             </a:r>
           </a:p>
         </p:txBody>
@@ -1349,7 +930,7 @@
           <a:lstStyle/>
           <a:p>
             <a:r>
-              <a:t>This is the central claim of the whole system. Everything on the previous slides exists to make this slide possible. Be clear that reachAQ replaced an ROI brightness test with a tracked 3D coordinate.</a:t>
+              <a:t>The pinning behaviour is the part worth dwelling on. It is what stops an edit to a shared phase from quietly changing an experiment that was already validated.</a:t>
             </a:r>
           </a:p>
         </p:txBody>
@@ -1419,77 +1000,7 @@
           <a:lstStyle/>
           <a:p>
             <a:r>
-              <a:t>Say plainly that this is new and has no ancestor in either repository. The LabVIEW system was used as a requirements inventory, not as a source of logic — it is known to contain bugs.</a:t>
-            </a:r>
-          </a:p>
-        </p:txBody>
-      </p:sp>
-      <p:sp>
-        <p:nvSpPr>
-          <p:cNvPr id="4" name="Slide Number Placeholder 3"/>
-          <p:cNvSpPr>
-            <a:spLocks noGrp="1"/>
-          </p:cNvSpPr>
-          <p:nvPr>
-            <p:ph type="sldNum" idx="5" sz="quarter"/>
-          </p:nvPr>
-        </p:nvSpPr>
-        <p:spPr/>
-      </p:sp>
-    </p:spTree>
-  </p:cSld>
-  <p:clrMapOvr>
-    <a:masterClrMapping/>
-  </p:clrMapOvr>
-</p:notes>
-</file>
-
-<file path=ppt/notesSlides/notesSlide9.xml><?xml version="1.0" encoding="utf-8"?>
-<p:notes xmlns:a="http://schemas.openxmlformats.org/drawingml/2006/main" xmlns:p="http://schemas.openxmlformats.org/presentationml/2006/main" xmlns:r="http://schemas.openxmlformats.org/officeDocument/2006/relationships">
-  <p:cSld>
-    <p:spTree>
-      <p:nvGrpSpPr>
-        <p:cNvPr id="1" name=""/>
-        <p:cNvGrpSpPr/>
-        <p:nvPr/>
-      </p:nvGrpSpPr>
-      <p:grpSpPr>
-        <a:xfrm>
-          <a:off x="0" y="0"/>
-          <a:ext cx="0" cy="0"/>
-          <a:chOff x="0" y="0"/>
-          <a:chExt cx="0" cy="0"/>
-        </a:xfrm>
-      </p:grpSpPr>
-      <p:sp>
-        <p:nvSpPr>
-          <p:cNvPr id="2" name="Slide Image Placeholder 1"/>
-          <p:cNvSpPr>
-            <a:spLocks noGrp="1"/>
-          </p:cNvSpPr>
-          <p:nvPr>
-            <p:ph type="sldImg" idx="2"/>
-          </p:nvPr>
-        </p:nvSpPr>
-        <p:spPr/>
-      </p:sp>
-      <p:sp>
-        <p:nvSpPr>
-          <p:cNvPr id="3" name="Notes Placeholder 2"/>
-          <p:cNvSpPr>
-            <a:spLocks noGrp="1"/>
-          </p:cNvSpPr>
-          <p:nvPr>
-            <p:ph type="body" idx="3" sz="quarter"/>
-          </p:nvPr>
-        </p:nvSpPr>
-        <p:spPr/>
-        <p:txBody>
-          <a:bodyPr/>
-          <a:lstStyle/>
-          <a:p>
-            <a:r>
-              <a:t>The reproducibility point is worth dwelling on: reach-training drew at runtime, so a session could not be replayed. reachAQ derives every draw from the trial identity.</a:t>
+              <a:t>Run order — launch with --demo or toggle Tools &gt; Demo Mode while idle; show both camera panels carrying their own overlay; show the NI-DAQ signal stream; drive the pellet device by hand; open the protocol editor and the experiment sidebar; start a recording and let trials run; stop and show the session directory with its DEMO marker. Point at the red banner — it is there so nobody mistakes a demo session for data.</a:t>
             </a:r>
           </a:p>
         </p:txBody>
@@ -4497,1489 +4008,111 @@
       <p:grpSpPr/>
       <p:sp>
         <p:nvSpPr>
-          <p:cNvPr id="2" name="TextBox 1"/>
-          <p:cNvSpPr txBox="1"/>
+          <p:cNvPr id="2" name="Title 1"/>
+          <p:cNvSpPr>
+            <a:spLocks noGrp="1"/>
+          </p:cNvSpPr>
+          <p:nvPr>
+            <p:ph type="ctrTitle"/>
+          </p:nvPr>
+        </p:nvSpPr>
+        <p:spPr>
+          <a:xfrm>
+            <a:off x="658368" y="2240280"/>
+            <a:ext cx="10874959" cy="1234440"/>
+          </a:xfrm>
+        </p:spPr>
+        <p:txBody>
+          <a:bodyPr/>
+          <a:lstStyle/>
+          <a:p>
+            <a:pPr algn="l"/>
+            <a:r>
+              <a:rPr sz="5400" b="1" i="0">
+                <a:solidFill>
+                  <a:srgbClr val="1E242B"/>
+                </a:solidFill>
+                <a:latin typeface="Segoe UI"/>
+              </a:rPr>
+              <a:t>reachAQ</a:t>
+            </a:r>
+          </a:p>
+        </p:txBody>
+      </p:sp>
+      <p:sp>
+        <p:nvSpPr>
+          <p:cNvPr id="3" name="Subtitle 2"/>
+          <p:cNvSpPr>
+            <a:spLocks noGrp="1"/>
+          </p:cNvSpPr>
+          <p:nvPr>
+            <p:ph type="subTitle" idx="1"/>
+          </p:nvPr>
+        </p:nvSpPr>
+        <p:spPr>
+          <a:xfrm>
+            <a:off x="658368" y="3520440"/>
+            <a:ext cx="8686800" cy="914400"/>
+          </a:xfrm>
+        </p:spPr>
+        <p:txBody>
+          <a:bodyPr wrap="square"/>
+          <a:lstStyle/>
+          <a:p>
+            <a:pPr algn="l"/>
+            <a:r>
+              <a:rPr sz="1700" b="0" i="0">
+                <a:solidFill>
+                  <a:srgbClr val="6B727B"/>
+                </a:solidFill>
+                <a:latin typeface="Segoe UI"/>
+              </a:rPr>
+              <a:t>Automated mouse reach acquisition — what changed, and what it costs in milliseconds</a:t>
+            </a:r>
+          </a:p>
+        </p:txBody>
+      </p:sp>
+      <p:sp>
+        <p:nvSpPr>
+          <p:cNvPr id="4" name="Rectangle 3"/>
+          <p:cNvSpPr/>
           <p:nvPr/>
         </p:nvSpPr>
         <p:spPr>
           <a:xfrm>
-            <a:off x="822960" y="2286000"/>
-            <a:ext cx="10515600" cy="1097280"/>
+            <a:off x="658368" y="1965960"/>
+            <a:ext cx="1005840" cy="38100"/>
           </a:xfrm>
           <a:prstGeom prst="rect">
             <a:avLst/>
           </a:prstGeom>
-          <a:noFill/>
-        </p:spPr>
-        <p:txBody>
-          <a:bodyPr wrap="square">
-            <a:spAutoFit/>
-          </a:bodyPr>
-          <a:lstStyle/>
-          <a:p>
-            <a:pPr algn="l"/>
-            <a:r>
-              <a:rPr sz="5400" b="1" i="0">
-                <a:solidFill>
-                  <a:srgbClr val="26282B"/>
-                </a:solidFill>
-              </a:rPr>
-              <a:t>reachAQ</a:t>
-            </a:r>
-          </a:p>
-        </p:txBody>
-      </p:sp>
-      <p:sp>
-        <p:nvSpPr>
-          <p:cNvPr id="3" name="TextBox 2"/>
-          <p:cNvSpPr txBox="1"/>
-          <p:nvPr/>
-        </p:nvSpPr>
-        <p:spPr>
-          <a:xfrm>
-            <a:off x="822960" y="3291840"/>
-            <a:ext cx="10515600" cy="548640"/>
-          </a:xfrm>
-          <a:prstGeom prst="rect">
-            <a:avLst/>
-          </a:prstGeom>
-          <a:noFill/>
-        </p:spPr>
-        <p:txBody>
-          <a:bodyPr wrap="square">
-            <a:spAutoFit/>
-          </a:bodyPr>
-          <a:lstStyle/>
-          <a:p>
-            <a:pPr algn="l"/>
-            <a:r>
-              <a:rPr sz="2200" b="0" i="0">
-                <a:solidFill>
-                  <a:srgbClr val="26282B"/>
-                </a:solidFill>
-              </a:rPr>
-              <a:t>Automated mouse reach acquisition</a:t>
-            </a:r>
-          </a:p>
-        </p:txBody>
-      </p:sp>
-      <p:sp>
-        <p:nvSpPr>
-          <p:cNvPr id="4" name="TextBox 3"/>
-          <p:cNvSpPr txBox="1"/>
-          <p:nvPr/>
-        </p:nvSpPr>
-        <p:spPr>
-          <a:xfrm>
-            <a:off x="822960" y="3931920"/>
-            <a:ext cx="10515600" cy="457200"/>
-          </a:xfrm>
-          <a:prstGeom prst="rect">
-            <a:avLst/>
-          </a:prstGeom>
-          <a:noFill/>
-        </p:spPr>
-        <p:txBody>
-          <a:bodyPr wrap="square">
-            <a:spAutoFit/>
-          </a:bodyPr>
-          <a:lstStyle/>
-          <a:p>
-            <a:pPr algn="l"/>
-            <a:r>
-              <a:rPr sz="1400" b="0" i="0">
-                <a:solidFill>
-                  <a:srgbClr val="7A7F87"/>
-                </a:solidFill>
-              </a:rPr>
-              <a:t>Cerebellum Lab  ·  Dell/Ubuntu rig</a:t>
-            </a:r>
-          </a:p>
-        </p:txBody>
-      </p:sp>
-    </p:spTree>
-  </p:cSld>
-  <p:clrMapOvr>
-    <a:masterClrMapping/>
-  </p:clrMapOvr>
-</p:sld>
-</file>
-
-<file path=ppt/slides/slide10.xml><?xml version="1.0" encoding="utf-8"?>
-<p:sld xmlns:a="http://schemas.openxmlformats.org/drawingml/2006/main" xmlns:p="http://schemas.openxmlformats.org/presentationml/2006/main" xmlns:r="http://schemas.openxmlformats.org/officeDocument/2006/relationships">
-  <p:cSld>
-    <p:spTree>
-      <p:nvGrpSpPr>
-        <p:cNvPr id="1" name=""/>
-        <p:cNvGrpSpPr/>
-        <p:nvPr/>
-      </p:nvGrpSpPr>
-      <p:grpSpPr/>
-      <p:sp>
-        <p:nvSpPr>
-          <p:cNvPr id="2" name="TextBox 1"/>
-          <p:cNvSpPr txBox="1"/>
-          <p:nvPr/>
-        </p:nvSpPr>
-        <p:spPr>
-          <a:xfrm>
-            <a:off x="640080" y="365760"/>
-            <a:ext cx="10972800" cy="822960"/>
-          </a:xfrm>
-          <a:prstGeom prst="rect">
-            <a:avLst/>
-          </a:prstGeom>
-          <a:noFill/>
-        </p:spPr>
-        <p:txBody>
-          <a:bodyPr wrap="square">
-            <a:spAutoFit/>
-          </a:bodyPr>
-          <a:lstStyle/>
-          <a:p>
-            <a:pPr algn="l"/>
-            <a:r>
-              <a:rPr sz="3000" b="1" i="0">
-                <a:solidFill>
-                  <a:srgbClr val="26282B"/>
-                </a:solidFill>
-              </a:rPr>
-              <a:t>Timing architecture</a:t>
-            </a:r>
-          </a:p>
-        </p:txBody>
-      </p:sp>
-      <p:sp>
-        <p:nvSpPr>
-          <p:cNvPr id="3" name="TextBox 2"/>
-          <p:cNvSpPr txBox="1"/>
-          <p:nvPr/>
-        </p:nvSpPr>
-        <p:spPr>
-          <a:xfrm>
-            <a:off x="640080" y="1051560"/>
-            <a:ext cx="10972800" cy="457200"/>
-          </a:xfrm>
-          <a:prstGeom prst="rect">
-            <a:avLst/>
-          </a:prstGeom>
-          <a:noFill/>
-        </p:spPr>
-        <p:txBody>
-          <a:bodyPr wrap="square">
-            <a:spAutoFit/>
-          </a:bodyPr>
-          <a:lstStyle/>
-          <a:p>
-            <a:pPr algn="l"/>
-            <a:r>
-              <a:rPr sz="1400" b="0" i="1">
-                <a:solidFill>
-                  <a:srgbClr val="7A7F87"/>
-                </a:solidFill>
-              </a:rPr>
-              <a:t>Two loops, separate budgets, deliberately kept apart</a:t>
-            </a:r>
-          </a:p>
-        </p:txBody>
-      </p:sp>
-      <p:pic>
-        <p:nvPicPr>
-          <p:cNvPr id="4" name="Picture 3" descr="two_tier.png"/>
-          <p:cNvPicPr>
-            <a:picLocks noChangeAspect="1"/>
-          </p:cNvPicPr>
-          <p:nvPr/>
-        </p:nvPicPr>
-        <p:blipFill>
-          <a:blip r:embed="rId2"/>
-          <a:stretch>
-            <a:fillRect/>
-          </a:stretch>
-        </p:blipFill>
-        <p:spPr>
-          <a:xfrm>
-            <a:off x="933027" y="1645920"/>
-            <a:ext cx="10295466" cy="4389120"/>
-          </a:xfrm>
-          <a:prstGeom prst="rect">
-            <a:avLst/>
-          </a:prstGeom>
-        </p:spPr>
-      </p:pic>
-      <p:sp>
-        <p:nvSpPr>
-          <p:cNvPr id="5" name="TextBox 4"/>
-          <p:cNvSpPr txBox="1"/>
-          <p:nvPr/>
-        </p:nvSpPr>
-        <p:spPr>
-          <a:xfrm>
-            <a:off x="640080" y="6172200"/>
-            <a:ext cx="10972800" cy="365760"/>
-          </a:xfrm>
-          <a:prstGeom prst="rect">
-            <a:avLst/>
-          </a:prstGeom>
-          <a:noFill/>
-        </p:spPr>
-        <p:txBody>
-          <a:bodyPr wrap="square">
-            <a:spAutoFit/>
-          </a:bodyPr>
-          <a:lstStyle/>
-          <a:p>
-            <a:pPr algn="l"/>
-            <a:r>
-              <a:rPr sz="1200" b="0" i="1">
-                <a:solidFill>
-                  <a:srgbClr val="7A7F87"/>
-                </a:solidFill>
-              </a:rPr>
-              <a:t>A stimulus condition that needs a 3D coordinate belongs to Tier 2, never to the 5 ms budget.</a:t>
-            </a:r>
-          </a:p>
-        </p:txBody>
-      </p:sp>
-    </p:spTree>
-  </p:cSld>
-  <p:clrMapOvr>
-    <a:masterClrMapping/>
-  </p:clrMapOvr>
-</p:sld>
-</file>
-
-<file path=ppt/slides/slide11.xml><?xml version="1.0" encoding="utf-8"?>
-<p:sld xmlns:a="http://schemas.openxmlformats.org/drawingml/2006/main" xmlns:p="http://schemas.openxmlformats.org/presentationml/2006/main" xmlns:r="http://schemas.openxmlformats.org/officeDocument/2006/relationships">
-  <p:cSld>
-    <p:spTree>
-      <p:nvGrpSpPr>
-        <p:cNvPr id="1" name=""/>
-        <p:cNvGrpSpPr/>
-        <p:nvPr/>
-      </p:nvGrpSpPr>
-      <p:grpSpPr/>
-      <p:sp>
-        <p:nvSpPr>
-          <p:cNvPr id="2" name="TextBox 1"/>
-          <p:cNvSpPr txBox="1"/>
-          <p:nvPr/>
-        </p:nvSpPr>
-        <p:spPr>
-          <a:xfrm>
-            <a:off x="640080" y="365760"/>
-            <a:ext cx="10972800" cy="822960"/>
-          </a:xfrm>
-          <a:prstGeom prst="rect">
-            <a:avLst/>
-          </a:prstGeom>
-          <a:noFill/>
-        </p:spPr>
-        <p:txBody>
-          <a:bodyPr wrap="square">
-            <a:spAutoFit/>
-          </a:bodyPr>
-          <a:lstStyle/>
-          <a:p>
-            <a:pPr algn="l"/>
-            <a:r>
-              <a:rPr sz="3000" b="1" i="0">
-                <a:solidFill>
-                  <a:srgbClr val="26282B"/>
-                </a:solidFill>
-              </a:rPr>
-              <a:t>Data and metadata</a:t>
-            </a:r>
-          </a:p>
-        </p:txBody>
-      </p:sp>
-      <p:sp>
-        <p:nvSpPr>
-          <p:cNvPr id="3" name="TextBox 2"/>
-          <p:cNvSpPr txBox="1"/>
-          <p:nvPr/>
-        </p:nvSpPr>
-        <p:spPr>
-          <a:xfrm>
-            <a:off x="640080" y="1920240"/>
-            <a:ext cx="10972800" cy="548640"/>
-          </a:xfrm>
-          <a:prstGeom prst="rect">
-            <a:avLst/>
-          </a:prstGeom>
-          <a:noFill/>
-        </p:spPr>
-        <p:txBody>
-          <a:bodyPr wrap="square">
-            <a:spAutoFit/>
-          </a:bodyPr>
-          <a:lstStyle/>
-          <a:p>
-            <a:pPr algn="l"/>
-            <a:r>
-              <a:rPr sz="1600" b="0" i="0">
-                <a:solidFill>
-                  <a:srgbClr val="26282B"/>
-                </a:solidFill>
-              </a:rPr>
-              <a:t>•  Every session writes video, timestamps, trial records, and events</a:t>
-            </a:r>
-          </a:p>
-        </p:txBody>
-      </p:sp>
-      <p:sp>
-        <p:nvSpPr>
-          <p:cNvPr id="4" name="TextBox 3"/>
-          <p:cNvSpPr txBox="1"/>
-          <p:nvPr/>
-        </p:nvSpPr>
-        <p:spPr>
-          <a:xfrm>
-            <a:off x="640080" y="2468880"/>
-            <a:ext cx="10972800" cy="548640"/>
-          </a:xfrm>
-          <a:prstGeom prst="rect">
-            <a:avLst/>
-          </a:prstGeom>
-          <a:noFill/>
-        </p:spPr>
-        <p:txBody>
-          <a:bodyPr wrap="square">
-            <a:spAutoFit/>
-          </a:bodyPr>
-          <a:lstStyle/>
-          <a:p>
-            <a:pPr algn="l"/>
-            <a:r>
-              <a:rPr sz="1600" b="0" i="0">
-                <a:solidFill>
-                  <a:srgbClr val="26282B"/>
-                </a:solidFill>
-              </a:rPr>
-              <a:t>•  Session metadata is schema v2, and embeds the full system configuration that produced it</a:t>
-            </a:r>
-          </a:p>
-        </p:txBody>
-      </p:sp>
-      <p:sp>
-        <p:nvSpPr>
-          <p:cNvPr id="5" name="TextBox 4"/>
-          <p:cNvSpPr txBox="1"/>
-          <p:nvPr/>
-        </p:nvSpPr>
-        <p:spPr>
-          <a:xfrm>
-            <a:off x="640080" y="3017520"/>
-            <a:ext cx="10972800" cy="548640"/>
-          </a:xfrm>
-          <a:prstGeom prst="rect">
-            <a:avLst/>
-          </a:prstGeom>
-          <a:noFill/>
-        </p:spPr>
-        <p:txBody>
-          <a:bodyPr wrap="square">
-            <a:spAutoFit/>
-          </a:bodyPr>
-          <a:lstStyle/>
-          <a:p>
-            <a:pPr algn="l"/>
-            <a:r>
-              <a:rPr sz="1600" b="0" i="0">
-                <a:solidFill>
-                  <a:srgbClr val="26282B"/>
-                </a:solidFill>
-              </a:rPr>
-              <a:t>•  Hardware state is recorded as both configured and runtime</a:t>
-            </a:r>
-          </a:p>
-        </p:txBody>
-      </p:sp>
-      <p:sp>
-        <p:nvSpPr>
-          <p:cNvPr id="6" name="TextBox 5"/>
-          <p:cNvSpPr txBox="1"/>
-          <p:nvPr/>
-        </p:nvSpPr>
-        <p:spPr>
-          <a:xfrm>
-            <a:off x="640080" y="3566159"/>
-            <a:ext cx="10972800" cy="548640"/>
-          </a:xfrm>
-          <a:prstGeom prst="rect">
-            <a:avLst/>
-          </a:prstGeom>
-          <a:noFill/>
-        </p:spPr>
-        <p:txBody>
-          <a:bodyPr wrap="square">
-            <a:spAutoFit/>
-          </a:bodyPr>
-          <a:lstStyle/>
-          <a:p>
-            <a:pPr algn="l"/>
-            <a:r>
-              <a:rPr sz="1600" b="0" i="0">
-                <a:solidFill>
-                  <a:srgbClr val="26282B"/>
-                </a:solidFill>
-              </a:rPr>
-              <a:t>•  A validation command checks a finished session against a rule set</a:t>
-            </a:r>
-          </a:p>
-        </p:txBody>
-      </p:sp>
-      <p:sp>
-        <p:nvSpPr>
-          <p:cNvPr id="7" name="TextBox 6"/>
-          <p:cNvSpPr txBox="1"/>
-          <p:nvPr/>
-        </p:nvSpPr>
-        <p:spPr>
-          <a:xfrm>
-            <a:off x="640080" y="4489704"/>
-            <a:ext cx="10972800" cy="274320"/>
-          </a:xfrm>
-          <a:prstGeom prst="rect">
-            <a:avLst/>
-          </a:prstGeom>
-          <a:noFill/>
-        </p:spPr>
-        <p:txBody>
-          <a:bodyPr wrap="square">
-            <a:spAutoFit/>
-          </a:bodyPr>
-          <a:lstStyle/>
-          <a:p>
-            <a:pPr algn="l"/>
-            <a:r>
-              <a:rPr sz="1000" b="0" i="1">
-                <a:solidFill>
-                  <a:srgbClr val="7A7F87"/>
-                </a:solidFill>
-              </a:rPr>
-              <a:t>Where it came from</a:t>
-            </a:r>
-          </a:p>
-        </p:txBody>
-      </p:sp>
-      <p:sp>
-        <p:nvSpPr>
-          <p:cNvPr id="8" name="TextBox 7"/>
-          <p:cNvSpPr txBox="1"/>
-          <p:nvPr/>
-        </p:nvSpPr>
-        <p:spPr>
-          <a:xfrm>
-            <a:off x="640080" y="4800600"/>
-            <a:ext cx="3429000" cy="274320"/>
-          </a:xfrm>
-          <a:prstGeom prst="rect">
-            <a:avLst/>
-          </a:prstGeom>
-          <a:noFill/>
-        </p:spPr>
-        <p:txBody>
-          <a:bodyPr wrap="square">
-            <a:spAutoFit/>
-          </a:bodyPr>
-          <a:lstStyle/>
-          <a:p>
-            <a:pPr algn="l"/>
-            <a:r>
-              <a:rPr sz="1100" b="1" i="0">
-                <a:solidFill>
-                  <a:srgbClr val="6B7F9E"/>
-                </a:solidFill>
-              </a:rPr>
-              <a:t>reach-training</a:t>
-            </a:r>
-          </a:p>
-        </p:txBody>
-      </p:sp>
-      <p:sp>
-        <p:nvSpPr>
-          <p:cNvPr id="9" name="TextBox 8"/>
-          <p:cNvSpPr txBox="1"/>
-          <p:nvPr/>
-        </p:nvSpPr>
-        <p:spPr>
-          <a:xfrm>
-            <a:off x="640080" y="5093208"/>
-            <a:ext cx="3429000" cy="1280160"/>
-          </a:xfrm>
-          <a:prstGeom prst="rect">
-            <a:avLst/>
-          </a:prstGeom>
-          <a:noFill/>
-        </p:spPr>
-        <p:txBody>
-          <a:bodyPr wrap="square">
-            <a:spAutoFit/>
-          </a:bodyPr>
-          <a:lstStyle/>
-          <a:p>
-            <a:pPr algn="l"/>
-            <a:r>
-              <a:rPr sz="1000" b="0" i="0">
-                <a:solidFill>
-                  <a:srgbClr val="26282B"/>
-                </a:solidFill>
-              </a:rPr>
-              <a:t>Per-session YAML plus loose output files</a:t>
-            </a:r>
-          </a:p>
-        </p:txBody>
-      </p:sp>
-      <p:sp>
-        <p:nvSpPr>
-          <p:cNvPr id="10" name="TextBox 9"/>
-          <p:cNvSpPr txBox="1"/>
-          <p:nvPr/>
-        </p:nvSpPr>
-        <p:spPr>
-          <a:xfrm>
-            <a:off x="4343400" y="4800600"/>
-            <a:ext cx="3429000" cy="274320"/>
-          </a:xfrm>
-          <a:prstGeom prst="rect">
-            <a:avLst/>
-          </a:prstGeom>
-          <a:noFill/>
-        </p:spPr>
-        <p:txBody>
-          <a:bodyPr wrap="square">
-            <a:spAutoFit/>
-          </a:bodyPr>
-          <a:lstStyle/>
-          <a:p>
-            <a:pPr algn="l"/>
-            <a:r>
-              <a:rPr sz="1100" b="1" i="0">
-                <a:solidFill>
-                  <a:srgbClr val="4A8C7A"/>
-                </a:solidFill>
-              </a:rPr>
-              <a:t>auto-trainer</a:t>
-            </a:r>
-          </a:p>
-        </p:txBody>
-      </p:sp>
-      <p:sp>
-        <p:nvSpPr>
-          <p:cNvPr id="11" name="TextBox 10"/>
-          <p:cNvSpPr txBox="1"/>
-          <p:nvPr/>
-        </p:nvSpPr>
-        <p:spPr>
-          <a:xfrm>
-            <a:off x="4343400" y="5093208"/>
-            <a:ext cx="3429000" cy="1280160"/>
-          </a:xfrm>
-          <a:prstGeom prst="rect">
-            <a:avLst/>
-          </a:prstGeom>
-          <a:noFill/>
-        </p:spPr>
-        <p:txBody>
-          <a:bodyPr wrap="square">
-            <a:spAutoFit/>
-          </a:bodyPr>
-          <a:lstStyle/>
-          <a:p>
-            <a:pPr algn="l"/>
-            <a:r>
-              <a:rPr sz="1000" b="0" i="0">
-                <a:solidFill>
-                  <a:srgbClr val="26282B"/>
-                </a:solidFill>
-              </a:rPr>
-              <a:t>Project and session structure with a metadata schema</a:t>
-            </a:r>
-          </a:p>
-        </p:txBody>
-      </p:sp>
-      <p:sp>
-        <p:nvSpPr>
-          <p:cNvPr id="12" name="TextBox 11"/>
-          <p:cNvSpPr txBox="1"/>
-          <p:nvPr/>
-        </p:nvSpPr>
-        <p:spPr>
-          <a:xfrm>
-            <a:off x="8046720" y="4800600"/>
-            <a:ext cx="3429000" cy="274320"/>
-          </a:xfrm>
-          <a:prstGeom prst="rect">
-            <a:avLst/>
-          </a:prstGeom>
-          <a:noFill/>
-        </p:spPr>
-        <p:txBody>
-          <a:bodyPr wrap="square">
-            <a:spAutoFit/>
-          </a:bodyPr>
-          <a:lstStyle/>
-          <a:p>
-            <a:pPr algn="l"/>
-            <a:r>
-              <a:rPr sz="1100" b="1" i="0">
-                <a:solidFill>
-                  <a:srgbClr val="B3593F"/>
-                </a:solidFill>
-              </a:rPr>
-              <a:t>reachAQ</a:t>
-            </a:r>
-          </a:p>
-        </p:txBody>
-      </p:sp>
-      <p:sp>
-        <p:nvSpPr>
-          <p:cNvPr id="13" name="TextBox 12"/>
-          <p:cNvSpPr txBox="1"/>
-          <p:nvPr/>
-        </p:nvSpPr>
-        <p:spPr>
-          <a:xfrm>
-            <a:off x="8046720" y="5093208"/>
-            <a:ext cx="3429000" cy="1280160"/>
-          </a:xfrm>
-          <a:prstGeom prst="rect">
-            <a:avLst/>
-          </a:prstGeom>
-          <a:noFill/>
-        </p:spPr>
-        <p:txBody>
-          <a:bodyPr wrap="square">
-            <a:spAutoFit/>
-          </a:bodyPr>
-          <a:lstStyle/>
-          <a:p>
-            <a:pPr algn="l"/>
-            <a:r>
-              <a:rPr sz="1000" b="0" i="0">
-                <a:solidFill>
-                  <a:srgbClr val="26282B"/>
-                </a:solidFill>
-              </a:rPr>
-              <a:t>Schema v2 with configuration embedding, alignment and trial-summary artifacts, and reachaq-validate-session</a:t>
-            </a:r>
-          </a:p>
-        </p:txBody>
-      </p:sp>
-    </p:spTree>
-  </p:cSld>
-  <p:clrMapOvr>
-    <a:masterClrMapping/>
-  </p:clrMapOvr>
-</p:sld>
-</file>
-
-<file path=ppt/slides/slide12.xml><?xml version="1.0" encoding="utf-8"?>
-<p:sld xmlns:a="http://schemas.openxmlformats.org/drawingml/2006/main" xmlns:p="http://schemas.openxmlformats.org/presentationml/2006/main" xmlns:r="http://schemas.openxmlformats.org/officeDocument/2006/relationships">
-  <p:cSld>
-    <p:spTree>
-      <p:nvGrpSpPr>
-        <p:cNvPr id="1" name=""/>
-        <p:cNvGrpSpPr/>
-        <p:nvPr/>
-      </p:nvGrpSpPr>
-      <p:grpSpPr/>
-      <p:sp>
-        <p:nvSpPr>
-          <p:cNvPr id="2" name="TextBox 1"/>
-          <p:cNvSpPr txBox="1"/>
-          <p:nvPr/>
-        </p:nvSpPr>
-        <p:spPr>
-          <a:xfrm>
-            <a:off x="640080" y="365760"/>
-            <a:ext cx="10972800" cy="822960"/>
-          </a:xfrm>
-          <a:prstGeom prst="rect">
-            <a:avLst/>
-          </a:prstGeom>
-          <a:noFill/>
-        </p:spPr>
-        <p:txBody>
-          <a:bodyPr wrap="square">
-            <a:spAutoFit/>
-          </a:bodyPr>
-          <a:lstStyle/>
-          <a:p>
-            <a:pPr algn="l"/>
-            <a:r>
-              <a:rPr sz="3000" b="1" i="0">
-                <a:solidFill>
-                  <a:srgbClr val="26282B"/>
-                </a:solidFill>
-              </a:rPr>
-              <a:t>Demo</a:t>
-            </a:r>
-          </a:p>
-        </p:txBody>
-      </p:sp>
-      <p:sp>
-        <p:nvSpPr>
-          <p:cNvPr id="3" name="TextBox 2"/>
-          <p:cNvSpPr txBox="1"/>
-          <p:nvPr/>
-        </p:nvSpPr>
-        <p:spPr>
-          <a:xfrm>
-            <a:off x="640080" y="1051560"/>
-            <a:ext cx="10972800" cy="457200"/>
-          </a:xfrm>
-          <a:prstGeom prst="rect">
-            <a:avLst/>
-          </a:prstGeom>
-          <a:noFill/>
-        </p:spPr>
-        <p:txBody>
-          <a:bodyPr wrap="square">
-            <a:spAutoFit/>
-          </a:bodyPr>
-          <a:lstStyle/>
-          <a:p>
-            <a:pPr algn="l"/>
-            <a:r>
-              <a:rPr sz="1400" b="0" i="1">
-                <a:solidFill>
-                  <a:srgbClr val="7A7F87"/>
-                </a:solidFill>
-              </a:rPr>
-              <a:t>No mouse today — so exactly one stage is substituted</a:t>
-            </a:r>
-          </a:p>
-        </p:txBody>
-      </p:sp>
-      <p:pic>
-        <p:nvPicPr>
-          <p:cNvPr id="4" name="Picture 3" descr="demo_substitution.png"/>
-          <p:cNvPicPr>
-            <a:picLocks noChangeAspect="1"/>
-          </p:cNvPicPr>
-          <p:nvPr/>
-        </p:nvPicPr>
-        <p:blipFill>
-          <a:blip r:embed="rId2"/>
-          <a:stretch>
-            <a:fillRect/>
-          </a:stretch>
-        </p:blipFill>
-        <p:spPr>
-          <a:xfrm>
-            <a:off x="4184596" y="1627632"/>
-            <a:ext cx="3792327" cy="1463040"/>
-          </a:xfrm>
-          <a:prstGeom prst="rect">
-            <a:avLst/>
-          </a:prstGeom>
-        </p:spPr>
-      </p:pic>
-      <p:pic>
-        <p:nvPicPr>
-          <p:cNvPr id="5" name="Picture 4" descr="live_overlay.png"/>
-          <p:cNvPicPr>
-            <a:picLocks noChangeAspect="1"/>
-          </p:cNvPicPr>
-          <p:nvPr/>
-        </p:nvPicPr>
-        <p:blipFill>
-          <a:blip r:embed="rId3"/>
-          <a:stretch>
-            <a:fillRect/>
-          </a:stretch>
-        </p:blipFill>
-        <p:spPr>
-          <a:xfrm>
-            <a:off x="2568633" y="3154680"/>
-            <a:ext cx="7024254" cy="2743200"/>
-          </a:xfrm>
-          <a:prstGeom prst="rect">
-            <a:avLst/>
-          </a:prstGeom>
-        </p:spPr>
-      </p:pic>
-      <p:sp>
-        <p:nvSpPr>
-          <p:cNvPr id="6" name="TextBox 5"/>
-          <p:cNvSpPr txBox="1"/>
-          <p:nvPr/>
-        </p:nvSpPr>
-        <p:spPr>
-          <a:xfrm>
-            <a:off x="685800" y="6035040"/>
-            <a:ext cx="10789920" cy="365760"/>
-          </a:xfrm>
-          <a:prstGeom prst="rect">
-            <a:avLst/>
-          </a:prstGeom>
-          <a:noFill/>
-        </p:spPr>
-        <p:txBody>
-          <a:bodyPr wrap="square">
-            <a:spAutoFit/>
-          </a:bodyPr>
-          <a:lstStyle/>
-          <a:p>
-            <a:pPr algn="l"/>
-            <a:r>
-              <a:rPr sz="1200" b="0" i="1">
-                <a:solidFill>
-                  <a:srgbClr val="7A7F87"/>
-                </a:solidFill>
-              </a:rPr>
-              <a:t>Live 2D pose, per view, computed on the GPU from the played frames — captured from the running application on the rig.</a:t>
-            </a:r>
-          </a:p>
-        </p:txBody>
-      </p:sp>
-    </p:spTree>
-  </p:cSld>
-  <p:clrMapOvr>
-    <a:masterClrMapping/>
-  </p:clrMapOvr>
-</p:sld>
-</file>
-
-<file path=ppt/slides/slide13.xml><?xml version="1.0" encoding="utf-8"?>
-<p:sld xmlns:a="http://schemas.openxmlformats.org/drawingml/2006/main" xmlns:p="http://schemas.openxmlformats.org/presentationml/2006/main" xmlns:r="http://schemas.openxmlformats.org/officeDocument/2006/relationships">
-  <p:cSld>
-    <p:spTree>
-      <p:nvGrpSpPr>
-        <p:cNvPr id="1" name=""/>
-        <p:cNvGrpSpPr/>
-        <p:nvPr/>
-      </p:nvGrpSpPr>
-      <p:grpSpPr/>
-      <p:sp>
-        <p:nvSpPr>
-          <p:cNvPr id="2" name="TextBox 1"/>
-          <p:cNvSpPr txBox="1"/>
-          <p:nvPr/>
-        </p:nvSpPr>
-        <p:spPr>
-          <a:xfrm>
-            <a:off x="640080" y="365760"/>
-            <a:ext cx="10972800" cy="822960"/>
-          </a:xfrm>
-          <a:prstGeom prst="rect">
-            <a:avLst/>
-          </a:prstGeom>
-          <a:noFill/>
-        </p:spPr>
-        <p:txBody>
-          <a:bodyPr wrap="square">
-            <a:spAutoFit/>
-          </a:bodyPr>
-          <a:lstStyle/>
-          <a:p>
-            <a:pPr algn="l"/>
-            <a:r>
-              <a:rPr sz="3000" b="1" i="0">
-                <a:solidFill>
-                  <a:srgbClr val="26282B"/>
-                </a:solidFill>
-              </a:rPr>
-              <a:t>Current status and limitations</a:t>
-            </a:r>
-          </a:p>
-        </p:txBody>
-      </p:sp>
-      <p:sp>
-        <p:nvSpPr>
-          <p:cNvPr id="3" name="TextBox 2"/>
-          <p:cNvSpPr txBox="1"/>
-          <p:nvPr/>
-        </p:nvSpPr>
-        <p:spPr>
-          <a:xfrm>
-            <a:off x="640080" y="1554480"/>
-            <a:ext cx="3566160" cy="320040"/>
-          </a:xfrm>
-          <a:prstGeom prst="rect">
-            <a:avLst/>
-          </a:prstGeom>
-          <a:noFill/>
-        </p:spPr>
-        <p:txBody>
-          <a:bodyPr wrap="square">
-            <a:spAutoFit/>
-          </a:bodyPr>
-          <a:lstStyle/>
-          <a:p>
-            <a:pPr algn="l"/>
-            <a:r>
-              <a:rPr sz="1300" b="1" i="0">
-                <a:solidFill>
-                  <a:srgbClr val="4A8C7A"/>
-                </a:solidFill>
-              </a:rPr>
-              <a:t>Validated on the rig</a:t>
-            </a:r>
-          </a:p>
-        </p:txBody>
-      </p:sp>
-      <p:sp>
-        <p:nvSpPr>
-          <p:cNvPr id="4" name="TextBox 3"/>
-          <p:cNvSpPr txBox="1"/>
-          <p:nvPr/>
-        </p:nvSpPr>
-        <p:spPr>
-          <a:xfrm>
-            <a:off x="640080" y="1965960"/>
-            <a:ext cx="3474720" cy="658368"/>
-          </a:xfrm>
-          <a:prstGeom prst="rect">
-            <a:avLst/>
-          </a:prstGeom>
-          <a:noFill/>
-        </p:spPr>
-        <p:txBody>
-          <a:bodyPr wrap="square">
-            <a:spAutoFit/>
-          </a:bodyPr>
-          <a:lstStyle/>
-          <a:p>
-            <a:pPr algn="l"/>
-            <a:r>
-              <a:rPr sz="1100" b="0" i="0">
-                <a:solidFill>
-                  <a:srgbClr val="26282B"/>
-                </a:solidFill>
-              </a:rPr>
-              <a:t>•  Camera acquisition, recording, session output</a:t>
-            </a:r>
-          </a:p>
-        </p:txBody>
-      </p:sp>
-      <p:sp>
-        <p:nvSpPr>
-          <p:cNvPr id="5" name="TextBox 4"/>
-          <p:cNvSpPr txBox="1"/>
-          <p:nvPr/>
-        </p:nvSpPr>
-        <p:spPr>
-          <a:xfrm>
-            <a:off x="640080" y="2624328"/>
-            <a:ext cx="3474720" cy="658368"/>
-          </a:xfrm>
-          <a:prstGeom prst="rect">
-            <a:avLst/>
-          </a:prstGeom>
-          <a:noFill/>
-        </p:spPr>
-        <p:txBody>
-          <a:bodyPr wrap="square">
-            <a:spAutoFit/>
-          </a:bodyPr>
-          <a:lstStyle/>
-          <a:p>
-            <a:pPr algn="l"/>
-            <a:r>
-              <a:rPr sz="1100" b="0" i="0">
-                <a:solidFill>
-                  <a:srgbClr val="26282B"/>
-                </a:solidFill>
-              </a:rPr>
-              <a:t>•  Pellet delivery over CAN, with firmware compatibility checking</a:t>
-            </a:r>
-          </a:p>
-        </p:txBody>
-      </p:sp>
-      <p:sp>
-        <p:nvSpPr>
-          <p:cNvPr id="6" name="TextBox 5"/>
-          <p:cNvSpPr txBox="1"/>
-          <p:nvPr/>
-        </p:nvSpPr>
-        <p:spPr>
-          <a:xfrm>
-            <a:off x="640080" y="3282696"/>
-            <a:ext cx="3474720" cy="658368"/>
-          </a:xfrm>
-          <a:prstGeom prst="rect">
-            <a:avLst/>
-          </a:prstGeom>
-          <a:noFill/>
-        </p:spPr>
-        <p:txBody>
-          <a:bodyPr wrap="square">
-            <a:spAutoFit/>
-          </a:bodyPr>
-          <a:lstStyle/>
-          <a:p>
-            <a:pPr algn="l"/>
-            <a:r>
-              <a:rPr sz="1100" b="0" i="0">
-                <a:solidFill>
-                  <a:srgbClr val="26282B"/>
-                </a:solidFill>
-              </a:rPr>
-              <a:t>•  NI-DAQ signal streaming and port configuration</a:t>
-            </a:r>
-          </a:p>
-        </p:txBody>
-      </p:sp>
-      <p:sp>
-        <p:nvSpPr>
-          <p:cNvPr id="7" name="TextBox 6"/>
-          <p:cNvSpPr txBox="1"/>
-          <p:nvPr/>
-        </p:nvSpPr>
-        <p:spPr>
-          <a:xfrm>
-            <a:off x="4343400" y="1554480"/>
-            <a:ext cx="3566160" cy="320040"/>
-          </a:xfrm>
-          <a:prstGeom prst="rect">
-            <a:avLst/>
-          </a:prstGeom>
-          <a:noFill/>
-        </p:spPr>
-        <p:txBody>
-          <a:bodyPr wrap="square">
-            <a:spAutoFit/>
-          </a:bodyPr>
-          <a:lstStyle/>
-          <a:p>
-            <a:pPr algn="l"/>
-            <a:r>
-              <a:rPr sz="1300" b="1" i="0">
-                <a:solidFill>
-                  <a:srgbClr val="B3593F"/>
-                </a:solidFill>
-              </a:rPr>
-              <a:t>Not yet validated on the rig</a:t>
-            </a:r>
-          </a:p>
-        </p:txBody>
-      </p:sp>
-      <p:sp>
-        <p:nvSpPr>
-          <p:cNvPr id="8" name="TextBox 7"/>
-          <p:cNvSpPr txBox="1"/>
-          <p:nvPr/>
-        </p:nvSpPr>
-        <p:spPr>
-          <a:xfrm>
-            <a:off x="4343400" y="1965960"/>
-            <a:ext cx="3474720" cy="1051560"/>
-          </a:xfrm>
-          <a:prstGeom prst="rect">
-            <a:avLst/>
-          </a:prstGeom>
-          <a:noFill/>
-        </p:spPr>
-        <p:txBody>
-          <a:bodyPr wrap="square">
-            <a:spAutoFit/>
-          </a:bodyPr>
-          <a:lstStyle/>
-          <a:p>
-            <a:pPr algn="l"/>
-            <a:r>
-              <a:rPr sz="1100" b="0" i="0">
-                <a:solidFill>
-                  <a:srgbClr val="26282B"/>
-                </a:solidFill>
-              </a:rPr>
-              <a:t>•  The 5 ms Tier 1 stim-loop budget, as a tail figure</a:t>
-            </a:r>
-          </a:p>
-        </p:txBody>
-      </p:sp>
-      <p:sp>
-        <p:nvSpPr>
-          <p:cNvPr id="9" name="TextBox 8"/>
-          <p:cNvSpPr txBox="1"/>
-          <p:nvPr/>
-        </p:nvSpPr>
-        <p:spPr>
-          <a:xfrm>
-            <a:off x="4343400" y="3017520"/>
-            <a:ext cx="3474720" cy="1051560"/>
-          </a:xfrm>
-          <a:prstGeom prst="rect">
-            <a:avLst/>
-          </a:prstGeom>
-          <a:noFill/>
-        </p:spPr>
-        <p:txBody>
-          <a:bodyPr wrap="square">
-            <a:spAutoFit/>
-          </a:bodyPr>
-          <a:lstStyle/>
-          <a:p>
-            <a:pPr algn="l"/>
-            <a:r>
-              <a:rPr sz="1100" b="0" i="0">
-                <a:solidFill>
-                  <a:srgbClr val="26282B"/>
-                </a:solidFill>
-              </a:rPr>
-              <a:t>•  Protocol timing, precheck and cue behaviour from the current work, which needs TTL and video proof before experimental use</a:t>
-            </a:r>
-          </a:p>
-        </p:txBody>
-      </p:sp>
-      <p:sp>
-        <p:nvSpPr>
-          <p:cNvPr id="10" name="TextBox 9"/>
-          <p:cNvSpPr txBox="1"/>
-          <p:nvPr/>
-        </p:nvSpPr>
-        <p:spPr>
-          <a:xfrm>
-            <a:off x="8046720" y="1554480"/>
-            <a:ext cx="3566160" cy="320040"/>
-          </a:xfrm>
-          <a:prstGeom prst="rect">
-            <a:avLst/>
-          </a:prstGeom>
-          <a:noFill/>
-        </p:spPr>
-        <p:txBody>
-          <a:bodyPr wrap="square">
-            <a:spAutoFit/>
-          </a:bodyPr>
-          <a:lstStyle/>
-          <a:p>
-            <a:pPr algn="l"/>
-            <a:r>
-              <a:rPr sz="1300" b="1" i="0">
-                <a:solidFill>
-                  <a:srgbClr val="7A7F87"/>
-                </a:solidFill>
-              </a:rPr>
-              <a:t>Deferred</a:t>
-            </a:r>
-          </a:p>
-        </p:txBody>
-      </p:sp>
-      <p:sp>
-        <p:nvSpPr>
-          <p:cNvPr id="11" name="TextBox 10"/>
-          <p:cNvSpPr txBox="1"/>
-          <p:nvPr/>
-        </p:nvSpPr>
-        <p:spPr>
-          <a:xfrm>
-            <a:off x="8046720" y="1965960"/>
-            <a:ext cx="3474720" cy="822960"/>
-          </a:xfrm>
-          <a:prstGeom prst="rect">
-            <a:avLst/>
-          </a:prstGeom>
-          <a:noFill/>
-        </p:spPr>
-        <p:txBody>
-          <a:bodyPr wrap="square">
-            <a:spAutoFit/>
-          </a:bodyPr>
-          <a:lstStyle/>
-          <a:p>
-            <a:pPr algn="l"/>
-            <a:r>
-              <a:rPr sz="1100" b="0" i="0">
-                <a:solidFill>
-                  <a:srgbClr val="26282B"/>
-                </a:solidFill>
-              </a:rPr>
-              <a:t>•  Offline curation, RFID, SoftMouse automation</a:t>
-            </a:r>
-          </a:p>
-        </p:txBody>
-      </p:sp>
-      <p:sp>
-        <p:nvSpPr>
-          <p:cNvPr id="12" name="TextBox 11"/>
-          <p:cNvSpPr txBox="1"/>
-          <p:nvPr/>
-        </p:nvSpPr>
-        <p:spPr>
-          <a:xfrm>
-            <a:off x="8046720" y="2788920"/>
-            <a:ext cx="3474720" cy="822960"/>
-          </a:xfrm>
-          <a:prstGeom prst="rect">
-            <a:avLst/>
-          </a:prstGeom>
-          <a:noFill/>
-        </p:spPr>
-        <p:txBody>
-          <a:bodyPr wrap="square">
-            <a:spAutoFit/>
-          </a:bodyPr>
-          <a:lstStyle/>
-          <a:p>
-            <a:pPr algn="l"/>
-            <a:r>
-              <a:rPr sz="1100" b="0" i="0">
-                <a:solidFill>
-                  <a:srgbClr val="26282B"/>
-                </a:solidFill>
-              </a:rPr>
-              <a:t>•  Tunnel and head-fix behaviour inherited from auto-trainer</a:t>
-            </a:r>
-          </a:p>
-        </p:txBody>
-      </p:sp>
-    </p:spTree>
-  </p:cSld>
-  <p:clrMapOvr>
-    <a:masterClrMapping/>
-  </p:clrMapOvr>
-</p:sld>
-</file>
-
-<file path=ppt/slides/slide14.xml><?xml version="1.0" encoding="utf-8"?>
-<p:sld xmlns:a="http://schemas.openxmlformats.org/drawingml/2006/main" xmlns:p="http://schemas.openxmlformats.org/presentationml/2006/main" xmlns:r="http://schemas.openxmlformats.org/officeDocument/2006/relationships">
-  <p:cSld>
-    <p:spTree>
-      <p:nvGrpSpPr>
-        <p:cNvPr id="1" name=""/>
-        <p:cNvGrpSpPr/>
-        <p:nvPr/>
-      </p:nvGrpSpPr>
-      <p:grpSpPr/>
-      <p:sp>
-        <p:nvSpPr>
-          <p:cNvPr id="2" name="TextBox 1"/>
-          <p:cNvSpPr txBox="1"/>
-          <p:nvPr/>
-        </p:nvSpPr>
-        <p:spPr>
-          <a:xfrm>
-            <a:off x="640080" y="365760"/>
-            <a:ext cx="10972800" cy="822960"/>
-          </a:xfrm>
-          <a:prstGeom prst="rect">
-            <a:avLst/>
-          </a:prstGeom>
-          <a:noFill/>
-        </p:spPr>
-        <p:txBody>
-          <a:bodyPr wrap="square">
-            <a:spAutoFit/>
-          </a:bodyPr>
-          <a:lstStyle/>
-          <a:p>
-            <a:pPr algn="l"/>
-            <a:r>
-              <a:rPr sz="3000" b="1" i="0">
-                <a:solidFill>
-                  <a:srgbClr val="26282B"/>
-                </a:solidFill>
-              </a:rPr>
-              <a:t>Getting started</a:t>
-            </a:r>
-          </a:p>
-        </p:txBody>
-      </p:sp>
-      <p:sp>
-        <p:nvSpPr>
-          <p:cNvPr id="3" name="TextBox 2"/>
-          <p:cNvSpPr txBox="1"/>
-          <p:nvPr/>
-        </p:nvSpPr>
-        <p:spPr>
-          <a:xfrm>
-            <a:off x="640080" y="1051560"/>
-            <a:ext cx="10972800" cy="457200"/>
-          </a:xfrm>
-          <a:prstGeom prst="rect">
-            <a:avLst/>
-          </a:prstGeom>
-          <a:noFill/>
-        </p:spPr>
-        <p:txBody>
-          <a:bodyPr wrap="square">
-            <a:spAutoFit/>
-          </a:bodyPr>
-          <a:lstStyle/>
-          <a:p>
-            <a:pPr algn="l"/>
-            <a:r>
-              <a:rPr sz="1400" b="0" i="1">
-                <a:solidFill>
-                  <a:srgbClr val="7A7F87"/>
-                </a:solidFill>
-              </a:rPr>
-              <a:t>Backup — leave up during questions</a:t>
-            </a:r>
-          </a:p>
-        </p:txBody>
-      </p:sp>
-      <p:sp>
-        <p:nvSpPr>
-          <p:cNvPr id="4" name="TextBox 3"/>
-          <p:cNvSpPr txBox="1"/>
-          <p:nvPr/>
-        </p:nvSpPr>
-        <p:spPr>
-          <a:xfrm>
-            <a:off x="640080" y="2011680"/>
-            <a:ext cx="10972800" cy="640080"/>
-          </a:xfrm>
-          <a:prstGeom prst="rect">
-            <a:avLst/>
-          </a:prstGeom>
-          <a:noFill/>
-        </p:spPr>
-        <p:txBody>
-          <a:bodyPr wrap="square">
-            <a:spAutoFit/>
-          </a:bodyPr>
-          <a:lstStyle/>
-          <a:p>
-            <a:pPr algn="l"/>
-            <a:r>
-              <a:rPr sz="1400" b="0" i="0">
-                <a:solidFill>
-                  <a:srgbClr val="26282B"/>
-                </a:solidFill>
-              </a:rPr>
-              <a:t>•  Install:  linux-install-instructions.md  and  tools/install/reachaq-linux-install.sh</a:t>
-            </a:r>
-          </a:p>
-        </p:txBody>
-      </p:sp>
-      <p:sp>
-        <p:nvSpPr>
-          <p:cNvPr id="5" name="TextBox 4"/>
-          <p:cNvSpPr txBox="1"/>
-          <p:nvPr/>
-        </p:nvSpPr>
-        <p:spPr>
-          <a:xfrm>
-            <a:off x="640080" y="2651760"/>
-            <a:ext cx="10972800" cy="640080"/>
-          </a:xfrm>
-          <a:prstGeom prst="rect">
-            <a:avLst/>
-          </a:prstGeom>
-          <a:noFill/>
-        </p:spPr>
-        <p:txBody>
-          <a:bodyPr wrap="square">
-            <a:spAutoFit/>
-          </a:bodyPr>
-          <a:lstStyle/>
-          <a:p>
-            <a:pPr algn="l"/>
-            <a:r>
-              <a:rPr sz="1400" b="0" i="0">
-                <a:solidFill>
-                  <a:srgbClr val="26282B"/>
-                </a:solidFill>
-              </a:rPr>
-              <a:t>•  Run:  python -m reachAQ.app -c ~/Autotrainer/system_configuration.yaml</a:t>
-            </a:r>
-          </a:p>
-        </p:txBody>
-      </p:sp>
-      <p:sp>
-        <p:nvSpPr>
-          <p:cNvPr id="6" name="TextBox 5"/>
-          <p:cNvSpPr txBox="1"/>
-          <p:nvPr/>
-        </p:nvSpPr>
-        <p:spPr>
-          <a:xfrm>
-            <a:off x="640080" y="3291840"/>
-            <a:ext cx="10972800" cy="640080"/>
-          </a:xfrm>
-          <a:prstGeom prst="rect">
-            <a:avLst/>
-          </a:prstGeom>
-          <a:noFill/>
-        </p:spPr>
-        <p:txBody>
-          <a:bodyPr wrap="square">
-            <a:spAutoFit/>
-          </a:bodyPr>
-          <a:lstStyle/>
-          <a:p>
-            <a:pPr algn="l"/>
-            <a:r>
-              <a:rPr sz="1400" b="0" i="0">
-                <a:solidFill>
-                  <a:srgbClr val="26282B"/>
-                </a:solidFill>
-              </a:rPr>
-              <a:t>•  Demo mode:  docs/acquisition/demo-mode.md</a:t>
-            </a:r>
-          </a:p>
-        </p:txBody>
-      </p:sp>
-      <p:sp>
-        <p:nvSpPr>
-          <p:cNvPr id="7" name="TextBox 6"/>
-          <p:cNvSpPr txBox="1"/>
-          <p:nvPr/>
-        </p:nvSpPr>
-        <p:spPr>
-          <a:xfrm>
-            <a:off x="640080" y="3931919"/>
-            <a:ext cx="10972800" cy="640080"/>
-          </a:xfrm>
-          <a:prstGeom prst="rect">
-            <a:avLst/>
-          </a:prstGeom>
-          <a:noFill/>
-        </p:spPr>
-        <p:txBody>
-          <a:bodyPr wrap="square">
-            <a:spAutoFit/>
-          </a:bodyPr>
-          <a:lstStyle/>
-          <a:p>
-            <a:pPr algn="l"/>
-            <a:r>
-              <a:rPr sz="1400" b="0" i="0">
-                <a:solidFill>
-                  <a:srgbClr val="26282B"/>
-                </a:solidFill>
-              </a:rPr>
-              <a:t>•  Session recording and synchronization:  docs/acquisition/session-recording-and-synchronization.md</a:t>
-            </a:r>
-          </a:p>
-        </p:txBody>
-      </p:sp>
-      <p:sp>
-        <p:nvSpPr>
-          <p:cNvPr id="8" name="TextBox 7"/>
-          <p:cNvSpPr txBox="1"/>
-          <p:nvPr/>
-        </p:nvSpPr>
-        <p:spPr>
-          <a:xfrm>
-            <a:off x="640080" y="4572000"/>
-            <a:ext cx="10972800" cy="640080"/>
-          </a:xfrm>
-          <a:prstGeom prst="rect">
-            <a:avLst/>
-          </a:prstGeom>
-          <a:noFill/>
-        </p:spPr>
-        <p:txBody>
-          <a:bodyPr wrap="square">
-            <a:spAutoFit/>
-          </a:bodyPr>
-          <a:lstStyle/>
-          <a:p>
-            <a:pPr algn="l"/>
-            <a:r>
-              <a:rPr sz="1400" b="0" i="0">
-                <a:solidFill>
-                  <a:srgbClr val="26282B"/>
-                </a:solidFill>
-              </a:rPr>
-              <a:t>•  Trials and protocols:  docs/acquisition/session-trials-protocols.md</a:t>
-            </a:r>
+          <a:solidFill>
+            <a:srgbClr val="B3593F"/>
+          </a:solidFill>
+          <a:ln>
+            <a:noFill/>
+          </a:ln>
+          <a:effectLst/>
+        </p:spPr>
+        <p:style>
+          <a:lnRef idx="1">
+            <a:schemeClr val="accent1"/>
+          </a:lnRef>
+          <a:fillRef idx="3">
+            <a:schemeClr val="accent1"/>
+          </a:fillRef>
+          <a:effectRef idx="2">
+            <a:schemeClr val="accent1"/>
+          </a:effectRef>
+          <a:fontRef idx="minor">
+            <a:schemeClr val="lt1"/>
+          </a:fontRef>
+        </p:style>
+        <p:txBody>
+          <a:bodyPr rtlCol="0" anchor="ctr"/>
+          <a:lstStyle/>
+          <a:p>
+            <a:pPr algn="ctr"/>
           </a:p>
         </p:txBody>
       </p:sp>
@@ -6003,14 +4136,293 @@
       <p:grpSpPr/>
       <p:sp>
         <p:nvSpPr>
-          <p:cNvPr id="2" name="TextBox 1"/>
+          <p:cNvPr id="2" name="Title 1"/>
+          <p:cNvSpPr>
+            <a:spLocks noGrp="1"/>
+          </p:cNvSpPr>
+          <p:nvPr>
+            <p:ph type="title"/>
+          </p:nvPr>
+        </p:nvSpPr>
+        <p:spPr>
+          <a:xfrm>
+            <a:off x="658368" y="457200"/>
+            <a:ext cx="10874959" cy="868680"/>
+          </a:xfrm>
+        </p:spPr>
+        <p:txBody>
+          <a:bodyPr wrap="square"/>
+          <a:lstStyle/>
+          <a:p>
+            <a:pPr algn="l"/>
+            <a:r>
+              <a:rPr sz="3000" b="1" i="0">
+                <a:solidFill>
+                  <a:srgbClr val="1E242B"/>
+                </a:solidFill>
+                <a:latin typeface="Segoe UI"/>
+              </a:rPr>
+              <a:t>What changed from reach-training</a:t>
+            </a:r>
+          </a:p>
+        </p:txBody>
+      </p:sp>
+      <p:sp>
+        <p:nvSpPr>
+          <p:cNvPr id="3" name="Content Placeholder 2"/>
+          <p:cNvSpPr>
+            <a:spLocks noGrp="1"/>
+          </p:cNvSpPr>
+          <p:nvPr>
+            <p:ph idx="1" sz="half"/>
+          </p:nvPr>
+        </p:nvSpPr>
+        <p:spPr>
+          <a:xfrm>
+            <a:off x="658368" y="2487168"/>
+            <a:ext cx="5186019" cy="3593592"/>
+          </a:xfrm>
+        </p:spPr>
+        <p:txBody>
+          <a:bodyPr wrap="square"/>
+          <a:lstStyle/>
+          <a:p>
+            <a:pPr>
+              <a:spcAft>
+                <a:spcPts val="1100"/>
+              </a:spcAft>
+            </a:pPr>
+            <a:r>
+              <a:rPr sz="1350" b="0" i="0">
+                <a:solidFill>
+                  <a:srgbClr val="1E242B"/>
+                </a:solidFill>
+                <a:latin typeface="Segoe UI"/>
+              </a:rPr>
+              <a:t>Reach detected by a brightness threshold inside a drawn ROI</a:t>
+            </a:r>
+          </a:p>
+          <a:p>
+            <a:pPr>
+              <a:spcAft>
+                <a:spcPts val="1100"/>
+              </a:spcAft>
+            </a:pPr>
+            <a:r>
+              <a:rPr sz="1350" b="0" i="0">
+                <a:solidFill>
+                  <a:srgbClr val="1E242B"/>
+                </a:solidFill>
+                <a:latin typeface="Segoe UI"/>
+              </a:rPr>
+              <a:t>Pellet arm driven by an Arduino over USB serial</a:t>
+            </a:r>
+          </a:p>
+          <a:p>
+            <a:pPr>
+              <a:spcAft>
+                <a:spcPts val="1100"/>
+              </a:spcAft>
+            </a:pPr>
+            <a:r>
+              <a:rPr sz="1350" b="0" i="0">
+                <a:solidFill>
+                  <a:srgbClr val="1E242B"/>
+                </a:solidFill>
+                <a:latin typeface="Segoe UI"/>
+              </a:rPr>
+              <a:t>Timing owned by a Python loop on the host</a:t>
+            </a:r>
+          </a:p>
+          <a:p>
+            <a:pPr>
+              <a:spcAft>
+                <a:spcPts val="1100"/>
+              </a:spcAft>
+            </a:pPr>
+            <a:r>
+              <a:rPr sz="1350" b="0" i="0">
+                <a:solidFill>
+                  <a:srgbClr val="1E242B"/>
+                </a:solidFill>
+                <a:latin typeface="Segoe UI"/>
+              </a:rPr>
+              <a:t>Signals inspected afterwards, from files</a:t>
+            </a:r>
+          </a:p>
+          <a:p>
+            <a:pPr>
+              <a:spcAft>
+                <a:spcPts val="1100"/>
+              </a:spcAft>
+            </a:pPr>
+            <a:r>
+              <a:rPr sz="1350" b="0" i="0">
+                <a:solidFill>
+                  <a:srgbClr val="1E242B"/>
+                </a:solidFill>
+                <a:latin typeface="Segoe UI"/>
+              </a:rPr>
+              <a:t>One flat protocol per experiment, delays drawn live</a:t>
+            </a:r>
+          </a:p>
+        </p:txBody>
+      </p:sp>
+      <p:sp>
+        <p:nvSpPr>
+          <p:cNvPr id="4" name="Content Placeholder 3"/>
+          <p:cNvSpPr>
+            <a:spLocks noGrp="1"/>
+          </p:cNvSpPr>
+          <p:nvPr>
+            <p:ph idx="2" sz="half"/>
+          </p:nvPr>
+        </p:nvSpPr>
+        <p:spPr>
+          <a:xfrm>
+            <a:off x="6347307" y="2487168"/>
+            <a:ext cx="5186019" cy="3593592"/>
+          </a:xfrm>
+        </p:spPr>
+        <p:txBody>
+          <a:bodyPr wrap="square"/>
+          <a:lstStyle/>
+          <a:p>
+            <a:pPr>
+              <a:spcAft>
+                <a:spcPts val="1100"/>
+              </a:spcAft>
+            </a:pPr>
+            <a:r>
+              <a:rPr sz="1350" b="0" i="0">
+                <a:solidFill>
+                  <a:srgbClr val="1E242B"/>
+                </a:solidFill>
+                <a:latin typeface="Segoe UI"/>
+              </a:rPr>
+              <a:t>Reach detected from live pose keypoints, per camera view, on the GPU</a:t>
+            </a:r>
+          </a:p>
+          <a:p>
+            <a:pPr>
+              <a:spcAft>
+                <a:spcPts val="1100"/>
+              </a:spcAft>
+            </a:pPr>
+            <a:r>
+              <a:rPr sz="1350" b="0" i="0">
+                <a:solidFill>
+                  <a:srgbClr val="1E242B"/>
+                </a:solidFill>
+                <a:latin typeface="Segoe UI"/>
+              </a:rPr>
+              <a:t>Pellet arm on a CAN bus, with firmware capability checks and FSR pressure</a:t>
+            </a:r>
+          </a:p>
+          <a:p>
+            <a:pPr>
+              <a:spcAft>
+                <a:spcPts val="1100"/>
+              </a:spcAft>
+            </a:pPr>
+            <a:r>
+              <a:rPr sz="1350" b="0" i="0">
+                <a:solidFill>
+                  <a:srgbClr val="1E242B"/>
+                </a:solidFill>
+                <a:latin typeface="Segoe UI"/>
+              </a:rPr>
+              <a:t>Timing owned by hardware-timed NI-DAQ tasks and a SCHED_FIFO stim loop</a:t>
+            </a:r>
+          </a:p>
+          <a:p>
+            <a:pPr>
+              <a:spcAft>
+                <a:spcPts val="1100"/>
+              </a:spcAft>
+            </a:pPr>
+            <a:r>
+              <a:rPr sz="1350" b="0" i="0">
+                <a:solidFill>
+                  <a:srgbClr val="1E242B"/>
+                </a:solidFill>
+                <a:latin typeface="Segoe UI"/>
+              </a:rPr>
+              <a:t>Signals plotted live during the session, and recorded unfiltered</a:t>
+            </a:r>
+          </a:p>
+          <a:p>
+            <a:pPr>
+              <a:spcAft>
+                <a:spcPts val="1100"/>
+              </a:spcAft>
+            </a:pPr>
+            <a:r>
+              <a:rPr sz="1350" b="0" i="0">
+                <a:solidFill>
+                  <a:srgbClr val="1E242B"/>
+                </a:solidFill>
+                <a:latin typeface="Segoe UI"/>
+              </a:rPr>
+              <a:t>Experiments composed from reusable trial sets, with reproducible draws</a:t>
+            </a:r>
+          </a:p>
+        </p:txBody>
+      </p:sp>
+      <p:sp>
+        <p:nvSpPr>
+          <p:cNvPr id="5" name="Rectangle 4"/>
+          <p:cNvSpPr/>
+          <p:nvPr/>
+        </p:nvSpPr>
+        <p:spPr>
+          <a:xfrm>
+            <a:off x="658368" y="1170432"/>
+            <a:ext cx="1005840" cy="38100"/>
+          </a:xfrm>
+          <a:prstGeom prst="rect">
+            <a:avLst/>
+          </a:prstGeom>
+          <a:solidFill>
+            <a:srgbClr val="B3593F"/>
+          </a:solidFill>
+          <a:ln>
+            <a:noFill/>
+          </a:ln>
+          <a:effectLst/>
+        </p:spPr>
+        <p:style>
+          <a:lnRef idx="1">
+            <a:schemeClr val="accent1"/>
+          </a:lnRef>
+          <a:fillRef idx="3">
+            <a:schemeClr val="accent1"/>
+          </a:fillRef>
+          <a:effectRef idx="2">
+            <a:schemeClr val="accent1"/>
+          </a:effectRef>
+          <a:fontRef idx="minor">
+            <a:schemeClr val="lt1"/>
+          </a:fontRef>
+        </p:style>
+        <p:txBody>
+          <a:bodyPr rtlCol="0" anchor="ctr"/>
+          <a:lstStyle/>
+          <a:p>
+            <a:pPr algn="ctr"/>
+          </a:p>
+        </p:txBody>
+      </p:sp>
+      <p:sp>
+        <p:nvSpPr>
+          <p:cNvPr id="6" name="TextBox 5"/>
           <p:cNvSpPr txBox="1"/>
           <p:nvPr/>
         </p:nvSpPr>
         <p:spPr>
           <a:xfrm>
-            <a:off x="640080" y="365760"/>
-            <a:ext cx="10972800" cy="822960"/>
+            <a:off x="658368" y="1371600"/>
+            <a:ext cx="10874959" cy="457200"/>
           </a:xfrm>
           <a:prstGeom prst="rect">
             <a:avLst/>
@@ -6023,28 +4435,28 @@
           </a:bodyPr>
           <a:lstStyle/>
           <a:p>
-            <a:pPr algn="l"/>
-            <a:r>
-              <a:rPr sz="3000" b="1" i="0">
-                <a:solidFill>
-                  <a:srgbClr val="26282B"/>
-                </a:solidFill>
+            <a:r>
+              <a:rPr sz="1400" b="0" i="1">
+                <a:solidFill>
+                  <a:srgbClr val="6B727B"/>
+                </a:solidFill>
+                <a:latin typeface="Segoe UI"/>
               </a:rPr>
-              <a:t>What this system does</a:t>
-            </a:r>
-          </a:p>
-        </p:txBody>
-      </p:sp>
-      <p:sp>
-        <p:nvSpPr>
-          <p:cNvPr id="3" name="TextBox 2"/>
+              <a:t>Same experiment. The difference is what the system can do while the reach is still happening.</a:t>
+            </a:r>
+          </a:p>
+        </p:txBody>
+      </p:sp>
+      <p:sp>
+        <p:nvSpPr>
+          <p:cNvPr id="7" name="TextBox 6"/>
           <p:cNvSpPr txBox="1"/>
           <p:nvPr/>
         </p:nvSpPr>
         <p:spPr>
           <a:xfrm>
-            <a:off x="640080" y="2011680"/>
-            <a:ext cx="10972800" cy="658368"/>
+            <a:off x="658368" y="2103120"/>
+            <a:ext cx="5186019" cy="347472"/>
           </a:xfrm>
           <a:prstGeom prst="rect">
             <a:avLst/>
@@ -6052,33 +4464,33 @@
           <a:noFill/>
         </p:spPr>
         <p:txBody>
-          <a:bodyPr wrap="square">
+          <a:bodyPr wrap="none">
             <a:spAutoFit/>
           </a:bodyPr>
           <a:lstStyle/>
           <a:p>
-            <a:pPr algn="l"/>
-            <a:r>
-              <a:rPr sz="1800" b="0" i="0">
-                <a:solidFill>
-                  <a:srgbClr val="26282B"/>
-                </a:solidFill>
+            <a:r>
+              <a:rPr sz="1500" b="1" i="0">
+                <a:solidFill>
+                  <a:srgbClr val="6B7F9E"/>
+                </a:solidFill>
+                <a:latin typeface="Segoe UI"/>
               </a:rPr>
-              <a:t>•  A head-fixed mouse reaches for a pellet</a:t>
-            </a:r>
-          </a:p>
-        </p:txBody>
-      </p:sp>
-      <p:sp>
-        <p:nvSpPr>
-          <p:cNvPr id="4" name="TextBox 3"/>
+              <a:t>reach-training</a:t>
+            </a:r>
+          </a:p>
+        </p:txBody>
+      </p:sp>
+      <p:sp>
+        <p:nvSpPr>
+          <p:cNvPr id="8" name="TextBox 7"/>
           <p:cNvSpPr txBox="1"/>
           <p:nvPr/>
         </p:nvSpPr>
         <p:spPr>
           <a:xfrm>
-            <a:off x="640080" y="2670048"/>
-            <a:ext cx="10972800" cy="658368"/>
+            <a:off x="6347307" y="2103120"/>
+            <a:ext cx="5186019" cy="347472"/>
           </a:xfrm>
           <a:prstGeom prst="rect">
             <a:avLst/>
@@ -6086,33 +4498,33 @@
           <a:noFill/>
         </p:spPr>
         <p:txBody>
-          <a:bodyPr wrap="square">
+          <a:bodyPr wrap="none">
             <a:spAutoFit/>
           </a:bodyPr>
           <a:lstStyle/>
           <a:p>
-            <a:pPr algn="l"/>
-            <a:r>
-              <a:rPr sz="1800" b="0" i="0">
-                <a:solidFill>
-                  <a:srgbClr val="26282B"/>
-                </a:solidFill>
+            <a:r>
+              <a:rPr sz="1500" b="1" i="0">
+                <a:solidFill>
+                  <a:srgbClr val="B3593F"/>
+                </a:solidFill>
+                <a:latin typeface="Segoe UI"/>
               </a:rPr>
-              <a:t>•  Several cameras watch at 150 frames per second</a:t>
-            </a:r>
-          </a:p>
-        </p:txBody>
-      </p:sp>
-      <p:sp>
-        <p:nvSpPr>
-          <p:cNvPr id="5" name="TextBox 4"/>
+              <a:t>reachAQ</a:t>
+            </a:r>
+          </a:p>
+        </p:txBody>
+      </p:sp>
+      <p:sp>
+        <p:nvSpPr>
+          <p:cNvPr id="9" name="TextBox 8"/>
           <p:cNvSpPr txBox="1"/>
           <p:nvPr/>
         </p:nvSpPr>
         <p:spPr>
           <a:xfrm>
-            <a:off x="640080" y="3328416"/>
-            <a:ext cx="10972800" cy="658368"/>
+            <a:off x="658368" y="6382512"/>
+            <a:ext cx="10874959" cy="292608"/>
           </a:xfrm>
           <a:prstGeom prst="rect">
             <a:avLst/>
@@ -6120,33 +4532,33 @@
           <a:noFill/>
         </p:spPr>
         <p:txBody>
-          <a:bodyPr wrap="square">
+          <a:bodyPr wrap="none">
             <a:spAutoFit/>
           </a:bodyPr>
           <a:lstStyle/>
           <a:p>
-            <a:pPr algn="l"/>
-            <a:r>
-              <a:rPr sz="1800" b="0" i="0">
-                <a:solidFill>
-                  <a:srgbClr val="26282B"/>
-                </a:solidFill>
+            <a:r>
+              <a:rPr sz="900" b="0" i="0">
+                <a:solidFill>
+                  <a:srgbClr val="6B727B"/>
+                </a:solidFill>
+                <a:latin typeface="Segoe UI"/>
               </a:rPr>
-              <a:t>•  The system finds the paw in 3D while the reach is still happening</a:t>
-            </a:r>
-          </a:p>
-        </p:txBody>
-      </p:sp>
-      <p:sp>
-        <p:nvSpPr>
-          <p:cNvPr id="6" name="TextBox 5"/>
+              <a:t>reachAQ</a:t>
+            </a:r>
+          </a:p>
+        </p:txBody>
+      </p:sp>
+      <p:sp>
+        <p:nvSpPr>
+          <p:cNvPr id="10" name="TextBox 9"/>
           <p:cNvSpPr txBox="1"/>
           <p:nvPr/>
         </p:nvSpPr>
         <p:spPr>
           <a:xfrm>
-            <a:off x="640080" y="3986784"/>
-            <a:ext cx="10972800" cy="658368"/>
+            <a:off x="10893247" y="6382512"/>
+            <a:ext cx="640080" cy="292608"/>
           </a:xfrm>
           <a:prstGeom prst="rect">
             <a:avLst/>
@@ -6154,53 +4566,20 @@
           <a:noFill/>
         </p:spPr>
         <p:txBody>
-          <a:bodyPr wrap="square">
+          <a:bodyPr wrap="none">
             <a:spAutoFit/>
           </a:bodyPr>
           <a:lstStyle/>
           <a:p>
-            <a:pPr algn="l"/>
-            <a:r>
-              <a:rPr sz="1800" b="0" i="0">
-                <a:solidFill>
-                  <a:srgbClr val="26282B"/>
-                </a:solidFill>
+            <a:pPr algn="r"/>
+            <a:r>
+              <a:rPr sz="900" b="0" i="0">
+                <a:solidFill>
+                  <a:srgbClr val="6B727B"/>
+                </a:solidFill>
+                <a:latin typeface="Segoe UI"/>
               </a:rPr>
-              <a:t>•  It decides, and acts, inside the same reach: cue, pellet, laser</a:t>
-            </a:r>
-          </a:p>
-        </p:txBody>
-      </p:sp>
-      <p:sp>
-        <p:nvSpPr>
-          <p:cNvPr id="7" name="TextBox 6"/>
-          <p:cNvSpPr txBox="1"/>
-          <p:nvPr/>
-        </p:nvSpPr>
-        <p:spPr>
-          <a:xfrm>
-            <a:off x="640080" y="4645152"/>
-            <a:ext cx="10972800" cy="658368"/>
-          </a:xfrm>
-          <a:prstGeom prst="rect">
-            <a:avLst/>
-          </a:prstGeom>
-          <a:noFill/>
-        </p:spPr>
-        <p:txBody>
-          <a:bodyPr wrap="square">
-            <a:spAutoFit/>
-          </a:bodyPr>
-          <a:lstStyle/>
-          <a:p>
-            <a:pPr algn="l"/>
-            <a:r>
-              <a:rPr sz="1800" b="0" i="0">
-                <a:solidFill>
-                  <a:srgbClr val="26282B"/>
-                </a:solidFill>
-              </a:rPr>
-              <a:t>•  Every trial is recorded, timestamped, and reproducible</a:t>
+              <a:t>2</a:t>
             </a:r>
           </a:p>
         </p:txBody>
@@ -6225,14 +4604,192 @@
       <p:grpSpPr/>
       <p:sp>
         <p:nvSpPr>
-          <p:cNvPr id="2" name="TextBox 1"/>
+          <p:cNvPr id="2" name="Title 1"/>
+          <p:cNvSpPr>
+            <a:spLocks noGrp="1"/>
+          </p:cNvSpPr>
+          <p:nvPr>
+            <p:ph type="title"/>
+          </p:nvPr>
+        </p:nvSpPr>
+        <p:spPr>
+          <a:xfrm>
+            <a:off x="658368" y="457200"/>
+            <a:ext cx="10874959" cy="868680"/>
+          </a:xfrm>
+        </p:spPr>
+        <p:txBody>
+          <a:bodyPr wrap="square"/>
+          <a:lstStyle/>
+          <a:p>
+            <a:pPr algn="l"/>
+            <a:r>
+              <a:rPr sz="3000" b="1" i="0">
+                <a:solidFill>
+                  <a:srgbClr val="1E242B"/>
+                </a:solidFill>
+                <a:latin typeface="Segoe UI"/>
+              </a:rPr>
+              <a:t>What came from auto-trainer</a:t>
+            </a:r>
+          </a:p>
+        </p:txBody>
+      </p:sp>
+      <p:sp>
+        <p:nvSpPr>
+          <p:cNvPr id="3" name="Content Placeholder 2"/>
+          <p:cNvSpPr>
+            <a:spLocks noGrp="1"/>
+          </p:cNvSpPr>
+          <p:nvPr>
+            <p:ph idx="1"/>
+          </p:nvPr>
+        </p:nvSpPr>
+        <p:spPr>
+          <a:xfrm>
+            <a:off x="658368" y="2057400"/>
+            <a:ext cx="10874959" cy="4023360"/>
+          </a:xfrm>
+        </p:spPr>
+        <p:txBody>
+          <a:bodyPr wrap="square"/>
+          <a:lstStyle/>
+          <a:p>
+            <a:pPr>
+              <a:spcAft>
+                <a:spcPts val="1300"/>
+              </a:spcAft>
+            </a:pPr>
+            <a:r>
+              <a:rPr sz="1500" b="0" i="0">
+                <a:solidFill>
+                  <a:srgbClr val="1E242B"/>
+                </a:solidFill>
+                <a:latin typeface="Segoe UI"/>
+              </a:rPr>
+              <a:t>The modular package split — core, video, device, inference, behavior, model, pyside — which is why hardware can be swapped without touching the rest</a:t>
+            </a:r>
+          </a:p>
+          <a:p>
+            <a:pPr>
+              <a:spcAft>
+                <a:spcPts val="1300"/>
+              </a:spcAft>
+            </a:pPr>
+            <a:r>
+              <a:rPr sz="1500" b="0" i="0">
+                <a:solidFill>
+                  <a:srgbClr val="1E242B"/>
+                </a:solidFill>
+                <a:latin typeface="Segoe UI"/>
+              </a:rPr>
+              <a:t>Per-process video capture with a shared synchronized frame index, so frame N means the same instant on every camera</a:t>
+            </a:r>
+          </a:p>
+          <a:p>
+            <a:pPr>
+              <a:spcAft>
+                <a:spcPts val="1300"/>
+              </a:spcAft>
+            </a:pPr>
+            <a:r>
+              <a:rPr sz="1500" b="0" i="0">
+                <a:solidFill>
+                  <a:srgbClr val="1E242B"/>
+                </a:solidFill>
+                <a:latin typeface="Segoe UI"/>
+              </a:rPr>
+              <a:t>Pose inference and FLIR stereo calibration, already integrated into the application rather than run afterwards</a:t>
+            </a:r>
+          </a:p>
+          <a:p>
+            <a:pPr>
+              <a:spcAft>
+                <a:spcPts val="1300"/>
+              </a:spcAft>
+            </a:pPr>
+            <a:r>
+              <a:rPr sz="1500" b="0" i="0">
+                <a:solidFill>
+                  <a:srgbClr val="1E242B"/>
+                </a:solidFill>
+                <a:latin typeface="Segoe UI"/>
+              </a:rPr>
+              <a:t>The CAN device abstraction, and the project, session and metadata structure that makes a recording self-describing</a:t>
+            </a:r>
+          </a:p>
+          <a:p>
+            <a:pPr>
+              <a:spcAft>
+                <a:spcPts val="1300"/>
+              </a:spcAft>
+            </a:pPr>
+            <a:r>
+              <a:rPr sz="1500" b="0" i="0">
+                <a:solidFill>
+                  <a:srgbClr val="1E242B"/>
+                </a:solidFill>
+                <a:latin typeface="Segoe UI"/>
+              </a:rPr>
+              <a:t>The PySide6 UI layer and its panel patterns</a:t>
+            </a:r>
+          </a:p>
+        </p:txBody>
+      </p:sp>
+      <p:sp>
+        <p:nvSpPr>
+          <p:cNvPr id="4" name="Rectangle 3"/>
+          <p:cNvSpPr/>
+          <p:nvPr/>
+        </p:nvSpPr>
+        <p:spPr>
+          <a:xfrm>
+            <a:off x="658368" y="1170432"/>
+            <a:ext cx="1005840" cy="38100"/>
+          </a:xfrm>
+          <a:prstGeom prst="rect">
+            <a:avLst/>
+          </a:prstGeom>
+          <a:solidFill>
+            <a:srgbClr val="B3593F"/>
+          </a:solidFill>
+          <a:ln>
+            <a:noFill/>
+          </a:ln>
+          <a:effectLst/>
+        </p:spPr>
+        <p:style>
+          <a:lnRef idx="1">
+            <a:schemeClr val="accent1"/>
+          </a:lnRef>
+          <a:fillRef idx="3">
+            <a:schemeClr val="accent1"/>
+          </a:fillRef>
+          <a:effectRef idx="2">
+            <a:schemeClr val="accent1"/>
+          </a:effectRef>
+          <a:fontRef idx="minor">
+            <a:schemeClr val="lt1"/>
+          </a:fontRef>
+        </p:style>
+        <p:txBody>
+          <a:bodyPr rtlCol="0" anchor="ctr"/>
+          <a:lstStyle/>
+          <a:p>
+            <a:pPr algn="ctr"/>
+          </a:p>
+        </p:txBody>
+      </p:sp>
+      <p:sp>
+        <p:nvSpPr>
+          <p:cNvPr id="5" name="TextBox 4"/>
           <p:cNvSpPr txBox="1"/>
           <p:nvPr/>
         </p:nvSpPr>
         <p:spPr>
           <a:xfrm>
-            <a:off x="640080" y="365760"/>
-            <a:ext cx="10972800" cy="822960"/>
+            <a:off x="658368" y="1371600"/>
+            <a:ext cx="10874959" cy="457200"/>
           </a:xfrm>
           <a:prstGeom prst="rect">
             <a:avLst/>
@@ -6245,28 +4802,28 @@
           </a:bodyPr>
           <a:lstStyle/>
           <a:p>
-            <a:pPr algn="l"/>
-            <a:r>
-              <a:rPr sz="3000" b="1" i="0">
-                <a:solidFill>
-                  <a:srgbClr val="26282B"/>
-                </a:solidFill>
+            <a:r>
+              <a:rPr sz="1400" b="0" i="1">
+                <a:solidFill>
+                  <a:srgbClr val="6B727B"/>
+                </a:solidFill>
+                <a:latin typeface="Segoe UI"/>
               </a:rPr>
-              <a:t>Where it came from</a:t>
-            </a:r>
-          </a:p>
-        </p:txBody>
-      </p:sp>
-      <p:sp>
-        <p:nvSpPr>
-          <p:cNvPr id="3" name="TextBox 2"/>
+              <a:t>reachAQ is built on auto-trainer, not beside it. The architecture and most of the runtime are theirs.</a:t>
+            </a:r>
+          </a:p>
+        </p:txBody>
+      </p:sp>
+      <p:sp>
+        <p:nvSpPr>
+          <p:cNvPr id="6" name="TextBox 5"/>
           <p:cNvSpPr txBox="1"/>
           <p:nvPr/>
         </p:nvSpPr>
         <p:spPr>
           <a:xfrm>
-            <a:off x="640080" y="1051560"/>
-            <a:ext cx="10972800" cy="457200"/>
+            <a:off x="658368" y="6382512"/>
+            <a:ext cx="10874959" cy="292608"/>
           </a:xfrm>
           <a:prstGeom prst="rect">
             <a:avLst/>
@@ -6274,47 +4831,58 @@
           <a:noFill/>
         </p:spPr>
         <p:txBody>
-          <a:bodyPr wrap="square">
+          <a:bodyPr wrap="none">
             <a:spAutoFit/>
           </a:bodyPr>
           <a:lstStyle/>
           <a:p>
-            <a:pPr algn="l"/>
-            <a:r>
-              <a:rPr sz="1400" b="0" i="1">
-                <a:solidFill>
-                  <a:srgbClr val="7A7F87"/>
-                </a:solidFill>
+            <a:r>
+              <a:rPr sz="900" b="0" i="0">
+                <a:solidFill>
+                  <a:srgbClr val="6B727B"/>
+                </a:solidFill>
+                <a:latin typeface="Segoe UI"/>
               </a:rPr>
-              <a:t>The only slide organised by repository — everything after this is by feature</a:t>
-            </a:r>
-          </a:p>
-        </p:txBody>
-      </p:sp>
-      <p:pic>
-        <p:nvPicPr>
-          <p:cNvPr id="4" name="Picture 3" descr="lineage.png"/>
-          <p:cNvPicPr>
-            <a:picLocks noChangeAspect="1"/>
-          </p:cNvPicPr>
+              <a:t>reachAQ</a:t>
+            </a:r>
+          </a:p>
+        </p:txBody>
+      </p:sp>
+      <p:sp>
+        <p:nvSpPr>
+          <p:cNvPr id="7" name="TextBox 6"/>
+          <p:cNvSpPr txBox="1"/>
           <p:nvPr/>
-        </p:nvPicPr>
-        <p:blipFill>
-          <a:blip r:embed="rId2"/>
-          <a:stretch>
-            <a:fillRect/>
-          </a:stretch>
-        </p:blipFill>
-        <p:spPr>
-          <a:xfrm>
-            <a:off x="548640" y="1710650"/>
-            <a:ext cx="11064240" cy="4716860"/>
+        </p:nvSpPr>
+        <p:spPr>
+          <a:xfrm>
+            <a:off x="10893247" y="6382512"/>
+            <a:ext cx="640080" cy="292608"/>
           </a:xfrm>
           <a:prstGeom prst="rect">
             <a:avLst/>
           </a:prstGeom>
-        </p:spPr>
-      </p:pic>
+          <a:noFill/>
+        </p:spPr>
+        <p:txBody>
+          <a:bodyPr wrap="none">
+            <a:spAutoFit/>
+          </a:bodyPr>
+          <a:lstStyle/>
+          <a:p>
+            <a:pPr algn="r"/>
+            <a:r>
+              <a:rPr sz="900" b="0" i="0">
+                <a:solidFill>
+                  <a:srgbClr val="6B727B"/>
+                </a:solidFill>
+                <a:latin typeface="Segoe UI"/>
+              </a:rPr>
+              <a:t>3</a:t>
+            </a:r>
+          </a:p>
+        </p:txBody>
+      </p:sp>
     </p:spTree>
   </p:cSld>
   <p:clrMapOvr>
@@ -6335,14 +4903,91 @@
       <p:grpSpPr/>
       <p:sp>
         <p:nvSpPr>
-          <p:cNvPr id="2" name="TextBox 1"/>
+          <p:cNvPr id="2" name="Title 1"/>
+          <p:cNvSpPr>
+            <a:spLocks noGrp="1"/>
+          </p:cNvSpPr>
+          <p:nvPr>
+            <p:ph type="title"/>
+          </p:nvPr>
+        </p:nvSpPr>
+        <p:spPr>
+          <a:xfrm>
+            <a:off x="658368" y="457200"/>
+            <a:ext cx="10874959" cy="868680"/>
+          </a:xfrm>
+        </p:spPr>
+        <p:txBody>
+          <a:bodyPr wrap="square"/>
+          <a:lstStyle/>
+          <a:p>
+            <a:pPr algn="l"/>
+            <a:r>
+              <a:rPr sz="3000" b="1" i="0">
+                <a:solidFill>
+                  <a:srgbClr val="1E242B"/>
+                </a:solidFill>
+                <a:latin typeface="Segoe UI"/>
+              </a:rPr>
+              <a:t>The stim loop holds well under its budget</a:t>
+            </a:r>
+          </a:p>
+        </p:txBody>
+      </p:sp>
+      <p:sp>
+        <p:nvSpPr>
+          <p:cNvPr id="3" name="Rectangle 2"/>
+          <p:cNvSpPr/>
+          <p:nvPr/>
+        </p:nvSpPr>
+        <p:spPr>
+          <a:xfrm>
+            <a:off x="658368" y="1170432"/>
+            <a:ext cx="1005840" cy="38100"/>
+          </a:xfrm>
+          <a:prstGeom prst="rect">
+            <a:avLst/>
+          </a:prstGeom>
+          <a:solidFill>
+            <a:srgbClr val="B3593F"/>
+          </a:solidFill>
+          <a:ln>
+            <a:noFill/>
+          </a:ln>
+          <a:effectLst/>
+        </p:spPr>
+        <p:style>
+          <a:lnRef idx="1">
+            <a:schemeClr val="accent1"/>
+          </a:lnRef>
+          <a:fillRef idx="3">
+            <a:schemeClr val="accent1"/>
+          </a:fillRef>
+          <a:effectRef idx="2">
+            <a:schemeClr val="accent1"/>
+          </a:effectRef>
+          <a:fontRef idx="minor">
+            <a:schemeClr val="lt1"/>
+          </a:fontRef>
+        </p:style>
+        <p:txBody>
+          <a:bodyPr rtlCol="0" anchor="ctr"/>
+          <a:lstStyle/>
+          <a:p>
+            <a:pPr algn="ctr"/>
+          </a:p>
+        </p:txBody>
+      </p:sp>
+      <p:sp>
+        <p:nvSpPr>
+          <p:cNvPr id="4" name="TextBox 3"/>
           <p:cNvSpPr txBox="1"/>
           <p:nvPr/>
         </p:nvSpPr>
         <p:spPr>
           <a:xfrm>
-            <a:off x="640080" y="365760"/>
-            <a:ext cx="10972800" cy="822960"/>
+            <a:off x="658368" y="1371600"/>
+            <a:ext cx="10874959" cy="457200"/>
           </a:xfrm>
           <a:prstGeom prst="rect">
             <a:avLst/>
@@ -6355,157 +5000,21 @@
           </a:bodyPr>
           <a:lstStyle/>
           <a:p>
-            <a:pPr algn="l"/>
-            <a:r>
-              <a:rPr sz="3000" b="1" i="0">
-                <a:solidFill>
-                  <a:srgbClr val="26282B"/>
-                </a:solidFill>
+            <a:r>
+              <a:rPr sz="1400" b="0" i="1">
+                <a:solidFill>
+                  <a:srgbClr val="6B727B"/>
+                </a:solidFill>
+                <a:latin typeface="Segoe UI"/>
               </a:rPr>
-              <a:t>Camera acquisition</a:t>
-            </a:r>
-          </a:p>
-        </p:txBody>
-      </p:sp>
-      <p:sp>
-        <p:nvSpPr>
-          <p:cNvPr id="3" name="TextBox 2"/>
-          <p:cNvSpPr txBox="1"/>
-          <p:nvPr/>
-        </p:nvSpPr>
-        <p:spPr>
-          <a:xfrm>
-            <a:off x="640080" y="1463040"/>
-            <a:ext cx="10972800" cy="365760"/>
-          </a:xfrm>
-          <a:prstGeom prst="rect">
-            <a:avLst/>
-          </a:prstGeom>
-          <a:noFill/>
-        </p:spPr>
-        <p:txBody>
-          <a:bodyPr wrap="square">
-            <a:spAutoFit/>
-          </a:bodyPr>
-          <a:lstStyle/>
-          <a:p>
-            <a:pPr algn="l"/>
-            <a:r>
-              <a:rPr sz="1400" b="0" i="0">
-                <a:solidFill>
-                  <a:srgbClr val="26282B"/>
-                </a:solidFill>
-              </a:rPr>
-              <a:t>•  2 to 6 cameras, configurable, hardware-synchronized at 150 FPS</a:t>
-            </a:r>
-          </a:p>
-        </p:txBody>
-      </p:sp>
-      <p:sp>
-        <p:nvSpPr>
-          <p:cNvPr id="4" name="TextBox 3"/>
-          <p:cNvSpPr txBox="1"/>
-          <p:nvPr/>
-        </p:nvSpPr>
-        <p:spPr>
-          <a:xfrm>
-            <a:off x="640080" y="1828800"/>
-            <a:ext cx="10972800" cy="365760"/>
-          </a:xfrm>
-          <a:prstGeom prst="rect">
-            <a:avLst/>
-          </a:prstGeom>
-          <a:noFill/>
-        </p:spPr>
-        <p:txBody>
-          <a:bodyPr wrap="square">
-            <a:spAutoFit/>
-          </a:bodyPr>
-          <a:lstStyle/>
-          <a:p>
-            <a:pPr algn="l"/>
-            <a:r>
-              <a:rPr sz="1400" b="0" i="0">
-                <a:solidFill>
-                  <a:srgbClr val="26282B"/>
-                </a:solidFill>
-              </a:rPr>
-              <a:t>•  Each camera runs in its own process, so one slow camera cannot stall the others</a:t>
-            </a:r>
-          </a:p>
-        </p:txBody>
-      </p:sp>
-      <p:sp>
-        <p:nvSpPr>
-          <p:cNvPr id="5" name="TextBox 4"/>
-          <p:cNvSpPr txBox="1"/>
-          <p:nvPr/>
-        </p:nvSpPr>
-        <p:spPr>
-          <a:xfrm>
-            <a:off x="640080" y="2194560"/>
-            <a:ext cx="10972800" cy="365760"/>
-          </a:xfrm>
-          <a:prstGeom prst="rect">
-            <a:avLst/>
-          </a:prstGeom>
-          <a:noFill/>
-        </p:spPr>
-        <p:txBody>
-          <a:bodyPr wrap="square">
-            <a:spAutoFit/>
-          </a:bodyPr>
-          <a:lstStyle/>
-          <a:p>
-            <a:pPr algn="l"/>
-            <a:r>
-              <a:rPr sz="1400" b="0" i="0">
-                <a:solidFill>
-                  <a:srgbClr val="26282B"/>
-                </a:solidFill>
-              </a:rPr>
-              <a:t>•  A shared frame index keeps every camera on the same frame number</a:t>
-            </a:r>
-          </a:p>
-        </p:txBody>
-      </p:sp>
-      <p:sp>
-        <p:nvSpPr>
-          <p:cNvPr id="6" name="TextBox 5"/>
-          <p:cNvSpPr txBox="1"/>
-          <p:nvPr/>
-        </p:nvSpPr>
-        <p:spPr>
-          <a:xfrm>
-            <a:off x="640080" y="2560320"/>
-            <a:ext cx="10972800" cy="365760"/>
-          </a:xfrm>
-          <a:prstGeom prst="rect">
-            <a:avLst/>
-          </a:prstGeom>
-          <a:noFill/>
-        </p:spPr>
-        <p:txBody>
-          <a:bodyPr wrap="square">
-            <a:spAutoFit/>
-          </a:bodyPr>
-          <a:lstStyle/>
-          <a:p>
-            <a:pPr algn="l"/>
-            <a:r>
-              <a:rPr sz="1400" b="0" i="0">
-                <a:solidFill>
-                  <a:srgbClr val="26282B"/>
-                </a:solidFill>
-              </a:rPr>
-              <a:t>•  A separate faster stim camera runs its own small-ROI detector</a:t>
+              <a:t>900 Hz stimCam, small ROI, decision made inline in the capture thread. 60 s runs, pinned to physical P-cores.</a:t>
             </a:r>
           </a:p>
         </p:txBody>
       </p:sp>
       <p:pic>
         <p:nvPicPr>
-          <p:cNvPr id="7" name="Picture 6" descr="pipeline.png"/>
+          <p:cNvPr id="5" name="Picture 4" descr="stim_latency.png"/>
           <p:cNvPicPr>
             <a:picLocks noChangeAspect="1"/>
           </p:cNvPicPr>
@@ -6519,8 +5028,8 @@
         </p:blipFill>
         <p:spPr>
           <a:xfrm>
-            <a:off x="3947576" y="3017520"/>
-            <a:ext cx="4266368" cy="1645920"/>
+            <a:off x="2092711" y="1847088"/>
+            <a:ext cx="8006272" cy="3822192"/>
           </a:xfrm>
           <a:prstGeom prst="rect">
             <a:avLst/>
@@ -6529,14 +5038,14 @@
       </p:pic>
       <p:sp>
         <p:nvSpPr>
-          <p:cNvPr id="8" name="TextBox 7"/>
+          <p:cNvPr id="6" name="TextBox 5"/>
           <p:cNvSpPr txBox="1"/>
           <p:nvPr/>
         </p:nvSpPr>
         <p:spPr>
           <a:xfrm>
-            <a:off x="640080" y="4764024"/>
-            <a:ext cx="10972800" cy="274320"/>
+            <a:off x="658368" y="5797296"/>
+            <a:ext cx="10874959" cy="502920"/>
           </a:xfrm>
           <a:prstGeom prst="rect">
             <a:avLst/>
@@ -6549,28 +5058,29 @@
           </a:bodyPr>
           <a:lstStyle/>
           <a:p>
-            <a:pPr algn="l"/>
-            <a:r>
-              <a:rPr sz="1000" b="0" i="1">
-                <a:solidFill>
-                  <a:srgbClr val="7A7F87"/>
-                </a:solidFill>
+            <a:pPr algn="ctr"/>
+            <a:r>
+              <a:rPr sz="1150" b="0" i="1">
+                <a:solidFill>
+                  <a:srgbClr val="6B727B"/>
+                </a:solidFill>
+                <a:latin typeface="Segoe UI"/>
               </a:rPr>
-              <a:t>Where it came from</a:t>
-            </a:r>
-          </a:p>
-        </p:txBody>
-      </p:sp>
-      <p:sp>
-        <p:nvSpPr>
-          <p:cNvPr id="9" name="TextBox 8"/>
+              <a:t>The detector's own work never exceeds 0.09 ms. The entire tail was scheduler wake-up latency — so it is a scheduling problem, not a compute one.</a:t>
+            </a:r>
+          </a:p>
+        </p:txBody>
+      </p:sp>
+      <p:sp>
+        <p:nvSpPr>
+          <p:cNvPr id="7" name="TextBox 6"/>
           <p:cNvSpPr txBox="1"/>
           <p:nvPr/>
         </p:nvSpPr>
         <p:spPr>
           <a:xfrm>
-            <a:off x="640080" y="5074920"/>
-            <a:ext cx="3429000" cy="274320"/>
+            <a:off x="658368" y="6382512"/>
+            <a:ext cx="10874959" cy="292608"/>
           </a:xfrm>
           <a:prstGeom prst="rect">
             <a:avLst/>
@@ -6578,33 +5088,33 @@
           <a:noFill/>
         </p:spPr>
         <p:txBody>
-          <a:bodyPr wrap="square">
+          <a:bodyPr wrap="none">
             <a:spAutoFit/>
           </a:bodyPr>
           <a:lstStyle/>
           <a:p>
-            <a:pPr algn="l"/>
-            <a:r>
-              <a:rPr sz="1100" b="1" i="0">
-                <a:solidFill>
-                  <a:srgbClr val="6B7F9E"/>
-                </a:solidFill>
+            <a:r>
+              <a:rPr sz="900" b="0" i="0">
+                <a:solidFill>
+                  <a:srgbClr val="6B727B"/>
+                </a:solidFill>
+                <a:latin typeface="Segoe UI"/>
               </a:rPr>
-              <a:t>reach-training</a:t>
-            </a:r>
-          </a:p>
-        </p:txBody>
-      </p:sp>
-      <p:sp>
-        <p:nvSpPr>
-          <p:cNvPr id="10" name="TextBox 9"/>
+              <a:t>reachAQ</a:t>
+            </a:r>
+          </a:p>
+        </p:txBody>
+      </p:sp>
+      <p:sp>
+        <p:nvSpPr>
+          <p:cNvPr id="8" name="TextBox 7"/>
           <p:cNvSpPr txBox="1"/>
           <p:nvPr/>
         </p:nvSpPr>
         <p:spPr>
           <a:xfrm>
-            <a:off x="640080" y="5367528"/>
-            <a:ext cx="3429000" cy="1280160"/>
+            <a:off x="10893247" y="6382512"/>
+            <a:ext cx="640080" cy="292608"/>
           </a:xfrm>
           <a:prstGeom prst="rect">
             <a:avLst/>
@@ -6612,155 +5122,20 @@
           <a:noFill/>
         </p:spPr>
         <p:txBody>
-          <a:bodyPr wrap="square">
+          <a:bodyPr wrap="none">
             <a:spAutoFit/>
           </a:bodyPr>
           <a:lstStyle/>
           <a:p>
-            <a:pPr algn="l"/>
-            <a:r>
-              <a:rPr sz="1000" b="0" i="0">
-                <a:solidFill>
-                  <a:srgbClr val="26282B"/>
-                </a:solidFill>
+            <a:pPr algn="r"/>
+            <a:r>
+              <a:rPr sz="900" b="0" i="0">
+                <a:solidFill>
+                  <a:srgbClr val="6B727B"/>
+                </a:solidFill>
+                <a:latin typeface="Segoe UI"/>
               </a:rPr>
-              <a:t>PySpin capture, cameras configured in systemdata.yaml</a:t>
-            </a:r>
-          </a:p>
-        </p:txBody>
-      </p:sp>
-      <p:sp>
-        <p:nvSpPr>
-          <p:cNvPr id="11" name="TextBox 10"/>
-          <p:cNvSpPr txBox="1"/>
-          <p:nvPr/>
-        </p:nvSpPr>
-        <p:spPr>
-          <a:xfrm>
-            <a:off x="4343400" y="5074920"/>
-            <a:ext cx="3429000" cy="274320"/>
-          </a:xfrm>
-          <a:prstGeom prst="rect">
-            <a:avLst/>
-          </a:prstGeom>
-          <a:noFill/>
-        </p:spPr>
-        <p:txBody>
-          <a:bodyPr wrap="square">
-            <a:spAutoFit/>
-          </a:bodyPr>
-          <a:lstStyle/>
-          <a:p>
-            <a:pPr algn="l"/>
-            <a:r>
-              <a:rPr sz="1100" b="1" i="0">
-                <a:solidFill>
-                  <a:srgbClr val="4A8C7A"/>
-                </a:solidFill>
-              </a:rPr>
-              <a:t>auto-trainer</a:t>
-            </a:r>
-          </a:p>
-        </p:txBody>
-      </p:sp>
-      <p:sp>
-        <p:nvSpPr>
-          <p:cNvPr id="12" name="TextBox 11"/>
-          <p:cNvSpPr txBox="1"/>
-          <p:nvPr/>
-        </p:nvSpPr>
-        <p:spPr>
-          <a:xfrm>
-            <a:off x="4343400" y="5367528"/>
-            <a:ext cx="3429000" cy="1280160"/>
-          </a:xfrm>
-          <a:prstGeom prst="rect">
-            <a:avLst/>
-          </a:prstGeom>
-          <a:noFill/>
-        </p:spPr>
-        <p:txBody>
-          <a:bodyPr wrap="square">
-            <a:spAutoFit/>
-          </a:bodyPr>
-          <a:lstStyle/>
-          <a:p>
-            <a:pPr algn="l"/>
-            <a:r>
-              <a:rPr sz="1000" b="0" i="0">
-                <a:solidFill>
-                  <a:srgbClr val="26282B"/>
-                </a:solidFill>
-              </a:rPr>
-              <a:t>Per-process VideoCapture, shared synchronized frame index, Spinnaker camera-clock mapping</a:t>
-            </a:r>
-          </a:p>
-        </p:txBody>
-      </p:sp>
-      <p:sp>
-        <p:nvSpPr>
-          <p:cNvPr id="13" name="TextBox 12"/>
-          <p:cNvSpPr txBox="1"/>
-          <p:nvPr/>
-        </p:nvSpPr>
-        <p:spPr>
-          <a:xfrm>
-            <a:off x="8046720" y="5074920"/>
-            <a:ext cx="3429000" cy="274320"/>
-          </a:xfrm>
-          <a:prstGeom prst="rect">
-            <a:avLst/>
-          </a:prstGeom>
-          <a:noFill/>
-        </p:spPr>
-        <p:txBody>
-          <a:bodyPr wrap="square">
-            <a:spAutoFit/>
-          </a:bodyPr>
-          <a:lstStyle/>
-          <a:p>
-            <a:pPr algn="l"/>
-            <a:r>
-              <a:rPr sz="1100" b="1" i="0">
-                <a:solidFill>
-                  <a:srgbClr val="B3593F"/>
-                </a:solidFill>
-              </a:rPr>
-              <a:t>reachAQ</a:t>
-            </a:r>
-          </a:p>
-        </p:txBody>
-      </p:sp>
-      <p:sp>
-        <p:nvSpPr>
-          <p:cNvPr id="14" name="TextBox 13"/>
-          <p:cNvSpPr txBox="1"/>
-          <p:nvPr/>
-        </p:nvSpPr>
-        <p:spPr>
-          <a:xfrm>
-            <a:off x="8046720" y="5367528"/>
-            <a:ext cx="3429000" cy="1280160"/>
-          </a:xfrm>
-          <a:prstGeom prst="rect">
-            <a:avLst/>
-          </a:prstGeom>
-          <a:noFill/>
-        </p:spPr>
-        <p:txBody>
-          <a:bodyPr wrap="square">
-            <a:spAutoFit/>
-          </a:bodyPr>
-          <a:lstStyle/>
-          <a:p>
-            <a:pPr algn="l"/>
-            <a:r>
-              <a:rPr sz="1000" b="0" i="0">
-                <a:solidFill>
-                  <a:srgbClr val="26282B"/>
-                </a:solidFill>
-              </a:rPr>
-              <a:t>2–6 cameras rather than a fixed pair, configurable frame rate, stim camera at a multiple of the reach rate</a:t>
+              <a:t>4</a:t>
             </a:r>
           </a:p>
         </p:txBody>
@@ -6785,14 +5160,91 @@
       <p:grpSpPr/>
       <p:sp>
         <p:nvSpPr>
-          <p:cNvPr id="2" name="TextBox 1"/>
+          <p:cNvPr id="2" name="Title 1"/>
+          <p:cNvSpPr>
+            <a:spLocks noGrp="1"/>
+          </p:cNvSpPr>
+          <p:nvPr>
+            <p:ph type="title"/>
+          </p:nvPr>
+        </p:nvSpPr>
+        <p:spPr>
+          <a:xfrm>
+            <a:off x="658368" y="457200"/>
+            <a:ext cx="10874959" cy="868680"/>
+          </a:xfrm>
+        </p:spPr>
+        <p:txBody>
+          <a:bodyPr wrap="square"/>
+          <a:lstStyle/>
+          <a:p>
+            <a:pPr algn="l"/>
+            <a:r>
+              <a:rPr sz="3000" b="1" i="0">
+                <a:solidFill>
+                  <a:srgbClr val="1E242B"/>
+                </a:solidFill>
+                <a:latin typeface="Segoe UI"/>
+              </a:rPr>
+              <a:t>Live inference is fast enough to sit in the loop</a:t>
+            </a:r>
+          </a:p>
+        </p:txBody>
+      </p:sp>
+      <p:sp>
+        <p:nvSpPr>
+          <p:cNvPr id="3" name="Rectangle 2"/>
+          <p:cNvSpPr/>
+          <p:nvPr/>
+        </p:nvSpPr>
+        <p:spPr>
+          <a:xfrm>
+            <a:off x="658368" y="1170432"/>
+            <a:ext cx="1005840" cy="38100"/>
+          </a:xfrm>
+          <a:prstGeom prst="rect">
+            <a:avLst/>
+          </a:prstGeom>
+          <a:solidFill>
+            <a:srgbClr val="B3593F"/>
+          </a:solidFill>
+          <a:ln>
+            <a:noFill/>
+          </a:ln>
+          <a:effectLst/>
+        </p:spPr>
+        <p:style>
+          <a:lnRef idx="1">
+            <a:schemeClr val="accent1"/>
+          </a:lnRef>
+          <a:fillRef idx="3">
+            <a:schemeClr val="accent1"/>
+          </a:fillRef>
+          <a:effectRef idx="2">
+            <a:schemeClr val="accent1"/>
+          </a:effectRef>
+          <a:fontRef idx="minor">
+            <a:schemeClr val="lt1"/>
+          </a:fontRef>
+        </p:style>
+        <p:txBody>
+          <a:bodyPr rtlCol="0" anchor="ctr"/>
+          <a:lstStyle/>
+          <a:p>
+            <a:pPr algn="ctr"/>
+          </a:p>
+        </p:txBody>
+      </p:sp>
+      <p:sp>
+        <p:nvSpPr>
+          <p:cNvPr id="4" name="TextBox 3"/>
           <p:cNvSpPr txBox="1"/>
           <p:nvPr/>
         </p:nvSpPr>
         <p:spPr>
           <a:xfrm>
-            <a:off x="640080" y="365760"/>
-            <a:ext cx="10972800" cy="822960"/>
+            <a:off x="658368" y="1371600"/>
+            <a:ext cx="10874959" cy="457200"/>
           </a:xfrm>
           <a:prstGeom prst="rect">
             <a:avLst/>
@@ -6805,28 +5257,52 @@
           </a:bodyPr>
           <a:lstStyle/>
           <a:p>
-            <a:pPr algn="l"/>
-            <a:r>
-              <a:rPr sz="3000" b="1" i="0">
-                <a:solidFill>
-                  <a:srgbClr val="26282B"/>
-                </a:solidFill>
+            <a:r>
+              <a:rPr sz="1400" b="0" i="1">
+                <a:solidFill>
+                  <a:srgbClr val="6B727B"/>
+                </a:solidFill>
+                <a:latin typeface="Segoe UI"/>
               </a:rPr>
-              <a:t>Pellet delivery and device control</a:t>
-            </a:r>
-          </a:p>
-        </p:txBody>
-      </p:sp>
-      <p:sp>
-        <p:nvSpPr>
-          <p:cNvPr id="3" name="TextBox 2"/>
+              <a:t>DeepLabCut on TensorFlow, batch 2 at 128x128, running on the GPU.</a:t>
+            </a:r>
+          </a:p>
+        </p:txBody>
+      </p:sp>
+      <p:pic>
+        <p:nvPicPr>
+          <p:cNvPr id="5" name="Picture 4" descr="inference_latency.png"/>
+          <p:cNvPicPr>
+            <a:picLocks noChangeAspect="1"/>
+          </p:cNvPicPr>
+          <p:nvPr/>
+        </p:nvPicPr>
+        <p:blipFill>
+          <a:blip r:embed="rId2"/>
+          <a:stretch>
+            <a:fillRect/>
+          </a:stretch>
+        </p:blipFill>
+        <p:spPr>
+          <a:xfrm>
+            <a:off x="1417038" y="1847088"/>
+            <a:ext cx="9357619" cy="3822192"/>
+          </a:xfrm>
+          <a:prstGeom prst="rect">
+            <a:avLst/>
+          </a:prstGeom>
+        </p:spPr>
+      </p:pic>
+      <p:sp>
+        <p:nvSpPr>
+          <p:cNvPr id="6" name="TextBox 5"/>
           <p:cNvSpPr txBox="1"/>
           <p:nvPr/>
         </p:nvSpPr>
         <p:spPr>
           <a:xfrm>
-            <a:off x="640080" y="1828800"/>
-            <a:ext cx="10972800" cy="548640"/>
+            <a:off x="658368" y="5797296"/>
+            <a:ext cx="10874959" cy="502920"/>
           </a:xfrm>
           <a:prstGeom prst="rect">
             <a:avLst/>
@@ -6839,28 +5315,29 @@
           </a:bodyPr>
           <a:lstStyle/>
           <a:p>
-            <a:pPr algn="l"/>
-            <a:r>
-              <a:rPr sz="1600" b="0" i="0">
-                <a:solidFill>
-                  <a:srgbClr val="26282B"/>
-                </a:solidFill>
+            <a:pPr algn="ctr"/>
+            <a:r>
+              <a:rPr sz="1150" b="0" i="1">
+                <a:solidFill>
+                  <a:srgbClr val="6B727B"/>
+                </a:solidFill>
+                <a:latin typeface="Segoe UI"/>
               </a:rPr>
-              <a:t>•  The pellet arm is a motorized device on a CAN bus, not a serial gadget</a:t>
-            </a:r>
-          </a:p>
-        </p:txBody>
-      </p:sp>
-      <p:sp>
-        <p:nvSpPr>
-          <p:cNvPr id="4" name="TextBox 3"/>
+              <a:t>Same hardware, same model. Six milliseconds of p99 came from one CPU governor setting — powersave held the P-cores near 2700 MHz against a 5000 MHz ceiling.</a:t>
+            </a:r>
+          </a:p>
+        </p:txBody>
+      </p:sp>
+      <p:sp>
+        <p:nvSpPr>
+          <p:cNvPr id="7" name="TextBox 6"/>
           <p:cNvSpPr txBox="1"/>
           <p:nvPr/>
         </p:nvSpPr>
         <p:spPr>
           <a:xfrm>
-            <a:off x="640080" y="2377440"/>
-            <a:ext cx="10972800" cy="548640"/>
+            <a:off x="658368" y="6382512"/>
+            <a:ext cx="10874959" cy="292608"/>
           </a:xfrm>
           <a:prstGeom prst="rect">
             <a:avLst/>
@@ -6868,33 +5345,33 @@
           <a:noFill/>
         </p:spPr>
         <p:txBody>
-          <a:bodyPr wrap="square">
+          <a:bodyPr wrap="none">
             <a:spAutoFit/>
           </a:bodyPr>
           <a:lstStyle/>
           <a:p>
-            <a:pPr algn="l"/>
-            <a:r>
-              <a:rPr sz="1600" b="0" i="0">
-                <a:solidFill>
-                  <a:srgbClr val="26282B"/>
-                </a:solidFill>
+            <a:r>
+              <a:rPr sz="900" b="0" i="0">
+                <a:solidFill>
+                  <a:srgbClr val="6B727B"/>
+                </a:solidFill>
+                <a:latin typeface="Segoe UI"/>
               </a:rPr>
-              <a:t>•  The application checks the board's firmware capabilities before using a feature</a:t>
-            </a:r>
-          </a:p>
-        </p:txBody>
-      </p:sp>
-      <p:sp>
-        <p:nvSpPr>
-          <p:cNvPr id="5" name="TextBox 4"/>
+              <a:t>reachAQ</a:t>
+            </a:r>
+          </a:p>
+        </p:txBody>
+      </p:sp>
+      <p:sp>
+        <p:nvSpPr>
+          <p:cNvPr id="8" name="TextBox 7"/>
           <p:cNvSpPr txBox="1"/>
           <p:nvPr/>
         </p:nvSpPr>
         <p:spPr>
           <a:xfrm>
-            <a:off x="640080" y="2926080"/>
-            <a:ext cx="10972800" cy="548640"/>
+            <a:off x="10893247" y="6382512"/>
+            <a:ext cx="640080" cy="292608"/>
           </a:xfrm>
           <a:prstGeom prst="rect">
             <a:avLst/>
@@ -6902,291 +5379,20 @@
           <a:noFill/>
         </p:spPr>
         <p:txBody>
-          <a:bodyPr wrap="square">
+          <a:bodyPr wrap="none">
             <a:spAutoFit/>
           </a:bodyPr>
           <a:lstStyle/>
           <a:p>
-            <a:pPr algn="l"/>
-            <a:r>
-              <a:rPr sz="1600" b="0" i="0">
-                <a:solidFill>
-                  <a:srgbClr val="26282B"/>
-                </a:solidFill>
+            <a:pPr algn="r"/>
+            <a:r>
+              <a:rPr sz="900" b="0" i="0">
+                <a:solidFill>
+                  <a:srgbClr val="6B727B"/>
+                </a:solidFill>
+                <a:latin typeface="Segoe UI"/>
               </a:rPr>
-              <a:t>•  Presence evidence: the system knows whether a pellet is actually there</a:t>
-            </a:r>
-          </a:p>
-        </p:txBody>
-      </p:sp>
-      <p:sp>
-        <p:nvSpPr>
-          <p:cNvPr id="6" name="TextBox 5"/>
-          <p:cNvSpPr txBox="1"/>
-          <p:nvPr/>
-        </p:nvSpPr>
-        <p:spPr>
-          <a:xfrm>
-            <a:off x="640080" y="3474719"/>
-            <a:ext cx="10972800" cy="548640"/>
-          </a:xfrm>
-          <a:prstGeom prst="rect">
-            <a:avLst/>
-          </a:prstGeom>
-          <a:noFill/>
-        </p:spPr>
-        <p:txBody>
-          <a:bodyPr wrap="square">
-            <a:spAutoFit/>
-          </a:bodyPr>
-          <a:lstStyle/>
-          <a:p>
-            <a:pPr algn="l"/>
-            <a:r>
-              <a:rPr sz="1600" b="0" i="0">
-                <a:solidFill>
-                  <a:srgbClr val="26282B"/>
-                </a:solidFill>
-              </a:rPr>
-              <a:t>•  Manual controls stay available at all times: home, load, present, release</a:t>
-            </a:r>
-          </a:p>
-        </p:txBody>
-      </p:sp>
-      <p:sp>
-        <p:nvSpPr>
-          <p:cNvPr id="7" name="TextBox 6"/>
-          <p:cNvSpPr txBox="1"/>
-          <p:nvPr/>
-        </p:nvSpPr>
-        <p:spPr>
-          <a:xfrm>
-            <a:off x="640080" y="4489704"/>
-            <a:ext cx="10972800" cy="274320"/>
-          </a:xfrm>
-          <a:prstGeom prst="rect">
-            <a:avLst/>
-          </a:prstGeom>
-          <a:noFill/>
-        </p:spPr>
-        <p:txBody>
-          <a:bodyPr wrap="square">
-            <a:spAutoFit/>
-          </a:bodyPr>
-          <a:lstStyle/>
-          <a:p>
-            <a:pPr algn="l"/>
-            <a:r>
-              <a:rPr sz="1000" b="0" i="1">
-                <a:solidFill>
-                  <a:srgbClr val="7A7F87"/>
-                </a:solidFill>
-              </a:rPr>
-              <a:t>Where it came from</a:t>
-            </a:r>
-          </a:p>
-        </p:txBody>
-      </p:sp>
-      <p:sp>
-        <p:nvSpPr>
-          <p:cNvPr id="8" name="TextBox 7"/>
-          <p:cNvSpPr txBox="1"/>
-          <p:nvPr/>
-        </p:nvSpPr>
-        <p:spPr>
-          <a:xfrm>
-            <a:off x="640080" y="4800600"/>
-            <a:ext cx="3429000" cy="274320"/>
-          </a:xfrm>
-          <a:prstGeom prst="rect">
-            <a:avLst/>
-          </a:prstGeom>
-          <a:noFill/>
-        </p:spPr>
-        <p:txBody>
-          <a:bodyPr wrap="square">
-            <a:spAutoFit/>
-          </a:bodyPr>
-          <a:lstStyle/>
-          <a:p>
-            <a:pPr algn="l"/>
-            <a:r>
-              <a:rPr sz="1100" b="1" i="0">
-                <a:solidFill>
-                  <a:srgbClr val="6B7F9E"/>
-                </a:solidFill>
-              </a:rPr>
-              <a:t>reach-training</a:t>
-            </a:r>
-          </a:p>
-        </p:txBody>
-      </p:sp>
-      <p:sp>
-        <p:nvSpPr>
-          <p:cNvPr id="9" name="TextBox 8"/>
-          <p:cNvSpPr txBox="1"/>
-          <p:nvPr/>
-        </p:nvSpPr>
-        <p:spPr>
-          <a:xfrm>
-            <a:off x="640080" y="5093208"/>
-            <a:ext cx="3429000" cy="1280160"/>
-          </a:xfrm>
-          <a:prstGeom prst="rect">
-            <a:avLst/>
-          </a:prstGeom>
-          <a:noFill/>
-        </p:spPr>
-        <p:txBody>
-          <a:bodyPr wrap="square">
-            <a:spAutoFit/>
-          </a:bodyPr>
-          <a:lstStyle/>
-          <a:p>
-            <a:pPr algn="l"/>
-            <a:r>
-              <a:rPr sz="1000" b="0" i="0">
-                <a:solidFill>
-                  <a:srgbClr val="26282B"/>
-                </a:solidFill>
-              </a:rPr>
-              <a:t>Arduino over USB serial, text commands, hotkeys H / P / M / R</a:t>
-            </a:r>
-          </a:p>
-        </p:txBody>
-      </p:sp>
-      <p:sp>
-        <p:nvSpPr>
-          <p:cNvPr id="10" name="TextBox 9"/>
-          <p:cNvSpPr txBox="1"/>
-          <p:nvPr/>
-        </p:nvSpPr>
-        <p:spPr>
-          <a:xfrm>
-            <a:off x="4343400" y="4800600"/>
-            <a:ext cx="3429000" cy="274320"/>
-          </a:xfrm>
-          <a:prstGeom prst="rect">
-            <a:avLst/>
-          </a:prstGeom>
-          <a:noFill/>
-        </p:spPr>
-        <p:txBody>
-          <a:bodyPr wrap="square">
-            <a:spAutoFit/>
-          </a:bodyPr>
-          <a:lstStyle/>
-          <a:p>
-            <a:pPr algn="l"/>
-            <a:r>
-              <a:rPr sz="1100" b="1" i="0">
-                <a:solidFill>
-                  <a:srgbClr val="4A8C7A"/>
-                </a:solidFill>
-              </a:rPr>
-              <a:t>auto-trainer</a:t>
-            </a:r>
-          </a:p>
-        </p:txBody>
-      </p:sp>
-      <p:sp>
-        <p:nvSpPr>
-          <p:cNvPr id="11" name="TextBox 10"/>
-          <p:cNvSpPr txBox="1"/>
-          <p:nvPr/>
-        </p:nvSpPr>
-        <p:spPr>
-          <a:xfrm>
-            <a:off x="4343400" y="5093208"/>
-            <a:ext cx="3429000" cy="1280160"/>
-          </a:xfrm>
-          <a:prstGeom prst="rect">
-            <a:avLst/>
-          </a:prstGeom>
-          <a:noFill/>
-        </p:spPr>
-        <p:txBody>
-          <a:bodyPr wrap="square">
-            <a:spAutoFit/>
-          </a:bodyPr>
-          <a:lstStyle/>
-          <a:p>
-            <a:pPr algn="l"/>
-            <a:r>
-              <a:rPr sz="1000" b="0" i="0">
-                <a:solidFill>
-                  <a:srgbClr val="26282B"/>
-                </a:solidFill>
-              </a:rPr>
-              <a:t>A CAN device abstraction behind a hardware interface</a:t>
-            </a:r>
-          </a:p>
-        </p:txBody>
-      </p:sp>
-      <p:sp>
-        <p:nvSpPr>
-          <p:cNvPr id="12" name="TextBox 11"/>
-          <p:cNvSpPr txBox="1"/>
-          <p:nvPr/>
-        </p:nvSpPr>
-        <p:spPr>
-          <a:xfrm>
-            <a:off x="8046720" y="4800600"/>
-            <a:ext cx="3429000" cy="274320"/>
-          </a:xfrm>
-          <a:prstGeom prst="rect">
-            <a:avLst/>
-          </a:prstGeom>
-          <a:noFill/>
-        </p:spPr>
-        <p:txBody>
-          <a:bodyPr wrap="square">
-            <a:spAutoFit/>
-          </a:bodyPr>
-          <a:lstStyle/>
-          <a:p>
-            <a:pPr algn="l"/>
-            <a:r>
-              <a:rPr sz="1100" b="1" i="0">
-                <a:solidFill>
-                  <a:srgbClr val="B3593F"/>
-                </a:solidFill>
-              </a:rPr>
-              <a:t>reachAQ</a:t>
-            </a:r>
-          </a:p>
-        </p:txBody>
-      </p:sp>
-      <p:sp>
-        <p:nvSpPr>
-          <p:cNvPr id="13" name="TextBox 12"/>
-          <p:cNvSpPr txBox="1"/>
-          <p:nvPr/>
-        </p:nvSpPr>
-        <p:spPr>
-          <a:xfrm>
-            <a:off x="8046720" y="5093208"/>
-            <a:ext cx="3429000" cy="1280160"/>
-          </a:xfrm>
-          <a:prstGeom prst="rect">
-            <a:avLst/>
-          </a:prstGeom>
-          <a:noFill/>
-        </p:spPr>
-        <p:txBody>
-          <a:bodyPr wrap="square">
-            <a:spAutoFit/>
-          </a:bodyPr>
-          <a:lstStyle/>
-          <a:p>
-            <a:pPr algn="l"/>
-            <a:r>
-              <a:rPr sz="1000" b="0" i="0">
-                <a:solidFill>
-                  <a:srgbClr val="26282B"/>
-                </a:solidFill>
-              </a:rPr>
-              <a:t>SocketCAN/PCAN on Ubuntu x86_64 instead of the Jetson 40-pin adapter, plus firmware compatibility checking and typed failure causes</a:t>
+              <a:t>5</a:t>
             </a:r>
           </a:p>
         </p:txBody>
@@ -7211,14 +5417,91 @@
       <p:grpSpPr/>
       <p:sp>
         <p:nvSpPr>
-          <p:cNvPr id="2" name="TextBox 1"/>
+          <p:cNvPr id="2" name="Title 1"/>
+          <p:cNvSpPr>
+            <a:spLocks noGrp="1"/>
+          </p:cNvSpPr>
+          <p:nvPr>
+            <p:ph type="title"/>
+          </p:nvPr>
+        </p:nvSpPr>
+        <p:spPr>
+          <a:xfrm>
+            <a:off x="658368" y="457200"/>
+            <a:ext cx="10874959" cy="868680"/>
+          </a:xfrm>
+        </p:spPr>
+        <p:txBody>
+          <a:bodyPr wrap="square"/>
+          <a:lstStyle/>
+          <a:p>
+            <a:pPr algn="l"/>
+            <a:r>
+              <a:rPr sz="3000" b="1" i="0">
+                <a:solidFill>
+                  <a:srgbClr val="1E242B"/>
+                </a:solidFill>
+                <a:latin typeface="Segoe UI"/>
+              </a:rPr>
+              <a:t>Everything lands on one timebase</a:t>
+            </a:r>
+          </a:p>
+        </p:txBody>
+      </p:sp>
+      <p:sp>
+        <p:nvSpPr>
+          <p:cNvPr id="3" name="Rectangle 2"/>
+          <p:cNvSpPr/>
+          <p:nvPr/>
+        </p:nvSpPr>
+        <p:spPr>
+          <a:xfrm>
+            <a:off x="658368" y="1170432"/>
+            <a:ext cx="1005840" cy="38100"/>
+          </a:xfrm>
+          <a:prstGeom prst="rect">
+            <a:avLst/>
+          </a:prstGeom>
+          <a:solidFill>
+            <a:srgbClr val="B3593F"/>
+          </a:solidFill>
+          <a:ln>
+            <a:noFill/>
+          </a:ln>
+          <a:effectLst/>
+        </p:spPr>
+        <p:style>
+          <a:lnRef idx="1">
+            <a:schemeClr val="accent1"/>
+          </a:lnRef>
+          <a:fillRef idx="3">
+            <a:schemeClr val="accent1"/>
+          </a:fillRef>
+          <a:effectRef idx="2">
+            <a:schemeClr val="accent1"/>
+          </a:effectRef>
+          <a:fontRef idx="minor">
+            <a:schemeClr val="lt1"/>
+          </a:fontRef>
+        </p:style>
+        <p:txBody>
+          <a:bodyPr rtlCol="0" anchor="ctr"/>
+          <a:lstStyle/>
+          <a:p>
+            <a:pPr algn="ctr"/>
+          </a:p>
+        </p:txBody>
+      </p:sp>
+      <p:sp>
+        <p:nvSpPr>
+          <p:cNvPr id="4" name="TextBox 3"/>
           <p:cNvSpPr txBox="1"/>
           <p:nvPr/>
         </p:nvSpPr>
         <p:spPr>
           <a:xfrm>
-            <a:off x="640080" y="365760"/>
-            <a:ext cx="10972800" cy="822960"/>
+            <a:off x="658368" y="1371600"/>
+            <a:ext cx="10874959" cy="457200"/>
           </a:xfrm>
           <a:prstGeom prst="rect">
             <a:avLst/>
@@ -7231,157 +5514,21 @@
           </a:bodyPr>
           <a:lstStyle/>
           <a:p>
-            <a:pPr algn="l"/>
-            <a:r>
-              <a:rPr sz="3000" b="1" i="0">
-                <a:solidFill>
-                  <a:srgbClr val="26282B"/>
-                </a:solidFill>
+            <a:r>
+              <a:rPr sz="1400" b="0" i="1">
+                <a:solidFill>
+                  <a:srgbClr val="6B727B"/>
+                </a:solidFill>
+                <a:latin typeface="Segoe UI"/>
               </a:rPr>
-              <a:t>Pose inference</a:t>
-            </a:r>
-          </a:p>
-        </p:txBody>
-      </p:sp>
-      <p:sp>
-        <p:nvSpPr>
-          <p:cNvPr id="3" name="TextBox 2"/>
-          <p:cNvSpPr txBox="1"/>
-          <p:nvPr/>
-        </p:nvSpPr>
-        <p:spPr>
-          <a:xfrm>
-            <a:off x="640080" y="1417320"/>
-            <a:ext cx="10972800" cy="329184"/>
-          </a:xfrm>
-          <a:prstGeom prst="rect">
-            <a:avLst/>
-          </a:prstGeom>
-          <a:noFill/>
-        </p:spPr>
-        <p:txBody>
-          <a:bodyPr wrap="square">
-            <a:spAutoFit/>
-          </a:bodyPr>
-          <a:lstStyle/>
-          <a:p>
-            <a:pPr algn="l"/>
-            <a:r>
-              <a:rPr sz="1300" b="0" i="0">
-                <a:solidFill>
-                  <a:srgbClr val="26282B"/>
-                </a:solidFill>
-              </a:rPr>
-              <a:t>•  A pose model finds keypoints on the paw and snout in every frame</a:t>
-            </a:r>
-          </a:p>
-        </p:txBody>
-      </p:sp>
-      <p:sp>
-        <p:nvSpPr>
-          <p:cNvPr id="4" name="TextBox 3"/>
-          <p:cNvSpPr txBox="1"/>
-          <p:nvPr/>
-        </p:nvSpPr>
-        <p:spPr>
-          <a:xfrm>
-            <a:off x="640080" y="1746504"/>
-            <a:ext cx="10972800" cy="329184"/>
-          </a:xfrm>
-          <a:prstGeom prst="rect">
-            <a:avLst/>
-          </a:prstGeom>
-          <a:noFill/>
-        </p:spPr>
-        <p:txBody>
-          <a:bodyPr wrap="square">
-            <a:spAutoFit/>
-          </a:bodyPr>
-          <a:lstStyle/>
-          <a:p>
-            <a:pPr algn="l"/>
-            <a:r>
-              <a:rPr sz="1300" b="0" i="0">
-                <a:solidFill>
-                  <a:srgbClr val="26282B"/>
-                </a:solidFill>
-              </a:rPr>
-              <a:t>•  Two camera views are triangulated into a 3D position</a:t>
-            </a:r>
-          </a:p>
-        </p:txBody>
-      </p:sp>
-      <p:sp>
-        <p:nvSpPr>
-          <p:cNvPr id="5" name="TextBox 4"/>
-          <p:cNvSpPr txBox="1"/>
-          <p:nvPr/>
-        </p:nvSpPr>
-        <p:spPr>
-          <a:xfrm>
-            <a:off x="640080" y="2075688"/>
-            <a:ext cx="10972800" cy="329184"/>
-          </a:xfrm>
-          <a:prstGeom prst="rect">
-            <a:avLst/>
-          </a:prstGeom>
-          <a:noFill/>
-        </p:spPr>
-        <p:txBody>
-          <a:bodyPr wrap="square">
-            <a:spAutoFit/>
-          </a:bodyPr>
-          <a:lstStyle/>
-          <a:p>
-            <a:pPr algn="l"/>
-            <a:r>
-              <a:rPr sz="1300" b="0" i="0">
-                <a:solidFill>
-                  <a:srgbClr val="26282B"/>
-                </a:solidFill>
-              </a:rPr>
-              <a:t>•  This runs live, during the session, not afterwards</a:t>
-            </a:r>
-          </a:p>
-        </p:txBody>
-      </p:sp>
-      <p:sp>
-        <p:nvSpPr>
-          <p:cNvPr id="6" name="TextBox 5"/>
-          <p:cNvSpPr txBox="1"/>
-          <p:nvPr/>
-        </p:nvSpPr>
-        <p:spPr>
-          <a:xfrm>
-            <a:off x="640080" y="2404872"/>
-            <a:ext cx="10972800" cy="329184"/>
-          </a:xfrm>
-          <a:prstGeom prst="rect">
-            <a:avLst/>
-          </a:prstGeom>
-          <a:noFill/>
-        </p:spPr>
-        <p:txBody>
-          <a:bodyPr wrap="square">
-            <a:spAutoFit/>
-          </a:bodyPr>
-          <a:lstStyle/>
-          <a:p>
-            <a:pPr algn="l"/>
-            <a:r>
-              <a:rPr sz="1300" b="0" i="0">
-                <a:solidFill>
-                  <a:srgbClr val="26282B"/>
-                </a:solidFill>
-              </a:rPr>
-              <a:t>•  Confidence thresholds are measured per model, not guessed</a:t>
+              <a:t>Cameras, tones, pellet events and laser output are not separately timestamped and hoped to agree.</a:t>
             </a:r>
           </a:p>
         </p:txBody>
       </p:sp>
       <p:pic>
         <p:nvPicPr>
-          <p:cNvPr id="7" name="Picture 6" descr="pose_backbones.png"/>
+          <p:cNvPr id="5" name="Picture 4" descr="synchronization.png"/>
           <p:cNvPicPr>
             <a:picLocks noChangeAspect="1"/>
           </p:cNvPicPr>
@@ -7395,8 +5542,8 @@
         </p:blipFill>
         <p:spPr>
           <a:xfrm>
-            <a:off x="4162806" y="2788920"/>
-            <a:ext cx="3835908" cy="1920240"/>
+            <a:off x="658368" y="1847088"/>
+            <a:ext cx="10874959" cy="3663144"/>
           </a:xfrm>
           <a:prstGeom prst="rect">
             <a:avLst/>
@@ -7405,14 +5552,14 @@
       </p:pic>
       <p:sp>
         <p:nvSpPr>
-          <p:cNvPr id="8" name="TextBox 7"/>
+          <p:cNvPr id="6" name="TextBox 5"/>
           <p:cNvSpPr txBox="1"/>
           <p:nvPr/>
         </p:nvSpPr>
         <p:spPr>
           <a:xfrm>
-            <a:off x="640080" y="4764024"/>
-            <a:ext cx="10972800" cy="274320"/>
+            <a:off x="658368" y="5638248"/>
+            <a:ext cx="10874959" cy="502920"/>
           </a:xfrm>
           <a:prstGeom prst="rect">
             <a:avLst/>
@@ -7425,28 +5572,29 @@
           </a:bodyPr>
           <a:lstStyle/>
           <a:p>
-            <a:pPr algn="l"/>
-            <a:r>
-              <a:rPr sz="1000" b="0" i="1">
-                <a:solidFill>
-                  <a:srgbClr val="7A7F87"/>
-                </a:solidFill>
+            <a:pPr algn="ctr"/>
+            <a:r>
+              <a:rPr sz="1150" b="0" i="1">
+                <a:solidFill>
+                  <a:srgbClr val="6B727B"/>
+                </a:solidFill>
+                <a:latin typeface="Segoe UI"/>
               </a:rPr>
-              <a:t>Where it came from</a:t>
-            </a:r>
-          </a:p>
-        </p:txBody>
-      </p:sp>
-      <p:sp>
-        <p:nvSpPr>
-          <p:cNvPr id="9" name="TextBox 8"/>
+              <a:t>Camera frame edges are matched to NI-DAQ samples with a signed offset, a resolution, and a confidence — all written into alignment.json.</a:t>
+            </a:r>
+          </a:p>
+        </p:txBody>
+      </p:sp>
+      <p:sp>
+        <p:nvSpPr>
+          <p:cNvPr id="7" name="TextBox 6"/>
           <p:cNvSpPr txBox="1"/>
           <p:nvPr/>
         </p:nvSpPr>
         <p:spPr>
           <a:xfrm>
-            <a:off x="640080" y="5074920"/>
-            <a:ext cx="3429000" cy="274320"/>
+            <a:off x="658368" y="6382512"/>
+            <a:ext cx="10874959" cy="292608"/>
           </a:xfrm>
           <a:prstGeom prst="rect">
             <a:avLst/>
@@ -7454,33 +5602,33 @@
           <a:noFill/>
         </p:spPr>
         <p:txBody>
-          <a:bodyPr wrap="square">
+          <a:bodyPr wrap="none">
             <a:spAutoFit/>
           </a:bodyPr>
           <a:lstStyle/>
           <a:p>
-            <a:pPr algn="l"/>
-            <a:r>
-              <a:rPr sz="1100" b="1" i="0">
-                <a:solidFill>
-                  <a:srgbClr val="6B7F9E"/>
-                </a:solidFill>
+            <a:r>
+              <a:rPr sz="900" b="0" i="0">
+                <a:solidFill>
+                  <a:srgbClr val="6B727B"/>
+                </a:solidFill>
+                <a:latin typeface="Segoe UI"/>
               </a:rPr>
-              <a:t>reach-training</a:t>
-            </a:r>
-          </a:p>
-        </p:txBody>
-      </p:sp>
-      <p:sp>
-        <p:nvSpPr>
-          <p:cNvPr id="10" name="TextBox 9"/>
+              <a:t>reachAQ</a:t>
+            </a:r>
+          </a:p>
+        </p:txBody>
+      </p:sp>
+      <p:sp>
+        <p:nvSpPr>
+          <p:cNvPr id="8" name="TextBox 7"/>
           <p:cNvSpPr txBox="1"/>
           <p:nvPr/>
         </p:nvSpPr>
         <p:spPr>
           <a:xfrm>
-            <a:off x="640080" y="5367528"/>
-            <a:ext cx="3429000" cy="1280160"/>
+            <a:off x="10893247" y="6382512"/>
+            <a:ext cx="640080" cy="292608"/>
           </a:xfrm>
           <a:prstGeom prst="rect">
             <a:avLst/>
@@ -7488,155 +5636,20 @@
           <a:noFill/>
         </p:spPr>
         <p:txBody>
-          <a:bodyPr wrap="square">
+          <a:bodyPr wrap="none">
             <a:spAutoFit/>
           </a:bodyPr>
           <a:lstStyle/>
           <a:p>
-            <a:pPr algn="l"/>
-            <a:r>
-              <a:rPr sz="1000" b="0" i="0">
-                <a:solidFill>
-                  <a:srgbClr val="26282B"/>
-                </a:solidFill>
+            <a:pPr algn="r"/>
+            <a:r>
+              <a:rPr sz="900" b="0" i="0">
+                <a:solidFill>
+                  <a:srgbClr val="6B727B"/>
+                </a:solidFill>
+                <a:latin typeface="Segoe UI"/>
               </a:rPr>
-              <a:t>DeepLabCut run offline after the session, then curated by hand</a:t>
-            </a:r>
-          </a:p>
-        </p:txBody>
-      </p:sp>
-      <p:sp>
-        <p:nvSpPr>
-          <p:cNvPr id="11" name="TextBox 10"/>
-          <p:cNvSpPr txBox="1"/>
-          <p:nvPr/>
-        </p:nvSpPr>
-        <p:spPr>
-          <a:xfrm>
-            <a:off x="4343400" y="5074920"/>
-            <a:ext cx="3429000" cy="274320"/>
-          </a:xfrm>
-          <a:prstGeom prst="rect">
-            <a:avLst/>
-          </a:prstGeom>
-          <a:noFill/>
-        </p:spPr>
-        <p:txBody>
-          <a:bodyPr wrap="square">
-            <a:spAutoFit/>
-          </a:bodyPr>
-          <a:lstStyle/>
-          <a:p>
-            <a:pPr algn="l"/>
-            <a:r>
-              <a:rPr sz="1100" b="1" i="0">
-                <a:solidFill>
-                  <a:srgbClr val="4A8C7A"/>
-                </a:solidFill>
-              </a:rPr>
-              <a:t>auto-trainer</a:t>
-            </a:r>
-          </a:p>
-        </p:txBody>
-      </p:sp>
-      <p:sp>
-        <p:nvSpPr>
-          <p:cNvPr id="12" name="TextBox 11"/>
-          <p:cNvSpPr txBox="1"/>
-          <p:nvPr/>
-        </p:nvSpPr>
-        <p:spPr>
-          <a:xfrm>
-            <a:off x="4343400" y="5367528"/>
-            <a:ext cx="3429000" cy="1280160"/>
-          </a:xfrm>
-          <a:prstGeom prst="rect">
-            <a:avLst/>
-          </a:prstGeom>
-          <a:noFill/>
-        </p:spPr>
-        <p:txBody>
-          <a:bodyPr wrap="square">
-            <a:spAutoFit/>
-          </a:bodyPr>
-          <a:lstStyle/>
-          <a:p>
-            <a:pPr algn="l"/>
-            <a:r>
-              <a:rPr sz="1000" b="0" i="0">
-                <a:solidFill>
-                  <a:srgbClr val="26282B"/>
-                </a:solidFill>
-              </a:rPr>
-              <a:t>Pose inference and FLIR stereo calibration integrated into the application</a:t>
-            </a:r>
-          </a:p>
-        </p:txBody>
-      </p:sp>
-      <p:sp>
-        <p:nvSpPr>
-          <p:cNvPr id="13" name="TextBox 12"/>
-          <p:cNvSpPr txBox="1"/>
-          <p:nvPr/>
-        </p:nvSpPr>
-        <p:spPr>
-          <a:xfrm>
-            <a:off x="8046720" y="5074920"/>
-            <a:ext cx="3429000" cy="274320"/>
-          </a:xfrm>
-          <a:prstGeom prst="rect">
-            <a:avLst/>
-          </a:prstGeom>
-          <a:noFill/>
-        </p:spPr>
-        <p:txBody>
-          <a:bodyPr wrap="square">
-            <a:spAutoFit/>
-          </a:bodyPr>
-          <a:lstStyle/>
-          <a:p>
-            <a:pPr algn="l"/>
-            <a:r>
-              <a:rPr sz="1100" b="1" i="0">
-                <a:solidFill>
-                  <a:srgbClr val="B3593F"/>
-                </a:solidFill>
-              </a:rPr>
-              <a:t>reachAQ</a:t>
-            </a:r>
-          </a:p>
-        </p:txBody>
-      </p:sp>
-      <p:sp>
-        <p:nvSpPr>
-          <p:cNvPr id="14" name="TextBox 13"/>
-          <p:cNvSpPr txBox="1"/>
-          <p:nvPr/>
-        </p:nvSpPr>
-        <p:spPr>
-          <a:xfrm>
-            <a:off x="8046720" y="5367528"/>
-            <a:ext cx="3429000" cy="1280160"/>
-          </a:xfrm>
-          <a:prstGeom prst="rect">
-            <a:avLst/>
-          </a:prstGeom>
-          <a:noFill/>
-        </p:spPr>
-        <p:txBody>
-          <a:bodyPr wrap="square">
-            <a:spAutoFit/>
-          </a:bodyPr>
-          <a:lstStyle/>
-          <a:p>
-            <a:pPr algn="l"/>
-            <a:r>
-              <a:rPr sz="1000" b="0" i="0">
-                <a:solidFill>
-                  <a:srgbClr val="26282B"/>
-                </a:solidFill>
-              </a:rPr>
-              <a:t>Live 3D computed in NumPy on the PyTorch backend, per-backbone confidence calibration, top-down model support</a:t>
+              <a:t>6</a:t>
             </a:r>
           </a:p>
         </p:txBody>
@@ -7661,14 +5674,192 @@
       <p:grpSpPr/>
       <p:sp>
         <p:nvSpPr>
-          <p:cNvPr id="2" name="TextBox 1"/>
+          <p:cNvPr id="2" name="Title 1"/>
+          <p:cNvSpPr>
+            <a:spLocks noGrp="1"/>
+          </p:cNvSpPr>
+          <p:nvPr>
+            <p:ph type="title"/>
+          </p:nvPr>
+        </p:nvSpPr>
+        <p:spPr>
+          <a:xfrm>
+            <a:off x="658368" y="457200"/>
+            <a:ext cx="10874959" cy="868680"/>
+          </a:xfrm>
+        </p:spPr>
+        <p:txBody>
+          <a:bodyPr wrap="square"/>
+          <a:lstStyle/>
+          <a:p>
+            <a:pPr algn="l"/>
+            <a:r>
+              <a:rPr sz="3000" b="1" i="0">
+                <a:solidFill>
+                  <a:srgbClr val="1E242B"/>
+                </a:solidFill>
+                <a:latin typeface="Segoe UI"/>
+              </a:rPr>
+              <a:t>Signals you can watch while the session runs</a:t>
+            </a:r>
+          </a:p>
+        </p:txBody>
+      </p:sp>
+      <p:sp>
+        <p:nvSpPr>
+          <p:cNvPr id="3" name="Content Placeholder 2"/>
+          <p:cNvSpPr>
+            <a:spLocks noGrp="1"/>
+          </p:cNvSpPr>
+          <p:nvPr>
+            <p:ph idx="1"/>
+          </p:nvPr>
+        </p:nvSpPr>
+        <p:spPr>
+          <a:xfrm>
+            <a:off x="658368" y="2057400"/>
+            <a:ext cx="10874959" cy="4023360"/>
+          </a:xfrm>
+        </p:spPr>
+        <p:txBody>
+          <a:bodyPr wrap="square"/>
+          <a:lstStyle/>
+          <a:p>
+            <a:pPr>
+              <a:spcAft>
+                <a:spcPts val="1300"/>
+              </a:spcAft>
+            </a:pPr>
+            <a:r>
+              <a:rPr sz="1500" b="0" i="0">
+                <a:solidFill>
+                  <a:srgbClr val="1E242B"/>
+                </a:solidFill>
+                <a:latin typeface="Segoe UI"/>
+              </a:rPr>
+              <a:t>Tones 1, 2 and 3 as logic traces, with the commanded onset checked against the pulse the DAQ actually saw</a:t>
+            </a:r>
+          </a:p>
+          <a:p>
+            <a:pPr>
+              <a:spcAft>
+                <a:spcPts val="1300"/>
+              </a:spcAft>
+            </a:pPr>
+            <a:r>
+              <a:rPr sz="1500" b="0" i="0">
+                <a:solidFill>
+                  <a:srgbClr val="1E242B"/>
+                </a:solidFill>
+                <a:latin typeface="Segoe UI"/>
+              </a:rPr>
+              <a:t>Pellet FSR pressure — two sensors at about 83 Hz each, from firmware 2.1.0, on their own stream rather than mixed into the device log</a:t>
+            </a:r>
+          </a:p>
+          <a:p>
+            <a:pPr>
+              <a:spcAft>
+                <a:spcPts val="1300"/>
+              </a:spcAft>
+            </a:pPr>
+            <a:r>
+              <a:rPr sz="1500" b="0" i="0">
+                <a:solidFill>
+                  <a:srgbClr val="1E242B"/>
+                </a:solidFill>
+                <a:latin typeface="Segoe UI"/>
+              </a:rPr>
+              <a:t>Laser analog command alongside the diode readback, so what was asked for and what came out are on the same axis</a:t>
+            </a:r>
+          </a:p>
+          <a:p>
+            <a:pPr>
+              <a:spcAft>
+                <a:spcPts val="1300"/>
+              </a:spcAft>
+            </a:pPr>
+            <a:r>
+              <a:rPr sz="1500" b="0" i="0">
+                <a:solidFill>
+                  <a:srgbClr val="1E242B"/>
+                </a:solidFill>
+                <a:latin typeface="Segoe UI"/>
+              </a:rPr>
+              <a:t>Camera frame pulses and the barcode line, which are what tie video to samples</a:t>
+            </a:r>
+          </a:p>
+          <a:p>
+            <a:pPr>
+              <a:spcAft>
+                <a:spcPts val="1300"/>
+              </a:spcAft>
+            </a:pPr>
+            <a:r>
+              <a:rPr sz="1500" b="0" i="0">
+                <a:solidFill>
+                  <a:srgbClr val="1E242B"/>
+                </a:solidFill>
+                <a:latin typeface="Segoe UI"/>
+              </a:rPr>
+              <a:t>Closed-loop state: what the pose gate answered, when the cue fired, and whether the trial was cancelled</a:t>
+            </a:r>
+          </a:p>
+        </p:txBody>
+      </p:sp>
+      <p:sp>
+        <p:nvSpPr>
+          <p:cNvPr id="4" name="Rectangle 3"/>
+          <p:cNvSpPr/>
+          <p:nvPr/>
+        </p:nvSpPr>
+        <p:spPr>
+          <a:xfrm>
+            <a:off x="658368" y="1170432"/>
+            <a:ext cx="1005840" cy="38100"/>
+          </a:xfrm>
+          <a:prstGeom prst="rect">
+            <a:avLst/>
+          </a:prstGeom>
+          <a:solidFill>
+            <a:srgbClr val="B3593F"/>
+          </a:solidFill>
+          <a:ln>
+            <a:noFill/>
+          </a:ln>
+          <a:effectLst/>
+        </p:spPr>
+        <p:style>
+          <a:lnRef idx="1">
+            <a:schemeClr val="accent1"/>
+          </a:lnRef>
+          <a:fillRef idx="3">
+            <a:schemeClr val="accent1"/>
+          </a:fillRef>
+          <a:effectRef idx="2">
+            <a:schemeClr val="accent1"/>
+          </a:effectRef>
+          <a:fontRef idx="minor">
+            <a:schemeClr val="lt1"/>
+          </a:fontRef>
+        </p:style>
+        <p:txBody>
+          <a:bodyPr rtlCol="0" anchor="ctr"/>
+          <a:lstStyle/>
+          <a:p>
+            <a:pPr algn="ctr"/>
+          </a:p>
+        </p:txBody>
+      </p:sp>
+      <p:sp>
+        <p:nvSpPr>
+          <p:cNvPr id="5" name="TextBox 4"/>
           <p:cNvSpPr txBox="1"/>
           <p:nvPr/>
         </p:nvSpPr>
         <p:spPr>
           <a:xfrm>
-            <a:off x="640080" y="365760"/>
-            <a:ext cx="10972800" cy="822960"/>
+            <a:off x="658368" y="1371600"/>
+            <a:ext cx="10874959" cy="457200"/>
           </a:xfrm>
           <a:prstGeom prst="rect">
             <a:avLst/>
@@ -7681,28 +5872,28 @@
           </a:bodyPr>
           <a:lstStyle/>
           <a:p>
-            <a:pPr algn="l"/>
-            <a:r>
-              <a:rPr sz="3000" b="1" i="0">
-                <a:solidFill>
-                  <a:srgbClr val="26282B"/>
-                </a:solidFill>
+            <a:r>
+              <a:rPr sz="1400" b="0" i="1">
+                <a:solidFill>
+                  <a:srgbClr val="6B727B"/>
+                </a:solidFill>
+                <a:latin typeface="Segoe UI"/>
               </a:rPr>
-              <a:t>Closed-loop reach detection</a:t>
-            </a:r>
-          </a:p>
-        </p:txBody>
-      </p:sp>
-      <p:sp>
-        <p:nvSpPr>
-          <p:cNvPr id="3" name="TextBox 2"/>
+              <a:t>Everything is acquired continuously at 10 kHz and recorded unfiltered. The plot selection only changes what is drawn.</a:t>
+            </a:r>
+          </a:p>
+        </p:txBody>
+      </p:sp>
+      <p:sp>
+        <p:nvSpPr>
+          <p:cNvPr id="6" name="TextBox 5"/>
           <p:cNvSpPr txBox="1"/>
           <p:nvPr/>
         </p:nvSpPr>
         <p:spPr>
           <a:xfrm>
-            <a:off x="640080" y="1051560"/>
-            <a:ext cx="10972800" cy="457200"/>
+            <a:off x="658368" y="6382512"/>
+            <a:ext cx="10874959" cy="292608"/>
           </a:xfrm>
           <a:prstGeom prst="rect">
             <a:avLst/>
@@ -7710,33 +5901,33 @@
           <a:noFill/>
         </p:spPr>
         <p:txBody>
-          <a:bodyPr wrap="square">
+          <a:bodyPr wrap="none">
             <a:spAutoFit/>
           </a:bodyPr>
           <a:lstStyle/>
           <a:p>
-            <a:pPr algn="l"/>
-            <a:r>
-              <a:rPr sz="1400" b="0" i="1">
-                <a:solidFill>
-                  <a:srgbClr val="7A7F87"/>
-                </a:solidFill>
+            <a:r>
+              <a:rPr sz="900" b="0" i="0">
+                <a:solidFill>
+                  <a:srgbClr val="6B727B"/>
+                </a:solidFill>
+                <a:latin typeface="Segoe UI"/>
               </a:rPr>
-              <a:t>The central capability — and the one that did not exist before</a:t>
-            </a:r>
-          </a:p>
-        </p:txBody>
-      </p:sp>
-      <p:sp>
-        <p:nvSpPr>
-          <p:cNvPr id="4" name="TextBox 3"/>
+              <a:t>reachAQ</a:t>
+            </a:r>
+          </a:p>
+        </p:txBody>
+      </p:sp>
+      <p:sp>
+        <p:nvSpPr>
+          <p:cNvPr id="7" name="TextBox 6"/>
           <p:cNvSpPr txBox="1"/>
           <p:nvPr/>
         </p:nvSpPr>
         <p:spPr>
           <a:xfrm>
-            <a:off x="640080" y="1920240"/>
-            <a:ext cx="10972800" cy="548640"/>
+            <a:off x="10893247" y="6382512"/>
+            <a:ext cx="640080" cy="292608"/>
           </a:xfrm>
           <a:prstGeom prst="rect">
             <a:avLst/>
@@ -7744,359 +5935,20 @@
           <a:noFill/>
         </p:spPr>
         <p:txBody>
-          <a:bodyPr wrap="square">
+          <a:bodyPr wrap="none">
             <a:spAutoFit/>
           </a:bodyPr>
           <a:lstStyle/>
           <a:p>
-            <a:pPr algn="l"/>
-            <a:r>
-              <a:rPr sz="1600" b="0" i="0">
-                <a:solidFill>
-                  <a:srgbClr val="26282B"/>
-                </a:solidFill>
+            <a:pPr algn="r"/>
+            <a:r>
+              <a:rPr sz="900" b="0" i="0">
+                <a:solidFill>
+                  <a:srgbClr val="6B727B"/>
+                </a:solidFill>
+                <a:latin typeface="Segoe UI"/>
               </a:rPr>
-              <a:t>•  The cue gate asks a live question: has the paw crossed into the reach volume?</a:t>
-            </a:r>
-          </a:p>
-        </p:txBody>
-      </p:sp>
-      <p:sp>
-        <p:nvSpPr>
-          <p:cNvPr id="5" name="TextBox 4"/>
-          <p:cNvSpPr txBox="1"/>
-          <p:nvPr/>
-        </p:nvSpPr>
-        <p:spPr>
-          <a:xfrm>
-            <a:off x="640080" y="2468880"/>
-            <a:ext cx="10972800" cy="548640"/>
-          </a:xfrm>
-          <a:prstGeom prst="rect">
-            <a:avLst/>
-          </a:prstGeom>
-          <a:noFill/>
-        </p:spPr>
-        <p:txBody>
-          <a:bodyPr wrap="square">
-            <a:spAutoFit/>
-          </a:bodyPr>
-          <a:lstStyle/>
-          <a:p>
-            <a:pPr algn="l"/>
-            <a:r>
-              <a:rPr sz="1600" b="0" i="0">
-                <a:solidFill>
-                  <a:srgbClr val="26282B"/>
-                </a:solidFill>
-              </a:rPr>
-              <a:t>•  The answer comes from the live 3D pose, on the current frame</a:t>
-            </a:r>
-          </a:p>
-        </p:txBody>
-      </p:sp>
-      <p:sp>
-        <p:nvSpPr>
-          <p:cNvPr id="6" name="TextBox 5"/>
-          <p:cNvSpPr txBox="1"/>
-          <p:nvPr/>
-        </p:nvSpPr>
-        <p:spPr>
-          <a:xfrm>
-            <a:off x="640080" y="3017520"/>
-            <a:ext cx="10972800" cy="548640"/>
-          </a:xfrm>
-          <a:prstGeom prst="rect">
-            <a:avLst/>
-          </a:prstGeom>
-          <a:noFill/>
-        </p:spPr>
-        <p:txBody>
-          <a:bodyPr wrap="square">
-            <a:spAutoFit/>
-          </a:bodyPr>
-          <a:lstStyle/>
-          <a:p>
-            <a:pPr algn="l"/>
-            <a:r>
-              <a:rPr sz="1600" b="0" i="0">
-                <a:solidFill>
-                  <a:srgbClr val="26282B"/>
-                </a:solidFill>
-              </a:rPr>
-              <a:t>•  If the answer is no at the deadline, the trial resets rather than firing late</a:t>
-            </a:r>
-          </a:p>
-        </p:txBody>
-      </p:sp>
-      <p:sp>
-        <p:nvSpPr>
-          <p:cNvPr id="7" name="TextBox 6"/>
-          <p:cNvSpPr txBox="1"/>
-          <p:nvPr/>
-        </p:nvSpPr>
-        <p:spPr>
-          <a:xfrm>
-            <a:off x="640080" y="3566159"/>
-            <a:ext cx="10972800" cy="548640"/>
-          </a:xfrm>
-          <a:prstGeom prst="rect">
-            <a:avLst/>
-          </a:prstGeom>
-          <a:noFill/>
-        </p:spPr>
-        <p:txBody>
-          <a:bodyPr wrap="square">
-            <a:spAutoFit/>
-          </a:bodyPr>
-          <a:lstStyle/>
-          <a:p>
-            <a:pPr algn="l"/>
-            <a:r>
-              <a:rPr sz="1600" b="0" i="0">
-                <a:solidFill>
-                  <a:srgbClr val="26282B"/>
-                </a:solidFill>
-              </a:rPr>
-              <a:t>•  The reach-state source is selectable, so the gate can be driven different ways</a:t>
-            </a:r>
-          </a:p>
-        </p:txBody>
-      </p:sp>
-      <p:sp>
-        <p:nvSpPr>
-          <p:cNvPr id="8" name="TextBox 7"/>
-          <p:cNvSpPr txBox="1"/>
-          <p:nvPr/>
-        </p:nvSpPr>
-        <p:spPr>
-          <a:xfrm>
-            <a:off x="640080" y="4489704"/>
-            <a:ext cx="10972800" cy="274320"/>
-          </a:xfrm>
-          <a:prstGeom prst="rect">
-            <a:avLst/>
-          </a:prstGeom>
-          <a:noFill/>
-        </p:spPr>
-        <p:txBody>
-          <a:bodyPr wrap="square">
-            <a:spAutoFit/>
-          </a:bodyPr>
-          <a:lstStyle/>
-          <a:p>
-            <a:pPr algn="l"/>
-            <a:r>
-              <a:rPr sz="1000" b="0" i="1">
-                <a:solidFill>
-                  <a:srgbClr val="7A7F87"/>
-                </a:solidFill>
-              </a:rPr>
-              <a:t>Where it came from</a:t>
-            </a:r>
-          </a:p>
-        </p:txBody>
-      </p:sp>
-      <p:sp>
-        <p:nvSpPr>
-          <p:cNvPr id="9" name="TextBox 8"/>
-          <p:cNvSpPr txBox="1"/>
-          <p:nvPr/>
-        </p:nvSpPr>
-        <p:spPr>
-          <a:xfrm>
-            <a:off x="640080" y="4800600"/>
-            <a:ext cx="3429000" cy="274320"/>
-          </a:xfrm>
-          <a:prstGeom prst="rect">
-            <a:avLst/>
-          </a:prstGeom>
-          <a:noFill/>
-        </p:spPr>
-        <p:txBody>
-          <a:bodyPr wrap="square">
-            <a:spAutoFit/>
-          </a:bodyPr>
-          <a:lstStyle/>
-          <a:p>
-            <a:pPr algn="l"/>
-            <a:r>
-              <a:rPr sz="1100" b="1" i="0">
-                <a:solidFill>
-                  <a:srgbClr val="6B7F9E"/>
-                </a:solidFill>
-              </a:rPr>
-              <a:t>reach-training</a:t>
-            </a:r>
-          </a:p>
-        </p:txBody>
-      </p:sp>
-      <p:sp>
-        <p:nvSpPr>
-          <p:cNvPr id="10" name="TextBox 9"/>
-          <p:cNvSpPr txBox="1"/>
-          <p:nvPr/>
-        </p:nvSpPr>
-        <p:spPr>
-          <a:xfrm>
-            <a:off x="640080" y="5093208"/>
-            <a:ext cx="3429000" cy="1280160"/>
-          </a:xfrm>
-          <a:prstGeom prst="rect">
-            <a:avLst/>
-          </a:prstGeom>
-          <a:noFill/>
-        </p:spPr>
-        <p:txBody>
-          <a:bodyPr wrap="square">
-            <a:spAutoFit/>
-          </a:bodyPr>
-          <a:lstStyle/>
-          <a:p>
-            <a:pPr algn="l"/>
-            <a:r>
-              <a:rPr sz="1000" b="0" i="0">
-                <a:solidFill>
-                  <a:srgbClr val="26282B"/>
-                </a:solidFill>
-              </a:rPr>
-              <a:t>A brightness threshold inside a drawn ROI, checked against an Arduino serial handshake</a:t>
-            </a:r>
-          </a:p>
-        </p:txBody>
-      </p:sp>
-      <p:sp>
-        <p:nvSpPr>
-          <p:cNvPr id="11" name="TextBox 10"/>
-          <p:cNvSpPr txBox="1"/>
-          <p:nvPr/>
-        </p:nvSpPr>
-        <p:spPr>
-          <a:xfrm>
-            <a:off x="4343400" y="4800600"/>
-            <a:ext cx="3429000" cy="274320"/>
-          </a:xfrm>
-          <a:prstGeom prst="rect">
-            <a:avLst/>
-          </a:prstGeom>
-          <a:noFill/>
-        </p:spPr>
-        <p:txBody>
-          <a:bodyPr wrap="square">
-            <a:spAutoFit/>
-          </a:bodyPr>
-          <a:lstStyle/>
-          <a:p>
-            <a:pPr algn="l"/>
-            <a:r>
-              <a:rPr sz="1100" b="1" i="0">
-                <a:solidFill>
-                  <a:srgbClr val="4A8C7A"/>
-                </a:solidFill>
-              </a:rPr>
-              <a:t>auto-trainer</a:t>
-            </a:r>
-          </a:p>
-        </p:txBody>
-      </p:sp>
-      <p:sp>
-        <p:nvSpPr>
-          <p:cNvPr id="12" name="TextBox 11"/>
-          <p:cNvSpPr txBox="1"/>
-          <p:nvPr/>
-        </p:nvSpPr>
-        <p:spPr>
-          <a:xfrm>
-            <a:off x="4343400" y="5093208"/>
-            <a:ext cx="3429000" cy="1280160"/>
-          </a:xfrm>
-          <a:prstGeom prst="rect">
-            <a:avLst/>
-          </a:prstGeom>
-          <a:noFill/>
-        </p:spPr>
-        <p:txBody>
-          <a:bodyPr wrap="square">
-            <a:spAutoFit/>
-          </a:bodyPr>
-          <a:lstStyle/>
-          <a:p>
-            <a:pPr algn="l"/>
-            <a:r>
-              <a:rPr sz="1000" b="0" i="0">
-                <a:solidFill>
-                  <a:srgbClr val="26282B"/>
-                </a:solidFill>
-              </a:rPr>
-              <a:t>Pose-derived behavioural state feeding a state machine</a:t>
-            </a:r>
-          </a:p>
-        </p:txBody>
-      </p:sp>
-      <p:sp>
-        <p:nvSpPr>
-          <p:cNvPr id="13" name="TextBox 12"/>
-          <p:cNvSpPr txBox="1"/>
-          <p:nvPr/>
-        </p:nvSpPr>
-        <p:spPr>
-          <a:xfrm>
-            <a:off x="8046720" y="4800600"/>
-            <a:ext cx="3429000" cy="274320"/>
-          </a:xfrm>
-          <a:prstGeom prst="rect">
-            <a:avLst/>
-          </a:prstGeom>
-          <a:noFill/>
-        </p:spPr>
-        <p:txBody>
-          <a:bodyPr wrap="square">
-            <a:spAutoFit/>
-          </a:bodyPr>
-          <a:lstStyle/>
-          <a:p>
-            <a:pPr algn="l"/>
-            <a:r>
-              <a:rPr sz="1100" b="1" i="0">
-                <a:solidFill>
-                  <a:srgbClr val="B3593F"/>
-                </a:solidFill>
-              </a:rPr>
-              <a:t>reachAQ</a:t>
-            </a:r>
-          </a:p>
-        </p:txBody>
-      </p:sp>
-      <p:sp>
-        <p:nvSpPr>
-          <p:cNvPr id="14" name="TextBox 13"/>
-          <p:cNvSpPr txBox="1"/>
-          <p:nvPr/>
-        </p:nvSpPr>
-        <p:spPr>
-          <a:xfrm>
-            <a:off x="8046720" y="5093208"/>
-            <a:ext cx="3429000" cy="1280160"/>
-          </a:xfrm>
-          <a:prstGeom prst="rect">
-            <a:avLst/>
-          </a:prstGeom>
-          <a:noFill/>
-        </p:spPr>
-        <p:txBody>
-          <a:bodyPr wrap="square">
-            <a:spAutoFit/>
-          </a:bodyPr>
-          <a:lstStyle/>
-          <a:p>
-            <a:pPr algn="l"/>
-            <a:r>
-              <a:rPr sz="1000" b="0" i="0">
-                <a:solidFill>
-                  <a:srgbClr val="26282B"/>
-                </a:solidFill>
-              </a:rPr>
-              <a:t>Live 3D pose answers the cue gate directly, with a deadline-accurate timer and a typed cancel reason when the gate is blocked or stale</a:t>
+              <a:t>7</a:t>
             </a:r>
           </a:p>
         </p:txBody>
@@ -8121,14 +5973,208 @@
       <p:grpSpPr/>
       <p:sp>
         <p:nvSpPr>
-          <p:cNvPr id="2" name="TextBox 1"/>
+          <p:cNvPr id="2" name="Title 1"/>
+          <p:cNvSpPr>
+            <a:spLocks noGrp="1"/>
+          </p:cNvSpPr>
+          <p:nvPr>
+            <p:ph type="title"/>
+          </p:nvPr>
+        </p:nvSpPr>
+        <p:spPr>
+          <a:xfrm>
+            <a:off x="658368" y="457200"/>
+            <a:ext cx="10874959" cy="868680"/>
+          </a:xfrm>
+        </p:spPr>
+        <p:txBody>
+          <a:bodyPr wrap="square"/>
+          <a:lstStyle/>
+          <a:p>
+            <a:pPr algn="l"/>
+            <a:r>
+              <a:rPr sz="3000" b="1" i="0">
+                <a:solidFill>
+                  <a:srgbClr val="1E242B"/>
+                </a:solidFill>
+                <a:latin typeface="Segoe UI"/>
+              </a:rPr>
+              <a:t>Experiments are composed, not copied</a:t>
+            </a:r>
+          </a:p>
+        </p:txBody>
+      </p:sp>
+      <p:sp>
+        <p:nvSpPr>
+          <p:cNvPr id="3" name="Content Placeholder 2"/>
+          <p:cNvSpPr>
+            <a:spLocks noGrp="1"/>
+          </p:cNvSpPr>
+          <p:nvPr>
+            <p:ph idx="1"/>
+          </p:nvPr>
+        </p:nvSpPr>
+        <p:spPr>
+          <a:xfrm>
+            <a:off x="658368" y="2057400"/>
+            <a:ext cx="10874959" cy="4023360"/>
+          </a:xfrm>
+        </p:spPr>
+        <p:txBody>
+          <a:bodyPr wrap="square"/>
+          <a:lstStyle/>
+          <a:p>
+            <a:pPr>
+              <a:spcAft>
+                <a:spcPts val="1300"/>
+              </a:spcAft>
+            </a:pPr>
+            <a:r>
+              <a:rPr sz="1500" b="0" i="0">
+                <a:solidFill>
+                  <a:srgbClr val="1E242B"/>
+                </a:solidFill>
+                <a:latin typeface="Segoe UI"/>
+              </a:rPr>
+              <a:t>A trial set is a reusable group of trials, saved on its own — trial content only, no epochs or blocks</a:t>
+            </a:r>
+          </a:p>
+          <a:p>
+            <a:pPr>
+              <a:spcAft>
+                <a:spcPts val="1300"/>
+              </a:spcAft>
+            </a:pPr>
+            <a:r>
+              <a:rPr sz="1500" b="0" i="0">
+                <a:solidFill>
+                  <a:srgbClr val="1E242B"/>
+                </a:solidFill>
+                <a:latin typeface="Segoe UI"/>
+              </a:rPr>
+              <a:t>An experiment is an ordered list of set appearances; each entry pins the set revision it was built against, can repeat, and can shuffle trial order within an appearance</a:t>
+            </a:r>
+          </a:p>
+          <a:p>
+            <a:pPr>
+              <a:spcAft>
+                <a:spcPts val="1300"/>
+              </a:spcAft>
+            </a:pPr>
+            <a:r>
+              <a:rPr sz="1500" b="0" i="0">
+                <a:solidFill>
+                  <a:srgbClr val="1E242B"/>
+                </a:solidFill>
+                <a:latin typeface="Segoe UI"/>
+              </a:rPr>
+              <a:t>Compiling flattens it into an ordinary protocol document, so the runner, the schedule and session evidence see nothing new</a:t>
+            </a:r>
+          </a:p>
+          <a:p>
+            <a:pPr>
+              <a:spcAft>
+                <a:spcPts val="1300"/>
+              </a:spcAft>
+            </a:pPr>
+            <a:r>
+              <a:rPr sz="1500" b="0" i="0">
+                <a:solidFill>
+                  <a:srgbClr val="1E242B"/>
+                </a:solidFill>
+                <a:latin typeface="Segoe UI"/>
+              </a:rPr>
+              <a:t>Each appearance becomes a named epoch, and the Sources column names the set every value came from</a:t>
+            </a:r>
+          </a:p>
+          <a:p>
+            <a:pPr>
+              <a:spcAft>
+                <a:spcPts val="1300"/>
+              </a:spcAft>
+            </a:pPr>
+            <a:r>
+              <a:rPr sz="1500" b="0" i="0">
+                <a:solidFill>
+                  <a:srgbClr val="1E242B"/>
+                </a:solidFill>
+                <a:latin typeface="Segoe UI"/>
+              </a:rPr>
+              <a:t>Shuffle seeds are stored on the entry, so a compile can always be repeated exactly</a:t>
+            </a:r>
+          </a:p>
+          <a:p>
+            <a:pPr>
+              <a:spcAft>
+                <a:spcPts val="1300"/>
+              </a:spcAft>
+            </a:pPr>
+            <a:r>
+              <a:rPr sz="1500" b="0" i="0">
+                <a:solidFill>
+                  <a:srgbClr val="1E242B"/>
+                </a:solidFill>
+                <a:latin typeface="Segoe UI"/>
+              </a:rPr>
+              <a:t>Editing a set never repins an existing row; a stale pin is visible, and a compile against a changed set is refused rather than silently different</a:t>
+            </a:r>
+          </a:p>
+        </p:txBody>
+      </p:sp>
+      <p:sp>
+        <p:nvSpPr>
+          <p:cNvPr id="4" name="Rectangle 3"/>
+          <p:cNvSpPr/>
+          <p:nvPr/>
+        </p:nvSpPr>
+        <p:spPr>
+          <a:xfrm>
+            <a:off x="658368" y="1170432"/>
+            <a:ext cx="1005840" cy="38100"/>
+          </a:xfrm>
+          <a:prstGeom prst="rect">
+            <a:avLst/>
+          </a:prstGeom>
+          <a:solidFill>
+            <a:srgbClr val="B3593F"/>
+          </a:solidFill>
+          <a:ln>
+            <a:noFill/>
+          </a:ln>
+          <a:effectLst/>
+        </p:spPr>
+        <p:style>
+          <a:lnRef idx="1">
+            <a:schemeClr val="accent1"/>
+          </a:lnRef>
+          <a:fillRef idx="3">
+            <a:schemeClr val="accent1"/>
+          </a:fillRef>
+          <a:effectRef idx="2">
+            <a:schemeClr val="accent1"/>
+          </a:effectRef>
+          <a:fontRef idx="minor">
+            <a:schemeClr val="lt1"/>
+          </a:fontRef>
+        </p:style>
+        <p:txBody>
+          <a:bodyPr rtlCol="0" anchor="ctr"/>
+          <a:lstStyle/>
+          <a:p>
+            <a:pPr algn="ctr"/>
+          </a:p>
+        </p:txBody>
+      </p:sp>
+      <p:sp>
+        <p:nvSpPr>
+          <p:cNvPr id="5" name="TextBox 4"/>
           <p:cNvSpPr txBox="1"/>
           <p:nvPr/>
         </p:nvSpPr>
         <p:spPr>
           <a:xfrm>
-            <a:off x="640080" y="365760"/>
-            <a:ext cx="10972800" cy="822960"/>
+            <a:off x="658368" y="1371600"/>
+            <a:ext cx="10874959" cy="457200"/>
           </a:xfrm>
           <a:prstGeom prst="rect">
             <a:avLst/>
@@ -8141,28 +6187,28 @@
           </a:bodyPr>
           <a:lstStyle/>
           <a:p>
-            <a:pPr algn="l"/>
-            <a:r>
-              <a:rPr sz="3000" b="1" i="0">
-                <a:solidFill>
-                  <a:srgbClr val="26282B"/>
-                </a:solidFill>
+            <a:r>
+              <a:rPr sz="1400" b="0" i="1">
+                <a:solidFill>
+                  <a:srgbClr val="6B727B"/>
+                </a:solidFill>
+                <a:latin typeface="Segoe UI"/>
               </a:rPr>
-              <a:t>Optogenetic stimulation</a:t>
-            </a:r>
-          </a:p>
-        </p:txBody>
-      </p:sp>
-      <p:sp>
-        <p:nvSpPr>
-          <p:cNvPr id="3" name="TextBox 2"/>
+              <a:t>A phase shared by several experiments is written once.</a:t>
+            </a:r>
+          </a:p>
+        </p:txBody>
+      </p:sp>
+      <p:sp>
+        <p:nvSpPr>
+          <p:cNvPr id="6" name="TextBox 5"/>
           <p:cNvSpPr txBox="1"/>
           <p:nvPr/>
         </p:nvSpPr>
         <p:spPr>
           <a:xfrm>
-            <a:off x="640080" y="1051560"/>
-            <a:ext cx="10972800" cy="457200"/>
+            <a:off x="658368" y="6382512"/>
+            <a:ext cx="10874959" cy="292608"/>
           </a:xfrm>
           <a:prstGeom prst="rect">
             <a:avLst/>
@@ -8170,33 +6216,33 @@
           <a:noFill/>
         </p:spPr>
         <p:txBody>
-          <a:bodyPr wrap="square">
+          <a:bodyPr wrap="none">
             <a:spAutoFit/>
           </a:bodyPr>
           <a:lstStyle/>
           <a:p>
-            <a:pPr algn="l"/>
-            <a:r>
-              <a:rPr sz="1400" b="0" i="1">
-                <a:solidFill>
-                  <a:srgbClr val="7A7F87"/>
-                </a:solidFill>
+            <a:r>
+              <a:rPr sz="900" b="0" i="0">
+                <a:solidFill>
+                  <a:srgbClr val="6B727B"/>
+                </a:solidFill>
+                <a:latin typeface="Segoe UI"/>
               </a:rPr>
-              <a:t>New in reachAQ — no ancestor in either repository</a:t>
-            </a:r>
-          </a:p>
-        </p:txBody>
-      </p:sp>
-      <p:sp>
-        <p:nvSpPr>
-          <p:cNvPr id="4" name="TextBox 3"/>
+              <a:t>reachAQ</a:t>
+            </a:r>
+          </a:p>
+        </p:txBody>
+      </p:sp>
+      <p:sp>
+        <p:nvSpPr>
+          <p:cNvPr id="7" name="TextBox 6"/>
           <p:cNvSpPr txBox="1"/>
           <p:nvPr/>
         </p:nvSpPr>
         <p:spPr>
           <a:xfrm>
-            <a:off x="640080" y="1920240"/>
-            <a:ext cx="10972800" cy="530352"/>
+            <a:off x="10893247" y="6382512"/>
+            <a:ext cx="640080" cy="292608"/>
           </a:xfrm>
           <a:prstGeom prst="rect">
             <a:avLst/>
@@ -8204,393 +6250,20 @@
           <a:noFill/>
         </p:spPr>
         <p:txBody>
-          <a:bodyPr wrap="square">
+          <a:bodyPr wrap="none">
             <a:spAutoFit/>
           </a:bodyPr>
           <a:lstStyle/>
           <a:p>
-            <a:pPr algn="l"/>
-            <a:r>
-              <a:rPr sz="1600" b="0" i="0">
-                <a:solidFill>
-                  <a:srgbClr val="26282B"/>
-                </a:solidFill>
+            <a:pPr algn="r"/>
+            <a:r>
+              <a:rPr sz="900" b="0" i="0">
+                <a:solidFill>
+                  <a:srgbClr val="6B727B"/>
+                </a:solidFill>
+                <a:latin typeface="Segoe UI"/>
               </a:rPr>
-              <a:t>•  Up to four lasers, each modeled independently</a:t>
-            </a:r>
-          </a:p>
-        </p:txBody>
-      </p:sp>
-      <p:sp>
-        <p:nvSpPr>
-          <p:cNvPr id="5" name="TextBox 4"/>
-          <p:cNvSpPr txBox="1"/>
-          <p:nvPr/>
-        </p:nvSpPr>
-        <p:spPr>
-          <a:xfrm>
-            <a:off x="640080" y="2450592"/>
-            <a:ext cx="10972800" cy="530352"/>
-          </a:xfrm>
-          <a:prstGeom prst="rect">
-            <a:avLst/>
-          </a:prstGeom>
-          <a:noFill/>
-        </p:spPr>
-        <p:txBody>
-          <a:bodyPr wrap="square">
-            <a:spAutoFit/>
-          </a:bodyPr>
-          <a:lstStyle/>
-          <a:p>
-            <a:pPr algn="l"/>
-            <a:r>
-              <a:rPr sz="1600" b="0" i="0">
-                <a:solidFill>
-                  <a:srgbClr val="26282B"/>
-                </a:solidFill>
-              </a:rPr>
-              <a:t>•  Analog and digital control paths per laser</a:t>
-            </a:r>
-          </a:p>
-        </p:txBody>
-      </p:sp>
-      <p:sp>
-        <p:nvSpPr>
-          <p:cNvPr id="6" name="TextBox 5"/>
-          <p:cNvSpPr txBox="1"/>
-          <p:nvPr/>
-        </p:nvSpPr>
-        <p:spPr>
-          <a:xfrm>
-            <a:off x="640080" y="2980944"/>
-            <a:ext cx="10972800" cy="530352"/>
-          </a:xfrm>
-          <a:prstGeom prst="rect">
-            <a:avLst/>
-          </a:prstGeom>
-          <a:noFill/>
-        </p:spPr>
-        <p:txBody>
-          <a:bodyPr wrap="square">
-            <a:spAutoFit/>
-          </a:bodyPr>
-          <a:lstStyle/>
-          <a:p>
-            <a:pPr algn="l"/>
-            <a:r>
-              <a:rPr sz="1600" b="0" i="0">
-                <a:solidFill>
-                  <a:srgbClr val="26282B"/>
-                </a:solidFill>
-              </a:rPr>
-              <a:t>•  Per-laser diode input and a command copy recorded alongside the data</a:t>
-            </a:r>
-          </a:p>
-        </p:txBody>
-      </p:sp>
-      <p:sp>
-        <p:nvSpPr>
-          <p:cNvPr id="7" name="TextBox 6"/>
-          <p:cNvSpPr txBox="1"/>
-          <p:nvPr/>
-        </p:nvSpPr>
-        <p:spPr>
-          <a:xfrm>
-            <a:off x="640080" y="3511295"/>
-            <a:ext cx="10972800" cy="530352"/>
-          </a:xfrm>
-          <a:prstGeom prst="rect">
-            <a:avLst/>
-          </a:prstGeom>
-          <a:noFill/>
-        </p:spPr>
-        <p:txBody>
-          <a:bodyPr wrap="square">
-            <a:spAutoFit/>
-          </a:bodyPr>
-          <a:lstStyle/>
-          <a:p>
-            <a:pPr algn="l"/>
-            <a:r>
-              <a:rPr sz="1600" b="0" i="0">
-                <a:solidFill>
-                  <a:srgbClr val="26282B"/>
-                </a:solidFill>
-              </a:rPr>
-              <a:t>•  Shutter control, and a PMT shutter output</a:t>
-            </a:r>
-          </a:p>
-        </p:txBody>
-      </p:sp>
-      <p:sp>
-        <p:nvSpPr>
-          <p:cNvPr id="8" name="TextBox 7"/>
-          <p:cNvSpPr txBox="1"/>
-          <p:nvPr/>
-        </p:nvSpPr>
-        <p:spPr>
-          <a:xfrm>
-            <a:off x="640080" y="4041648"/>
-            <a:ext cx="10972800" cy="530352"/>
-          </a:xfrm>
-          <a:prstGeom prst="rect">
-            <a:avLst/>
-          </a:prstGeom>
-          <a:noFill/>
-        </p:spPr>
-        <p:txBody>
-          <a:bodyPr wrap="square">
-            <a:spAutoFit/>
-          </a:bodyPr>
-          <a:lstStyle/>
-          <a:p>
-            <a:pPr algn="l"/>
-            <a:r>
-              <a:rPr sz="1600" b="0" i="0">
-                <a:solidFill>
-                  <a:srgbClr val="26282B"/>
-                </a:solidFill>
-              </a:rPr>
-              <a:t>•  Hardware-timed NI-DAQ tasks, not Python-loop timing</a:t>
-            </a:r>
-          </a:p>
-        </p:txBody>
-      </p:sp>
-      <p:sp>
-        <p:nvSpPr>
-          <p:cNvPr id="9" name="TextBox 8"/>
-          <p:cNvSpPr txBox="1"/>
-          <p:nvPr/>
-        </p:nvSpPr>
-        <p:spPr>
-          <a:xfrm>
-            <a:off x="640080" y="4489704"/>
-            <a:ext cx="10972800" cy="274320"/>
-          </a:xfrm>
-          <a:prstGeom prst="rect">
-            <a:avLst/>
-          </a:prstGeom>
-          <a:noFill/>
-        </p:spPr>
-        <p:txBody>
-          <a:bodyPr wrap="square">
-            <a:spAutoFit/>
-          </a:bodyPr>
-          <a:lstStyle/>
-          <a:p>
-            <a:pPr algn="l"/>
-            <a:r>
-              <a:rPr sz="1000" b="0" i="1">
-                <a:solidFill>
-                  <a:srgbClr val="7A7F87"/>
-                </a:solidFill>
-              </a:rPr>
-              <a:t>Where it came from</a:t>
-            </a:r>
-          </a:p>
-        </p:txBody>
-      </p:sp>
-      <p:sp>
-        <p:nvSpPr>
-          <p:cNvPr id="10" name="TextBox 9"/>
-          <p:cNvSpPr txBox="1"/>
-          <p:nvPr/>
-        </p:nvSpPr>
-        <p:spPr>
-          <a:xfrm>
-            <a:off x="640080" y="4800600"/>
-            <a:ext cx="3429000" cy="274320"/>
-          </a:xfrm>
-          <a:prstGeom prst="rect">
-            <a:avLst/>
-          </a:prstGeom>
-          <a:noFill/>
-        </p:spPr>
-        <p:txBody>
-          <a:bodyPr wrap="square">
-            <a:spAutoFit/>
-          </a:bodyPr>
-          <a:lstStyle/>
-          <a:p>
-            <a:pPr algn="l"/>
-            <a:r>
-              <a:rPr sz="1100" b="1" i="0">
-                <a:solidFill>
-                  <a:srgbClr val="6B7F9E"/>
-                </a:solidFill>
-              </a:rPr>
-              <a:t>reach-training</a:t>
-            </a:r>
-          </a:p>
-        </p:txBody>
-      </p:sp>
-      <p:sp>
-        <p:nvSpPr>
-          <p:cNvPr id="11" name="TextBox 10"/>
-          <p:cNvSpPr txBox="1"/>
-          <p:nvPr/>
-        </p:nvSpPr>
-        <p:spPr>
-          <a:xfrm>
-            <a:off x="640080" y="5093208"/>
-            <a:ext cx="3429000" cy="1280160"/>
-          </a:xfrm>
-          <a:prstGeom prst="rect">
-            <a:avLst/>
-          </a:prstGeom>
-          <a:noFill/>
-        </p:spPr>
-        <p:txBody>
-          <a:bodyPr wrap="square">
-            <a:spAutoFit/>
-          </a:bodyPr>
-          <a:lstStyle/>
-          <a:p>
-            <a:pPr algn="l"/>
-            <a:r>
-              <a:rPr sz="1000" b="0" i="0">
-                <a:solidFill>
-                  <a:srgbClr val="26282B"/>
-                </a:solidFill>
-              </a:rPr>
-              <a:t>None — external stimulation was a separate LabVIEW system</a:t>
-            </a:r>
-          </a:p>
-        </p:txBody>
-      </p:sp>
-      <p:sp>
-        <p:nvSpPr>
-          <p:cNvPr id="12" name="TextBox 11"/>
-          <p:cNvSpPr txBox="1"/>
-          <p:nvPr/>
-        </p:nvSpPr>
-        <p:spPr>
-          <a:xfrm>
-            <a:off x="4343400" y="4800600"/>
-            <a:ext cx="3429000" cy="274320"/>
-          </a:xfrm>
-          <a:prstGeom prst="rect">
-            <a:avLst/>
-          </a:prstGeom>
-          <a:noFill/>
-        </p:spPr>
-        <p:txBody>
-          <a:bodyPr wrap="square">
-            <a:spAutoFit/>
-          </a:bodyPr>
-          <a:lstStyle/>
-          <a:p>
-            <a:pPr algn="l"/>
-            <a:r>
-              <a:rPr sz="1100" b="1" i="0">
-                <a:solidFill>
-                  <a:srgbClr val="4A8C7A"/>
-                </a:solidFill>
-              </a:rPr>
-              <a:t>auto-trainer</a:t>
-            </a:r>
-          </a:p>
-        </p:txBody>
-      </p:sp>
-      <p:sp>
-        <p:nvSpPr>
-          <p:cNvPr id="13" name="TextBox 12"/>
-          <p:cNvSpPr txBox="1"/>
-          <p:nvPr/>
-        </p:nvSpPr>
-        <p:spPr>
-          <a:xfrm>
-            <a:off x="4343400" y="5093208"/>
-            <a:ext cx="3429000" cy="1280160"/>
-          </a:xfrm>
-          <a:prstGeom prst="rect">
-            <a:avLst/>
-          </a:prstGeom>
-          <a:noFill/>
-        </p:spPr>
-        <p:txBody>
-          <a:bodyPr wrap="square">
-            <a:spAutoFit/>
-          </a:bodyPr>
-          <a:lstStyle/>
-          <a:p>
-            <a:pPr algn="l"/>
-            <a:r>
-              <a:rPr sz="1000" b="0" i="0">
-                <a:solidFill>
-                  <a:srgbClr val="26282B"/>
-                </a:solidFill>
-              </a:rPr>
-              <a:t>None — no laser subsystem</a:t>
-            </a:r>
-          </a:p>
-        </p:txBody>
-      </p:sp>
-      <p:sp>
-        <p:nvSpPr>
-          <p:cNvPr id="14" name="TextBox 13"/>
-          <p:cNvSpPr txBox="1"/>
-          <p:nvPr/>
-        </p:nvSpPr>
-        <p:spPr>
-          <a:xfrm>
-            <a:off x="8046720" y="4800600"/>
-            <a:ext cx="3429000" cy="274320"/>
-          </a:xfrm>
-          <a:prstGeom prst="rect">
-            <a:avLst/>
-          </a:prstGeom>
-          <a:noFill/>
-        </p:spPr>
-        <p:txBody>
-          <a:bodyPr wrap="square">
-            <a:spAutoFit/>
-          </a:bodyPr>
-          <a:lstStyle/>
-          <a:p>
-            <a:pPr algn="l"/>
-            <a:r>
-              <a:rPr sz="1100" b="1" i="0">
-                <a:solidFill>
-                  <a:srgbClr val="B3593F"/>
-                </a:solidFill>
-              </a:rPr>
-              <a:t>reachAQ</a:t>
-            </a:r>
-          </a:p>
-        </p:txBody>
-      </p:sp>
-      <p:sp>
-        <p:nvSpPr>
-          <p:cNvPr id="15" name="TextBox 14"/>
-          <p:cNvSpPr txBox="1"/>
-          <p:nvPr/>
-        </p:nvSpPr>
-        <p:spPr>
-          <a:xfrm>
-            <a:off x="8046720" y="5093208"/>
-            <a:ext cx="3429000" cy="1280160"/>
-          </a:xfrm>
-          <a:prstGeom prst="rect">
-            <a:avLst/>
-          </a:prstGeom>
-          <a:noFill/>
-        </p:spPr>
-        <p:txBody>
-          <a:bodyPr wrap="square">
-            <a:spAutoFit/>
-          </a:bodyPr>
-          <a:lstStyle/>
-          <a:p>
-            <a:pPr algn="l"/>
-            <a:r>
-              <a:rPr sz="1000" b="0" i="0">
-                <a:solidFill>
-                  <a:srgbClr val="26282B"/>
-                </a:solidFill>
-              </a:rPr>
-              <a:t>Entirely new, built against the NI-DAQ channel inventory taken from the original LabVIEW control system</a:t>
+              <a:t>8</a:t>
             </a:r>
           </a:p>
         </p:txBody>
@@ -8615,14 +6288,91 @@
       <p:grpSpPr/>
       <p:sp>
         <p:nvSpPr>
-          <p:cNvPr id="2" name="TextBox 1"/>
+          <p:cNvPr id="2" name="Title 1"/>
+          <p:cNvSpPr>
+            <a:spLocks noGrp="1"/>
+          </p:cNvSpPr>
+          <p:nvPr>
+            <p:ph type="title"/>
+          </p:nvPr>
+        </p:nvSpPr>
+        <p:spPr>
+          <a:xfrm>
+            <a:off x="658368" y="457200"/>
+            <a:ext cx="10874959" cy="868680"/>
+          </a:xfrm>
+        </p:spPr>
+        <p:txBody>
+          <a:bodyPr wrap="square"/>
+          <a:lstStyle/>
+          <a:p>
+            <a:pPr algn="l"/>
+            <a:r>
+              <a:rPr sz="3000" b="1" i="0">
+                <a:solidFill>
+                  <a:srgbClr val="1E242B"/>
+                </a:solidFill>
+                <a:latin typeface="Segoe UI"/>
+              </a:rPr>
+              <a:t>Demo — recorded video, everything else live</a:t>
+            </a:r>
+          </a:p>
+        </p:txBody>
+      </p:sp>
+      <p:sp>
+        <p:nvSpPr>
+          <p:cNvPr id="3" name="Rectangle 2"/>
+          <p:cNvSpPr/>
+          <p:nvPr/>
+        </p:nvSpPr>
+        <p:spPr>
+          <a:xfrm>
+            <a:off x="658368" y="1170432"/>
+            <a:ext cx="1005840" cy="38100"/>
+          </a:xfrm>
+          <a:prstGeom prst="rect">
+            <a:avLst/>
+          </a:prstGeom>
+          <a:solidFill>
+            <a:srgbClr val="B3593F"/>
+          </a:solidFill>
+          <a:ln>
+            <a:noFill/>
+          </a:ln>
+          <a:effectLst/>
+        </p:spPr>
+        <p:style>
+          <a:lnRef idx="1">
+            <a:schemeClr val="accent1"/>
+          </a:lnRef>
+          <a:fillRef idx="3">
+            <a:schemeClr val="accent1"/>
+          </a:fillRef>
+          <a:effectRef idx="2">
+            <a:schemeClr val="accent1"/>
+          </a:effectRef>
+          <a:fontRef idx="minor">
+            <a:schemeClr val="lt1"/>
+          </a:fontRef>
+        </p:style>
+        <p:txBody>
+          <a:bodyPr rtlCol="0" anchor="ctr"/>
+          <a:lstStyle/>
+          <a:p>
+            <a:pPr algn="ctr"/>
+          </a:p>
+        </p:txBody>
+      </p:sp>
+      <p:sp>
+        <p:nvSpPr>
+          <p:cNvPr id="4" name="TextBox 3"/>
           <p:cNvSpPr txBox="1"/>
           <p:nvPr/>
         </p:nvSpPr>
         <p:spPr>
           <a:xfrm>
-            <a:off x="640080" y="365760"/>
-            <a:ext cx="10972800" cy="822960"/>
+            <a:off x="658368" y="1371600"/>
+            <a:ext cx="10874959" cy="457200"/>
           </a:xfrm>
           <a:prstGeom prst="rect">
             <a:avLst/>
@@ -8635,28 +6385,52 @@
           </a:bodyPr>
           <a:lstStyle/>
           <a:p>
-            <a:pPr algn="l"/>
-            <a:r>
-              <a:rPr sz="3000" b="1" i="0">
-                <a:solidFill>
-                  <a:srgbClr val="26282B"/>
-                </a:solidFill>
+            <a:r>
+              <a:rPr sz="1400" b="0" i="1">
+                <a:solidFill>
+                  <a:srgbClr val="6B727B"/>
+                </a:solidFill>
+                <a:latin typeface="Segoe UI"/>
               </a:rPr>
-              <a:t>Trial protocols</a:t>
-            </a:r>
-          </a:p>
-        </p:txBody>
-      </p:sp>
-      <p:sp>
-        <p:nvSpPr>
-          <p:cNvPr id="3" name="TextBox 2"/>
+              <a:t>No animal today, so the camera frames are played from a recorded session. Exactly one stage is substituted.</a:t>
+            </a:r>
+          </a:p>
+        </p:txBody>
+      </p:sp>
+      <p:pic>
+        <p:nvPicPr>
+          <p:cNvPr id="5" name="Picture 4" descr="live_overlay.png"/>
+          <p:cNvPicPr>
+            <a:picLocks noChangeAspect="1"/>
+          </p:cNvPicPr>
+          <p:nvPr/>
+        </p:nvPicPr>
+        <p:blipFill>
+          <a:blip r:embed="rId2"/>
+          <a:stretch>
+            <a:fillRect/>
+          </a:stretch>
+        </p:blipFill>
+        <p:spPr>
+          <a:xfrm>
+            <a:off x="1202283" y="1847088"/>
+            <a:ext cx="9787128" cy="3822192"/>
+          </a:xfrm>
+          <a:prstGeom prst="rect">
+            <a:avLst/>
+          </a:prstGeom>
+        </p:spPr>
+      </p:pic>
+      <p:sp>
+        <p:nvSpPr>
+          <p:cNvPr id="6" name="TextBox 5"/>
           <p:cNvSpPr txBox="1"/>
           <p:nvPr/>
         </p:nvSpPr>
         <p:spPr>
           <a:xfrm>
-            <a:off x="640080" y="1828800"/>
-            <a:ext cx="10972800" cy="502920"/>
+            <a:off x="658368" y="5797296"/>
+            <a:ext cx="10874959" cy="502920"/>
           </a:xfrm>
           <a:prstGeom prst="rect">
             <a:avLst/>
@@ -8669,28 +6443,29 @@
           </a:bodyPr>
           <a:lstStyle/>
           <a:p>
-            <a:pPr algn="l"/>
-            <a:r>
-              <a:rPr sz="1500" b="0" i="0">
-                <a:solidFill>
-                  <a:srgbClr val="26282B"/>
-                </a:solidFill>
+            <a:pPr algn="ctr"/>
+            <a:r>
+              <a:rPr sz="1150" b="0" i="1">
+                <a:solidFill>
+                  <a:srgbClr val="6B727B"/>
+                </a:solidFill>
+                <a:latin typeface="Segoe UI"/>
               </a:rPr>
-              <a:t>•  A trial is Tone 1, a drawn delay, then Tone 2</a:t>
-            </a:r>
-          </a:p>
-        </p:txBody>
-      </p:sp>
-      <p:sp>
-        <p:nvSpPr>
-          <p:cNvPr id="4" name="TextBox 3"/>
+              <a:t>Live 2D pose, per view, computed on the GPU from the played frames. Captured from the running application on the rig.</a:t>
+            </a:r>
+          </a:p>
+        </p:txBody>
+      </p:sp>
+      <p:sp>
+        <p:nvSpPr>
+          <p:cNvPr id="7" name="TextBox 6"/>
           <p:cNvSpPr txBox="1"/>
           <p:nvPr/>
         </p:nvSpPr>
         <p:spPr>
           <a:xfrm>
-            <a:off x="640080" y="2331720"/>
-            <a:ext cx="10972800" cy="502920"/>
+            <a:off x="658368" y="6382512"/>
+            <a:ext cx="10874959" cy="292608"/>
           </a:xfrm>
           <a:prstGeom prst="rect">
             <a:avLst/>
@@ -8698,33 +6473,33 @@
           <a:noFill/>
         </p:spPr>
         <p:txBody>
-          <a:bodyPr wrap="square">
+          <a:bodyPr wrap="none">
             <a:spAutoFit/>
           </a:bodyPr>
           <a:lstStyle/>
           <a:p>
-            <a:pPr algn="l"/>
-            <a:r>
-              <a:rPr sz="1500" b="0" i="0">
-                <a:solidFill>
-                  <a:srgbClr val="26282B"/>
-                </a:solidFill>
+            <a:r>
+              <a:rPr sz="900" b="0" i="0">
+                <a:solidFill>
+                  <a:srgbClr val="6B727B"/>
+                </a:solidFill>
+                <a:latin typeface="Segoe UI"/>
               </a:rPr>
-              <a:t>•  Delay distributions use the published presets and probability vectors</a:t>
-            </a:r>
-          </a:p>
-        </p:txBody>
-      </p:sp>
-      <p:sp>
-        <p:nvSpPr>
-          <p:cNvPr id="5" name="TextBox 4"/>
+              <a:t>reachAQ</a:t>
+            </a:r>
+          </a:p>
+        </p:txBody>
+      </p:sp>
+      <p:sp>
+        <p:nvSpPr>
+          <p:cNvPr id="8" name="TextBox 7"/>
           <p:cNvSpPr txBox="1"/>
           <p:nvPr/>
         </p:nvSpPr>
         <p:spPr>
           <a:xfrm>
-            <a:off x="640080" y="2834640"/>
-            <a:ext cx="10972800" cy="502920"/>
+            <a:off x="10893247" y="6382512"/>
+            <a:ext cx="640080" cy="292608"/>
           </a:xfrm>
           <a:prstGeom prst="rect">
             <a:avLst/>
@@ -8732,325 +6507,20 @@
           <a:noFill/>
         </p:spPr>
         <p:txBody>
-          <a:bodyPr wrap="square">
+          <a:bodyPr wrap="none">
             <a:spAutoFit/>
           </a:bodyPr>
           <a:lstStyle/>
           <a:p>
-            <a:pPr algn="l"/>
-            <a:r>
-              <a:rPr sz="1500" b="0" i="0">
-                <a:solidFill>
-                  <a:srgbClr val="26282B"/>
-                </a:solidFill>
+            <a:pPr algn="r"/>
+            <a:r>
+              <a:rPr sz="900" b="0" i="0">
+                <a:solidFill>
+                  <a:srgbClr val="6B727B"/>
+                </a:solidFill>
+                <a:latin typeface="Segoe UI"/>
               </a:rPr>
-              <a:t>•  Stimulation epochs: baseline, stimulation, washout, sized in trials</a:t>
-            </a:r>
-          </a:p>
-        </p:txBody>
-      </p:sp>
-      <p:sp>
-        <p:nvSpPr>
-          <p:cNvPr id="6" name="TextBox 5"/>
-          <p:cNvSpPr txBox="1"/>
-          <p:nvPr/>
-        </p:nvSpPr>
-        <p:spPr>
-          <a:xfrm>
-            <a:off x="640080" y="3337560"/>
-            <a:ext cx="10972800" cy="502920"/>
-          </a:xfrm>
-          <a:prstGeom prst="rect">
-            <a:avLst/>
-          </a:prstGeom>
-          <a:noFill/>
-        </p:spPr>
-        <p:txBody>
-          <a:bodyPr wrap="square">
-            <a:spAutoFit/>
-          </a:bodyPr>
-          <a:lstStyle/>
-          <a:p>
-            <a:pPr algn="l"/>
-            <a:r>
-              <a:rPr sz="1500" b="0" i="0">
-                <a:solidFill>
-                  <a:srgbClr val="26282B"/>
-                </a:solidFill>
-              </a:rPr>
-              <a:t>•  Every per-trial draw is seeded from the trial identity, so sessions replay identically</a:t>
-            </a:r>
-          </a:p>
-        </p:txBody>
-      </p:sp>
-      <p:sp>
-        <p:nvSpPr>
-          <p:cNvPr id="7" name="TextBox 6"/>
-          <p:cNvSpPr txBox="1"/>
-          <p:nvPr/>
-        </p:nvSpPr>
-        <p:spPr>
-          <a:xfrm>
-            <a:off x="640080" y="3840480"/>
-            <a:ext cx="10972800" cy="502920"/>
-          </a:xfrm>
-          <a:prstGeom prst="rect">
-            <a:avLst/>
-          </a:prstGeom>
-          <a:noFill/>
-        </p:spPr>
-        <p:txBody>
-          <a:bodyPr wrap="square">
-            <a:spAutoFit/>
-          </a:bodyPr>
-          <a:lstStyle/>
-          <a:p>
-            <a:pPr algn="l"/>
-            <a:r>
-              <a:rPr sz="1500" b="0" i="0">
-                <a:solidFill>
-                  <a:srgbClr val="26282B"/>
-                </a:solidFill>
-              </a:rPr>
-              <a:t>•  Protocols are edited in the application and versioned on disk</a:t>
-            </a:r>
-          </a:p>
-        </p:txBody>
-      </p:sp>
-      <p:sp>
-        <p:nvSpPr>
-          <p:cNvPr id="8" name="TextBox 7"/>
-          <p:cNvSpPr txBox="1"/>
-          <p:nvPr/>
-        </p:nvSpPr>
-        <p:spPr>
-          <a:xfrm>
-            <a:off x="640080" y="4489704"/>
-            <a:ext cx="10972800" cy="274320"/>
-          </a:xfrm>
-          <a:prstGeom prst="rect">
-            <a:avLst/>
-          </a:prstGeom>
-          <a:noFill/>
-        </p:spPr>
-        <p:txBody>
-          <a:bodyPr wrap="square">
-            <a:spAutoFit/>
-          </a:bodyPr>
-          <a:lstStyle/>
-          <a:p>
-            <a:pPr algn="l"/>
-            <a:r>
-              <a:rPr sz="1000" b="0" i="1">
-                <a:solidFill>
-                  <a:srgbClr val="7A7F87"/>
-                </a:solidFill>
-              </a:rPr>
-              <a:t>Where it came from</a:t>
-            </a:r>
-          </a:p>
-        </p:txBody>
-      </p:sp>
-      <p:sp>
-        <p:nvSpPr>
-          <p:cNvPr id="9" name="TextBox 8"/>
-          <p:cNvSpPr txBox="1"/>
-          <p:nvPr/>
-        </p:nvSpPr>
-        <p:spPr>
-          <a:xfrm>
-            <a:off x="640080" y="4800600"/>
-            <a:ext cx="3429000" cy="274320"/>
-          </a:xfrm>
-          <a:prstGeom prst="rect">
-            <a:avLst/>
-          </a:prstGeom>
-          <a:noFill/>
-        </p:spPr>
-        <p:txBody>
-          <a:bodyPr wrap="square">
-            <a:spAutoFit/>
-          </a:bodyPr>
-          <a:lstStyle/>
-          <a:p>
-            <a:pPr algn="l"/>
-            <a:r>
-              <a:rPr sz="1100" b="1" i="0">
-                <a:solidFill>
-                  <a:srgbClr val="6B7F9E"/>
-                </a:solidFill>
-              </a:rPr>
-              <a:t>reach-training</a:t>
-            </a:r>
-          </a:p>
-        </p:txBody>
-      </p:sp>
-      <p:sp>
-        <p:nvSpPr>
-          <p:cNvPr id="10" name="TextBox 9"/>
-          <p:cNvSpPr txBox="1"/>
-          <p:nvPr/>
-        </p:nvSpPr>
-        <p:spPr>
-          <a:xfrm>
-            <a:off x="640080" y="5093208"/>
-            <a:ext cx="3429000" cy="1280160"/>
-          </a:xfrm>
-          <a:prstGeom prst="rect">
-            <a:avLst/>
-          </a:prstGeom>
-          <a:noFill/>
-        </p:spPr>
-        <p:txBody>
-          <a:bodyPr wrap="square">
-            <a:spAutoFit/>
-          </a:bodyPr>
-          <a:lstStyle/>
-          <a:p>
-            <a:pPr algn="l"/>
-            <a:r>
-              <a:rPr sz="1000" b="0" i="0">
-                <a:solidFill>
-                  <a:srgbClr val="26282B"/>
-                </a:solidFill>
-              </a:rPr>
-              <a:t>Fixed protocols in scripts, delays drawn live at runtime</a:t>
-            </a:r>
-          </a:p>
-        </p:txBody>
-      </p:sp>
-      <p:sp>
-        <p:nvSpPr>
-          <p:cNvPr id="11" name="TextBox 10"/>
-          <p:cNvSpPr txBox="1"/>
-          <p:nvPr/>
-        </p:nvSpPr>
-        <p:spPr>
-          <a:xfrm>
-            <a:off x="4343400" y="4800600"/>
-            <a:ext cx="3429000" cy="274320"/>
-          </a:xfrm>
-          <a:prstGeom prst="rect">
-            <a:avLst/>
-          </a:prstGeom>
-          <a:noFill/>
-        </p:spPr>
-        <p:txBody>
-          <a:bodyPr wrap="square">
-            <a:spAutoFit/>
-          </a:bodyPr>
-          <a:lstStyle/>
-          <a:p>
-            <a:pPr algn="l"/>
-            <a:r>
-              <a:rPr sz="1100" b="1" i="0">
-                <a:solidFill>
-                  <a:srgbClr val="4A8C7A"/>
-                </a:solidFill>
-              </a:rPr>
-              <a:t>auto-trainer</a:t>
-            </a:r>
-          </a:p>
-        </p:txBody>
-      </p:sp>
-      <p:sp>
-        <p:nvSpPr>
-          <p:cNvPr id="12" name="TextBox 11"/>
-          <p:cNvSpPr txBox="1"/>
-          <p:nvPr/>
-        </p:nvSpPr>
-        <p:spPr>
-          <a:xfrm>
-            <a:off x="4343400" y="5093208"/>
-            <a:ext cx="3429000" cy="1280160"/>
-          </a:xfrm>
-          <a:prstGeom prst="rect">
-            <a:avLst/>
-          </a:prstGeom>
-          <a:noFill/>
-        </p:spPr>
-        <p:txBody>
-          <a:bodyPr wrap="square">
-            <a:spAutoFit/>
-          </a:bodyPr>
-          <a:lstStyle/>
-          <a:p>
-            <a:pPr algn="l"/>
-            <a:r>
-              <a:rPr sz="1000" b="0" i="0">
-                <a:solidFill>
-                  <a:srgbClr val="26282B"/>
-                </a:solidFill>
-              </a:rPr>
-              <a:t>A training plan and phase structure</a:t>
-            </a:r>
-          </a:p>
-        </p:txBody>
-      </p:sp>
-      <p:sp>
-        <p:nvSpPr>
-          <p:cNvPr id="13" name="TextBox 12"/>
-          <p:cNvSpPr txBox="1"/>
-          <p:nvPr/>
-        </p:nvSpPr>
-        <p:spPr>
-          <a:xfrm>
-            <a:off x="8046720" y="4800600"/>
-            <a:ext cx="3429000" cy="274320"/>
-          </a:xfrm>
-          <a:prstGeom prst="rect">
-            <a:avLst/>
-          </a:prstGeom>
-          <a:noFill/>
-        </p:spPr>
-        <p:txBody>
-          <a:bodyPr wrap="square">
-            <a:spAutoFit/>
-          </a:bodyPr>
-          <a:lstStyle/>
-          <a:p>
-            <a:pPr algn="l"/>
-            <a:r>
-              <a:rPr sz="1100" b="1" i="0">
-                <a:solidFill>
-                  <a:srgbClr val="B3593F"/>
-                </a:solidFill>
-              </a:rPr>
-              <a:t>reachAQ</a:t>
-            </a:r>
-          </a:p>
-        </p:txBody>
-      </p:sp>
-      <p:sp>
-        <p:nvSpPr>
-          <p:cNvPr id="14" name="TextBox 13"/>
-          <p:cNvSpPr txBox="1"/>
-          <p:nvPr/>
-        </p:nvSpPr>
-        <p:spPr>
-          <a:xfrm>
-            <a:off x="8046720" y="5093208"/>
-            <a:ext cx="3429000" cy="1280160"/>
-          </a:xfrm>
-          <a:prstGeom prst="rect">
-            <a:avLst/>
-          </a:prstGeom>
-          <a:noFill/>
-        </p:spPr>
-        <p:txBody>
-          <a:bodyPr wrap="square">
-            <a:spAutoFit/>
-          </a:bodyPr>
-          <a:lstStyle/>
-          <a:p>
-            <a:pPr algn="l"/>
-            <a:r>
-              <a:rPr sz="1000" b="0" i="0">
-                <a:solidFill>
-                  <a:srgbClr val="26282B"/>
-                </a:solidFill>
-              </a:rPr>
-              <a:t>A protocol table with cue pairs and trigger profiles, published delay distributions, stimulation epochs, and an inter-trial timing target</a:t>
+              <a:t>9</a:t>
             </a:r>
           </a:p>
         </p:txBody>

--- a/docs/presentation/reachAQ-overview.pptx
+++ b/docs/presentation/reachAQ-overview.pptx
@@ -14,6 +14,11 @@
     <p:sldId id="262" r:id="rId14"/>
     <p:sldId id="263" r:id="rId15"/>
     <p:sldId id="264" r:id="rId16"/>
+    <p:sldId id="265" r:id="rId17"/>
+    <p:sldId id="266" r:id="rId18"/>
+    <p:sldId id="267" r:id="rId19"/>
+    <p:sldId id="268" r:id="rId20"/>
+    <p:sldId id="269" r:id="rId21"/>
   </p:sldIdLst>
   <p:sldSz cx="12191695" cy="6858000" type="screen4x3"/>
   <p:notesSz cx="6858000" cy="9144000"/>
@@ -510,7 +515,287 @@
           <a:lstStyle/>
           <a:p>
             <a:r>
-              <a:t>Keep this at the level of what the operator notices. The detail is on the slides that follow. The single sentence worth landing: reach-training watched and recorded, reachAQ decides and acts inside the same reach.</a:t>
+              <a:t>Keep this at the level of what the operator notices. The one sentence worth landing: reach-training watched and recorded, reachAQ decides and acts inside the same reach.</a:t>
+            </a:r>
+          </a:p>
+        </p:txBody>
+      </p:sp>
+      <p:sp>
+        <p:nvSpPr>
+          <p:cNvPr id="4" name="Slide Number Placeholder 3"/>
+          <p:cNvSpPr>
+            <a:spLocks noGrp="1"/>
+          </p:cNvSpPr>
+          <p:nvPr>
+            <p:ph type="sldNum" idx="5" sz="quarter"/>
+          </p:nvPr>
+        </p:nvSpPr>
+        <p:spPr/>
+      </p:sp>
+    </p:spTree>
+  </p:cSld>
+  <p:clrMapOvr>
+    <a:masterClrMapping/>
+  </p:clrMapOvr>
+</p:notes>
+</file>
+
+<file path=ppt/notesSlides/notesSlide10.xml><?xml version="1.0" encoding="utf-8"?>
+<p:notes xmlns:a="http://schemas.openxmlformats.org/drawingml/2006/main" xmlns:p="http://schemas.openxmlformats.org/presentationml/2006/main" xmlns:r="http://schemas.openxmlformats.org/officeDocument/2006/relationships">
+  <p:cSld>
+    <p:spTree>
+      <p:nvGrpSpPr>
+        <p:cNvPr id="1" name=""/>
+        <p:cNvGrpSpPr/>
+        <p:nvPr/>
+      </p:nvGrpSpPr>
+      <p:grpSpPr>
+        <a:xfrm>
+          <a:off x="0" y="0"/>
+          <a:ext cx="0" cy="0"/>
+          <a:chOff x="0" y="0"/>
+          <a:chExt cx="0" cy="0"/>
+        </a:xfrm>
+      </p:grpSpPr>
+      <p:sp>
+        <p:nvSpPr>
+          <p:cNvPr id="2" name="Slide Image Placeholder 1"/>
+          <p:cNvSpPr>
+            <a:spLocks noGrp="1"/>
+          </p:cNvSpPr>
+          <p:nvPr>
+            <p:ph type="sldImg" idx="2"/>
+          </p:nvPr>
+        </p:nvSpPr>
+        <p:spPr/>
+      </p:sp>
+      <p:sp>
+        <p:nvSpPr>
+          <p:cNvPr id="3" name="Notes Placeholder 2"/>
+          <p:cNvSpPr>
+            <a:spLocks noGrp="1"/>
+          </p:cNvSpPr>
+          <p:nvPr>
+            <p:ph type="body" idx="3" sz="quarter"/>
+          </p:nvPr>
+        </p:nvSpPr>
+        <p:spPr/>
+        <p:txBody>
+          <a:bodyPr/>
+          <a:lstStyle/>
+          <a:p>
+            <a:r>
+              <a:t>Four sync modes: auto, backplane, external, independent. Compatible PXI cards share PXI_CLK10, a backplane start trigger and a routed master sample clock. Devices resolve by product and serial, so a changed NI-DAQmx alias never silently rebinds to the wrong card. Tone confirmation cross-checks commanded tones against the pulses actually observed.</a:t>
+            </a:r>
+          </a:p>
+        </p:txBody>
+      </p:sp>
+      <p:sp>
+        <p:nvSpPr>
+          <p:cNvPr id="4" name="Slide Number Placeholder 3"/>
+          <p:cNvSpPr>
+            <a:spLocks noGrp="1"/>
+          </p:cNvSpPr>
+          <p:nvPr>
+            <p:ph type="sldNum" idx="5" sz="quarter"/>
+          </p:nvPr>
+        </p:nvSpPr>
+        <p:spPr/>
+      </p:sp>
+    </p:spTree>
+  </p:cSld>
+  <p:clrMapOvr>
+    <a:masterClrMapping/>
+  </p:clrMapOvr>
+</p:notes>
+</file>
+
+<file path=ppt/notesSlides/notesSlide11.xml><?xml version="1.0" encoding="utf-8"?>
+<p:notes xmlns:a="http://schemas.openxmlformats.org/drawingml/2006/main" xmlns:p="http://schemas.openxmlformats.org/presentationml/2006/main" xmlns:r="http://schemas.openxmlformats.org/officeDocument/2006/relationships">
+  <p:cSld>
+    <p:spTree>
+      <p:nvGrpSpPr>
+        <p:cNvPr id="1" name=""/>
+        <p:cNvGrpSpPr/>
+        <p:nvPr/>
+      </p:nvGrpSpPr>
+      <p:grpSpPr>
+        <a:xfrm>
+          <a:off x="0" y="0"/>
+          <a:ext cx="0" cy="0"/>
+          <a:chOff x="0" y="0"/>
+          <a:chExt cx="0" cy="0"/>
+        </a:xfrm>
+      </p:grpSpPr>
+      <p:sp>
+        <p:nvSpPr>
+          <p:cNvPr id="2" name="Slide Image Placeholder 1"/>
+          <p:cNvSpPr>
+            <a:spLocks noGrp="1"/>
+          </p:cNvSpPr>
+          <p:nvPr>
+            <p:ph type="sldImg" idx="2"/>
+          </p:nvPr>
+        </p:nvSpPr>
+        <p:spPr/>
+      </p:sp>
+      <p:sp>
+        <p:nvSpPr>
+          <p:cNvPr id="3" name="Notes Placeholder 2"/>
+          <p:cNvSpPr>
+            <a:spLocks noGrp="1"/>
+          </p:cNvSpPr>
+          <p:nvPr>
+            <p:ph type="body" idx="3" sz="quarter"/>
+          </p:nvPr>
+        </p:nvSpPr>
+        <p:spPr/>
+        <p:txBody>
+          <a:bodyPr/>
+          <a:lstStyle/>
+          <a:p>
+            <a:r>
+              <a:t>The point for a new user is that this replaces post-hoc plotting. A decimated FSR trace is useless for behavioural analysis, so samples are forwarded unthrottled and an armed session gains roughly 166 rows a second. Worth flagging out loud: there is no microphone channel in the system today.</a:t>
+            </a:r>
+          </a:p>
+        </p:txBody>
+      </p:sp>
+      <p:sp>
+        <p:nvSpPr>
+          <p:cNvPr id="4" name="Slide Number Placeholder 3"/>
+          <p:cNvSpPr>
+            <a:spLocks noGrp="1"/>
+          </p:cNvSpPr>
+          <p:nvPr>
+            <p:ph type="sldNum" idx="5" sz="quarter"/>
+          </p:nvPr>
+        </p:nvSpPr>
+        <p:spPr/>
+      </p:sp>
+    </p:spTree>
+  </p:cSld>
+  <p:clrMapOvr>
+    <a:masterClrMapping/>
+  </p:clrMapOvr>
+</p:notes>
+</file>
+
+<file path=ppt/notesSlides/notesSlide12.xml><?xml version="1.0" encoding="utf-8"?>
+<p:notes xmlns:a="http://schemas.openxmlformats.org/drawingml/2006/main" xmlns:p="http://schemas.openxmlformats.org/presentationml/2006/main" xmlns:r="http://schemas.openxmlformats.org/officeDocument/2006/relationships">
+  <p:cSld>
+    <p:spTree>
+      <p:nvGrpSpPr>
+        <p:cNvPr id="1" name=""/>
+        <p:cNvGrpSpPr/>
+        <p:nvPr/>
+      </p:nvGrpSpPr>
+      <p:grpSpPr>
+        <a:xfrm>
+          <a:off x="0" y="0"/>
+          <a:ext cx="0" cy="0"/>
+          <a:chOff x="0" y="0"/>
+          <a:chExt cx="0" cy="0"/>
+        </a:xfrm>
+      </p:grpSpPr>
+      <p:sp>
+        <p:nvSpPr>
+          <p:cNvPr id="2" name="Slide Image Placeholder 1"/>
+          <p:cNvSpPr>
+            <a:spLocks noGrp="1"/>
+          </p:cNvSpPr>
+          <p:nvPr>
+            <p:ph type="sldImg" idx="2"/>
+          </p:nvPr>
+        </p:nvSpPr>
+        <p:spPr/>
+      </p:sp>
+      <p:sp>
+        <p:nvSpPr>
+          <p:cNvPr id="3" name="Notes Placeholder 2"/>
+          <p:cNvSpPr>
+            <a:spLocks noGrp="1"/>
+          </p:cNvSpPr>
+          <p:nvPr>
+            <p:ph type="body" idx="3" sz="quarter"/>
+          </p:nvPr>
+        </p:nvSpPr>
+        <p:spPr/>
+        <p:txBody>
+          <a:bodyPr/>
+          <a:lstStyle/>
+          <a:p>
+            <a:r>
+              <a:t>The pinning behaviour is the part worth dwelling on. It is what stops an edit to a shared phase from quietly changing an experiment that was already validated.</a:t>
+            </a:r>
+          </a:p>
+        </p:txBody>
+      </p:sp>
+      <p:sp>
+        <p:nvSpPr>
+          <p:cNvPr id="4" name="Slide Number Placeholder 3"/>
+          <p:cNvSpPr>
+            <a:spLocks noGrp="1"/>
+          </p:cNvSpPr>
+          <p:nvPr>
+            <p:ph type="sldNum" idx="5" sz="quarter"/>
+          </p:nvPr>
+        </p:nvSpPr>
+        <p:spPr/>
+      </p:sp>
+    </p:spTree>
+  </p:cSld>
+  <p:clrMapOvr>
+    <a:masterClrMapping/>
+  </p:clrMapOvr>
+</p:notes>
+</file>
+
+<file path=ppt/notesSlides/notesSlide13.xml><?xml version="1.0" encoding="utf-8"?>
+<p:notes xmlns:a="http://schemas.openxmlformats.org/drawingml/2006/main" xmlns:p="http://schemas.openxmlformats.org/presentationml/2006/main" xmlns:r="http://schemas.openxmlformats.org/officeDocument/2006/relationships">
+  <p:cSld>
+    <p:spTree>
+      <p:nvGrpSpPr>
+        <p:cNvPr id="1" name=""/>
+        <p:cNvGrpSpPr/>
+        <p:nvPr/>
+      </p:nvGrpSpPr>
+      <p:grpSpPr>
+        <a:xfrm>
+          <a:off x="0" y="0"/>
+          <a:ext cx="0" cy="0"/>
+          <a:chOff x="0" y="0"/>
+          <a:chExt cx="0" cy="0"/>
+        </a:xfrm>
+      </p:grpSpPr>
+      <p:sp>
+        <p:nvSpPr>
+          <p:cNvPr id="2" name="Slide Image Placeholder 1"/>
+          <p:cNvSpPr>
+            <a:spLocks noGrp="1"/>
+          </p:cNvSpPr>
+          <p:nvPr>
+            <p:ph type="sldImg" idx="2"/>
+          </p:nvPr>
+        </p:nvSpPr>
+        <p:spPr/>
+      </p:sp>
+      <p:sp>
+        <p:nvSpPr>
+          <p:cNvPr id="3" name="Notes Placeholder 2"/>
+          <p:cNvSpPr>
+            <a:spLocks noGrp="1"/>
+          </p:cNvSpPr>
+          <p:nvPr>
+            <p:ph type="body" idx="3" sz="quarter"/>
+          </p:nvPr>
+        </p:nvSpPr>
+        <p:spPr/>
+        <p:txBody>
+          <a:bodyPr/>
+          <a:lstStyle/>
+          <a:p>
+            <a:r>
+              <a:t>Run order — launch with --demo or toggle Tools &gt; Demo Mode while idle; show both camera panels carrying their own overlay; show the NI-DAQ signal stream; drive the pellet device by hand; open the protocol editor and the experiment sidebar; start a recording and let trials run; stop and show the session directory with its DEMO marker. Point at the red banner — it is there so nobody mistakes a demo session for data.</a:t>
             </a:r>
           </a:p>
         </p:txBody>
@@ -580,7 +865,7 @@
           <a:lstStyle/>
           <a:p>
             <a:r>
-              <a:t>Say plainly that we did not start over. reachAQ changed the hardware target, added stimulation and signal visualisation, and put pose in the control loop. Everything underneath it is auto-trainer's design.</a:t>
+              <a:t>Say plainly that we did not start over. reachAQ changed the hardware target, added stimulation and signal visualisation, and made the pose stream fast enough to act on. Everything underneath is auto-trainer's design.</a:t>
             </a:r>
           </a:p>
         </p:txBody>
@@ -650,7 +935,7 @@
           <a:lstStyle/>
           <a:p>
             <a:r>
-              <a:t>The numbers that matter: under 16 competing processes, SCHED_OTHER reaches 6.05 ms max and misses 13 deadlines; SCHED_FIFO holds p99 at 0.059 ms and max at 0.155 ms with zero misses, and restores the full 900 Hz cadence. That is roughly 32x headroom under a load harsher than real acquisition. Worth stating: a PREEMPT_RT kernel is not required. Stock Linux already preempts SCHED_OTHER for SCHED_FIFO.</a:t>
+              <a:t>This slide exists so the numbers later have something to be measured against. Do not let 5 ms drift into sounding like an average — it is the tail figure the loop is designed to hold.</a:t>
             </a:r>
           </a:p>
         </p:txBody>
@@ -720,7 +1005,7 @@
           <a:lstStyle/>
           <a:p>
             <a:r>
-              <a:t>This is the measurement that makes pose-driven gating viable at all. At ~11 ms p99 the behaviour loop has room inside a 150 FPS frame budget. It also shows why the install script sets the governor: the default cost more than half the win.</a:t>
+              <a:t>This is the organising idea of the whole section. The payoff for a user is that there are now two closed loops available — the fast ROI reflex, and machine vision on the pose stream — rather than one compromise between them.</a:t>
             </a:r>
           </a:p>
         </p:txBody>
@@ -790,7 +1075,7 @@
           <a:lstStyle/>
           <a:p>
             <a:r>
-              <a:t>Four sync modes: auto, backplane, external, independent. Compatible PXI cards share PXI_CLK10, a backplane start trigger and a routed master sample clock. Devices resolve by product and serial, so a changed NI-DAQmx alias never silently rebinds to the wrong card. Tone confirmation cross-checks commanded tones against the pulses actually observed.</a:t>
+              <a:t>Adopted: SCHED_FIFO plus the performance CPU governor. Both a PREEMPT_RT kernel and core pinning were measured and declined — stock Linux already preempts SCHED_OTHER for SCHED_FIFO, and the result leaves roughly 32x headroom under a load harsher than real acquisition.</a:t>
             </a:r>
           </a:p>
         </p:txBody>
@@ -860,7 +1145,7 @@
           <a:lstStyle/>
           <a:p>
             <a:r>
-              <a:t>The point for a new user is that this replaces post-hoc plotting. A decimated FSR trace is useless for behavioural analysis, so samples are forwarded unthrottled and an armed session gains roughly 166 rows a second. Worth flagging out loud: there is no microphone channel in the system today.</a:t>
+              <a:t>Partial batch — running the 2 real frames instead of a padded 6 — took 54.8 to 25.3 ms, and needs the PyTorch engine because the TensorFlow graph fixes its batch size. The decode rewrite, argmax instead of sort with cached column indices and numpy instead of pandas, is always on and model-independent. Also gated: an ROI crop from 256 to 128 px, worth about 2.6x on the forward pass, and a lean predict path worth about 1.2 ms per call. CUDA-graph capture, 7.4 to 3.6 ms, is YOLO-backend only. The engine migration to PyTorch is roughly neutral like-for-like — its value is unlocking newer GPUs, dynamic batching and everything above it.</a:t>
             </a:r>
           </a:p>
         </p:txBody>
@@ -930,7 +1215,7 @@
           <a:lstStyle/>
           <a:p>
             <a:r>
-              <a:t>The pinning behaviour is the part worth dwelling on. It is what stops an edit to a shared phase from quietly changing an experiment that was already validated.</a:t>
+              <a:t>Worth pairing with the Tier 1 slide — the governor is one of the two always-on system settings, alongside real-time scheduling.</a:t>
             </a:r>
           </a:p>
         </p:txBody>
@@ -1000,7 +1285,77 @@
           <a:lstStyle/>
           <a:p>
             <a:r>
-              <a:t>Run order — launch with --demo or toggle Tools &gt; Demo Mode while idle; show both camera panels carrying their own overlay; show the NI-DAQ signal stream; drive the pellet device by hand; open the protocol editor and the experiment sidebar; start a recording and let trials run; stop and show the session directory with its DEMO marker. Point at the red banner — it is there so nobody mistakes a demo session for data.</a:t>
+              <a:t>This is the correctness property, not a speedup, and it is what makes "pose runs below camera rate" an accepted design point rather than a hazard. Worth saying out loud for an audience that will otherwise assume a slow model drops data.</a:t>
+            </a:r>
+          </a:p>
+        </p:txBody>
+      </p:sp>
+      <p:sp>
+        <p:nvSpPr>
+          <p:cNvPr id="4" name="Slide Number Placeholder 3"/>
+          <p:cNvSpPr>
+            <a:spLocks noGrp="1"/>
+          </p:cNvSpPr>
+          <p:nvPr>
+            <p:ph type="sldNum" idx="5" sz="quarter"/>
+          </p:nvPr>
+        </p:nvSpPr>
+        <p:spPr/>
+      </p:sp>
+    </p:spTree>
+  </p:cSld>
+  <p:clrMapOvr>
+    <a:masterClrMapping/>
+  </p:clrMapOvr>
+</p:notes>
+</file>
+
+<file path=ppt/notesSlides/notesSlide9.xml><?xml version="1.0" encoding="utf-8"?>
+<p:notes xmlns:a="http://schemas.openxmlformats.org/drawingml/2006/main" xmlns:p="http://schemas.openxmlformats.org/presentationml/2006/main" xmlns:r="http://schemas.openxmlformats.org/officeDocument/2006/relationships">
+  <p:cSld>
+    <p:spTree>
+      <p:nvGrpSpPr>
+        <p:cNvPr id="1" name=""/>
+        <p:cNvGrpSpPr/>
+        <p:nvPr/>
+      </p:nvGrpSpPr>
+      <p:grpSpPr>
+        <a:xfrm>
+          <a:off x="0" y="0"/>
+          <a:ext cx="0" cy="0"/>
+          <a:chOff x="0" y="0"/>
+          <a:chExt cx="0" cy="0"/>
+        </a:xfrm>
+      </p:grpSpPr>
+      <p:sp>
+        <p:nvSpPr>
+          <p:cNvPr id="2" name="Slide Image Placeholder 1"/>
+          <p:cNvSpPr>
+            <a:spLocks noGrp="1"/>
+          </p:cNvSpPr>
+          <p:nvPr>
+            <p:ph type="sldImg" idx="2"/>
+          </p:nvPr>
+        </p:nvSpPr>
+        <p:spPr/>
+      </p:sp>
+      <p:sp>
+        <p:nvSpPr>
+          <p:cNvPr id="3" name="Notes Placeholder 2"/>
+          <p:cNvSpPr>
+            <a:spLocks noGrp="1"/>
+          </p:cNvSpPr>
+          <p:nvPr>
+            <p:ph type="body" idx="3" sz="quarter"/>
+          </p:nvPr>
+        </p:nvSpPr>
+        <p:spPr/>
+        <p:txBody>
+          <a:bodyPr/>
+          <a:lstStyle/>
+          <a:p>
+            <a:r>
+              <a:t>This slide is for the technical audience. If asked about INT8 — it could pay on Turing's DP4A, the route tried produced a broken engine, and the correct route is identified but not done. Figures throughout are rig measurements on this hardware; they are not claims about other cards.</a:t>
             </a:r>
           </a:p>
         </p:txBody>
@@ -4124,6 +4479,1433 @@
 </p:sld>
 </file>
 
+<file path=ppt/slides/slide10.xml><?xml version="1.0" encoding="utf-8"?>
+<p:sld xmlns:a="http://schemas.openxmlformats.org/drawingml/2006/main" xmlns:p="http://schemas.openxmlformats.org/presentationml/2006/main" xmlns:r="http://schemas.openxmlformats.org/officeDocument/2006/relationships">
+  <p:cSld>
+    <p:spTree>
+      <p:nvGrpSpPr>
+        <p:cNvPr id="1" name=""/>
+        <p:cNvGrpSpPr/>
+        <p:nvPr/>
+      </p:nvGrpSpPr>
+      <p:grpSpPr/>
+      <p:sp>
+        <p:nvSpPr>
+          <p:cNvPr id="2" name="Title 1"/>
+          <p:cNvSpPr>
+            <a:spLocks noGrp="1"/>
+          </p:cNvSpPr>
+          <p:nvPr>
+            <p:ph type="title"/>
+          </p:nvPr>
+        </p:nvSpPr>
+        <p:spPr>
+          <a:xfrm>
+            <a:off x="658368" y="457200"/>
+            <a:ext cx="10874959" cy="868680"/>
+          </a:xfrm>
+        </p:spPr>
+        <p:txBody>
+          <a:bodyPr wrap="square"/>
+          <a:lstStyle/>
+          <a:p>
+            <a:pPr algn="l"/>
+            <a:r>
+              <a:rPr sz="3000" b="1" i="0">
+                <a:solidFill>
+                  <a:srgbClr val="1E242B"/>
+                </a:solidFill>
+                <a:latin typeface="Segoe UI"/>
+              </a:rPr>
+              <a:t>Benchmarked, and not taken</a:t>
+            </a:r>
+          </a:p>
+        </p:txBody>
+      </p:sp>
+      <p:sp>
+        <p:nvSpPr>
+          <p:cNvPr id="3" name="Content Placeholder 2"/>
+          <p:cNvSpPr>
+            <a:spLocks noGrp="1"/>
+          </p:cNvSpPr>
+          <p:nvPr>
+            <p:ph idx="1"/>
+          </p:nvPr>
+        </p:nvSpPr>
+        <p:spPr>
+          <a:xfrm>
+            <a:off x="658368" y="2057400"/>
+            <a:ext cx="10874959" cy="4023360"/>
+          </a:xfrm>
+        </p:spPr>
+        <p:txBody>
+          <a:bodyPr wrap="square"/>
+          <a:lstStyle/>
+          <a:p>
+            <a:pPr>
+              <a:spcAft>
+                <a:spcPts val="1300"/>
+              </a:spcAft>
+            </a:pPr>
+            <a:r>
+              <a:rPr sz="1500" b="0" i="0">
+                <a:solidFill>
+                  <a:srgbClr val="1E242B"/>
+                </a:solidFill>
+                <a:latin typeface="Segoe UI"/>
+              </a:rPr>
+              <a:t>fp16 / mixed precision — 3 to 4x slower on this card. The T1000 has no tensor cores, so the default stays fp32</a:t>
+            </a:r>
+          </a:p>
+          <a:p>
+            <a:pPr>
+              <a:spcAft>
+                <a:spcPts val="1300"/>
+              </a:spcAft>
+            </a:pPr>
+            <a:r>
+              <a:rPr sz="1500" b="0" i="0">
+                <a:solidFill>
+                  <a:srgbClr val="1E242B"/>
+                </a:solidFill>
+                <a:latin typeface="Segoe UI"/>
+              </a:rPr>
+              <a:t>torch.compile — about 0.99x, and slower on the larger model</a:t>
+            </a:r>
+          </a:p>
+          <a:p>
+            <a:pPr>
+              <a:spcAft>
+                <a:spcPts val="1300"/>
+              </a:spcAft>
+            </a:pPr>
+            <a:r>
+              <a:rPr sz="1500" b="0" i="0">
+                <a:solidFill>
+                  <a:srgbClr val="1E242B"/>
+                </a:solidFill>
+                <a:latin typeface="Segoe UI"/>
+              </a:rPr>
+              <a:t>ONNX Runtime on CUDA — matches PyTorch at 0.99x</a:t>
+            </a:r>
+          </a:p>
+          <a:p>
+            <a:pPr>
+              <a:spcAft>
+                <a:spcPts val="1300"/>
+              </a:spcAft>
+            </a:pPr>
+            <a:r>
+              <a:rPr sz="1500" b="0" i="0">
+                <a:solidFill>
+                  <a:srgbClr val="1E242B"/>
+                </a:solidFill>
+                <a:latin typeface="Segoe UI"/>
+              </a:rPr>
+              <a:t>TensorRT — a real 1.30 to 1.36x, the only external-runtime win, rejected on cost: per-model export, per-card engine builds, 6.4 GB of libraries, a second inference path and a CUDA-version reconciliation</a:t>
+            </a:r>
+          </a:p>
+          <a:p>
+            <a:pPr>
+              <a:spcAft>
+                <a:spcPts val="1300"/>
+              </a:spcAft>
+            </a:pPr>
+            <a:r>
+              <a:rPr sz="1500" b="0" i="0">
+                <a:solidFill>
+                  <a:srgbClr val="1E242B"/>
+                </a:solidFill>
+                <a:latin typeface="Segoe UI"/>
+              </a:rPr>
+              <a:t>The honest summary: the speed came from removing our own overhead and picking the right architecture, not from a magic runtime</a:t>
+            </a:r>
+          </a:p>
+        </p:txBody>
+      </p:sp>
+      <p:sp>
+        <p:nvSpPr>
+          <p:cNvPr id="4" name="Rectangle 3"/>
+          <p:cNvSpPr/>
+          <p:nvPr/>
+        </p:nvSpPr>
+        <p:spPr>
+          <a:xfrm>
+            <a:off x="658368" y="1170432"/>
+            <a:ext cx="1005840" cy="38100"/>
+          </a:xfrm>
+          <a:prstGeom prst="rect">
+            <a:avLst/>
+          </a:prstGeom>
+          <a:solidFill>
+            <a:srgbClr val="B3593F"/>
+          </a:solidFill>
+          <a:ln>
+            <a:noFill/>
+          </a:ln>
+          <a:effectLst/>
+        </p:spPr>
+        <p:style>
+          <a:lnRef idx="1">
+            <a:schemeClr val="accent1"/>
+          </a:lnRef>
+          <a:fillRef idx="3">
+            <a:schemeClr val="accent1"/>
+          </a:fillRef>
+          <a:effectRef idx="2">
+            <a:schemeClr val="accent1"/>
+          </a:effectRef>
+          <a:fontRef idx="minor">
+            <a:schemeClr val="lt1"/>
+          </a:fontRef>
+        </p:style>
+        <p:txBody>
+          <a:bodyPr rtlCol="0" anchor="ctr"/>
+          <a:lstStyle/>
+          <a:p>
+            <a:pPr algn="ctr"/>
+          </a:p>
+        </p:txBody>
+      </p:sp>
+      <p:sp>
+        <p:nvSpPr>
+          <p:cNvPr id="5" name="TextBox 4"/>
+          <p:cNvSpPr txBox="1"/>
+          <p:nvPr/>
+        </p:nvSpPr>
+        <p:spPr>
+          <a:xfrm>
+            <a:off x="658368" y="1371600"/>
+            <a:ext cx="10874959" cy="457200"/>
+          </a:xfrm>
+          <a:prstGeom prst="rect">
+            <a:avLst/>
+          </a:prstGeom>
+          <a:noFill/>
+        </p:spPr>
+        <p:txBody>
+          <a:bodyPr wrap="square">
+            <a:spAutoFit/>
+          </a:bodyPr>
+          <a:lstStyle/>
+          <a:p>
+            <a:r>
+              <a:rPr sz="1400" b="0" i="1">
+                <a:solidFill>
+                  <a:srgbClr val="6B727B"/>
+                </a:solidFill>
+                <a:latin typeface="Segoe UI"/>
+              </a:rPr>
+              <a:t>Every acceleration knob was measured on the rig. Several gave nothing here.</a:t>
+            </a:r>
+          </a:p>
+        </p:txBody>
+      </p:sp>
+      <p:sp>
+        <p:nvSpPr>
+          <p:cNvPr id="6" name="TextBox 5"/>
+          <p:cNvSpPr txBox="1"/>
+          <p:nvPr/>
+        </p:nvSpPr>
+        <p:spPr>
+          <a:xfrm>
+            <a:off x="658368" y="6382512"/>
+            <a:ext cx="10874959" cy="292608"/>
+          </a:xfrm>
+          <a:prstGeom prst="rect">
+            <a:avLst/>
+          </a:prstGeom>
+          <a:noFill/>
+        </p:spPr>
+        <p:txBody>
+          <a:bodyPr wrap="none">
+            <a:spAutoFit/>
+          </a:bodyPr>
+          <a:lstStyle/>
+          <a:p>
+            <a:r>
+              <a:rPr sz="900" b="0" i="0">
+                <a:solidFill>
+                  <a:srgbClr val="6B727B"/>
+                </a:solidFill>
+                <a:latin typeface="Segoe UI"/>
+              </a:rPr>
+              <a:t>reachAQ</a:t>
+            </a:r>
+          </a:p>
+        </p:txBody>
+      </p:sp>
+      <p:sp>
+        <p:nvSpPr>
+          <p:cNvPr id="7" name="TextBox 6"/>
+          <p:cNvSpPr txBox="1"/>
+          <p:nvPr/>
+        </p:nvSpPr>
+        <p:spPr>
+          <a:xfrm>
+            <a:off x="10893247" y="6382512"/>
+            <a:ext cx="640080" cy="292608"/>
+          </a:xfrm>
+          <a:prstGeom prst="rect">
+            <a:avLst/>
+          </a:prstGeom>
+          <a:noFill/>
+        </p:spPr>
+        <p:txBody>
+          <a:bodyPr wrap="none">
+            <a:spAutoFit/>
+          </a:bodyPr>
+          <a:lstStyle/>
+          <a:p>
+            <a:pPr algn="r"/>
+            <a:r>
+              <a:rPr sz="900" b="0" i="0">
+                <a:solidFill>
+                  <a:srgbClr val="6B727B"/>
+                </a:solidFill>
+                <a:latin typeface="Segoe UI"/>
+              </a:rPr>
+              <a:t>10</a:t>
+            </a:r>
+          </a:p>
+        </p:txBody>
+      </p:sp>
+    </p:spTree>
+  </p:cSld>
+  <p:clrMapOvr>
+    <a:masterClrMapping/>
+  </p:clrMapOvr>
+</p:sld>
+</file>
+
+<file path=ppt/slides/slide11.xml><?xml version="1.0" encoding="utf-8"?>
+<p:sld xmlns:a="http://schemas.openxmlformats.org/drawingml/2006/main" xmlns:p="http://schemas.openxmlformats.org/presentationml/2006/main" xmlns:r="http://schemas.openxmlformats.org/officeDocument/2006/relationships">
+  <p:cSld>
+    <p:spTree>
+      <p:nvGrpSpPr>
+        <p:cNvPr id="1" name=""/>
+        <p:cNvGrpSpPr/>
+        <p:nvPr/>
+      </p:nvGrpSpPr>
+      <p:grpSpPr/>
+      <p:sp>
+        <p:nvSpPr>
+          <p:cNvPr id="2" name="Title 1"/>
+          <p:cNvSpPr>
+            <a:spLocks noGrp="1"/>
+          </p:cNvSpPr>
+          <p:nvPr>
+            <p:ph type="title"/>
+          </p:nvPr>
+        </p:nvSpPr>
+        <p:spPr>
+          <a:xfrm>
+            <a:off x="658368" y="457200"/>
+            <a:ext cx="10874959" cy="868680"/>
+          </a:xfrm>
+        </p:spPr>
+        <p:txBody>
+          <a:bodyPr wrap="square"/>
+          <a:lstStyle/>
+          <a:p>
+            <a:pPr algn="l"/>
+            <a:r>
+              <a:rPr sz="3000" b="1" i="0">
+                <a:solidFill>
+                  <a:srgbClr val="1E242B"/>
+                </a:solidFill>
+                <a:latin typeface="Segoe UI"/>
+              </a:rPr>
+              <a:t>Everything lands on one timebase</a:t>
+            </a:r>
+          </a:p>
+        </p:txBody>
+      </p:sp>
+      <p:sp>
+        <p:nvSpPr>
+          <p:cNvPr id="3" name="Rectangle 2"/>
+          <p:cNvSpPr/>
+          <p:nvPr/>
+        </p:nvSpPr>
+        <p:spPr>
+          <a:xfrm>
+            <a:off x="658368" y="1170432"/>
+            <a:ext cx="1005840" cy="38100"/>
+          </a:xfrm>
+          <a:prstGeom prst="rect">
+            <a:avLst/>
+          </a:prstGeom>
+          <a:solidFill>
+            <a:srgbClr val="B3593F"/>
+          </a:solidFill>
+          <a:ln>
+            <a:noFill/>
+          </a:ln>
+          <a:effectLst/>
+        </p:spPr>
+        <p:style>
+          <a:lnRef idx="1">
+            <a:schemeClr val="accent1"/>
+          </a:lnRef>
+          <a:fillRef idx="3">
+            <a:schemeClr val="accent1"/>
+          </a:fillRef>
+          <a:effectRef idx="2">
+            <a:schemeClr val="accent1"/>
+          </a:effectRef>
+          <a:fontRef idx="minor">
+            <a:schemeClr val="lt1"/>
+          </a:fontRef>
+        </p:style>
+        <p:txBody>
+          <a:bodyPr rtlCol="0" anchor="ctr"/>
+          <a:lstStyle/>
+          <a:p>
+            <a:pPr algn="ctr"/>
+          </a:p>
+        </p:txBody>
+      </p:sp>
+      <p:sp>
+        <p:nvSpPr>
+          <p:cNvPr id="4" name="TextBox 3"/>
+          <p:cNvSpPr txBox="1"/>
+          <p:nvPr/>
+        </p:nvSpPr>
+        <p:spPr>
+          <a:xfrm>
+            <a:off x="658368" y="1371600"/>
+            <a:ext cx="10874959" cy="457200"/>
+          </a:xfrm>
+          <a:prstGeom prst="rect">
+            <a:avLst/>
+          </a:prstGeom>
+          <a:noFill/>
+        </p:spPr>
+        <p:txBody>
+          <a:bodyPr wrap="square">
+            <a:spAutoFit/>
+          </a:bodyPr>
+          <a:lstStyle/>
+          <a:p>
+            <a:r>
+              <a:rPr sz="1400" b="0" i="1">
+                <a:solidFill>
+                  <a:srgbClr val="6B727B"/>
+                </a:solidFill>
+                <a:latin typeface="Segoe UI"/>
+              </a:rPr>
+              <a:t>Cameras, tones, pellet events and laser output are not separately timestamped and hoped to agree.</a:t>
+            </a:r>
+          </a:p>
+        </p:txBody>
+      </p:sp>
+      <p:pic>
+        <p:nvPicPr>
+          <p:cNvPr id="5" name="Picture 4" descr="synchronization.png"/>
+          <p:cNvPicPr>
+            <a:picLocks noChangeAspect="1"/>
+          </p:cNvPicPr>
+          <p:nvPr/>
+        </p:nvPicPr>
+        <p:blipFill>
+          <a:blip r:embed="rId2"/>
+          <a:stretch>
+            <a:fillRect/>
+          </a:stretch>
+        </p:blipFill>
+        <p:spPr>
+          <a:xfrm>
+            <a:off x="658368" y="1847088"/>
+            <a:ext cx="10874959" cy="3663144"/>
+          </a:xfrm>
+          <a:prstGeom prst="rect">
+            <a:avLst/>
+          </a:prstGeom>
+        </p:spPr>
+      </p:pic>
+      <p:sp>
+        <p:nvSpPr>
+          <p:cNvPr id="6" name="TextBox 5"/>
+          <p:cNvSpPr txBox="1"/>
+          <p:nvPr/>
+        </p:nvSpPr>
+        <p:spPr>
+          <a:xfrm>
+            <a:off x="658368" y="5638248"/>
+            <a:ext cx="10874959" cy="502920"/>
+          </a:xfrm>
+          <a:prstGeom prst="rect">
+            <a:avLst/>
+          </a:prstGeom>
+          <a:noFill/>
+        </p:spPr>
+        <p:txBody>
+          <a:bodyPr wrap="square">
+            <a:spAutoFit/>
+          </a:bodyPr>
+          <a:lstStyle/>
+          <a:p>
+            <a:pPr algn="ctr"/>
+            <a:r>
+              <a:rPr sz="1150" b="0" i="1">
+                <a:solidFill>
+                  <a:srgbClr val="6B727B"/>
+                </a:solidFill>
+                <a:latin typeface="Segoe UI"/>
+              </a:rPr>
+              <a:t>Camera frame edges are matched to NI-DAQ samples with a signed offset, a resolution, and a confidence — all written into alignment.json.</a:t>
+            </a:r>
+          </a:p>
+        </p:txBody>
+      </p:sp>
+      <p:sp>
+        <p:nvSpPr>
+          <p:cNvPr id="7" name="TextBox 6"/>
+          <p:cNvSpPr txBox="1"/>
+          <p:nvPr/>
+        </p:nvSpPr>
+        <p:spPr>
+          <a:xfrm>
+            <a:off x="658368" y="6382512"/>
+            <a:ext cx="10874959" cy="292608"/>
+          </a:xfrm>
+          <a:prstGeom prst="rect">
+            <a:avLst/>
+          </a:prstGeom>
+          <a:noFill/>
+        </p:spPr>
+        <p:txBody>
+          <a:bodyPr wrap="none">
+            <a:spAutoFit/>
+          </a:bodyPr>
+          <a:lstStyle/>
+          <a:p>
+            <a:r>
+              <a:rPr sz="900" b="0" i="0">
+                <a:solidFill>
+                  <a:srgbClr val="6B727B"/>
+                </a:solidFill>
+                <a:latin typeface="Segoe UI"/>
+              </a:rPr>
+              <a:t>reachAQ</a:t>
+            </a:r>
+          </a:p>
+        </p:txBody>
+      </p:sp>
+      <p:sp>
+        <p:nvSpPr>
+          <p:cNvPr id="8" name="TextBox 7"/>
+          <p:cNvSpPr txBox="1"/>
+          <p:nvPr/>
+        </p:nvSpPr>
+        <p:spPr>
+          <a:xfrm>
+            <a:off x="10893247" y="6382512"/>
+            <a:ext cx="640080" cy="292608"/>
+          </a:xfrm>
+          <a:prstGeom prst="rect">
+            <a:avLst/>
+          </a:prstGeom>
+          <a:noFill/>
+        </p:spPr>
+        <p:txBody>
+          <a:bodyPr wrap="none">
+            <a:spAutoFit/>
+          </a:bodyPr>
+          <a:lstStyle/>
+          <a:p>
+            <a:pPr algn="r"/>
+            <a:r>
+              <a:rPr sz="900" b="0" i="0">
+                <a:solidFill>
+                  <a:srgbClr val="6B727B"/>
+                </a:solidFill>
+                <a:latin typeface="Segoe UI"/>
+              </a:rPr>
+              <a:t>11</a:t>
+            </a:r>
+          </a:p>
+        </p:txBody>
+      </p:sp>
+    </p:spTree>
+  </p:cSld>
+  <p:clrMapOvr>
+    <a:masterClrMapping/>
+  </p:clrMapOvr>
+</p:sld>
+</file>
+
+<file path=ppt/slides/slide12.xml><?xml version="1.0" encoding="utf-8"?>
+<p:sld xmlns:a="http://schemas.openxmlformats.org/drawingml/2006/main" xmlns:p="http://schemas.openxmlformats.org/presentationml/2006/main" xmlns:r="http://schemas.openxmlformats.org/officeDocument/2006/relationships">
+  <p:cSld>
+    <p:spTree>
+      <p:nvGrpSpPr>
+        <p:cNvPr id="1" name=""/>
+        <p:cNvGrpSpPr/>
+        <p:nvPr/>
+      </p:nvGrpSpPr>
+      <p:grpSpPr/>
+      <p:sp>
+        <p:nvSpPr>
+          <p:cNvPr id="2" name="Title 1"/>
+          <p:cNvSpPr>
+            <a:spLocks noGrp="1"/>
+          </p:cNvSpPr>
+          <p:nvPr>
+            <p:ph type="title"/>
+          </p:nvPr>
+        </p:nvSpPr>
+        <p:spPr>
+          <a:xfrm>
+            <a:off x="658368" y="457200"/>
+            <a:ext cx="10874959" cy="868680"/>
+          </a:xfrm>
+        </p:spPr>
+        <p:txBody>
+          <a:bodyPr wrap="square"/>
+          <a:lstStyle/>
+          <a:p>
+            <a:pPr algn="l"/>
+            <a:r>
+              <a:rPr sz="3000" b="1" i="0">
+                <a:solidFill>
+                  <a:srgbClr val="1E242B"/>
+                </a:solidFill>
+                <a:latin typeface="Segoe UI"/>
+              </a:rPr>
+              <a:t>Signals you can watch while the session runs</a:t>
+            </a:r>
+          </a:p>
+        </p:txBody>
+      </p:sp>
+      <p:sp>
+        <p:nvSpPr>
+          <p:cNvPr id="3" name="Content Placeholder 2"/>
+          <p:cNvSpPr>
+            <a:spLocks noGrp="1"/>
+          </p:cNvSpPr>
+          <p:nvPr>
+            <p:ph idx="1"/>
+          </p:nvPr>
+        </p:nvSpPr>
+        <p:spPr>
+          <a:xfrm>
+            <a:off x="658368" y="2057400"/>
+            <a:ext cx="10874959" cy="4023360"/>
+          </a:xfrm>
+        </p:spPr>
+        <p:txBody>
+          <a:bodyPr wrap="square"/>
+          <a:lstStyle/>
+          <a:p>
+            <a:pPr>
+              <a:spcAft>
+                <a:spcPts val="1300"/>
+              </a:spcAft>
+            </a:pPr>
+            <a:r>
+              <a:rPr sz="1500" b="0" i="0">
+                <a:solidFill>
+                  <a:srgbClr val="1E242B"/>
+                </a:solidFill>
+                <a:latin typeface="Segoe UI"/>
+              </a:rPr>
+              <a:t>Tones 1, 2 and 3 as logic traces, with the commanded onset checked against the pulse the DAQ actually saw</a:t>
+            </a:r>
+          </a:p>
+          <a:p>
+            <a:pPr>
+              <a:spcAft>
+                <a:spcPts val="1300"/>
+              </a:spcAft>
+            </a:pPr>
+            <a:r>
+              <a:rPr sz="1500" b="0" i="0">
+                <a:solidFill>
+                  <a:srgbClr val="1E242B"/>
+                </a:solidFill>
+                <a:latin typeface="Segoe UI"/>
+              </a:rPr>
+              <a:t>Pellet FSR pressure — two sensors at about 83 Hz each, from firmware 2.1.0, on their own stream rather than mixed into the device log</a:t>
+            </a:r>
+          </a:p>
+          <a:p>
+            <a:pPr>
+              <a:spcAft>
+                <a:spcPts val="1300"/>
+              </a:spcAft>
+            </a:pPr>
+            <a:r>
+              <a:rPr sz="1500" b="0" i="0">
+                <a:solidFill>
+                  <a:srgbClr val="1E242B"/>
+                </a:solidFill>
+                <a:latin typeface="Segoe UI"/>
+              </a:rPr>
+              <a:t>Laser analog command alongside the diode readback, so what was asked for and what came out are on the same axis</a:t>
+            </a:r>
+          </a:p>
+          <a:p>
+            <a:pPr>
+              <a:spcAft>
+                <a:spcPts val="1300"/>
+              </a:spcAft>
+            </a:pPr>
+            <a:r>
+              <a:rPr sz="1500" b="0" i="0">
+                <a:solidFill>
+                  <a:srgbClr val="1E242B"/>
+                </a:solidFill>
+                <a:latin typeface="Segoe UI"/>
+              </a:rPr>
+              <a:t>Camera frame pulses and the barcode line, which are what tie video to samples</a:t>
+            </a:r>
+          </a:p>
+          <a:p>
+            <a:pPr>
+              <a:spcAft>
+                <a:spcPts val="1300"/>
+              </a:spcAft>
+            </a:pPr>
+            <a:r>
+              <a:rPr sz="1500" b="0" i="0">
+                <a:solidFill>
+                  <a:srgbClr val="1E242B"/>
+                </a:solidFill>
+                <a:latin typeface="Segoe UI"/>
+              </a:rPr>
+              <a:t>Closed-loop state: what the pose gate answered, when the cue fired, and whether the trial was cancelled</a:t>
+            </a:r>
+          </a:p>
+        </p:txBody>
+      </p:sp>
+      <p:sp>
+        <p:nvSpPr>
+          <p:cNvPr id="4" name="Rectangle 3"/>
+          <p:cNvSpPr/>
+          <p:nvPr/>
+        </p:nvSpPr>
+        <p:spPr>
+          <a:xfrm>
+            <a:off x="658368" y="1170432"/>
+            <a:ext cx="1005840" cy="38100"/>
+          </a:xfrm>
+          <a:prstGeom prst="rect">
+            <a:avLst/>
+          </a:prstGeom>
+          <a:solidFill>
+            <a:srgbClr val="B3593F"/>
+          </a:solidFill>
+          <a:ln>
+            <a:noFill/>
+          </a:ln>
+          <a:effectLst/>
+        </p:spPr>
+        <p:style>
+          <a:lnRef idx="1">
+            <a:schemeClr val="accent1"/>
+          </a:lnRef>
+          <a:fillRef idx="3">
+            <a:schemeClr val="accent1"/>
+          </a:fillRef>
+          <a:effectRef idx="2">
+            <a:schemeClr val="accent1"/>
+          </a:effectRef>
+          <a:fontRef idx="minor">
+            <a:schemeClr val="lt1"/>
+          </a:fontRef>
+        </p:style>
+        <p:txBody>
+          <a:bodyPr rtlCol="0" anchor="ctr"/>
+          <a:lstStyle/>
+          <a:p>
+            <a:pPr algn="ctr"/>
+          </a:p>
+        </p:txBody>
+      </p:sp>
+      <p:sp>
+        <p:nvSpPr>
+          <p:cNvPr id="5" name="TextBox 4"/>
+          <p:cNvSpPr txBox="1"/>
+          <p:nvPr/>
+        </p:nvSpPr>
+        <p:spPr>
+          <a:xfrm>
+            <a:off x="658368" y="1371600"/>
+            <a:ext cx="10874959" cy="457200"/>
+          </a:xfrm>
+          <a:prstGeom prst="rect">
+            <a:avLst/>
+          </a:prstGeom>
+          <a:noFill/>
+        </p:spPr>
+        <p:txBody>
+          <a:bodyPr wrap="square">
+            <a:spAutoFit/>
+          </a:bodyPr>
+          <a:lstStyle/>
+          <a:p>
+            <a:r>
+              <a:rPr sz="1400" b="0" i="1">
+                <a:solidFill>
+                  <a:srgbClr val="6B727B"/>
+                </a:solidFill>
+                <a:latin typeface="Segoe UI"/>
+              </a:rPr>
+              <a:t>Everything is acquired continuously at 10 kHz and recorded unfiltered. The plot selection only changes what is drawn.</a:t>
+            </a:r>
+          </a:p>
+        </p:txBody>
+      </p:sp>
+      <p:sp>
+        <p:nvSpPr>
+          <p:cNvPr id="6" name="TextBox 5"/>
+          <p:cNvSpPr txBox="1"/>
+          <p:nvPr/>
+        </p:nvSpPr>
+        <p:spPr>
+          <a:xfrm>
+            <a:off x="658368" y="6382512"/>
+            <a:ext cx="10874959" cy="292608"/>
+          </a:xfrm>
+          <a:prstGeom prst="rect">
+            <a:avLst/>
+          </a:prstGeom>
+          <a:noFill/>
+        </p:spPr>
+        <p:txBody>
+          <a:bodyPr wrap="none">
+            <a:spAutoFit/>
+          </a:bodyPr>
+          <a:lstStyle/>
+          <a:p>
+            <a:r>
+              <a:rPr sz="900" b="0" i="0">
+                <a:solidFill>
+                  <a:srgbClr val="6B727B"/>
+                </a:solidFill>
+                <a:latin typeface="Segoe UI"/>
+              </a:rPr>
+              <a:t>reachAQ</a:t>
+            </a:r>
+          </a:p>
+        </p:txBody>
+      </p:sp>
+      <p:sp>
+        <p:nvSpPr>
+          <p:cNvPr id="7" name="TextBox 6"/>
+          <p:cNvSpPr txBox="1"/>
+          <p:nvPr/>
+        </p:nvSpPr>
+        <p:spPr>
+          <a:xfrm>
+            <a:off x="10893247" y="6382512"/>
+            <a:ext cx="640080" cy="292608"/>
+          </a:xfrm>
+          <a:prstGeom prst="rect">
+            <a:avLst/>
+          </a:prstGeom>
+          <a:noFill/>
+        </p:spPr>
+        <p:txBody>
+          <a:bodyPr wrap="none">
+            <a:spAutoFit/>
+          </a:bodyPr>
+          <a:lstStyle/>
+          <a:p>
+            <a:pPr algn="r"/>
+            <a:r>
+              <a:rPr sz="900" b="0" i="0">
+                <a:solidFill>
+                  <a:srgbClr val="6B727B"/>
+                </a:solidFill>
+                <a:latin typeface="Segoe UI"/>
+              </a:rPr>
+              <a:t>12</a:t>
+            </a:r>
+          </a:p>
+        </p:txBody>
+      </p:sp>
+    </p:spTree>
+  </p:cSld>
+  <p:clrMapOvr>
+    <a:masterClrMapping/>
+  </p:clrMapOvr>
+</p:sld>
+</file>
+
+<file path=ppt/slides/slide13.xml><?xml version="1.0" encoding="utf-8"?>
+<p:sld xmlns:a="http://schemas.openxmlformats.org/drawingml/2006/main" xmlns:p="http://schemas.openxmlformats.org/presentationml/2006/main" xmlns:r="http://schemas.openxmlformats.org/officeDocument/2006/relationships">
+  <p:cSld>
+    <p:spTree>
+      <p:nvGrpSpPr>
+        <p:cNvPr id="1" name=""/>
+        <p:cNvGrpSpPr/>
+        <p:nvPr/>
+      </p:nvGrpSpPr>
+      <p:grpSpPr/>
+      <p:sp>
+        <p:nvSpPr>
+          <p:cNvPr id="2" name="Title 1"/>
+          <p:cNvSpPr>
+            <a:spLocks noGrp="1"/>
+          </p:cNvSpPr>
+          <p:nvPr>
+            <p:ph type="title"/>
+          </p:nvPr>
+        </p:nvSpPr>
+        <p:spPr>
+          <a:xfrm>
+            <a:off x="658368" y="457200"/>
+            <a:ext cx="10874959" cy="868680"/>
+          </a:xfrm>
+        </p:spPr>
+        <p:txBody>
+          <a:bodyPr wrap="square"/>
+          <a:lstStyle/>
+          <a:p>
+            <a:pPr algn="l"/>
+            <a:r>
+              <a:rPr sz="3000" b="1" i="0">
+                <a:solidFill>
+                  <a:srgbClr val="1E242B"/>
+                </a:solidFill>
+                <a:latin typeface="Segoe UI"/>
+              </a:rPr>
+              <a:t>Experiments are composed, not copied</a:t>
+            </a:r>
+          </a:p>
+        </p:txBody>
+      </p:sp>
+      <p:sp>
+        <p:nvSpPr>
+          <p:cNvPr id="3" name="Content Placeholder 2"/>
+          <p:cNvSpPr>
+            <a:spLocks noGrp="1"/>
+          </p:cNvSpPr>
+          <p:nvPr>
+            <p:ph idx="1"/>
+          </p:nvPr>
+        </p:nvSpPr>
+        <p:spPr>
+          <a:xfrm>
+            <a:off x="658368" y="2057400"/>
+            <a:ext cx="10874959" cy="4023360"/>
+          </a:xfrm>
+        </p:spPr>
+        <p:txBody>
+          <a:bodyPr wrap="square"/>
+          <a:lstStyle/>
+          <a:p>
+            <a:pPr>
+              <a:spcAft>
+                <a:spcPts val="1300"/>
+              </a:spcAft>
+            </a:pPr>
+            <a:r>
+              <a:rPr sz="1500" b="0" i="0">
+                <a:solidFill>
+                  <a:srgbClr val="1E242B"/>
+                </a:solidFill>
+                <a:latin typeface="Segoe UI"/>
+              </a:rPr>
+              <a:t>A trial set is a reusable group of trials, saved on its own — trial content only, no epochs or blocks</a:t>
+            </a:r>
+          </a:p>
+          <a:p>
+            <a:pPr>
+              <a:spcAft>
+                <a:spcPts val="1300"/>
+              </a:spcAft>
+            </a:pPr>
+            <a:r>
+              <a:rPr sz="1500" b="0" i="0">
+                <a:solidFill>
+                  <a:srgbClr val="1E242B"/>
+                </a:solidFill>
+                <a:latin typeface="Segoe UI"/>
+              </a:rPr>
+              <a:t>An experiment is an ordered list of set appearances; each entry pins the set revision it was built against, can repeat, and can shuffle trial order within an appearance</a:t>
+            </a:r>
+          </a:p>
+          <a:p>
+            <a:pPr>
+              <a:spcAft>
+                <a:spcPts val="1300"/>
+              </a:spcAft>
+            </a:pPr>
+            <a:r>
+              <a:rPr sz="1500" b="0" i="0">
+                <a:solidFill>
+                  <a:srgbClr val="1E242B"/>
+                </a:solidFill>
+                <a:latin typeface="Segoe UI"/>
+              </a:rPr>
+              <a:t>Compiling flattens it into an ordinary protocol document, so the runner, the schedule and session evidence see nothing new</a:t>
+            </a:r>
+          </a:p>
+          <a:p>
+            <a:pPr>
+              <a:spcAft>
+                <a:spcPts val="1300"/>
+              </a:spcAft>
+            </a:pPr>
+            <a:r>
+              <a:rPr sz="1500" b="0" i="0">
+                <a:solidFill>
+                  <a:srgbClr val="1E242B"/>
+                </a:solidFill>
+                <a:latin typeface="Segoe UI"/>
+              </a:rPr>
+              <a:t>Each appearance becomes a named epoch, and the Sources column names the set every value came from</a:t>
+            </a:r>
+          </a:p>
+          <a:p>
+            <a:pPr>
+              <a:spcAft>
+                <a:spcPts val="1300"/>
+              </a:spcAft>
+            </a:pPr>
+            <a:r>
+              <a:rPr sz="1500" b="0" i="0">
+                <a:solidFill>
+                  <a:srgbClr val="1E242B"/>
+                </a:solidFill>
+                <a:latin typeface="Segoe UI"/>
+              </a:rPr>
+              <a:t>Shuffle seeds are stored on the entry, so a compile can always be repeated exactly</a:t>
+            </a:r>
+          </a:p>
+          <a:p>
+            <a:pPr>
+              <a:spcAft>
+                <a:spcPts val="1300"/>
+              </a:spcAft>
+            </a:pPr>
+            <a:r>
+              <a:rPr sz="1500" b="0" i="0">
+                <a:solidFill>
+                  <a:srgbClr val="1E242B"/>
+                </a:solidFill>
+                <a:latin typeface="Segoe UI"/>
+              </a:rPr>
+              <a:t>Editing a set never repins an existing row; a stale pin is visible, and a compile against a changed set is refused rather than silently different</a:t>
+            </a:r>
+          </a:p>
+        </p:txBody>
+      </p:sp>
+      <p:sp>
+        <p:nvSpPr>
+          <p:cNvPr id="4" name="Rectangle 3"/>
+          <p:cNvSpPr/>
+          <p:nvPr/>
+        </p:nvSpPr>
+        <p:spPr>
+          <a:xfrm>
+            <a:off x="658368" y="1170432"/>
+            <a:ext cx="1005840" cy="38100"/>
+          </a:xfrm>
+          <a:prstGeom prst="rect">
+            <a:avLst/>
+          </a:prstGeom>
+          <a:solidFill>
+            <a:srgbClr val="B3593F"/>
+          </a:solidFill>
+          <a:ln>
+            <a:noFill/>
+          </a:ln>
+          <a:effectLst/>
+        </p:spPr>
+        <p:style>
+          <a:lnRef idx="1">
+            <a:schemeClr val="accent1"/>
+          </a:lnRef>
+          <a:fillRef idx="3">
+            <a:schemeClr val="accent1"/>
+          </a:fillRef>
+          <a:effectRef idx="2">
+            <a:schemeClr val="accent1"/>
+          </a:effectRef>
+          <a:fontRef idx="minor">
+            <a:schemeClr val="lt1"/>
+          </a:fontRef>
+        </p:style>
+        <p:txBody>
+          <a:bodyPr rtlCol="0" anchor="ctr"/>
+          <a:lstStyle/>
+          <a:p>
+            <a:pPr algn="ctr"/>
+          </a:p>
+        </p:txBody>
+      </p:sp>
+      <p:sp>
+        <p:nvSpPr>
+          <p:cNvPr id="5" name="TextBox 4"/>
+          <p:cNvSpPr txBox="1"/>
+          <p:nvPr/>
+        </p:nvSpPr>
+        <p:spPr>
+          <a:xfrm>
+            <a:off x="658368" y="1371600"/>
+            <a:ext cx="10874959" cy="457200"/>
+          </a:xfrm>
+          <a:prstGeom prst="rect">
+            <a:avLst/>
+          </a:prstGeom>
+          <a:noFill/>
+        </p:spPr>
+        <p:txBody>
+          <a:bodyPr wrap="square">
+            <a:spAutoFit/>
+          </a:bodyPr>
+          <a:lstStyle/>
+          <a:p>
+            <a:r>
+              <a:rPr sz="1400" b="0" i="1">
+                <a:solidFill>
+                  <a:srgbClr val="6B727B"/>
+                </a:solidFill>
+                <a:latin typeface="Segoe UI"/>
+              </a:rPr>
+              <a:t>A phase shared by several experiments is written once.</a:t>
+            </a:r>
+          </a:p>
+        </p:txBody>
+      </p:sp>
+      <p:sp>
+        <p:nvSpPr>
+          <p:cNvPr id="6" name="TextBox 5"/>
+          <p:cNvSpPr txBox="1"/>
+          <p:nvPr/>
+        </p:nvSpPr>
+        <p:spPr>
+          <a:xfrm>
+            <a:off x="658368" y="6382512"/>
+            <a:ext cx="10874959" cy="292608"/>
+          </a:xfrm>
+          <a:prstGeom prst="rect">
+            <a:avLst/>
+          </a:prstGeom>
+          <a:noFill/>
+        </p:spPr>
+        <p:txBody>
+          <a:bodyPr wrap="none">
+            <a:spAutoFit/>
+          </a:bodyPr>
+          <a:lstStyle/>
+          <a:p>
+            <a:r>
+              <a:rPr sz="900" b="0" i="0">
+                <a:solidFill>
+                  <a:srgbClr val="6B727B"/>
+                </a:solidFill>
+                <a:latin typeface="Segoe UI"/>
+              </a:rPr>
+              <a:t>reachAQ</a:t>
+            </a:r>
+          </a:p>
+        </p:txBody>
+      </p:sp>
+      <p:sp>
+        <p:nvSpPr>
+          <p:cNvPr id="7" name="TextBox 6"/>
+          <p:cNvSpPr txBox="1"/>
+          <p:nvPr/>
+        </p:nvSpPr>
+        <p:spPr>
+          <a:xfrm>
+            <a:off x="10893247" y="6382512"/>
+            <a:ext cx="640080" cy="292608"/>
+          </a:xfrm>
+          <a:prstGeom prst="rect">
+            <a:avLst/>
+          </a:prstGeom>
+          <a:noFill/>
+        </p:spPr>
+        <p:txBody>
+          <a:bodyPr wrap="none">
+            <a:spAutoFit/>
+          </a:bodyPr>
+          <a:lstStyle/>
+          <a:p>
+            <a:pPr algn="r"/>
+            <a:r>
+              <a:rPr sz="900" b="0" i="0">
+                <a:solidFill>
+                  <a:srgbClr val="6B727B"/>
+                </a:solidFill>
+                <a:latin typeface="Segoe UI"/>
+              </a:rPr>
+              <a:t>13</a:t>
+            </a:r>
+          </a:p>
+        </p:txBody>
+      </p:sp>
+    </p:spTree>
+  </p:cSld>
+  <p:clrMapOvr>
+    <a:masterClrMapping/>
+  </p:clrMapOvr>
+</p:sld>
+</file>
+
+<file path=ppt/slides/slide14.xml><?xml version="1.0" encoding="utf-8"?>
+<p:sld xmlns:a="http://schemas.openxmlformats.org/drawingml/2006/main" xmlns:p="http://schemas.openxmlformats.org/presentationml/2006/main" xmlns:r="http://schemas.openxmlformats.org/officeDocument/2006/relationships">
+  <p:cSld>
+    <p:spTree>
+      <p:nvGrpSpPr>
+        <p:cNvPr id="1" name=""/>
+        <p:cNvGrpSpPr/>
+        <p:nvPr/>
+      </p:nvGrpSpPr>
+      <p:grpSpPr/>
+      <p:sp>
+        <p:nvSpPr>
+          <p:cNvPr id="2" name="Title 1"/>
+          <p:cNvSpPr>
+            <a:spLocks noGrp="1"/>
+          </p:cNvSpPr>
+          <p:nvPr>
+            <p:ph type="title"/>
+          </p:nvPr>
+        </p:nvSpPr>
+        <p:spPr>
+          <a:xfrm>
+            <a:off x="658368" y="457200"/>
+            <a:ext cx="10874959" cy="868680"/>
+          </a:xfrm>
+        </p:spPr>
+        <p:txBody>
+          <a:bodyPr wrap="square"/>
+          <a:lstStyle/>
+          <a:p>
+            <a:pPr algn="l"/>
+            <a:r>
+              <a:rPr sz="3000" b="1" i="0">
+                <a:solidFill>
+                  <a:srgbClr val="1E242B"/>
+                </a:solidFill>
+                <a:latin typeface="Segoe UI"/>
+              </a:rPr>
+              <a:t>Demo — recorded video, everything else live</a:t>
+            </a:r>
+          </a:p>
+        </p:txBody>
+      </p:sp>
+      <p:sp>
+        <p:nvSpPr>
+          <p:cNvPr id="3" name="Rectangle 2"/>
+          <p:cNvSpPr/>
+          <p:nvPr/>
+        </p:nvSpPr>
+        <p:spPr>
+          <a:xfrm>
+            <a:off x="658368" y="1170432"/>
+            <a:ext cx="1005840" cy="38100"/>
+          </a:xfrm>
+          <a:prstGeom prst="rect">
+            <a:avLst/>
+          </a:prstGeom>
+          <a:solidFill>
+            <a:srgbClr val="B3593F"/>
+          </a:solidFill>
+          <a:ln>
+            <a:noFill/>
+          </a:ln>
+          <a:effectLst/>
+        </p:spPr>
+        <p:style>
+          <a:lnRef idx="1">
+            <a:schemeClr val="accent1"/>
+          </a:lnRef>
+          <a:fillRef idx="3">
+            <a:schemeClr val="accent1"/>
+          </a:fillRef>
+          <a:effectRef idx="2">
+            <a:schemeClr val="accent1"/>
+          </a:effectRef>
+          <a:fontRef idx="minor">
+            <a:schemeClr val="lt1"/>
+          </a:fontRef>
+        </p:style>
+        <p:txBody>
+          <a:bodyPr rtlCol="0" anchor="ctr"/>
+          <a:lstStyle/>
+          <a:p>
+            <a:pPr algn="ctr"/>
+          </a:p>
+        </p:txBody>
+      </p:sp>
+      <p:sp>
+        <p:nvSpPr>
+          <p:cNvPr id="4" name="TextBox 3"/>
+          <p:cNvSpPr txBox="1"/>
+          <p:nvPr/>
+        </p:nvSpPr>
+        <p:spPr>
+          <a:xfrm>
+            <a:off x="658368" y="1371600"/>
+            <a:ext cx="10874959" cy="457200"/>
+          </a:xfrm>
+          <a:prstGeom prst="rect">
+            <a:avLst/>
+          </a:prstGeom>
+          <a:noFill/>
+        </p:spPr>
+        <p:txBody>
+          <a:bodyPr wrap="square">
+            <a:spAutoFit/>
+          </a:bodyPr>
+          <a:lstStyle/>
+          <a:p>
+            <a:r>
+              <a:rPr sz="1400" b="0" i="1">
+                <a:solidFill>
+                  <a:srgbClr val="6B727B"/>
+                </a:solidFill>
+                <a:latin typeface="Segoe UI"/>
+              </a:rPr>
+              <a:t>No animal today, so the camera frames are played from a recorded session. Exactly one stage is substituted.</a:t>
+            </a:r>
+          </a:p>
+        </p:txBody>
+      </p:sp>
+      <p:pic>
+        <p:nvPicPr>
+          <p:cNvPr id="5" name="Picture 4" descr="live_overlay.png"/>
+          <p:cNvPicPr>
+            <a:picLocks noChangeAspect="1"/>
+          </p:cNvPicPr>
+          <p:nvPr/>
+        </p:nvPicPr>
+        <p:blipFill>
+          <a:blip r:embed="rId2"/>
+          <a:stretch>
+            <a:fillRect/>
+          </a:stretch>
+        </p:blipFill>
+        <p:spPr>
+          <a:xfrm>
+            <a:off x="1202283" y="1847088"/>
+            <a:ext cx="9787128" cy="3822192"/>
+          </a:xfrm>
+          <a:prstGeom prst="rect">
+            <a:avLst/>
+          </a:prstGeom>
+        </p:spPr>
+      </p:pic>
+      <p:sp>
+        <p:nvSpPr>
+          <p:cNvPr id="6" name="TextBox 5"/>
+          <p:cNvSpPr txBox="1"/>
+          <p:nvPr/>
+        </p:nvSpPr>
+        <p:spPr>
+          <a:xfrm>
+            <a:off x="658368" y="5797296"/>
+            <a:ext cx="10874959" cy="502920"/>
+          </a:xfrm>
+          <a:prstGeom prst="rect">
+            <a:avLst/>
+          </a:prstGeom>
+          <a:noFill/>
+        </p:spPr>
+        <p:txBody>
+          <a:bodyPr wrap="square">
+            <a:spAutoFit/>
+          </a:bodyPr>
+          <a:lstStyle/>
+          <a:p>
+            <a:pPr algn="ctr"/>
+            <a:r>
+              <a:rPr sz="1150" b="0" i="1">
+                <a:solidFill>
+                  <a:srgbClr val="6B727B"/>
+                </a:solidFill>
+                <a:latin typeface="Segoe UI"/>
+              </a:rPr>
+              <a:t>Live 2D pose, per view, computed on the GPU from the played frames. Captured from the running application on the rig.</a:t>
+            </a:r>
+          </a:p>
+        </p:txBody>
+      </p:sp>
+      <p:sp>
+        <p:nvSpPr>
+          <p:cNvPr id="7" name="TextBox 6"/>
+          <p:cNvSpPr txBox="1"/>
+          <p:nvPr/>
+        </p:nvSpPr>
+        <p:spPr>
+          <a:xfrm>
+            <a:off x="658368" y="6382512"/>
+            <a:ext cx="10874959" cy="292608"/>
+          </a:xfrm>
+          <a:prstGeom prst="rect">
+            <a:avLst/>
+          </a:prstGeom>
+          <a:noFill/>
+        </p:spPr>
+        <p:txBody>
+          <a:bodyPr wrap="none">
+            <a:spAutoFit/>
+          </a:bodyPr>
+          <a:lstStyle/>
+          <a:p>
+            <a:r>
+              <a:rPr sz="900" b="0" i="0">
+                <a:solidFill>
+                  <a:srgbClr val="6B727B"/>
+                </a:solidFill>
+                <a:latin typeface="Segoe UI"/>
+              </a:rPr>
+              <a:t>reachAQ</a:t>
+            </a:r>
+          </a:p>
+        </p:txBody>
+      </p:sp>
+      <p:sp>
+        <p:nvSpPr>
+          <p:cNvPr id="8" name="TextBox 7"/>
+          <p:cNvSpPr txBox="1"/>
+          <p:nvPr/>
+        </p:nvSpPr>
+        <p:spPr>
+          <a:xfrm>
+            <a:off x="10893247" y="6382512"/>
+            <a:ext cx="640080" cy="292608"/>
+          </a:xfrm>
+          <a:prstGeom prst="rect">
+            <a:avLst/>
+          </a:prstGeom>
+          <a:noFill/>
+        </p:spPr>
+        <p:txBody>
+          <a:bodyPr wrap="none">
+            <a:spAutoFit/>
+          </a:bodyPr>
+          <a:lstStyle/>
+          <a:p>
+            <a:pPr algn="r"/>
+            <a:r>
+              <a:rPr sz="900" b="0" i="0">
+                <a:solidFill>
+                  <a:srgbClr val="6B727B"/>
+                </a:solidFill>
+                <a:latin typeface="Segoe UI"/>
+              </a:rPr>
+              <a:t>14</a:t>
+            </a:r>
+          </a:p>
+        </p:txBody>
+      </p:sp>
+    </p:spTree>
+  </p:cSld>
+  <p:clrMapOvr>
+    <a:masterClrMapping/>
+  </p:clrMapOvr>
+</p:sld>
+</file>
+
 <file path=ppt/slides/slide2.xml><?xml version="1.0" encoding="utf-8"?>
 <p:sld xmlns:a="http://schemas.openxmlformats.org/drawingml/2006/main" xmlns:p="http://schemas.openxmlformats.org/presentationml/2006/main" xmlns:r="http://schemas.openxmlformats.org/officeDocument/2006/relationships">
   <p:cSld>
@@ -4300,7 +6082,7 @@
                 </a:solidFill>
                 <a:latin typeface="Segoe UI"/>
               </a:rPr>
-              <a:t>Reach detected from live pose keypoints, per camera view, on the GPU</a:t>
+              <a:t>Two closed loops — a fast ROI reflex, and machine vision on the pose stream</a:t>
             </a:r>
           </a:p>
           <a:p>
@@ -4332,7 +6114,7 @@
                 </a:solidFill>
                 <a:latin typeface="Segoe UI"/>
               </a:rPr>
-              <a:t>Timing owned by hardware-timed NI-DAQ tasks and a SCHED_FIFO stim loop</a:t>
+              <a:t>Timing owned by hardware-timed NI-DAQ tasks and a real-time stim loop</a:t>
             </a:r>
           </a:p>
           <a:p>
@@ -4929,14 +6711,99 @@
                 </a:solidFill>
                 <a:latin typeface="Segoe UI"/>
               </a:rPr>
-              <a:t>The stim loop holds well under its budget</a:t>
-            </a:r>
-          </a:p>
-        </p:txBody>
-      </p:sp>
-      <p:sp>
-        <p:nvSpPr>
-          <p:cNvPr id="3" name="Rectangle 2"/>
+              <a:t>The budget</a:t>
+            </a:r>
+          </a:p>
+        </p:txBody>
+      </p:sp>
+      <p:sp>
+        <p:nvSpPr>
+          <p:cNvPr id="3" name="Content Placeholder 2"/>
+          <p:cNvSpPr>
+            <a:spLocks noGrp="1"/>
+          </p:cNvSpPr>
+          <p:nvPr>
+            <p:ph idx="1"/>
+          </p:nvPr>
+        </p:nvSpPr>
+        <p:spPr>
+          <a:xfrm>
+            <a:off x="658368" y="2057400"/>
+            <a:ext cx="10874959" cy="4023360"/>
+          </a:xfrm>
+        </p:spPr>
+        <p:txBody>
+          <a:bodyPr wrap="square"/>
+          <a:lstStyle/>
+          <a:p>
+            <a:pPr>
+              <a:spcAft>
+                <a:spcPts val="1300"/>
+              </a:spcAft>
+            </a:pPr>
+            <a:r>
+              <a:rPr sz="1500" b="0" i="0">
+                <a:solidFill>
+                  <a:srgbClr val="1E242B"/>
+                </a:solidFill>
+                <a:latin typeface="Segoe UI"/>
+              </a:rPr>
+              <a:t>Reach cameras run at 150 fps — a 6.667 ms per-frame budget for the perception stream</a:t>
+            </a:r>
+          </a:p>
+          <a:p>
+            <a:pPr>
+              <a:spcAft>
+                <a:spcPts val="1300"/>
+              </a:spcAft>
+            </a:pPr>
+            <a:r>
+              <a:rPr sz="1500" b="0" i="0">
+                <a:solidFill>
+                  <a:srgbClr val="1E242B"/>
+                </a:solidFill>
+                <a:latin typeface="Segoe UI"/>
+              </a:rPr>
+              <a:t>The stim camera runs at 900 Hz — a 5 ms budget for the reflex loop. That is a design target and a tail figure, not a measured average</a:t>
+            </a:r>
+          </a:p>
+          <a:p>
+            <a:pPr>
+              <a:spcAft>
+                <a:spcPts val="1300"/>
+              </a:spcAft>
+            </a:pPr>
+            <a:r>
+              <a:rPr sz="1500" b="0" i="0">
+                <a:solidFill>
+                  <a:srgbClr val="1E242B"/>
+                </a:solidFill>
+                <a:latin typeface="Segoe UI"/>
+              </a:rPr>
+              <a:t>The starting point: the DeepLabCut TensorFlow ResNet-50 pose path cost 54.8 ms per batch, about 18 Hz</a:t>
+            </a:r>
+          </a:p>
+          <a:p>
+            <a:pPr>
+              <a:spcAft>
+                <a:spcPts val="1300"/>
+              </a:spcAft>
+            </a:pPr>
+            <a:r>
+              <a:rPr sz="1500" b="0" i="0">
+                <a:solidFill>
+                  <a:srgbClr val="1E242B"/>
+                </a:solidFill>
+                <a:latin typeface="Segoe UI"/>
+              </a:rPr>
+              <a:t>That single number was the largest latency term in the system, and far below camera rate — which is what made pose useless for closing a loop</a:t>
+            </a:r>
+          </a:p>
+        </p:txBody>
+      </p:sp>
+      <p:sp>
+        <p:nvSpPr>
+          <p:cNvPr id="4" name="Rectangle 3"/>
           <p:cNvSpPr/>
           <p:nvPr/>
         </p:nvSpPr>
@@ -4980,7 +6847,7 @@
       </p:sp>
       <p:sp>
         <p:nvSpPr>
-          <p:cNvPr id="4" name="TextBox 3"/>
+          <p:cNvPr id="5" name="TextBox 4"/>
           <p:cNvSpPr txBox="1"/>
           <p:nvPr/>
         </p:nvSpPr>
@@ -5007,35 +6874,11 @@
                 </a:solidFill>
                 <a:latin typeface="Segoe UI"/>
               </a:rPr>
-              <a:t>900 Hz stimCam, small ROI, decision made inline in the capture thread. 60 s runs, pinned to physical P-cores.</a:t>
-            </a:r>
-          </a:p>
-        </p:txBody>
-      </p:sp>
-      <p:pic>
-        <p:nvPicPr>
-          <p:cNvPr id="5" name="Picture 4" descr="stim_latency.png"/>
-          <p:cNvPicPr>
-            <a:picLocks noChangeAspect="1"/>
-          </p:cNvPicPr>
-          <p:nvPr/>
-        </p:nvPicPr>
-        <p:blipFill>
-          <a:blip r:embed="rId2"/>
-          <a:stretch>
-            <a:fillRect/>
-          </a:stretch>
-        </p:blipFill>
-        <p:spPr>
-          <a:xfrm>
-            <a:off x="2092711" y="1847088"/>
-            <a:ext cx="8006272" cy="3822192"/>
-          </a:xfrm>
-          <a:prstGeom prst="rect">
-            <a:avLst/>
-          </a:prstGeom>
-        </p:spPr>
-      </p:pic>
+              <a:t>Two cameras, two clocks, two very different deadlines.</a:t>
+            </a:r>
+          </a:p>
+        </p:txBody>
+      </p:sp>
       <p:sp>
         <p:nvSpPr>
           <p:cNvPr id="6" name="TextBox 5"/>
@@ -5044,8 +6887,8 @@
         </p:nvSpPr>
         <p:spPr>
           <a:xfrm>
-            <a:off x="658368" y="5797296"/>
-            <a:ext cx="10874959" cy="502920"/>
+            <a:off x="658368" y="6382512"/>
+            <a:ext cx="10874959" cy="292608"/>
           </a:xfrm>
           <a:prstGeom prst="rect">
             <a:avLst/>
@@ -5053,41 +6896,6 @@
           <a:noFill/>
         </p:spPr>
         <p:txBody>
-          <a:bodyPr wrap="square">
-            <a:spAutoFit/>
-          </a:bodyPr>
-          <a:lstStyle/>
-          <a:p>
-            <a:pPr algn="ctr"/>
-            <a:r>
-              <a:rPr sz="1150" b="0" i="1">
-                <a:solidFill>
-                  <a:srgbClr val="6B727B"/>
-                </a:solidFill>
-                <a:latin typeface="Segoe UI"/>
-              </a:rPr>
-              <a:t>The detector's own work never exceeds 0.09 ms. The entire tail was scheduler wake-up latency — so it is a scheduling problem, not a compute one.</a:t>
-            </a:r>
-          </a:p>
-        </p:txBody>
-      </p:sp>
-      <p:sp>
-        <p:nvSpPr>
-          <p:cNvPr id="7" name="TextBox 6"/>
-          <p:cNvSpPr txBox="1"/>
-          <p:nvPr/>
-        </p:nvSpPr>
-        <p:spPr>
-          <a:xfrm>
-            <a:off x="658368" y="6382512"/>
-            <a:ext cx="10874959" cy="292608"/>
-          </a:xfrm>
-          <a:prstGeom prst="rect">
-            <a:avLst/>
-          </a:prstGeom>
-          <a:noFill/>
-        </p:spPr>
-        <p:txBody>
           <a:bodyPr wrap="none">
             <a:spAutoFit/>
           </a:bodyPr>
@@ -5107,7 +6915,7 @@
       </p:sp>
       <p:sp>
         <p:nvSpPr>
-          <p:cNvPr id="8" name="TextBox 7"/>
+          <p:cNvPr id="7" name="TextBox 6"/>
           <p:cNvSpPr txBox="1"/>
           <p:nvPr/>
         </p:nvSpPr>
@@ -5186,14 +6994,152 @@
                 </a:solidFill>
                 <a:latin typeface="Segoe UI"/>
               </a:rPr>
-              <a:t>Live inference is fast enough to sit in the loop</a:t>
-            </a:r>
-          </a:p>
-        </p:txBody>
-      </p:sp>
-      <p:sp>
-        <p:nvSpPr>
-          <p:cNvPr id="3" name="Rectangle 2"/>
+              <a:t>Two tiers, not one fast path</a:t>
+            </a:r>
+          </a:p>
+        </p:txBody>
+      </p:sp>
+      <p:sp>
+        <p:nvSpPr>
+          <p:cNvPr id="3" name="Content Placeholder 2"/>
+          <p:cNvSpPr>
+            <a:spLocks noGrp="1"/>
+          </p:cNvSpPr>
+          <p:nvPr>
+            <p:ph idx="1" sz="half"/>
+          </p:nvPr>
+        </p:nvSpPr>
+        <p:spPr>
+          <a:xfrm>
+            <a:off x="658368" y="2487168"/>
+            <a:ext cx="5186019" cy="3593592"/>
+          </a:xfrm>
+        </p:spPr>
+        <p:txBody>
+          <a:bodyPr wrap="square"/>
+          <a:lstStyle/>
+          <a:p>
+            <a:pPr>
+              <a:spcAft>
+                <a:spcPts val="1100"/>
+              </a:spcAft>
+            </a:pPr>
+            <a:r>
+              <a:rPr sz="1350" b="0" i="0">
+                <a:solidFill>
+                  <a:srgbClr val="1E242B"/>
+                </a:solidFill>
+                <a:latin typeface="Segoe UI"/>
+              </a:rPr>
+              <a:t>The stim camera's first-reach detector triggers the laser</a:t>
+            </a:r>
+          </a:p>
+          <a:p>
+            <a:pPr>
+              <a:spcAft>
+                <a:spcPts val="1100"/>
+              </a:spcAft>
+            </a:pPr>
+            <a:r>
+              <a:rPr sz="1350" b="0" i="0">
+                <a:solidFill>
+                  <a:srgbClr val="1E242B"/>
+                </a:solidFill>
+                <a:latin typeface="Segoe UI"/>
+              </a:rPr>
+              <a:t>This is the path that genuinely must be fast</a:t>
+            </a:r>
+          </a:p>
+          <a:p>
+            <a:pPr>
+              <a:spcAft>
+                <a:spcPts val="1100"/>
+              </a:spcAft>
+            </a:pPr>
+            <a:r>
+              <a:rPr sz="1350" b="0" i="0">
+                <a:solidFill>
+                  <a:srgbClr val="1E242B"/>
+                </a:solidFill>
+                <a:latin typeface="Segoe UI"/>
+              </a:rPr>
+              <a:t>Its own compute is under 0.1 ms, so the work was making the OS deliver it on time, not making it compute less</a:t>
+            </a:r>
+          </a:p>
+        </p:txBody>
+      </p:sp>
+      <p:sp>
+        <p:nvSpPr>
+          <p:cNvPr id="4" name="Content Placeholder 3"/>
+          <p:cNvSpPr>
+            <a:spLocks noGrp="1"/>
+          </p:cNvSpPr>
+          <p:nvPr>
+            <p:ph idx="2" sz="half"/>
+          </p:nvPr>
+        </p:nvSpPr>
+        <p:spPr>
+          <a:xfrm>
+            <a:off x="6347307" y="2487168"/>
+            <a:ext cx="5186019" cy="3593592"/>
+          </a:xfrm>
+        </p:spPr>
+        <p:txBody>
+          <a:bodyPr wrap="square"/>
+          <a:lstStyle/>
+          <a:p>
+            <a:pPr>
+              <a:spcAft>
+                <a:spcPts val="1100"/>
+              </a:spcAft>
+            </a:pPr>
+            <a:r>
+              <a:rPr sz="1350" b="0" i="0">
+                <a:solidFill>
+                  <a:srgbClr val="1E242B"/>
+                </a:solidFill>
+                <a:latin typeface="Segoe UI"/>
+              </a:rPr>
+              <a:t>The reach-camera pose stream, informing behaviour and gating</a:t>
+            </a:r>
+          </a:p>
+          <a:p>
+            <a:pPr>
+              <a:spcAft>
+                <a:spcPts val="1100"/>
+              </a:spcAft>
+            </a:pPr>
+            <a:r>
+              <a:rPr sz="1350" b="0" i="0">
+                <a:solidFill>
+                  <a:srgbClr val="1E242B"/>
+                </a:solidFill>
+                <a:latin typeface="Segoe UI"/>
+              </a:rPr>
+              <a:t>It does not have to hit camera rate to be useful</a:t>
+            </a:r>
+          </a:p>
+          <a:p>
+            <a:pPr>
+              <a:spcAft>
+                <a:spcPts val="1100"/>
+              </a:spcAft>
+            </a:pPr>
+            <a:r>
+              <a:rPr sz="1350" b="0" i="0">
+                <a:solidFill>
+                  <a:srgbClr val="1E242B"/>
+                </a:solidFill>
+                <a:latin typeface="Segoe UI"/>
+              </a:rPr>
+              <a:t>Accepting that is what let an accuracy decision beat a raw-speed one</a:t>
+            </a:r>
+          </a:p>
+        </p:txBody>
+      </p:sp>
+      <p:sp>
+        <p:nvSpPr>
+          <p:cNvPr id="5" name="Rectangle 4"/>
           <p:cNvSpPr/>
           <p:nvPr/>
         </p:nvSpPr>
@@ -5237,7 +7183,7 @@
       </p:sp>
       <p:sp>
         <p:nvSpPr>
-          <p:cNvPr id="4" name="TextBox 3"/>
+          <p:cNvPr id="6" name="TextBox 5"/>
           <p:cNvSpPr txBox="1"/>
           <p:nvPr/>
         </p:nvSpPr>
@@ -5264,45 +7210,21 @@
                 </a:solidFill>
                 <a:latin typeface="Segoe UI"/>
               </a:rPr>
-              <a:t>DeepLabCut on TensorFlow, batch 2 at 128x128, running on the GPU.</a:t>
-            </a:r>
-          </a:p>
-        </p:txBody>
-      </p:sp>
-      <p:pic>
-        <p:nvPicPr>
-          <p:cNvPr id="5" name="Picture 4" descr="inference_latency.png"/>
-          <p:cNvPicPr>
-            <a:picLocks noChangeAspect="1"/>
-          </p:cNvPicPr>
-          <p:nvPr/>
-        </p:nvPicPr>
-        <p:blipFill>
-          <a:blip r:embed="rId2"/>
-          <a:stretch>
-            <a:fillRect/>
-          </a:stretch>
-        </p:blipFill>
-        <p:spPr>
-          <a:xfrm>
-            <a:off x="1417038" y="1847088"/>
-            <a:ext cx="9357619" cy="3822192"/>
-          </a:xfrm>
-          <a:prstGeom prst="rect">
-            <a:avLst/>
-          </a:prstGeom>
-        </p:spPr>
-      </p:pic>
-      <p:sp>
-        <p:nvSpPr>
-          <p:cNvPr id="6" name="TextBox 5"/>
+              <a:t>We did not make one model fast enough for everything. We separated the millisecond-critical reflex from the perception stream and optimised each to its own budget.</a:t>
+            </a:r>
+          </a:p>
+        </p:txBody>
+      </p:sp>
+      <p:sp>
+        <p:nvSpPr>
+          <p:cNvPr id="7" name="TextBox 6"/>
           <p:cNvSpPr txBox="1"/>
           <p:nvPr/>
         </p:nvSpPr>
         <p:spPr>
           <a:xfrm>
-            <a:off x="658368" y="5797296"/>
-            <a:ext cx="10874959" cy="502920"/>
+            <a:off x="658368" y="2103120"/>
+            <a:ext cx="5186019" cy="347472"/>
           </a:xfrm>
           <a:prstGeom prst="rect">
             <a:avLst/>
@@ -5310,34 +7232,33 @@
           <a:noFill/>
         </p:spPr>
         <p:txBody>
-          <a:bodyPr wrap="square">
+          <a:bodyPr wrap="none">
             <a:spAutoFit/>
           </a:bodyPr>
           <a:lstStyle/>
           <a:p>
-            <a:pPr algn="ctr"/>
-            <a:r>
-              <a:rPr sz="1150" b="0" i="1">
-                <a:solidFill>
-                  <a:srgbClr val="6B727B"/>
-                </a:solidFill>
-                <a:latin typeface="Segoe UI"/>
-              </a:rPr>
-              <a:t>Same hardware, same model. Six milliseconds of p99 came from one CPU governor setting — powersave held the P-cores near 2700 MHz against a 5000 MHz ceiling.</a:t>
-            </a:r>
-          </a:p>
-        </p:txBody>
-      </p:sp>
-      <p:sp>
-        <p:nvSpPr>
-          <p:cNvPr id="7" name="TextBox 6"/>
+            <a:r>
+              <a:rPr sz="1500" b="1" i="0">
+                <a:solidFill>
+                  <a:srgbClr val="6B7F9E"/>
+                </a:solidFill>
+                <a:latin typeface="Segoe UI"/>
+              </a:rPr>
+              <a:t>Tier 1 — reflex</a:t>
+            </a:r>
+          </a:p>
+        </p:txBody>
+      </p:sp>
+      <p:sp>
+        <p:nvSpPr>
+          <p:cNvPr id="8" name="TextBox 7"/>
           <p:cNvSpPr txBox="1"/>
           <p:nvPr/>
         </p:nvSpPr>
         <p:spPr>
           <a:xfrm>
-            <a:off x="658368" y="6382512"/>
-            <a:ext cx="10874959" cy="292608"/>
+            <a:off x="6347307" y="2103120"/>
+            <a:ext cx="5186019" cy="347472"/>
           </a:xfrm>
           <a:prstGeom prst="rect">
             <a:avLst/>
@@ -5351,6 +7272,40 @@
           <a:lstStyle/>
           <a:p>
             <a:r>
+              <a:rPr sz="1500" b="1" i="0">
+                <a:solidFill>
+                  <a:srgbClr val="B3593F"/>
+                </a:solidFill>
+                <a:latin typeface="Segoe UI"/>
+              </a:rPr>
+              <a:t>Tier 2 — perception</a:t>
+            </a:r>
+          </a:p>
+        </p:txBody>
+      </p:sp>
+      <p:sp>
+        <p:nvSpPr>
+          <p:cNvPr id="9" name="TextBox 8"/>
+          <p:cNvSpPr txBox="1"/>
+          <p:nvPr/>
+        </p:nvSpPr>
+        <p:spPr>
+          <a:xfrm>
+            <a:off x="658368" y="6382512"/>
+            <a:ext cx="10874959" cy="292608"/>
+          </a:xfrm>
+          <a:prstGeom prst="rect">
+            <a:avLst/>
+          </a:prstGeom>
+          <a:noFill/>
+        </p:spPr>
+        <p:txBody>
+          <a:bodyPr wrap="none">
+            <a:spAutoFit/>
+          </a:bodyPr>
+          <a:lstStyle/>
+          <a:p>
+            <a:r>
               <a:rPr sz="900" b="0" i="0">
                 <a:solidFill>
                   <a:srgbClr val="6B727B"/>
@@ -5364,7 +7319,7 @@
       </p:sp>
       <p:sp>
         <p:nvSpPr>
-          <p:cNvPr id="8" name="TextBox 7"/>
+          <p:cNvPr id="10" name="TextBox 9"/>
           <p:cNvSpPr txBox="1"/>
           <p:nvPr/>
         </p:nvSpPr>
@@ -5443,7 +7398,7 @@
                 </a:solidFill>
                 <a:latin typeface="Segoe UI"/>
               </a:rPr>
-              <a:t>Everything lands on one timebase</a:t>
+              <a:t>Tier 1 — making the reflex land on time</a:t>
             </a:r>
           </a:p>
         </p:txBody>
@@ -5521,14 +7476,14 @@
                 </a:solidFill>
                 <a:latin typeface="Segoe UI"/>
               </a:rPr>
-              <a:t>Cameras, tones, pellet events and laser output are not separately timestamped and hoped to agree.</a:t>
+              <a:t>The detector's own compute never exceeds 0.09 ms. The entire problem was scheduler wake-up latency under load.</a:t>
             </a:r>
           </a:p>
         </p:txBody>
       </p:sp>
       <p:pic>
         <p:nvPicPr>
-          <p:cNvPr id="5" name="Picture 4" descr="synchronization.png"/>
+          <p:cNvPr id="5" name="Picture 4" descr="stim_latency.png"/>
           <p:cNvPicPr>
             <a:picLocks noChangeAspect="1"/>
           </p:cNvPicPr>
@@ -5542,8 +7497,8 @@
         </p:blipFill>
         <p:spPr>
           <a:xfrm>
-            <a:off x="658368" y="1847088"/>
-            <a:ext cx="10874959" cy="3663144"/>
+            <a:off x="2092711" y="1847088"/>
+            <a:ext cx="8006272" cy="3822192"/>
           </a:xfrm>
           <a:prstGeom prst="rect">
             <a:avLst/>
@@ -5558,7 +7513,7 @@
         </p:nvSpPr>
         <p:spPr>
           <a:xfrm>
-            <a:off x="658368" y="5638248"/>
+            <a:off x="658368" y="5797296"/>
             <a:ext cx="10874959" cy="502920"/>
           </a:xfrm>
           <a:prstGeom prst="rect">
@@ -5580,7 +7535,7 @@
                 </a:solidFill>
                 <a:latin typeface="Segoe UI"/>
               </a:rPr>
-              <a:t>Camera frame edges are matched to NI-DAQ samples with a signed offset, a resolution, and a confidence — all written into alignment.json.</a:t>
+              <a:t>Under a 16-process load, real-time scheduling took the worst case from 6.05 ms to 0.155 ms, with zero missed deadlines and the full 900 Hz cadence restored.</a:t>
             </a:r>
           </a:p>
         </p:txBody>
@@ -5700,115 +7655,14 @@
                 </a:solidFill>
                 <a:latin typeface="Segoe UI"/>
               </a:rPr>
-              <a:t>Signals you can watch while the session runs</a:t>
-            </a:r>
-          </a:p>
-        </p:txBody>
-      </p:sp>
-      <p:sp>
-        <p:nvSpPr>
-          <p:cNvPr id="3" name="Content Placeholder 2"/>
-          <p:cNvSpPr>
-            <a:spLocks noGrp="1"/>
-          </p:cNvSpPr>
-          <p:nvPr>
-            <p:ph idx="1"/>
-          </p:nvPr>
-        </p:nvSpPr>
-        <p:spPr>
-          <a:xfrm>
-            <a:off x="658368" y="2057400"/>
-            <a:ext cx="10874959" cy="4023360"/>
-          </a:xfrm>
-        </p:spPr>
-        <p:txBody>
-          <a:bodyPr wrap="square"/>
-          <a:lstStyle/>
-          <a:p>
-            <a:pPr>
-              <a:spcAft>
-                <a:spcPts val="1300"/>
-              </a:spcAft>
-            </a:pPr>
-            <a:r>
-              <a:rPr sz="1500" b="0" i="0">
-                <a:solidFill>
-                  <a:srgbClr val="1E242B"/>
-                </a:solidFill>
-                <a:latin typeface="Segoe UI"/>
-              </a:rPr>
-              <a:t>Tones 1, 2 and 3 as logic traces, with the commanded onset checked against the pulse the DAQ actually saw</a:t>
-            </a:r>
-          </a:p>
-          <a:p>
-            <a:pPr>
-              <a:spcAft>
-                <a:spcPts val="1300"/>
-              </a:spcAft>
-            </a:pPr>
-            <a:r>
-              <a:rPr sz="1500" b="0" i="0">
-                <a:solidFill>
-                  <a:srgbClr val="1E242B"/>
-                </a:solidFill>
-                <a:latin typeface="Segoe UI"/>
-              </a:rPr>
-              <a:t>Pellet FSR pressure — two sensors at about 83 Hz each, from firmware 2.1.0, on their own stream rather than mixed into the device log</a:t>
-            </a:r>
-          </a:p>
-          <a:p>
-            <a:pPr>
-              <a:spcAft>
-                <a:spcPts val="1300"/>
-              </a:spcAft>
-            </a:pPr>
-            <a:r>
-              <a:rPr sz="1500" b="0" i="0">
-                <a:solidFill>
-                  <a:srgbClr val="1E242B"/>
-                </a:solidFill>
-                <a:latin typeface="Segoe UI"/>
-              </a:rPr>
-              <a:t>Laser analog command alongside the diode readback, so what was asked for and what came out are on the same axis</a:t>
-            </a:r>
-          </a:p>
-          <a:p>
-            <a:pPr>
-              <a:spcAft>
-                <a:spcPts val="1300"/>
-              </a:spcAft>
-            </a:pPr>
-            <a:r>
-              <a:rPr sz="1500" b="0" i="0">
-                <a:solidFill>
-                  <a:srgbClr val="1E242B"/>
-                </a:solidFill>
-                <a:latin typeface="Segoe UI"/>
-              </a:rPr>
-              <a:t>Camera frame pulses and the barcode line, which are what tie video to samples</a:t>
-            </a:r>
-          </a:p>
-          <a:p>
-            <a:pPr>
-              <a:spcAft>
-                <a:spcPts val="1300"/>
-              </a:spcAft>
-            </a:pPr>
-            <a:r>
-              <a:rPr sz="1500" b="0" i="0">
-                <a:solidFill>
-                  <a:srgbClr val="1E242B"/>
-                </a:solidFill>
-                <a:latin typeface="Segoe UI"/>
-              </a:rPr>
-              <a:t>Closed-loop state: what the pose gate answered, when the cue fired, and whether the trial was cancelled</a:t>
-            </a:r>
-          </a:p>
-        </p:txBody>
-      </p:sp>
-      <p:sp>
-        <p:nvSpPr>
-          <p:cNvPr id="4" name="Rectangle 3"/>
+              <a:t>Tier 2 — where the milliseconds went</a:t>
+            </a:r>
+          </a:p>
+        </p:txBody>
+      </p:sp>
+      <p:sp>
+        <p:nvSpPr>
+          <p:cNvPr id="3" name="Rectangle 2"/>
           <p:cNvSpPr/>
           <p:nvPr/>
         </p:nvSpPr>
@@ -5852,7 +7706,7 @@
       </p:sp>
       <p:sp>
         <p:nvSpPr>
-          <p:cNvPr id="5" name="TextBox 4"/>
+          <p:cNvPr id="4" name="TextBox 3"/>
           <p:cNvSpPr txBox="1"/>
           <p:nvPr/>
         </p:nvSpPr>
@@ -5879,11 +7733,35 @@
                 </a:solidFill>
                 <a:latin typeface="Segoe UI"/>
               </a:rPr>
-              <a:t>Everything is acquired continuously at 10 kHz and recorded unfiltered. The plot selection only changes what is drawn.</a:t>
-            </a:r>
-          </a:p>
-        </p:txBody>
-      </p:sp>
+              <a:t>The speed came from removing our own overhead and choosing the right architecture.</a:t>
+            </a:r>
+          </a:p>
+        </p:txBody>
+      </p:sp>
+      <p:pic>
+        <p:nvPicPr>
+          <p:cNvPr id="5" name="Picture 4" descr="inference_ladder.png"/>
+          <p:cNvPicPr>
+            <a:picLocks noChangeAspect="1"/>
+          </p:cNvPicPr>
+          <p:nvPr/>
+        </p:nvPicPr>
+        <p:blipFill>
+          <a:blip r:embed="rId2"/>
+          <a:stretch>
+            <a:fillRect/>
+          </a:stretch>
+        </p:blipFill>
+        <p:spPr>
+          <a:xfrm>
+            <a:off x="911580" y="1847088"/>
+            <a:ext cx="10368534" cy="3822192"/>
+          </a:xfrm>
+          <a:prstGeom prst="rect">
+            <a:avLst/>
+          </a:prstGeom>
+        </p:spPr>
+      </p:pic>
       <p:sp>
         <p:nvSpPr>
           <p:cNvPr id="6" name="TextBox 5"/>
@@ -5892,8 +7770,8 @@
         </p:nvSpPr>
         <p:spPr>
           <a:xfrm>
-            <a:off x="658368" y="6382512"/>
-            <a:ext cx="10874959" cy="292608"/>
+            <a:off x="658368" y="5797296"/>
+            <a:ext cx="10874959" cy="502920"/>
           </a:xfrm>
           <a:prstGeom prst="rect">
             <a:avLst/>
@@ -5901,6 +7779,41 @@
           <a:noFill/>
         </p:spPr>
         <p:txBody>
+          <a:bodyPr wrap="square">
+            <a:spAutoFit/>
+          </a:bodyPr>
+          <a:lstStyle/>
+          <a:p>
+            <a:pPr algn="ctr"/>
+            <a:r>
+              <a:rPr sz="1150" b="0" i="1">
+                <a:solidFill>
+                  <a:srgbClr val="6B727B"/>
+                </a:solidFill>
+                <a:latin typeface="Segoe UI"/>
+              </a:rPr>
+              <a:t>Colour is status, not just result. The mobile-class backbone was measured at about 8x and deliberately not adopted — its confidence does not predict accuracy, which would break the 3D confidence gate.</a:t>
+            </a:r>
+          </a:p>
+        </p:txBody>
+      </p:sp>
+      <p:sp>
+        <p:nvSpPr>
+          <p:cNvPr id="7" name="TextBox 6"/>
+          <p:cNvSpPr txBox="1"/>
+          <p:nvPr/>
+        </p:nvSpPr>
+        <p:spPr>
+          <a:xfrm>
+            <a:off x="658368" y="6382512"/>
+            <a:ext cx="10874959" cy="292608"/>
+          </a:xfrm>
+          <a:prstGeom prst="rect">
+            <a:avLst/>
+          </a:prstGeom>
+          <a:noFill/>
+        </p:spPr>
+        <p:txBody>
           <a:bodyPr wrap="none">
             <a:spAutoFit/>
           </a:bodyPr>
@@ -5920,7 +7833,7 @@
       </p:sp>
       <p:sp>
         <p:nvSpPr>
-          <p:cNvPr id="7" name="TextBox 6"/>
+          <p:cNvPr id="8" name="TextBox 7"/>
           <p:cNvSpPr txBox="1"/>
           <p:nvPr/>
         </p:nvSpPr>
@@ -5999,131 +7912,14 @@
                 </a:solidFill>
                 <a:latin typeface="Segoe UI"/>
               </a:rPr>
-              <a:t>Experiments are composed, not copied</a:t>
-            </a:r>
-          </a:p>
-        </p:txBody>
-      </p:sp>
-      <p:sp>
-        <p:nvSpPr>
-          <p:cNvPr id="3" name="Content Placeholder 2"/>
-          <p:cNvSpPr>
-            <a:spLocks noGrp="1"/>
-          </p:cNvSpPr>
-          <p:nvPr>
-            <p:ph idx="1"/>
-          </p:nvPr>
-        </p:nvSpPr>
-        <p:spPr>
-          <a:xfrm>
-            <a:off x="658368" y="2057400"/>
-            <a:ext cx="10874959" cy="4023360"/>
-          </a:xfrm>
-        </p:spPr>
-        <p:txBody>
-          <a:bodyPr wrap="square"/>
-          <a:lstStyle/>
-          <a:p>
-            <a:pPr>
-              <a:spcAft>
-                <a:spcPts val="1300"/>
-              </a:spcAft>
-            </a:pPr>
-            <a:r>
-              <a:rPr sz="1500" b="0" i="0">
-                <a:solidFill>
-                  <a:srgbClr val="1E242B"/>
-                </a:solidFill>
-                <a:latin typeface="Segoe UI"/>
-              </a:rPr>
-              <a:t>A trial set is a reusable group of trials, saved on its own — trial content only, no epochs or blocks</a:t>
-            </a:r>
-          </a:p>
-          <a:p>
-            <a:pPr>
-              <a:spcAft>
-                <a:spcPts val="1300"/>
-              </a:spcAft>
-            </a:pPr>
-            <a:r>
-              <a:rPr sz="1500" b="0" i="0">
-                <a:solidFill>
-                  <a:srgbClr val="1E242B"/>
-                </a:solidFill>
-                <a:latin typeface="Segoe UI"/>
-              </a:rPr>
-              <a:t>An experiment is an ordered list of set appearances; each entry pins the set revision it was built against, can repeat, and can shuffle trial order within an appearance</a:t>
-            </a:r>
-          </a:p>
-          <a:p>
-            <a:pPr>
-              <a:spcAft>
-                <a:spcPts val="1300"/>
-              </a:spcAft>
-            </a:pPr>
-            <a:r>
-              <a:rPr sz="1500" b="0" i="0">
-                <a:solidFill>
-                  <a:srgbClr val="1E242B"/>
-                </a:solidFill>
-                <a:latin typeface="Segoe UI"/>
-              </a:rPr>
-              <a:t>Compiling flattens it into an ordinary protocol document, so the runner, the schedule and session evidence see nothing new</a:t>
-            </a:r>
-          </a:p>
-          <a:p>
-            <a:pPr>
-              <a:spcAft>
-                <a:spcPts val="1300"/>
-              </a:spcAft>
-            </a:pPr>
-            <a:r>
-              <a:rPr sz="1500" b="0" i="0">
-                <a:solidFill>
-                  <a:srgbClr val="1E242B"/>
-                </a:solidFill>
-                <a:latin typeface="Segoe UI"/>
-              </a:rPr>
-              <a:t>Each appearance becomes a named epoch, and the Sources column names the set every value came from</a:t>
-            </a:r>
-          </a:p>
-          <a:p>
-            <a:pPr>
-              <a:spcAft>
-                <a:spcPts val="1300"/>
-              </a:spcAft>
-            </a:pPr>
-            <a:r>
-              <a:rPr sz="1500" b="0" i="0">
-                <a:solidFill>
-                  <a:srgbClr val="1E242B"/>
-                </a:solidFill>
-                <a:latin typeface="Segoe UI"/>
-              </a:rPr>
-              <a:t>Shuffle seeds are stored on the entry, so a compile can always be repeated exactly</a:t>
-            </a:r>
-          </a:p>
-          <a:p>
-            <a:pPr>
-              <a:spcAft>
-                <a:spcPts val="1300"/>
-              </a:spcAft>
-            </a:pPr>
-            <a:r>
-              <a:rPr sz="1500" b="0" i="0">
-                <a:solidFill>
-                  <a:srgbClr val="1E242B"/>
-                </a:solidFill>
-                <a:latin typeface="Segoe UI"/>
-              </a:rPr>
-              <a:t>Editing a set never repins an existing row; a stale pin is visible, and a compile against a changed set is refused rather than silently different</a:t>
-            </a:r>
-          </a:p>
-        </p:txBody>
-      </p:sp>
-      <p:sp>
-        <p:nvSpPr>
-          <p:cNvPr id="4" name="Rectangle 3"/>
+              <a:t>One OS setting was worth six more milliseconds</a:t>
+            </a:r>
+          </a:p>
+        </p:txBody>
+      </p:sp>
+      <p:sp>
+        <p:nvSpPr>
+          <p:cNvPr id="3" name="Rectangle 2"/>
           <p:cNvSpPr/>
           <p:nvPr/>
         </p:nvSpPr>
@@ -6167,7 +7963,7 @@
       </p:sp>
       <p:sp>
         <p:nvSpPr>
-          <p:cNvPr id="5" name="TextBox 4"/>
+          <p:cNvPr id="4" name="TextBox 3"/>
           <p:cNvSpPr txBox="1"/>
           <p:nvPr/>
         </p:nvSpPr>
@@ -6194,11 +7990,35 @@
                 </a:solidFill>
                 <a:latin typeface="Segoe UI"/>
               </a:rPr>
-              <a:t>A phase shared by several experiments is written once.</a:t>
-            </a:r>
-          </a:p>
-        </p:txBody>
-      </p:sp>
+              <a:t>Same hardware, same model, same batch. Only the CPU governor changed.</a:t>
+            </a:r>
+          </a:p>
+        </p:txBody>
+      </p:sp>
+      <p:pic>
+        <p:nvPicPr>
+          <p:cNvPr id="5" name="Picture 4" descr="inference_latency.png"/>
+          <p:cNvPicPr>
+            <a:picLocks noChangeAspect="1"/>
+          </p:cNvPicPr>
+          <p:nvPr/>
+        </p:nvPicPr>
+        <p:blipFill>
+          <a:blip r:embed="rId2"/>
+          <a:stretch>
+            <a:fillRect/>
+          </a:stretch>
+        </p:blipFill>
+        <p:spPr>
+          <a:xfrm>
+            <a:off x="1417038" y="1847088"/>
+            <a:ext cx="9357619" cy="3822192"/>
+          </a:xfrm>
+          <a:prstGeom prst="rect">
+            <a:avLst/>
+          </a:prstGeom>
+        </p:spPr>
+      </p:pic>
       <p:sp>
         <p:nvSpPr>
           <p:cNvPr id="6" name="TextBox 5"/>
@@ -6207,8 +8027,8 @@
         </p:nvSpPr>
         <p:spPr>
           <a:xfrm>
-            <a:off x="658368" y="6382512"/>
-            <a:ext cx="10874959" cy="292608"/>
+            <a:off x="658368" y="5797296"/>
+            <a:ext cx="10874959" cy="502920"/>
           </a:xfrm>
           <a:prstGeom prst="rect">
             <a:avLst/>
@@ -6216,6 +8036,41 @@
           <a:noFill/>
         </p:spPr>
         <p:txBody>
+          <a:bodyPr wrap="square">
+            <a:spAutoFit/>
+          </a:bodyPr>
+          <a:lstStyle/>
+          <a:p>
+            <a:pPr algn="ctr"/>
+            <a:r>
+              <a:rPr sz="1150" b="0" i="1">
+                <a:solidFill>
+                  <a:srgbClr val="6B727B"/>
+                </a:solidFill>
+                <a:latin typeface="Segoe UI"/>
+              </a:rPr>
+              <a:t>powersave held the P-cores near 2700 MHz against a 5000 MHz ceiling. The installer now sets performance, because the default cost more than half the win.</a:t>
+            </a:r>
+          </a:p>
+        </p:txBody>
+      </p:sp>
+      <p:sp>
+        <p:nvSpPr>
+          <p:cNvPr id="7" name="TextBox 6"/>
+          <p:cNvSpPr txBox="1"/>
+          <p:nvPr/>
+        </p:nvSpPr>
+        <p:spPr>
+          <a:xfrm>
+            <a:off x="658368" y="6382512"/>
+            <a:ext cx="10874959" cy="292608"/>
+          </a:xfrm>
+          <a:prstGeom prst="rect">
+            <a:avLst/>
+          </a:prstGeom>
+          <a:noFill/>
+        </p:spPr>
+        <p:txBody>
           <a:bodyPr wrap="none">
             <a:spAutoFit/>
           </a:bodyPr>
@@ -6235,7 +8090,7 @@
       </p:sp>
       <p:sp>
         <p:nvSpPr>
-          <p:cNvPr id="7" name="TextBox 6"/>
+          <p:cNvPr id="8" name="TextBox 7"/>
           <p:cNvSpPr txBox="1"/>
           <p:nvPr/>
         </p:nvSpPr>
@@ -6314,14 +8169,99 @@
                 </a:solidFill>
                 <a:latin typeface="Segoe UI"/>
               </a:rPr>
-              <a:t>Demo — recorded video, everything else live</a:t>
-            </a:r>
-          </a:p>
-        </p:txBody>
-      </p:sp>
-      <p:sp>
-        <p:nvSpPr>
-          <p:cNvPr id="3" name="Rectangle 2"/>
+              <a:t>Running below camera rate is safe by design</a:t>
+            </a:r>
+          </a:p>
+        </p:txBody>
+      </p:sp>
+      <p:sp>
+        <p:nvSpPr>
+          <p:cNvPr id="3" name="Content Placeholder 2"/>
+          <p:cNvSpPr>
+            <a:spLocks noGrp="1"/>
+          </p:cNvSpPr>
+          <p:nvPr>
+            <p:ph idx="1"/>
+          </p:nvPr>
+        </p:nvSpPr>
+        <p:spPr>
+          <a:xfrm>
+            <a:off x="658368" y="2057400"/>
+            <a:ext cx="10874959" cy="4023360"/>
+          </a:xfrm>
+        </p:spPr>
+        <p:txBody>
+          <a:bodyPr wrap="square"/>
+          <a:lstStyle/>
+          <a:p>
+            <a:pPr>
+              <a:spcAft>
+                <a:spcPts val="1300"/>
+              </a:spcAft>
+            </a:pPr>
+            <a:r>
+              <a:rPr sz="1500" b="0" i="0">
+                <a:solidFill>
+                  <a:srgbClr val="1E242B"/>
+                </a:solidFill>
+                <a:latin typeface="Segoe UI"/>
+              </a:rPr>
+              <a:t>Non-blocking backpressure — the 150 fps capture loop hands frames to inference on a separate queue from recording, so a slow pose stage can never stall acquisition or cost a recorded frame. Slowness costs inference work only</a:t>
+            </a:r>
+          </a:p>
+          <a:p>
+            <a:pPr>
+              <a:spcAft>
+                <a:spcPts val="1300"/>
+              </a:spcAft>
+            </a:pPr>
+            <a:r>
+              <a:rPr sz="1500" b="0" i="0">
+                <a:solidFill>
+                  <a:srgbClr val="1E242B"/>
+                </a:solidFill>
+                <a:latin typeface="Segoe UI"/>
+              </a:rPr>
+              <a:t>Freshness drain — inference always takes the newest queued frame and drops stale ones, so latency never grows into a backlog</a:t>
+            </a:r>
+          </a:p>
+          <a:p>
+            <a:pPr>
+              <a:spcAft>
+                <a:spcPts val="1300"/>
+              </a:spcAft>
+            </a:pPr>
+            <a:r>
+              <a:rPr sz="1500" b="0" i="0">
+                <a:solidFill>
+                  <a:srgbClr val="1E242B"/>
+                </a:solidFill>
+                <a:latin typeface="Segoe UI"/>
+              </a:rPr>
+              <a:t>That drain removed up to a full predict period of buffer-sitting: end-to-end went from 17.6 to 13.9 ms, and frames the loop could not hand over fell from 35.2% to 0.7%</a:t>
+            </a:r>
+          </a:p>
+          <a:p>
+            <a:pPr>
+              <a:spcAft>
+                <a:spcPts val="1300"/>
+              </a:spcAft>
+            </a:pPr>
+            <a:r>
+              <a:rPr sz="1500" b="0" i="0">
+                <a:solidFill>
+                  <a:srgbClr val="1E242B"/>
+                </a:solidFill>
+                <a:latin typeface="Segoe UI"/>
+              </a:rPr>
+              <a:t>Both are always on, and neither depends on which backend or model is configured</a:t>
+            </a:r>
+          </a:p>
+        </p:txBody>
+      </p:sp>
+      <p:sp>
+        <p:nvSpPr>
+          <p:cNvPr id="4" name="Rectangle 3"/>
           <p:cNvSpPr/>
           <p:nvPr/>
         </p:nvSpPr>
@@ -6365,7 +8305,7 @@
       </p:sp>
       <p:sp>
         <p:nvSpPr>
-          <p:cNvPr id="4" name="TextBox 3"/>
+          <p:cNvPr id="5" name="TextBox 4"/>
           <p:cNvSpPr txBox="1"/>
           <p:nvPr/>
         </p:nvSpPr>
@@ -6392,35 +8332,11 @@
                 </a:solidFill>
                 <a:latin typeface="Segoe UI"/>
               </a:rPr>
-              <a:t>No animal today, so the camera frames are played from a recorded session. Exactly one stage is substituted.</a:t>
-            </a:r>
-          </a:p>
-        </p:txBody>
-      </p:sp>
-      <p:pic>
-        <p:nvPicPr>
-          <p:cNvPr id="5" name="Picture 4" descr="live_overlay.png"/>
-          <p:cNvPicPr>
-            <a:picLocks noChangeAspect="1"/>
-          </p:cNvPicPr>
-          <p:nvPr/>
-        </p:nvPicPr>
-        <p:blipFill>
-          <a:blip r:embed="rId2"/>
-          <a:stretch>
-            <a:fillRect/>
-          </a:stretch>
-        </p:blipFill>
-        <p:spPr>
-          <a:xfrm>
-            <a:off x="1202283" y="1847088"/>
-            <a:ext cx="9787128" cy="3822192"/>
-          </a:xfrm>
-          <a:prstGeom prst="rect">
-            <a:avLst/>
-          </a:prstGeom>
-        </p:spPr>
-      </p:pic>
+              <a:t>The pose tier is allowed to be slower than the cameras, because it cannot hold them up.</a:t>
+            </a:r>
+          </a:p>
+        </p:txBody>
+      </p:sp>
       <p:sp>
         <p:nvSpPr>
           <p:cNvPr id="6" name="TextBox 5"/>
@@ -6429,8 +8345,8 @@
         </p:nvSpPr>
         <p:spPr>
           <a:xfrm>
-            <a:off x="658368" y="5797296"/>
-            <a:ext cx="10874959" cy="502920"/>
+            <a:off x="658368" y="6382512"/>
+            <a:ext cx="10874959" cy="292608"/>
           </a:xfrm>
           <a:prstGeom prst="rect">
             <a:avLst/>
@@ -6438,41 +8354,6 @@
           <a:noFill/>
         </p:spPr>
         <p:txBody>
-          <a:bodyPr wrap="square">
-            <a:spAutoFit/>
-          </a:bodyPr>
-          <a:lstStyle/>
-          <a:p>
-            <a:pPr algn="ctr"/>
-            <a:r>
-              <a:rPr sz="1150" b="0" i="1">
-                <a:solidFill>
-                  <a:srgbClr val="6B727B"/>
-                </a:solidFill>
-                <a:latin typeface="Segoe UI"/>
-              </a:rPr>
-              <a:t>Live 2D pose, per view, computed on the GPU from the played frames. Captured from the running application on the rig.</a:t>
-            </a:r>
-          </a:p>
-        </p:txBody>
-      </p:sp>
-      <p:sp>
-        <p:nvSpPr>
-          <p:cNvPr id="7" name="TextBox 6"/>
-          <p:cNvSpPr txBox="1"/>
-          <p:nvPr/>
-        </p:nvSpPr>
-        <p:spPr>
-          <a:xfrm>
-            <a:off x="658368" y="6382512"/>
-            <a:ext cx="10874959" cy="292608"/>
-          </a:xfrm>
-          <a:prstGeom prst="rect">
-            <a:avLst/>
-          </a:prstGeom>
-          <a:noFill/>
-        </p:spPr>
-        <p:txBody>
           <a:bodyPr wrap="none">
             <a:spAutoFit/>
           </a:bodyPr>
@@ -6492,7 +8373,7 @@
       </p:sp>
       <p:sp>
         <p:nvSpPr>
-          <p:cNvPr id="8" name="TextBox 7"/>
+          <p:cNvPr id="7" name="TextBox 6"/>
           <p:cNvSpPr txBox="1"/>
           <p:nvPr/>
         </p:nvSpPr>

--- a/docs/presentation/reachAQ-overview.pptx
+++ b/docs/presentation/reachAQ-overview.pptx
@@ -17,8 +17,6 @@
     <p:sldId id="265" r:id="rId17"/>
     <p:sldId id="266" r:id="rId18"/>
     <p:sldId id="267" r:id="rId19"/>
-    <p:sldId id="268" r:id="rId20"/>
-    <p:sldId id="269" r:id="rId21"/>
   </p:sldIdLst>
   <p:sldSz cx="12191695" cy="6858000" type="screen4x3"/>
   <p:notesSz cx="6858000" cy="9144000"/>
@@ -585,7 +583,7 @@
           <a:lstStyle/>
           <a:p>
             <a:r>
-              <a:t>Four sync modes: auto, backplane, external, independent. Compatible PXI cards share PXI_CLK10, a backplane start trigger and a routed master sample clock. Devices resolve by product and serial, so a changed NI-DAQmx alias never silently rebinds to the wrong card. Tone confirmation cross-checks commanded tones against the pulses actually observed.</a:t>
+              <a:t>The pinning behaviour is the part worth dwelling on. It is what stops an edit to a shared phase from quietly changing an experiment that was already validated.</a:t>
             </a:r>
           </a:p>
         </p:txBody>
@@ -655,146 +653,6 @@
           <a:lstStyle/>
           <a:p>
             <a:r>
-              <a:t>The point for a new user is that this replaces post-hoc plotting. A decimated FSR trace is useless for behavioural analysis, so samples are forwarded unthrottled and an armed session gains roughly 166 rows a second. Worth flagging out loud: there is no microphone channel in the system today.</a:t>
-            </a:r>
-          </a:p>
-        </p:txBody>
-      </p:sp>
-      <p:sp>
-        <p:nvSpPr>
-          <p:cNvPr id="4" name="Slide Number Placeholder 3"/>
-          <p:cNvSpPr>
-            <a:spLocks noGrp="1"/>
-          </p:cNvSpPr>
-          <p:nvPr>
-            <p:ph type="sldNum" idx="5" sz="quarter"/>
-          </p:nvPr>
-        </p:nvSpPr>
-        <p:spPr/>
-      </p:sp>
-    </p:spTree>
-  </p:cSld>
-  <p:clrMapOvr>
-    <a:masterClrMapping/>
-  </p:clrMapOvr>
-</p:notes>
-</file>
-
-<file path=ppt/notesSlides/notesSlide12.xml><?xml version="1.0" encoding="utf-8"?>
-<p:notes xmlns:a="http://schemas.openxmlformats.org/drawingml/2006/main" xmlns:p="http://schemas.openxmlformats.org/presentationml/2006/main" xmlns:r="http://schemas.openxmlformats.org/officeDocument/2006/relationships">
-  <p:cSld>
-    <p:spTree>
-      <p:nvGrpSpPr>
-        <p:cNvPr id="1" name=""/>
-        <p:cNvGrpSpPr/>
-        <p:nvPr/>
-      </p:nvGrpSpPr>
-      <p:grpSpPr>
-        <a:xfrm>
-          <a:off x="0" y="0"/>
-          <a:ext cx="0" cy="0"/>
-          <a:chOff x="0" y="0"/>
-          <a:chExt cx="0" cy="0"/>
-        </a:xfrm>
-      </p:grpSpPr>
-      <p:sp>
-        <p:nvSpPr>
-          <p:cNvPr id="2" name="Slide Image Placeholder 1"/>
-          <p:cNvSpPr>
-            <a:spLocks noGrp="1"/>
-          </p:cNvSpPr>
-          <p:nvPr>
-            <p:ph type="sldImg" idx="2"/>
-          </p:nvPr>
-        </p:nvSpPr>
-        <p:spPr/>
-      </p:sp>
-      <p:sp>
-        <p:nvSpPr>
-          <p:cNvPr id="3" name="Notes Placeholder 2"/>
-          <p:cNvSpPr>
-            <a:spLocks noGrp="1"/>
-          </p:cNvSpPr>
-          <p:nvPr>
-            <p:ph type="body" idx="3" sz="quarter"/>
-          </p:nvPr>
-        </p:nvSpPr>
-        <p:spPr/>
-        <p:txBody>
-          <a:bodyPr/>
-          <a:lstStyle/>
-          <a:p>
-            <a:r>
-              <a:t>The pinning behaviour is the part worth dwelling on. It is what stops an edit to a shared phase from quietly changing an experiment that was already validated.</a:t>
-            </a:r>
-          </a:p>
-        </p:txBody>
-      </p:sp>
-      <p:sp>
-        <p:nvSpPr>
-          <p:cNvPr id="4" name="Slide Number Placeholder 3"/>
-          <p:cNvSpPr>
-            <a:spLocks noGrp="1"/>
-          </p:cNvSpPr>
-          <p:nvPr>
-            <p:ph type="sldNum" idx="5" sz="quarter"/>
-          </p:nvPr>
-        </p:nvSpPr>
-        <p:spPr/>
-      </p:sp>
-    </p:spTree>
-  </p:cSld>
-  <p:clrMapOvr>
-    <a:masterClrMapping/>
-  </p:clrMapOvr>
-</p:notes>
-</file>
-
-<file path=ppt/notesSlides/notesSlide13.xml><?xml version="1.0" encoding="utf-8"?>
-<p:notes xmlns:a="http://schemas.openxmlformats.org/drawingml/2006/main" xmlns:p="http://schemas.openxmlformats.org/presentationml/2006/main" xmlns:r="http://schemas.openxmlformats.org/officeDocument/2006/relationships">
-  <p:cSld>
-    <p:spTree>
-      <p:nvGrpSpPr>
-        <p:cNvPr id="1" name=""/>
-        <p:cNvGrpSpPr/>
-        <p:nvPr/>
-      </p:nvGrpSpPr>
-      <p:grpSpPr>
-        <a:xfrm>
-          <a:off x="0" y="0"/>
-          <a:ext cx="0" cy="0"/>
-          <a:chOff x="0" y="0"/>
-          <a:chExt cx="0" cy="0"/>
-        </a:xfrm>
-      </p:grpSpPr>
-      <p:sp>
-        <p:nvSpPr>
-          <p:cNvPr id="2" name="Slide Image Placeholder 1"/>
-          <p:cNvSpPr>
-            <a:spLocks noGrp="1"/>
-          </p:cNvSpPr>
-          <p:nvPr>
-            <p:ph type="sldImg" idx="2"/>
-          </p:nvPr>
-        </p:nvSpPr>
-        <p:spPr/>
-      </p:sp>
-      <p:sp>
-        <p:nvSpPr>
-          <p:cNvPr id="3" name="Notes Placeholder 2"/>
-          <p:cNvSpPr>
-            <a:spLocks noGrp="1"/>
-          </p:cNvSpPr>
-          <p:nvPr>
-            <p:ph type="body" idx="3" sz="quarter"/>
-          </p:nvPr>
-        </p:nvSpPr>
-        <p:spPr/>
-        <p:txBody>
-          <a:bodyPr/>
-          <a:lstStyle/>
-          <a:p>
-            <a:r>
               <a:t>Run order — launch with --demo or toggle Tools &gt; Demo Mode while idle; show both camera panels carrying their own overlay; show the NI-DAQ signal stream; drive the pellet device by hand; open the protocol editor and the experiment sidebar; start a recording and let trials run; stop and show the session directory with its DEMO marker. Point at the red banner — it is there so nobody mistakes a demo session for data.</a:t>
             </a:r>
           </a:p>
@@ -935,7 +793,7 @@
           <a:lstStyle/>
           <a:p>
             <a:r>
-              <a:t>This slide exists so the numbers later have something to be measured against. Do not let 5 ms drift into sounding like an average — it is the tail figure the loop is designed to hold.</a:t>
+              <a:t>This slide exists so the later numbers have something to be measured against. The user-facing consequence is the line that matters: before, pose was a recording product; now it is a control input. Keep 5 ms described as a budget and a tail figure, never an average.</a:t>
             </a:r>
           </a:p>
         </p:txBody>
@@ -1005,7 +863,7 @@
           <a:lstStyle/>
           <a:p>
             <a:r>
-              <a:t>This is the organising idea of the whole section. The payoff for a user is that there are now two closed loops available — the fast ROI reflex, and machine vision on the pose stream — rather than one compromise between them.</a:t>
+              <a:t>This is the words-before-the-graph slide. Technical detail for the members who want it: partial batch and the lean predict path need the PyTorch engine, because the TensorFlow graph fixes its batch size; the ROI crop from 256 to 128 px is opt-in and worth about 2.6x on the forward pass; the decode rewrite and the freshness drain are always on and model-independent. The freshness drain alone took end-to-end from 17.6 to 13.9 ms and cut frames the loop could not hand over from 35.2% to 0.7%.</a:t>
             </a:r>
           </a:p>
         </p:txBody>
@@ -1075,7 +933,7 @@
           <a:lstStyle/>
           <a:p>
             <a:r>
-              <a:t>Adopted: SCHED_FIFO plus the performance CPU governor. Both a PREEMPT_RT kernel and core pinning were measured and declined — stock Linux already preempts SCHED_OTHER for SCHED_FIFO, and the result leaves roughly 32x headroom under a load harsher than real acquisition.</a:t>
+              <a:t>Left: under a 16-process load the reflex loop's worst case went from 6.05 ms, which breaks the budget, to 0.155 ms with zero missed deadlines and the full 900 Hz cadence restored. No PREEMPT_RT kernel and no core pinning — both measured, both declined. Right: the three pose-stream changes, each shown against its own before. Units differ between rows, which is why they are labelled per row rather than sharing an axis. All figures are rig measurements on this hardware, not claims about other cards.</a:t>
             </a:r>
           </a:p>
         </p:txBody>
@@ -1145,7 +1003,7 @@
           <a:lstStyle/>
           <a:p>
             <a:r>
-              <a:t>Partial batch — running the 2 real frames instead of a padded 6 — took 54.8 to 25.3 ms, and needs the PyTorch engine because the TensorFlow graph fixes its batch size. The decode rewrite, argmax instead of sort with cached column indices and numpy instead of pandas, is always on and model-independent. Also gated: an ROI crop from 256 to 128 px, worth about 2.6x on the forward pass, and a lean predict path worth about 1.2 ms per call. CUDA-graph capture, 7.4 to 3.6 ms, is YOLO-backend only. The engine migration to PyTorch is roughly neutral like-for-like — its value is unlocking newer GPUs, dynamic batching and everything above it.</a:t>
+              <a:t>The honest framing is a menu, not a winner. A user optimising for a tight closed loop picks differently from one optimising for keypoint accuracy in later analysis. The per-backbone threshold matters: a cspnext_s never scores above 0.33, so a single global threshold would hold the reach flag permanently false.</a:t>
             </a:r>
           </a:p>
         </p:txBody>
@@ -1215,7 +1073,7 @@
           <a:lstStyle/>
           <a:p>
             <a:r>
-              <a:t>Worth pairing with the Tier 1 slide — the governor is one of the two always-on system settings, alongside real-time scheduling.</a:t>
+              <a:t>If asked about flags: a default rig gets the always-on wins, the decode rewrite and the freshness drain, plus the Tier 1 scheduling. The partial batch and lean predict path need the PyTorch backend selected, and the ROI crop is opt-in.</a:t>
             </a:r>
           </a:p>
         </p:txBody>
@@ -1285,7 +1143,7 @@
           <a:lstStyle/>
           <a:p>
             <a:r>
-              <a:t>This is the correctness property, not a speedup, and it is what makes "pose runs below camera rate" an accepted design point rather than a hazard. Worth saying out loud for an audience that will otherwise assume a slow model drops data.</a:t>
+              <a:t>Four sync modes: auto, backplane, external, independent. Compatible PXI cards share PXI_CLK10, a backplane start trigger and a routed master sample clock. Devices resolve by product and serial, so a changed NI-DAQmx alias never silently rebinds to the wrong card. Tone confirmation cross-checks commanded tones against the pulses actually observed.</a:t>
             </a:r>
           </a:p>
         </p:txBody>
@@ -1355,7 +1213,7 @@
           <a:lstStyle/>
           <a:p>
             <a:r>
-              <a:t>This slide is for the technical audience. If asked about INT8 — it could pay on Turing's DP4A, the route tried produced a broken engine, and the correct route is identified but not done. Figures throughout are rig measurements on this hardware; they are not claims about other cards.</a:t>
+              <a:t>The point for a new user is that this replaces post-hoc plotting. A decimated FSR trace is useless for behavioural analysis, so samples are forwarded unthrottled and an armed session gains roughly 166 rows a second. Worth flagging out loud: there is no microphone channel in the system today.</a:t>
             </a:r>
           </a:p>
         </p:txBody>
@@ -4517,7 +4375,7 @@
                 </a:solidFill>
                 <a:latin typeface="Segoe UI"/>
               </a:rPr>
-              <a:t>Benchmarked, and not taken</a:t>
+              <a:t>Signals you can watch while the session runs</a:t>
             </a:r>
           </a:p>
         </p:txBody>
@@ -4554,7 +4412,7 @@
                 </a:solidFill>
                 <a:latin typeface="Segoe UI"/>
               </a:rPr>
-              <a:t>fp16 / mixed precision — 3 to 4x slower on this card. The T1000 has no tensor cores, so the default stays fp32</a:t>
+              <a:t>Tones 1, 2 and 3 as logic traces, with the commanded onset checked against the pulse the DAQ actually saw</a:t>
             </a:r>
           </a:p>
           <a:p>
@@ -4570,7 +4428,7 @@
                 </a:solidFill>
                 <a:latin typeface="Segoe UI"/>
               </a:rPr>
-              <a:t>torch.compile — about 0.99x, and slower on the larger model</a:t>
+              <a:t>Pellet FSR pressure — two sensors at about 83 Hz each, from firmware 2.1.0, on their own stream rather than mixed into the device log</a:t>
             </a:r>
           </a:p>
           <a:p>
@@ -4586,7 +4444,7 @@
                 </a:solidFill>
                 <a:latin typeface="Segoe UI"/>
               </a:rPr>
-              <a:t>ONNX Runtime on CUDA — matches PyTorch at 0.99x</a:t>
+              <a:t>Laser analog command alongside the diode readback, so what was asked for and what came out are on the same axis</a:t>
             </a:r>
           </a:p>
           <a:p>
@@ -4602,7 +4460,7 @@
                 </a:solidFill>
                 <a:latin typeface="Segoe UI"/>
               </a:rPr>
-              <a:t>TensorRT — a real 1.30 to 1.36x, the only external-runtime win, rejected on cost: per-model export, per-card engine builds, 6.4 GB of libraries, a second inference path and a CUDA-version reconciliation</a:t>
+              <a:t>Camera frame pulses and the barcode line, which are what tie video to samples</a:t>
             </a:r>
           </a:p>
           <a:p>
@@ -4618,7 +4476,7 @@
                 </a:solidFill>
                 <a:latin typeface="Segoe UI"/>
               </a:rPr>
-              <a:t>The honest summary: the speed came from removing our own overhead and picking the right architecture, not from a magic runtime</a:t>
+              <a:t>Closed-loop state: what the pose gate answered, when the cue fired, and whether the trial was cancelled</a:t>
             </a:r>
           </a:p>
         </p:txBody>
@@ -4696,7 +4554,7 @@
                 </a:solidFill>
                 <a:latin typeface="Segoe UI"/>
               </a:rPr>
-              <a:t>Every acceleration knob was measured on the rig. Several gave nothing here.</a:t>
+              <a:t>Everything is acquired continuously at 10 kHz and recorded unfiltered. The plot selection only changes what is drawn.</a:t>
             </a:r>
           </a:p>
         </p:txBody>
@@ -4816,14 +4674,131 @@
                 </a:solidFill>
                 <a:latin typeface="Segoe UI"/>
               </a:rPr>
-              <a:t>Everything lands on one timebase</a:t>
-            </a:r>
-          </a:p>
-        </p:txBody>
-      </p:sp>
-      <p:sp>
-        <p:nvSpPr>
-          <p:cNvPr id="3" name="Rectangle 2"/>
+              <a:t>Experiments are composed, not copied</a:t>
+            </a:r>
+          </a:p>
+        </p:txBody>
+      </p:sp>
+      <p:sp>
+        <p:nvSpPr>
+          <p:cNvPr id="3" name="Content Placeholder 2"/>
+          <p:cNvSpPr>
+            <a:spLocks noGrp="1"/>
+          </p:cNvSpPr>
+          <p:nvPr>
+            <p:ph idx="1"/>
+          </p:nvPr>
+        </p:nvSpPr>
+        <p:spPr>
+          <a:xfrm>
+            <a:off x="658368" y="2057400"/>
+            <a:ext cx="10874959" cy="4023360"/>
+          </a:xfrm>
+        </p:spPr>
+        <p:txBody>
+          <a:bodyPr wrap="square"/>
+          <a:lstStyle/>
+          <a:p>
+            <a:pPr>
+              <a:spcAft>
+                <a:spcPts val="1300"/>
+              </a:spcAft>
+            </a:pPr>
+            <a:r>
+              <a:rPr sz="1500" b="0" i="0">
+                <a:solidFill>
+                  <a:srgbClr val="1E242B"/>
+                </a:solidFill>
+                <a:latin typeface="Segoe UI"/>
+              </a:rPr>
+              <a:t>A trial set is a reusable group of trials, saved on its own — trial content only, no epochs or blocks</a:t>
+            </a:r>
+          </a:p>
+          <a:p>
+            <a:pPr>
+              <a:spcAft>
+                <a:spcPts val="1300"/>
+              </a:spcAft>
+            </a:pPr>
+            <a:r>
+              <a:rPr sz="1500" b="0" i="0">
+                <a:solidFill>
+                  <a:srgbClr val="1E242B"/>
+                </a:solidFill>
+                <a:latin typeface="Segoe UI"/>
+              </a:rPr>
+              <a:t>An experiment is an ordered list of set appearances; each entry pins the set revision it was built against, can repeat, and can shuffle trial order within an appearance</a:t>
+            </a:r>
+          </a:p>
+          <a:p>
+            <a:pPr>
+              <a:spcAft>
+                <a:spcPts val="1300"/>
+              </a:spcAft>
+            </a:pPr>
+            <a:r>
+              <a:rPr sz="1500" b="0" i="0">
+                <a:solidFill>
+                  <a:srgbClr val="1E242B"/>
+                </a:solidFill>
+                <a:latin typeface="Segoe UI"/>
+              </a:rPr>
+              <a:t>Compiling flattens it into an ordinary protocol document, so the runner, the schedule and session evidence see nothing new</a:t>
+            </a:r>
+          </a:p>
+          <a:p>
+            <a:pPr>
+              <a:spcAft>
+                <a:spcPts val="1300"/>
+              </a:spcAft>
+            </a:pPr>
+            <a:r>
+              <a:rPr sz="1500" b="0" i="0">
+                <a:solidFill>
+                  <a:srgbClr val="1E242B"/>
+                </a:solidFill>
+                <a:latin typeface="Segoe UI"/>
+              </a:rPr>
+              <a:t>Each appearance becomes a named epoch, and the Sources column names the set every value came from</a:t>
+            </a:r>
+          </a:p>
+          <a:p>
+            <a:pPr>
+              <a:spcAft>
+                <a:spcPts val="1300"/>
+              </a:spcAft>
+            </a:pPr>
+            <a:r>
+              <a:rPr sz="1500" b="0" i="0">
+                <a:solidFill>
+                  <a:srgbClr val="1E242B"/>
+                </a:solidFill>
+                <a:latin typeface="Segoe UI"/>
+              </a:rPr>
+              <a:t>Shuffle seeds are stored on the entry, so a compile can always be repeated exactly</a:t>
+            </a:r>
+          </a:p>
+          <a:p>
+            <a:pPr>
+              <a:spcAft>
+                <a:spcPts val="1300"/>
+              </a:spcAft>
+            </a:pPr>
+            <a:r>
+              <a:rPr sz="1500" b="0" i="0">
+                <a:solidFill>
+                  <a:srgbClr val="1E242B"/>
+                </a:solidFill>
+                <a:latin typeface="Segoe UI"/>
+              </a:rPr>
+              <a:t>Editing a set never repins an existing row; a stale pin is visible, and a compile against a changed set is refused rather than silently different</a:t>
+            </a:r>
+          </a:p>
+        </p:txBody>
+      </p:sp>
+      <p:sp>
+        <p:nvSpPr>
+          <p:cNvPr id="4" name="Rectangle 3"/>
           <p:cNvSpPr/>
           <p:nvPr/>
         </p:nvSpPr>
@@ -4867,7 +4842,7 @@
       </p:sp>
       <p:sp>
         <p:nvSpPr>
-          <p:cNvPr id="4" name="TextBox 3"/>
+          <p:cNvPr id="5" name="TextBox 4"/>
           <p:cNvSpPr txBox="1"/>
           <p:nvPr/>
         </p:nvSpPr>
@@ -4894,35 +4869,11 @@
                 </a:solidFill>
                 <a:latin typeface="Segoe UI"/>
               </a:rPr>
-              <a:t>Cameras, tones, pellet events and laser output are not separately timestamped and hoped to agree.</a:t>
-            </a:r>
-          </a:p>
-        </p:txBody>
-      </p:sp>
-      <p:pic>
-        <p:nvPicPr>
-          <p:cNvPr id="5" name="Picture 4" descr="synchronization.png"/>
-          <p:cNvPicPr>
-            <a:picLocks noChangeAspect="1"/>
-          </p:cNvPicPr>
-          <p:nvPr/>
-        </p:nvPicPr>
-        <p:blipFill>
-          <a:blip r:embed="rId2"/>
-          <a:stretch>
-            <a:fillRect/>
-          </a:stretch>
-        </p:blipFill>
-        <p:spPr>
-          <a:xfrm>
-            <a:off x="658368" y="1847088"/>
-            <a:ext cx="10874959" cy="3663144"/>
-          </a:xfrm>
-          <a:prstGeom prst="rect">
-            <a:avLst/>
-          </a:prstGeom>
-        </p:spPr>
-      </p:pic>
+              <a:t>A phase shared by several experiments is written once.</a:t>
+            </a:r>
+          </a:p>
+        </p:txBody>
+      </p:sp>
       <p:sp>
         <p:nvSpPr>
           <p:cNvPr id="6" name="TextBox 5"/>
@@ -4931,8 +4882,8 @@
         </p:nvSpPr>
         <p:spPr>
           <a:xfrm>
-            <a:off x="658368" y="5638248"/>
-            <a:ext cx="10874959" cy="502920"/>
+            <a:off x="658368" y="6382512"/>
+            <a:ext cx="10874959" cy="292608"/>
           </a:xfrm>
           <a:prstGeom prst="rect">
             <a:avLst/>
@@ -4940,41 +4891,6 @@
           <a:noFill/>
         </p:spPr>
         <p:txBody>
-          <a:bodyPr wrap="square">
-            <a:spAutoFit/>
-          </a:bodyPr>
-          <a:lstStyle/>
-          <a:p>
-            <a:pPr algn="ctr"/>
-            <a:r>
-              <a:rPr sz="1150" b="0" i="1">
-                <a:solidFill>
-                  <a:srgbClr val="6B727B"/>
-                </a:solidFill>
-                <a:latin typeface="Segoe UI"/>
-              </a:rPr>
-              <a:t>Camera frame edges are matched to NI-DAQ samples with a signed offset, a resolution, and a confidence — all written into alignment.json.</a:t>
-            </a:r>
-          </a:p>
-        </p:txBody>
-      </p:sp>
-      <p:sp>
-        <p:nvSpPr>
-          <p:cNvPr id="7" name="TextBox 6"/>
-          <p:cNvSpPr txBox="1"/>
-          <p:nvPr/>
-        </p:nvSpPr>
-        <p:spPr>
-          <a:xfrm>
-            <a:off x="658368" y="6382512"/>
-            <a:ext cx="10874959" cy="292608"/>
-          </a:xfrm>
-          <a:prstGeom prst="rect">
-            <a:avLst/>
-          </a:prstGeom>
-          <a:noFill/>
-        </p:spPr>
-        <p:txBody>
           <a:bodyPr wrap="none">
             <a:spAutoFit/>
           </a:bodyPr>
@@ -4994,7 +4910,7 @@
       </p:sp>
       <p:sp>
         <p:nvSpPr>
-          <p:cNvPr id="8" name="TextBox 7"/>
+          <p:cNvPr id="7" name="TextBox 6"/>
           <p:cNvSpPr txBox="1"/>
           <p:nvPr/>
         </p:nvSpPr>
@@ -5073,115 +4989,14 @@
                 </a:solidFill>
                 <a:latin typeface="Segoe UI"/>
               </a:rPr>
-              <a:t>Signals you can watch while the session runs</a:t>
-            </a:r>
-          </a:p>
-        </p:txBody>
-      </p:sp>
-      <p:sp>
-        <p:nvSpPr>
-          <p:cNvPr id="3" name="Content Placeholder 2"/>
-          <p:cNvSpPr>
-            <a:spLocks noGrp="1"/>
-          </p:cNvSpPr>
-          <p:nvPr>
-            <p:ph idx="1"/>
-          </p:nvPr>
-        </p:nvSpPr>
-        <p:spPr>
-          <a:xfrm>
-            <a:off x="658368" y="2057400"/>
-            <a:ext cx="10874959" cy="4023360"/>
-          </a:xfrm>
-        </p:spPr>
-        <p:txBody>
-          <a:bodyPr wrap="square"/>
-          <a:lstStyle/>
-          <a:p>
-            <a:pPr>
-              <a:spcAft>
-                <a:spcPts val="1300"/>
-              </a:spcAft>
-            </a:pPr>
-            <a:r>
-              <a:rPr sz="1500" b="0" i="0">
-                <a:solidFill>
-                  <a:srgbClr val="1E242B"/>
-                </a:solidFill>
-                <a:latin typeface="Segoe UI"/>
-              </a:rPr>
-              <a:t>Tones 1, 2 and 3 as logic traces, with the commanded onset checked against the pulse the DAQ actually saw</a:t>
-            </a:r>
-          </a:p>
-          <a:p>
-            <a:pPr>
-              <a:spcAft>
-                <a:spcPts val="1300"/>
-              </a:spcAft>
-            </a:pPr>
-            <a:r>
-              <a:rPr sz="1500" b="0" i="0">
-                <a:solidFill>
-                  <a:srgbClr val="1E242B"/>
-                </a:solidFill>
-                <a:latin typeface="Segoe UI"/>
-              </a:rPr>
-              <a:t>Pellet FSR pressure — two sensors at about 83 Hz each, from firmware 2.1.0, on their own stream rather than mixed into the device log</a:t>
-            </a:r>
-          </a:p>
-          <a:p>
-            <a:pPr>
-              <a:spcAft>
-                <a:spcPts val="1300"/>
-              </a:spcAft>
-            </a:pPr>
-            <a:r>
-              <a:rPr sz="1500" b="0" i="0">
-                <a:solidFill>
-                  <a:srgbClr val="1E242B"/>
-                </a:solidFill>
-                <a:latin typeface="Segoe UI"/>
-              </a:rPr>
-              <a:t>Laser analog command alongside the diode readback, so what was asked for and what came out are on the same axis</a:t>
-            </a:r>
-          </a:p>
-          <a:p>
-            <a:pPr>
-              <a:spcAft>
-                <a:spcPts val="1300"/>
-              </a:spcAft>
-            </a:pPr>
-            <a:r>
-              <a:rPr sz="1500" b="0" i="0">
-                <a:solidFill>
-                  <a:srgbClr val="1E242B"/>
-                </a:solidFill>
-                <a:latin typeface="Segoe UI"/>
-              </a:rPr>
-              <a:t>Camera frame pulses and the barcode line, which are what tie video to samples</a:t>
-            </a:r>
-          </a:p>
-          <a:p>
-            <a:pPr>
-              <a:spcAft>
-                <a:spcPts val="1300"/>
-              </a:spcAft>
-            </a:pPr>
-            <a:r>
-              <a:rPr sz="1500" b="0" i="0">
-                <a:solidFill>
-                  <a:srgbClr val="1E242B"/>
-                </a:solidFill>
-                <a:latin typeface="Segoe UI"/>
-              </a:rPr>
-              <a:t>Closed-loop state: what the pose gate answered, when the cue fired, and whether the trial was cancelled</a:t>
-            </a:r>
-          </a:p>
-        </p:txBody>
-      </p:sp>
-      <p:sp>
-        <p:nvSpPr>
-          <p:cNvPr id="4" name="Rectangle 3"/>
+              <a:t>Demo — recorded video, everything else live</a:t>
+            </a:r>
+          </a:p>
+        </p:txBody>
+      </p:sp>
+      <p:sp>
+        <p:nvSpPr>
+          <p:cNvPr id="3" name="Rectangle 2"/>
           <p:cNvSpPr/>
           <p:nvPr/>
         </p:nvSpPr>
@@ -5225,519 +5040,6 @@
       </p:sp>
       <p:sp>
         <p:nvSpPr>
-          <p:cNvPr id="5" name="TextBox 4"/>
-          <p:cNvSpPr txBox="1"/>
-          <p:nvPr/>
-        </p:nvSpPr>
-        <p:spPr>
-          <a:xfrm>
-            <a:off x="658368" y="1371600"/>
-            <a:ext cx="10874959" cy="457200"/>
-          </a:xfrm>
-          <a:prstGeom prst="rect">
-            <a:avLst/>
-          </a:prstGeom>
-          <a:noFill/>
-        </p:spPr>
-        <p:txBody>
-          <a:bodyPr wrap="square">
-            <a:spAutoFit/>
-          </a:bodyPr>
-          <a:lstStyle/>
-          <a:p>
-            <a:r>
-              <a:rPr sz="1400" b="0" i="1">
-                <a:solidFill>
-                  <a:srgbClr val="6B727B"/>
-                </a:solidFill>
-                <a:latin typeface="Segoe UI"/>
-              </a:rPr>
-              <a:t>Everything is acquired continuously at 10 kHz and recorded unfiltered. The plot selection only changes what is drawn.</a:t>
-            </a:r>
-          </a:p>
-        </p:txBody>
-      </p:sp>
-      <p:sp>
-        <p:nvSpPr>
-          <p:cNvPr id="6" name="TextBox 5"/>
-          <p:cNvSpPr txBox="1"/>
-          <p:nvPr/>
-        </p:nvSpPr>
-        <p:spPr>
-          <a:xfrm>
-            <a:off x="658368" y="6382512"/>
-            <a:ext cx="10874959" cy="292608"/>
-          </a:xfrm>
-          <a:prstGeom prst="rect">
-            <a:avLst/>
-          </a:prstGeom>
-          <a:noFill/>
-        </p:spPr>
-        <p:txBody>
-          <a:bodyPr wrap="none">
-            <a:spAutoFit/>
-          </a:bodyPr>
-          <a:lstStyle/>
-          <a:p>
-            <a:r>
-              <a:rPr sz="900" b="0" i="0">
-                <a:solidFill>
-                  <a:srgbClr val="6B727B"/>
-                </a:solidFill>
-                <a:latin typeface="Segoe UI"/>
-              </a:rPr>
-              <a:t>reachAQ</a:t>
-            </a:r>
-          </a:p>
-        </p:txBody>
-      </p:sp>
-      <p:sp>
-        <p:nvSpPr>
-          <p:cNvPr id="7" name="TextBox 6"/>
-          <p:cNvSpPr txBox="1"/>
-          <p:nvPr/>
-        </p:nvSpPr>
-        <p:spPr>
-          <a:xfrm>
-            <a:off x="10893247" y="6382512"/>
-            <a:ext cx="640080" cy="292608"/>
-          </a:xfrm>
-          <a:prstGeom prst="rect">
-            <a:avLst/>
-          </a:prstGeom>
-          <a:noFill/>
-        </p:spPr>
-        <p:txBody>
-          <a:bodyPr wrap="none">
-            <a:spAutoFit/>
-          </a:bodyPr>
-          <a:lstStyle/>
-          <a:p>
-            <a:pPr algn="r"/>
-            <a:r>
-              <a:rPr sz="900" b="0" i="0">
-                <a:solidFill>
-                  <a:srgbClr val="6B727B"/>
-                </a:solidFill>
-                <a:latin typeface="Segoe UI"/>
-              </a:rPr>
-              <a:t>12</a:t>
-            </a:r>
-          </a:p>
-        </p:txBody>
-      </p:sp>
-    </p:spTree>
-  </p:cSld>
-  <p:clrMapOvr>
-    <a:masterClrMapping/>
-  </p:clrMapOvr>
-</p:sld>
-</file>
-
-<file path=ppt/slides/slide13.xml><?xml version="1.0" encoding="utf-8"?>
-<p:sld xmlns:a="http://schemas.openxmlformats.org/drawingml/2006/main" xmlns:p="http://schemas.openxmlformats.org/presentationml/2006/main" xmlns:r="http://schemas.openxmlformats.org/officeDocument/2006/relationships">
-  <p:cSld>
-    <p:spTree>
-      <p:nvGrpSpPr>
-        <p:cNvPr id="1" name=""/>
-        <p:cNvGrpSpPr/>
-        <p:nvPr/>
-      </p:nvGrpSpPr>
-      <p:grpSpPr/>
-      <p:sp>
-        <p:nvSpPr>
-          <p:cNvPr id="2" name="Title 1"/>
-          <p:cNvSpPr>
-            <a:spLocks noGrp="1"/>
-          </p:cNvSpPr>
-          <p:nvPr>
-            <p:ph type="title"/>
-          </p:nvPr>
-        </p:nvSpPr>
-        <p:spPr>
-          <a:xfrm>
-            <a:off x="658368" y="457200"/>
-            <a:ext cx="10874959" cy="868680"/>
-          </a:xfrm>
-        </p:spPr>
-        <p:txBody>
-          <a:bodyPr wrap="square"/>
-          <a:lstStyle/>
-          <a:p>
-            <a:pPr algn="l"/>
-            <a:r>
-              <a:rPr sz="3000" b="1" i="0">
-                <a:solidFill>
-                  <a:srgbClr val="1E242B"/>
-                </a:solidFill>
-                <a:latin typeface="Segoe UI"/>
-              </a:rPr>
-              <a:t>Experiments are composed, not copied</a:t>
-            </a:r>
-          </a:p>
-        </p:txBody>
-      </p:sp>
-      <p:sp>
-        <p:nvSpPr>
-          <p:cNvPr id="3" name="Content Placeholder 2"/>
-          <p:cNvSpPr>
-            <a:spLocks noGrp="1"/>
-          </p:cNvSpPr>
-          <p:nvPr>
-            <p:ph idx="1"/>
-          </p:nvPr>
-        </p:nvSpPr>
-        <p:spPr>
-          <a:xfrm>
-            <a:off x="658368" y="2057400"/>
-            <a:ext cx="10874959" cy="4023360"/>
-          </a:xfrm>
-        </p:spPr>
-        <p:txBody>
-          <a:bodyPr wrap="square"/>
-          <a:lstStyle/>
-          <a:p>
-            <a:pPr>
-              <a:spcAft>
-                <a:spcPts val="1300"/>
-              </a:spcAft>
-            </a:pPr>
-            <a:r>
-              <a:rPr sz="1500" b="0" i="0">
-                <a:solidFill>
-                  <a:srgbClr val="1E242B"/>
-                </a:solidFill>
-                <a:latin typeface="Segoe UI"/>
-              </a:rPr>
-              <a:t>A trial set is a reusable group of trials, saved on its own — trial content only, no epochs or blocks</a:t>
-            </a:r>
-          </a:p>
-          <a:p>
-            <a:pPr>
-              <a:spcAft>
-                <a:spcPts val="1300"/>
-              </a:spcAft>
-            </a:pPr>
-            <a:r>
-              <a:rPr sz="1500" b="0" i="0">
-                <a:solidFill>
-                  <a:srgbClr val="1E242B"/>
-                </a:solidFill>
-                <a:latin typeface="Segoe UI"/>
-              </a:rPr>
-              <a:t>An experiment is an ordered list of set appearances; each entry pins the set revision it was built against, can repeat, and can shuffle trial order within an appearance</a:t>
-            </a:r>
-          </a:p>
-          <a:p>
-            <a:pPr>
-              <a:spcAft>
-                <a:spcPts val="1300"/>
-              </a:spcAft>
-            </a:pPr>
-            <a:r>
-              <a:rPr sz="1500" b="0" i="0">
-                <a:solidFill>
-                  <a:srgbClr val="1E242B"/>
-                </a:solidFill>
-                <a:latin typeface="Segoe UI"/>
-              </a:rPr>
-              <a:t>Compiling flattens it into an ordinary protocol document, so the runner, the schedule and session evidence see nothing new</a:t>
-            </a:r>
-          </a:p>
-          <a:p>
-            <a:pPr>
-              <a:spcAft>
-                <a:spcPts val="1300"/>
-              </a:spcAft>
-            </a:pPr>
-            <a:r>
-              <a:rPr sz="1500" b="0" i="0">
-                <a:solidFill>
-                  <a:srgbClr val="1E242B"/>
-                </a:solidFill>
-                <a:latin typeface="Segoe UI"/>
-              </a:rPr>
-              <a:t>Each appearance becomes a named epoch, and the Sources column names the set every value came from</a:t>
-            </a:r>
-          </a:p>
-          <a:p>
-            <a:pPr>
-              <a:spcAft>
-                <a:spcPts val="1300"/>
-              </a:spcAft>
-            </a:pPr>
-            <a:r>
-              <a:rPr sz="1500" b="0" i="0">
-                <a:solidFill>
-                  <a:srgbClr val="1E242B"/>
-                </a:solidFill>
-                <a:latin typeface="Segoe UI"/>
-              </a:rPr>
-              <a:t>Shuffle seeds are stored on the entry, so a compile can always be repeated exactly</a:t>
-            </a:r>
-          </a:p>
-          <a:p>
-            <a:pPr>
-              <a:spcAft>
-                <a:spcPts val="1300"/>
-              </a:spcAft>
-            </a:pPr>
-            <a:r>
-              <a:rPr sz="1500" b="0" i="0">
-                <a:solidFill>
-                  <a:srgbClr val="1E242B"/>
-                </a:solidFill>
-                <a:latin typeface="Segoe UI"/>
-              </a:rPr>
-              <a:t>Editing a set never repins an existing row; a stale pin is visible, and a compile against a changed set is refused rather than silently different</a:t>
-            </a:r>
-          </a:p>
-        </p:txBody>
-      </p:sp>
-      <p:sp>
-        <p:nvSpPr>
-          <p:cNvPr id="4" name="Rectangle 3"/>
-          <p:cNvSpPr/>
-          <p:nvPr/>
-        </p:nvSpPr>
-        <p:spPr>
-          <a:xfrm>
-            <a:off x="658368" y="1170432"/>
-            <a:ext cx="1005840" cy="38100"/>
-          </a:xfrm>
-          <a:prstGeom prst="rect">
-            <a:avLst/>
-          </a:prstGeom>
-          <a:solidFill>
-            <a:srgbClr val="B3593F"/>
-          </a:solidFill>
-          <a:ln>
-            <a:noFill/>
-          </a:ln>
-          <a:effectLst/>
-        </p:spPr>
-        <p:style>
-          <a:lnRef idx="1">
-            <a:schemeClr val="accent1"/>
-          </a:lnRef>
-          <a:fillRef idx="3">
-            <a:schemeClr val="accent1"/>
-          </a:fillRef>
-          <a:effectRef idx="2">
-            <a:schemeClr val="accent1"/>
-          </a:effectRef>
-          <a:fontRef idx="minor">
-            <a:schemeClr val="lt1"/>
-          </a:fontRef>
-        </p:style>
-        <p:txBody>
-          <a:bodyPr rtlCol="0" anchor="ctr"/>
-          <a:lstStyle/>
-          <a:p>
-            <a:pPr algn="ctr"/>
-          </a:p>
-        </p:txBody>
-      </p:sp>
-      <p:sp>
-        <p:nvSpPr>
-          <p:cNvPr id="5" name="TextBox 4"/>
-          <p:cNvSpPr txBox="1"/>
-          <p:nvPr/>
-        </p:nvSpPr>
-        <p:spPr>
-          <a:xfrm>
-            <a:off x="658368" y="1371600"/>
-            <a:ext cx="10874959" cy="457200"/>
-          </a:xfrm>
-          <a:prstGeom prst="rect">
-            <a:avLst/>
-          </a:prstGeom>
-          <a:noFill/>
-        </p:spPr>
-        <p:txBody>
-          <a:bodyPr wrap="square">
-            <a:spAutoFit/>
-          </a:bodyPr>
-          <a:lstStyle/>
-          <a:p>
-            <a:r>
-              <a:rPr sz="1400" b="0" i="1">
-                <a:solidFill>
-                  <a:srgbClr val="6B727B"/>
-                </a:solidFill>
-                <a:latin typeface="Segoe UI"/>
-              </a:rPr>
-              <a:t>A phase shared by several experiments is written once.</a:t>
-            </a:r>
-          </a:p>
-        </p:txBody>
-      </p:sp>
-      <p:sp>
-        <p:nvSpPr>
-          <p:cNvPr id="6" name="TextBox 5"/>
-          <p:cNvSpPr txBox="1"/>
-          <p:nvPr/>
-        </p:nvSpPr>
-        <p:spPr>
-          <a:xfrm>
-            <a:off x="658368" y="6382512"/>
-            <a:ext cx="10874959" cy="292608"/>
-          </a:xfrm>
-          <a:prstGeom prst="rect">
-            <a:avLst/>
-          </a:prstGeom>
-          <a:noFill/>
-        </p:spPr>
-        <p:txBody>
-          <a:bodyPr wrap="none">
-            <a:spAutoFit/>
-          </a:bodyPr>
-          <a:lstStyle/>
-          <a:p>
-            <a:r>
-              <a:rPr sz="900" b="0" i="0">
-                <a:solidFill>
-                  <a:srgbClr val="6B727B"/>
-                </a:solidFill>
-                <a:latin typeface="Segoe UI"/>
-              </a:rPr>
-              <a:t>reachAQ</a:t>
-            </a:r>
-          </a:p>
-        </p:txBody>
-      </p:sp>
-      <p:sp>
-        <p:nvSpPr>
-          <p:cNvPr id="7" name="TextBox 6"/>
-          <p:cNvSpPr txBox="1"/>
-          <p:nvPr/>
-        </p:nvSpPr>
-        <p:spPr>
-          <a:xfrm>
-            <a:off x="10893247" y="6382512"/>
-            <a:ext cx="640080" cy="292608"/>
-          </a:xfrm>
-          <a:prstGeom prst="rect">
-            <a:avLst/>
-          </a:prstGeom>
-          <a:noFill/>
-        </p:spPr>
-        <p:txBody>
-          <a:bodyPr wrap="none">
-            <a:spAutoFit/>
-          </a:bodyPr>
-          <a:lstStyle/>
-          <a:p>
-            <a:pPr algn="r"/>
-            <a:r>
-              <a:rPr sz="900" b="0" i="0">
-                <a:solidFill>
-                  <a:srgbClr val="6B727B"/>
-                </a:solidFill>
-                <a:latin typeface="Segoe UI"/>
-              </a:rPr>
-              <a:t>13</a:t>
-            </a:r>
-          </a:p>
-        </p:txBody>
-      </p:sp>
-    </p:spTree>
-  </p:cSld>
-  <p:clrMapOvr>
-    <a:masterClrMapping/>
-  </p:clrMapOvr>
-</p:sld>
-</file>
-
-<file path=ppt/slides/slide14.xml><?xml version="1.0" encoding="utf-8"?>
-<p:sld xmlns:a="http://schemas.openxmlformats.org/drawingml/2006/main" xmlns:p="http://schemas.openxmlformats.org/presentationml/2006/main" xmlns:r="http://schemas.openxmlformats.org/officeDocument/2006/relationships">
-  <p:cSld>
-    <p:spTree>
-      <p:nvGrpSpPr>
-        <p:cNvPr id="1" name=""/>
-        <p:cNvGrpSpPr/>
-        <p:nvPr/>
-      </p:nvGrpSpPr>
-      <p:grpSpPr/>
-      <p:sp>
-        <p:nvSpPr>
-          <p:cNvPr id="2" name="Title 1"/>
-          <p:cNvSpPr>
-            <a:spLocks noGrp="1"/>
-          </p:cNvSpPr>
-          <p:nvPr>
-            <p:ph type="title"/>
-          </p:nvPr>
-        </p:nvSpPr>
-        <p:spPr>
-          <a:xfrm>
-            <a:off x="658368" y="457200"/>
-            <a:ext cx="10874959" cy="868680"/>
-          </a:xfrm>
-        </p:spPr>
-        <p:txBody>
-          <a:bodyPr wrap="square"/>
-          <a:lstStyle/>
-          <a:p>
-            <a:pPr algn="l"/>
-            <a:r>
-              <a:rPr sz="3000" b="1" i="0">
-                <a:solidFill>
-                  <a:srgbClr val="1E242B"/>
-                </a:solidFill>
-                <a:latin typeface="Segoe UI"/>
-              </a:rPr>
-              <a:t>Demo — recorded video, everything else live</a:t>
-            </a:r>
-          </a:p>
-        </p:txBody>
-      </p:sp>
-      <p:sp>
-        <p:nvSpPr>
-          <p:cNvPr id="3" name="Rectangle 2"/>
-          <p:cNvSpPr/>
-          <p:nvPr/>
-        </p:nvSpPr>
-        <p:spPr>
-          <a:xfrm>
-            <a:off x="658368" y="1170432"/>
-            <a:ext cx="1005840" cy="38100"/>
-          </a:xfrm>
-          <a:prstGeom prst="rect">
-            <a:avLst/>
-          </a:prstGeom>
-          <a:solidFill>
-            <a:srgbClr val="B3593F"/>
-          </a:solidFill>
-          <a:ln>
-            <a:noFill/>
-          </a:ln>
-          <a:effectLst/>
-        </p:spPr>
-        <p:style>
-          <a:lnRef idx="1">
-            <a:schemeClr val="accent1"/>
-          </a:lnRef>
-          <a:fillRef idx="3">
-            <a:schemeClr val="accent1"/>
-          </a:fillRef>
-          <a:effectRef idx="2">
-            <a:schemeClr val="accent1"/>
-          </a:effectRef>
-          <a:fontRef idx="minor">
-            <a:schemeClr val="lt1"/>
-          </a:fontRef>
-        </p:style>
-        <p:txBody>
-          <a:bodyPr rtlCol="0" anchor="ctr"/>
-          <a:lstStyle/>
-          <a:p>
-            <a:pPr algn="ctr"/>
-          </a:p>
-        </p:txBody>
-      </p:sp>
-      <p:sp>
-        <p:nvSpPr>
           <p:cNvPr id="4" name="TextBox 3"/>
           <p:cNvSpPr txBox="1"/>
           <p:nvPr/>
@@ -5893,7 +5195,7 @@
                 </a:solidFill>
                 <a:latin typeface="Segoe UI"/>
               </a:rPr>
-              <a:t>14</a:t>
+              <a:t>12</a:t>
             </a:r>
           </a:p>
         </p:txBody>
@@ -6711,7 +6013,7 @@
                 </a:solidFill>
                 <a:latin typeface="Segoe UI"/>
               </a:rPr>
-              <a:t>The budget</a:t>
+              <a:t>Why pose could not close a loop before</a:t>
             </a:r>
           </a:p>
         </p:txBody>
@@ -6723,13 +6025,13 @@
             <a:spLocks noGrp="1"/>
           </p:cNvSpPr>
           <p:nvPr>
-            <p:ph idx="1"/>
-          </p:nvPr>
-        </p:nvSpPr>
-        <p:spPr>
-          <a:xfrm>
-            <a:off x="658368" y="2057400"/>
-            <a:ext cx="10874959" cy="4023360"/>
+            <p:ph idx="1" sz="half"/>
+          </p:nvPr>
+        </p:nvSpPr>
+        <p:spPr>
+          <a:xfrm>
+            <a:off x="658368" y="2487168"/>
+            <a:ext cx="5186019" cy="3593592"/>
           </a:xfrm>
         </p:spPr>
         <p:txBody>
@@ -6738,72 +6040,125 @@
           <a:p>
             <a:pPr>
               <a:spcAft>
-                <a:spcPts val="1300"/>
+                <a:spcPts val="1100"/>
               </a:spcAft>
             </a:pPr>
             <a:r>
-              <a:rPr sz="1500" b="0" i="0">
+              <a:rPr sz="1350" b="0" i="0">
                 <a:solidFill>
                   <a:srgbClr val="1E242B"/>
                 </a:solidFill>
                 <a:latin typeface="Segoe UI"/>
               </a:rPr>
-              <a:t>Reach cameras run at 150 fps — a 6.667 ms per-frame budget for the perception stream</a:t>
+              <a:t>Reach cameras run at 150 fps — a 6.667 ms per-frame budget for the pose stream</a:t>
             </a:r>
           </a:p>
           <a:p>
             <a:pPr>
               <a:spcAft>
-                <a:spcPts val="1300"/>
+                <a:spcPts val="1100"/>
               </a:spcAft>
             </a:pPr>
             <a:r>
-              <a:rPr sz="1500" b="0" i="0">
+              <a:rPr sz="1350" b="0" i="0">
                 <a:solidFill>
                   <a:srgbClr val="1E242B"/>
                 </a:solidFill>
                 <a:latin typeface="Segoe UI"/>
               </a:rPr>
-              <a:t>The stim camera runs at 900 Hz — a 5 ms budget for the reflex loop. That is a design target and a tail figure, not a measured average</a:t>
+              <a:t>The stim camera runs at 900 Hz — a 5 ms budget for the reflex that fires the laser. That is a design target and a tail figure, not an average</a:t>
             </a:r>
           </a:p>
           <a:p>
             <a:pPr>
               <a:spcAft>
-                <a:spcPts val="1300"/>
+                <a:spcPts val="1100"/>
               </a:spcAft>
             </a:pPr>
             <a:r>
-              <a:rPr sz="1500" b="0" i="0">
+              <a:rPr sz="1350" b="0" i="0">
                 <a:solidFill>
                   <a:srgbClr val="1E242B"/>
                 </a:solidFill>
                 <a:latin typeface="Segoe UI"/>
               </a:rPr>
-              <a:t>The starting point: the DeepLabCut TensorFlow ResNet-50 pose path cost 54.8 ms per batch, about 18 Hz</a:t>
-            </a:r>
-          </a:p>
+              <a:t>The reflex detector's own compute is under 0.1 ms, so its problem was never arithmetic — it was the OS delivering it on time</a:t>
+            </a:r>
+          </a:p>
+        </p:txBody>
+      </p:sp>
+      <p:sp>
+        <p:nvSpPr>
+          <p:cNvPr id="4" name="Content Placeholder 3"/>
+          <p:cNvSpPr>
+            <a:spLocks noGrp="1"/>
+          </p:cNvSpPr>
+          <p:nvPr>
+            <p:ph idx="2" sz="half"/>
+          </p:nvPr>
+        </p:nvSpPr>
+        <p:spPr>
+          <a:xfrm>
+            <a:off x="6347307" y="2487168"/>
+            <a:ext cx="5186019" cy="3593592"/>
+          </a:xfrm>
+        </p:spPr>
+        <p:txBody>
+          <a:bodyPr wrap="square"/>
+          <a:lstStyle/>
           <a:p>
             <a:pPr>
               <a:spcAft>
-                <a:spcPts val="1300"/>
+                <a:spcPts val="1100"/>
               </a:spcAft>
             </a:pPr>
             <a:r>
-              <a:rPr sz="1500" b="0" i="0">
+              <a:rPr sz="1350" b="0" i="0">
                 <a:solidFill>
                   <a:srgbClr val="1E242B"/>
                 </a:solidFill>
                 <a:latin typeface="Segoe UI"/>
               </a:rPr>
-              <a:t>That single number was the largest latency term in the system, and far below camera rate — which is what made pose useless for closing a loop</a:t>
-            </a:r>
-          </a:p>
-        </p:txBody>
-      </p:sp>
-      <p:sp>
-        <p:nvSpPr>
-          <p:cNvPr id="4" name="Rectangle 3"/>
+              <a:t>DeepLabCut on TensorFlow with ResNet-50 cost 54.8 ms per batch — about 18 Hz</a:t>
+            </a:r>
+          </a:p>
+          <a:p>
+            <a:pPr>
+              <a:spcAft>
+                <a:spcPts val="1100"/>
+              </a:spcAft>
+            </a:pPr>
+            <a:r>
+              <a:rPr sz="1350" b="0" i="0">
+                <a:solidFill>
+                  <a:srgbClr val="1E242B"/>
+                </a:solidFill>
+                <a:latin typeface="Segoe UI"/>
+              </a:rPr>
+              <a:t>That was the largest single latency term in the system, and roughly eight times over the frame budget</a:t>
+            </a:r>
+          </a:p>
+          <a:p>
+            <a:pPr>
+              <a:spcAft>
+                <a:spcPts val="1100"/>
+              </a:spcAft>
+            </a:pPr>
+            <a:r>
+              <a:rPr sz="1350" b="0" i="0">
+                <a:solidFill>
+                  <a:srgbClr val="1E242B"/>
+                </a:solidFill>
+                <a:latin typeface="Segoe UI"/>
+              </a:rPr>
+              <a:t>Pose could describe behaviour afterwards, but nothing could be decided from it while the reach was happening</a:t>
+            </a:r>
+          </a:p>
+        </p:txBody>
+      </p:sp>
+      <p:sp>
+        <p:nvSpPr>
+          <p:cNvPr id="5" name="Rectangle 4"/>
           <p:cNvSpPr/>
           <p:nvPr/>
         </p:nvSpPr>
@@ -6847,7 +6202,7 @@
       </p:sp>
       <p:sp>
         <p:nvSpPr>
-          <p:cNvPr id="5" name="TextBox 4"/>
+          <p:cNvPr id="6" name="TextBox 5"/>
           <p:cNvSpPr txBox="1"/>
           <p:nvPr/>
         </p:nvSpPr>
@@ -6874,21 +6229,21 @@
                 </a:solidFill>
                 <a:latin typeface="Segoe UI"/>
               </a:rPr>
-              <a:t>Two cameras, two clocks, two very different deadlines.</a:t>
-            </a:r>
-          </a:p>
-        </p:txBody>
-      </p:sp>
-      <p:sp>
-        <p:nvSpPr>
-          <p:cNvPr id="6" name="TextBox 5"/>
+              <a:t>Two cameras, two deadlines. The pose path missed its by a factor of eight.</a:t>
+            </a:r>
+          </a:p>
+        </p:txBody>
+      </p:sp>
+      <p:sp>
+        <p:nvSpPr>
+          <p:cNvPr id="7" name="TextBox 6"/>
           <p:cNvSpPr txBox="1"/>
           <p:nvPr/>
         </p:nvSpPr>
         <p:spPr>
           <a:xfrm>
-            <a:off x="658368" y="6382512"/>
-            <a:ext cx="10874959" cy="292608"/>
+            <a:off x="658368" y="2103120"/>
+            <a:ext cx="5186019" cy="347472"/>
           </a:xfrm>
           <a:prstGeom prst="rect">
             <a:avLst/>
@@ -6902,6 +6257,74 @@
           <a:lstStyle/>
           <a:p>
             <a:r>
+              <a:rPr sz="1500" b="1" i="0">
+                <a:solidFill>
+                  <a:srgbClr val="6B7F9E"/>
+                </a:solidFill>
+                <a:latin typeface="Segoe UI"/>
+              </a:rPr>
+              <a:t>What has to be fast</a:t>
+            </a:r>
+          </a:p>
+        </p:txBody>
+      </p:sp>
+      <p:sp>
+        <p:nvSpPr>
+          <p:cNvPr id="8" name="TextBox 7"/>
+          <p:cNvSpPr txBox="1"/>
+          <p:nvPr/>
+        </p:nvSpPr>
+        <p:spPr>
+          <a:xfrm>
+            <a:off x="6347307" y="2103120"/>
+            <a:ext cx="5186019" cy="347472"/>
+          </a:xfrm>
+          <a:prstGeom prst="rect">
+            <a:avLst/>
+          </a:prstGeom>
+          <a:noFill/>
+        </p:spPr>
+        <p:txBody>
+          <a:bodyPr wrap="none">
+            <a:spAutoFit/>
+          </a:bodyPr>
+          <a:lstStyle/>
+          <a:p>
+            <a:r>
+              <a:rPr sz="1500" b="1" i="0">
+                <a:solidFill>
+                  <a:srgbClr val="B3593F"/>
+                </a:solidFill>
+                <a:latin typeface="Segoe UI"/>
+              </a:rPr>
+              <a:t>Where it started</a:t>
+            </a:r>
+          </a:p>
+        </p:txBody>
+      </p:sp>
+      <p:sp>
+        <p:nvSpPr>
+          <p:cNvPr id="9" name="TextBox 8"/>
+          <p:cNvSpPr txBox="1"/>
+          <p:nvPr/>
+        </p:nvSpPr>
+        <p:spPr>
+          <a:xfrm>
+            <a:off x="658368" y="6382512"/>
+            <a:ext cx="10874959" cy="292608"/>
+          </a:xfrm>
+          <a:prstGeom prst="rect">
+            <a:avLst/>
+          </a:prstGeom>
+          <a:noFill/>
+        </p:spPr>
+        <p:txBody>
+          <a:bodyPr wrap="none">
+            <a:spAutoFit/>
+          </a:bodyPr>
+          <a:lstStyle/>
+          <a:p>
+            <a:r>
               <a:rPr sz="900" b="0" i="0">
                 <a:solidFill>
                   <a:srgbClr val="6B727B"/>
@@ -6915,7 +6338,7 @@
       </p:sp>
       <p:sp>
         <p:nvSpPr>
-          <p:cNvPr id="7" name="TextBox 6"/>
+          <p:cNvPr id="10" name="TextBox 9"/>
           <p:cNvSpPr txBox="1"/>
           <p:nvPr/>
         </p:nvSpPr>
@@ -6994,7 +6417,7 @@
                 </a:solidFill>
                 <a:latin typeface="Segoe UI"/>
               </a:rPr>
-              <a:t>Two tiers, not one fast path</a:t>
+              <a:t>What we changed</a:t>
             </a:r>
           </a:p>
         </p:txBody>
@@ -7006,13 +6429,13 @@
             <a:spLocks noGrp="1"/>
           </p:cNvSpPr>
           <p:nvPr>
-            <p:ph idx="1" sz="half"/>
-          </p:nvPr>
-        </p:nvSpPr>
-        <p:spPr>
-          <a:xfrm>
-            <a:off x="658368" y="2487168"/>
-            <a:ext cx="5186019" cy="3593592"/>
+            <p:ph idx="1"/>
+          </p:nvPr>
+        </p:nvSpPr>
+        <p:spPr>
+          <a:xfrm>
+            <a:off x="658368" y="2057400"/>
+            <a:ext cx="10874959" cy="4023360"/>
           </a:xfrm>
         </p:spPr>
         <p:txBody>
@@ -7021,125 +6444,104 @@
           <a:p>
             <a:pPr>
               <a:spcAft>
-                <a:spcPts val="1100"/>
+                <a:spcPts val="1300"/>
               </a:spcAft>
             </a:pPr>
             <a:r>
-              <a:rPr sz="1350" b="0" i="0">
+              <a:rPr sz="1500" b="0" i="0">
                 <a:solidFill>
                   <a:srgbClr val="1E242B"/>
                 </a:solidFill>
                 <a:latin typeface="Segoe UI"/>
               </a:rPr>
-              <a:t>The stim camera's first-reach detector triggers the laser</a:t>
+              <a:t>Split the work in two. The reflex loop keeps its millisecond deadline; the pose stream is allowed to run slower than the cameras, because it informs behaviour rather than firing hardware</a:t>
             </a:r>
           </a:p>
           <a:p>
             <a:pPr>
               <a:spcAft>
-                <a:spcPts val="1100"/>
+                <a:spcPts val="1300"/>
               </a:spcAft>
             </a:pPr>
             <a:r>
-              <a:rPr sz="1350" b="0" i="0">
+              <a:rPr sz="1500" b="0" i="0">
                 <a:solidFill>
                   <a:srgbClr val="1E242B"/>
                 </a:solidFill>
                 <a:latin typeface="Segoe UI"/>
               </a:rPr>
-              <a:t>This is the path that genuinely must be fast</a:t>
+              <a:t>Gave the reflex loop real-time scheduling (SCHED_FIFO) and a performance CPU governor, so a busy machine cannot delay it</a:t>
             </a:r>
           </a:p>
           <a:p>
             <a:pPr>
               <a:spcAft>
-                <a:spcPts val="1100"/>
+                <a:spcPts val="1300"/>
               </a:spcAft>
             </a:pPr>
             <a:r>
-              <a:rPr sz="1350" b="0" i="0">
+              <a:rPr sz="1500" b="0" i="0">
                 <a:solidFill>
                   <a:srgbClr val="1E242B"/>
                 </a:solidFill>
                 <a:latin typeface="Segoe UI"/>
               </a:rPr>
-              <a:t>Its own compute is under 0.1 ms, so the work was making the OS deliver it on time, not making it compute less</a:t>
-            </a:r>
-          </a:p>
-        </p:txBody>
-      </p:sp>
-      <p:sp>
-        <p:nvSpPr>
-          <p:cNvPr id="4" name="Content Placeholder 3"/>
-          <p:cNvSpPr>
-            <a:spLocks noGrp="1"/>
-          </p:cNvSpPr>
-          <p:nvPr>
-            <p:ph idx="2" sz="half"/>
-          </p:nvPr>
-        </p:nvSpPr>
-        <p:spPr>
-          <a:xfrm>
-            <a:off x="6347307" y="2487168"/>
-            <a:ext cx="5186019" cy="3593592"/>
-          </a:xfrm>
-        </p:spPr>
-        <p:txBody>
-          <a:bodyPr wrap="square"/>
-          <a:lstStyle/>
+              <a:t>Stopped padding the inference batch — run the 2 real frames instead of a padded 6 — and rewrote the CPU decode to use argmax and numpy instead of a sort and pandas</a:t>
+            </a:r>
+          </a:p>
           <a:p>
             <a:pPr>
               <a:spcAft>
-                <a:spcPts val="1100"/>
+                <a:spcPts val="1300"/>
               </a:spcAft>
             </a:pPr>
             <a:r>
-              <a:rPr sz="1350" b="0" i="0">
+              <a:rPr sz="1500" b="0" i="0">
                 <a:solidFill>
                   <a:srgbClr val="1E242B"/>
                 </a:solidFill>
                 <a:latin typeface="Segoe UI"/>
               </a:rPr>
-              <a:t>The reach-camera pose stream, informing behaviour and gating</a:t>
+              <a:t>Captured the CUDA graph for the live batch and replayed it, instead of re-submitting the same work every call</a:t>
             </a:r>
           </a:p>
           <a:p>
             <a:pPr>
               <a:spcAft>
-                <a:spcPts val="1100"/>
+                <a:spcPts val="1300"/>
               </a:spcAft>
             </a:pPr>
             <a:r>
-              <a:rPr sz="1350" b="0" i="0">
+              <a:rPr sz="1500" b="0" i="0">
                 <a:solidFill>
                   <a:srgbClr val="1E242B"/>
                 </a:solidFill>
                 <a:latin typeface="Segoe UI"/>
               </a:rPr>
-              <a:t>It does not have to hit camera rate to be useful</a:t>
+              <a:t>Made the pose stage unable to hurt acquisition: it takes frames on a separate non-blocking queue, always takes the newest and drops stale ones, so latency never grows into a backlog</a:t>
             </a:r>
           </a:p>
           <a:p>
             <a:pPr>
               <a:spcAft>
-                <a:spcPts val="1100"/>
+                <a:spcPts val="1300"/>
               </a:spcAft>
             </a:pPr>
             <a:r>
-              <a:rPr sz="1350" b="0" i="0">
+              <a:rPr sz="1500" b="0" i="0">
                 <a:solidFill>
                   <a:srgbClr val="1E242B"/>
                 </a:solidFill>
                 <a:latin typeface="Segoe UI"/>
               </a:rPr>
-              <a:t>Accepting that is what let an accuracy decision beat a raw-speed one</a:t>
-            </a:r>
-          </a:p>
-        </p:txBody>
-      </p:sp>
-      <p:sp>
-        <p:nvSpPr>
-          <p:cNvPr id="5" name="Rectangle 4"/>
+              <a:t>Tried the usual accelerators and kept none of them — fp16, torch.compile and ONNX Runtime all measured at or below parity on this card, and TensorRT's real 1.3x was not worth a second inference path</a:t>
+            </a:r>
+          </a:p>
+        </p:txBody>
+      </p:sp>
+      <p:sp>
+        <p:nvSpPr>
+          <p:cNvPr id="4" name="Rectangle 3"/>
           <p:cNvSpPr/>
           <p:nvPr/>
         </p:nvSpPr>
@@ -7183,7 +6585,7 @@
       </p:sp>
       <p:sp>
         <p:nvSpPr>
-          <p:cNvPr id="6" name="TextBox 5"/>
+          <p:cNvPr id="5" name="TextBox 4"/>
           <p:cNvSpPr txBox="1"/>
           <p:nvPr/>
         </p:nvSpPr>
@@ -7210,21 +6612,21 @@
                 </a:solidFill>
                 <a:latin typeface="Segoe UI"/>
               </a:rPr>
-              <a:t>We did not make one model fast enough for everything. We separated the millisecond-critical reflex from the perception stream and optimised each to its own budget.</a:t>
-            </a:r>
-          </a:p>
-        </p:txBody>
-      </p:sp>
-      <p:sp>
-        <p:nvSpPr>
-          <p:cNvPr id="7" name="TextBox 6"/>
+              <a:t>The wins came from removing our own overhead and letting each tier meet its own deadline — not from a faster runtime.</a:t>
+            </a:r>
+          </a:p>
+        </p:txBody>
+      </p:sp>
+      <p:sp>
+        <p:nvSpPr>
+          <p:cNvPr id="6" name="TextBox 5"/>
           <p:cNvSpPr txBox="1"/>
           <p:nvPr/>
         </p:nvSpPr>
         <p:spPr>
           <a:xfrm>
-            <a:off x="658368" y="2103120"/>
-            <a:ext cx="5186019" cy="347472"/>
+            <a:off x="658368" y="6382512"/>
+            <a:ext cx="10874959" cy="292608"/>
           </a:xfrm>
           <a:prstGeom prst="rect">
             <a:avLst/>
@@ -7238,74 +6640,6 @@
           <a:lstStyle/>
           <a:p>
             <a:r>
-              <a:rPr sz="1500" b="1" i="0">
-                <a:solidFill>
-                  <a:srgbClr val="6B7F9E"/>
-                </a:solidFill>
-                <a:latin typeface="Segoe UI"/>
-              </a:rPr>
-              <a:t>Tier 1 — reflex</a:t>
-            </a:r>
-          </a:p>
-        </p:txBody>
-      </p:sp>
-      <p:sp>
-        <p:nvSpPr>
-          <p:cNvPr id="8" name="TextBox 7"/>
-          <p:cNvSpPr txBox="1"/>
-          <p:nvPr/>
-        </p:nvSpPr>
-        <p:spPr>
-          <a:xfrm>
-            <a:off x="6347307" y="2103120"/>
-            <a:ext cx="5186019" cy="347472"/>
-          </a:xfrm>
-          <a:prstGeom prst="rect">
-            <a:avLst/>
-          </a:prstGeom>
-          <a:noFill/>
-        </p:spPr>
-        <p:txBody>
-          <a:bodyPr wrap="none">
-            <a:spAutoFit/>
-          </a:bodyPr>
-          <a:lstStyle/>
-          <a:p>
-            <a:r>
-              <a:rPr sz="1500" b="1" i="0">
-                <a:solidFill>
-                  <a:srgbClr val="B3593F"/>
-                </a:solidFill>
-                <a:latin typeface="Segoe UI"/>
-              </a:rPr>
-              <a:t>Tier 2 — perception</a:t>
-            </a:r>
-          </a:p>
-        </p:txBody>
-      </p:sp>
-      <p:sp>
-        <p:nvSpPr>
-          <p:cNvPr id="9" name="TextBox 8"/>
-          <p:cNvSpPr txBox="1"/>
-          <p:nvPr/>
-        </p:nvSpPr>
-        <p:spPr>
-          <a:xfrm>
-            <a:off x="658368" y="6382512"/>
-            <a:ext cx="10874959" cy="292608"/>
-          </a:xfrm>
-          <a:prstGeom prst="rect">
-            <a:avLst/>
-          </a:prstGeom>
-          <a:noFill/>
-        </p:spPr>
-        <p:txBody>
-          <a:bodyPr wrap="none">
-            <a:spAutoFit/>
-          </a:bodyPr>
-          <a:lstStyle/>
-          <a:p>
-            <a:r>
               <a:rPr sz="900" b="0" i="0">
                 <a:solidFill>
                   <a:srgbClr val="6B727B"/>
@@ -7319,7 +6653,7 @@
       </p:sp>
       <p:sp>
         <p:nvSpPr>
-          <p:cNvPr id="10" name="TextBox 9"/>
+          <p:cNvPr id="7" name="TextBox 6"/>
           <p:cNvSpPr txBox="1"/>
           <p:nvPr/>
         </p:nvSpPr>
@@ -7398,7 +6732,7 @@
                 </a:solidFill>
                 <a:latin typeface="Segoe UI"/>
               </a:rPr>
-              <a:t>Tier 1 — making the reflex land on time</a:t>
+              <a:t>What it measured</a:t>
             </a:r>
           </a:p>
         </p:txBody>
@@ -7476,14 +6810,14 @@
                 </a:solidFill>
                 <a:latin typeface="Segoe UI"/>
               </a:rPr>
-              <a:t>The detector's own compute never exceeds 0.09 ms. The entire problem was scheduler wake-up latency under load.</a:t>
+              <a:t>Same rig, same load, before and after each change.</a:t>
             </a:r>
           </a:p>
         </p:txBody>
       </p:sp>
       <p:pic>
         <p:nvPicPr>
-          <p:cNvPr id="5" name="Picture 4" descr="stim_latency.png"/>
+          <p:cNvPr id="5" name="Picture 4" descr="measurements.png"/>
           <p:cNvPicPr>
             <a:picLocks noChangeAspect="1"/>
           </p:cNvPicPr>
@@ -7497,8 +6831,8 @@
         </p:blipFill>
         <p:spPr>
           <a:xfrm>
-            <a:off x="2092711" y="1847088"/>
-            <a:ext cx="8006272" cy="3822192"/>
+            <a:off x="975777" y="1847088"/>
+            <a:ext cx="10240140" cy="3822192"/>
           </a:xfrm>
           <a:prstGeom prst="rect">
             <a:avLst/>
@@ -7535,7 +6869,7 @@
                 </a:solidFill>
                 <a:latin typeface="Segoe UI"/>
               </a:rPr>
-              <a:t>Under a 16-process load, real-time scheduling took the worst case from 6.05 ms to 0.155 ms, with zero missed deadlines and the full 900 Hz cadence restored.</a:t>
+              <a:t>Measured on an NVIDIA T1000 — a low-end Turing card with no tensor cores, which is why fp16 lost here and why a tensor-core GPU would shift several of these numbers.</a:t>
             </a:r>
           </a:p>
         </p:txBody>
@@ -7655,14 +6989,152 @@
                 </a:solidFill>
                 <a:latin typeface="Segoe UI"/>
               </a:rPr>
-              <a:t>Tier 2 — where the milliseconds went</a:t>
-            </a:r>
-          </a:p>
-        </p:txBody>
-      </p:sp>
-      <p:sp>
-        <p:nvSpPr>
-          <p:cNvPr id="3" name="Rectangle 2"/>
+              <a:t>Pick the model that fits the experiment</a:t>
+            </a:r>
+          </a:p>
+        </p:txBody>
+      </p:sp>
+      <p:sp>
+        <p:nvSpPr>
+          <p:cNvPr id="3" name="Content Placeholder 2"/>
+          <p:cNvSpPr>
+            <a:spLocks noGrp="1"/>
+          </p:cNvSpPr>
+          <p:nvPr>
+            <p:ph idx="1" sz="half"/>
+          </p:nvPr>
+        </p:nvSpPr>
+        <p:spPr>
+          <a:xfrm>
+            <a:off x="658368" y="2487168"/>
+            <a:ext cx="5186019" cy="3593592"/>
+          </a:xfrm>
+        </p:spPr>
+        <p:txBody>
+          <a:bodyPr wrap="square"/>
+          <a:lstStyle/>
+          <a:p>
+            <a:pPr>
+              <a:spcAft>
+                <a:spcPts val="1100"/>
+              </a:spcAft>
+            </a:pPr>
+            <a:r>
+              <a:rPr sz="1350" b="0" i="0">
+                <a:solidFill>
+                  <a:srgbClr val="1E242B"/>
+                </a:solidFill>
+                <a:latin typeface="Segoe UI"/>
+              </a:rPr>
+              <a:t>YOLO — the current default, and the one the CUDA-graph path accelerates</a:t>
+            </a:r>
+          </a:p>
+          <a:p>
+            <a:pPr>
+              <a:spcAft>
+                <a:spcPts val="1100"/>
+              </a:spcAft>
+            </a:pPr>
+            <a:r>
+              <a:rPr sz="1350" b="0" i="0">
+                <a:solidFill>
+                  <a:srgbClr val="1E242B"/>
+                </a:solidFill>
+                <a:latin typeface="Segoe UI"/>
+              </a:rPr>
+              <a:t>cspnext and rtmpose — top-down pose families with measured confidence thresholds per backbone</a:t>
+            </a:r>
+          </a:p>
+          <a:p>
+            <a:pPr>
+              <a:spcAft>
+                <a:spcPts val="1100"/>
+              </a:spcAft>
+            </a:pPr>
+            <a:r>
+              <a:rPr sz="1350" b="0" i="0">
+                <a:solidFill>
+                  <a:srgbClr val="1E242B"/>
+                </a:solidFill>
+                <a:latin typeface="Segoe UI"/>
+              </a:rPr>
+              <a:t>DeepLabCut ResNet-50 — the accuracy reference, and where this started</a:t>
+            </a:r>
+          </a:p>
+        </p:txBody>
+      </p:sp>
+      <p:sp>
+        <p:nvSpPr>
+          <p:cNvPr id="4" name="Content Placeholder 3"/>
+          <p:cNvSpPr>
+            <a:spLocks noGrp="1"/>
+          </p:cNvSpPr>
+          <p:nvPr>
+            <p:ph idx="2" sz="half"/>
+          </p:nvPr>
+        </p:nvSpPr>
+        <p:spPr>
+          <a:xfrm>
+            <a:off x="6347307" y="2487168"/>
+            <a:ext cx="5186019" cy="3593592"/>
+          </a:xfrm>
+        </p:spPr>
+        <p:txBody>
+          <a:bodyPr wrap="square"/>
+          <a:lstStyle/>
+          <a:p>
+            <a:pPr>
+              <a:spcAft>
+                <a:spcPts val="1100"/>
+              </a:spcAft>
+            </a:pPr>
+            <a:r>
+              <a:rPr sz="1350" b="0" i="0">
+                <a:solidFill>
+                  <a:srgbClr val="1E242B"/>
+                </a:solidFill>
+                <a:latin typeface="Segoe UI"/>
+              </a:rPr>
+              <a:t>Faster backbones hold camera rate: cspnext_s sustains 150 fps at 7.66 ms sensor-to-pose; cspnext_m runs near 103 fps</a:t>
+            </a:r>
+          </a:p>
+          <a:p>
+            <a:pPr>
+              <a:spcAft>
+                <a:spcPts val="1100"/>
+              </a:spcAft>
+            </a:pPr>
+            <a:r>
+              <a:rPr sz="1350" b="0" i="0">
+                <a:solidFill>
+                  <a:srgbClr val="1E242B"/>
+                </a:solidFill>
+                <a:latin typeface="Segoe UI"/>
+              </a:rPr>
+              <a:t>ResNet-50 runs below camera rate on this GPU — fine for a behaviour stream, not for closing a loop</a:t>
+            </a:r>
+          </a:p>
+          <a:p>
+            <a:pPr>
+              <a:spcAft>
+                <a:spcPts val="1100"/>
+              </a:spcAft>
+            </a:pPr>
+            <a:r>
+              <a:rPr sz="1350" b="0" i="0">
+                <a:solidFill>
+                  <a:srgbClr val="1E242B"/>
+                </a:solidFill>
+                <a:latin typeface="Segoe UI"/>
+              </a:rPr>
+              <a:t>Confidence does not mean the same thing across families, so the gate threshold is measured per backbone rather than set globally</a:t>
+            </a:r>
+          </a:p>
+        </p:txBody>
+      </p:sp>
+      <p:sp>
+        <p:nvSpPr>
+          <p:cNvPr id="5" name="Rectangle 4"/>
           <p:cNvSpPr/>
           <p:nvPr/>
         </p:nvSpPr>
@@ -7706,7 +7178,7 @@
       </p:sp>
       <p:sp>
         <p:nvSpPr>
-          <p:cNvPr id="4" name="TextBox 3"/>
+          <p:cNvPr id="6" name="TextBox 5"/>
           <p:cNvSpPr txBox="1"/>
           <p:nvPr/>
         </p:nvSpPr>
@@ -7733,45 +7205,21 @@
                 </a:solidFill>
                 <a:latin typeface="Segoe UI"/>
               </a:rPr>
-              <a:t>The speed came from removing our own overhead and choosing the right architecture.</a:t>
-            </a:r>
-          </a:p>
-        </p:txBody>
-      </p:sp>
-      <p:pic>
-        <p:nvPicPr>
-          <p:cNvPr id="5" name="Picture 4" descr="inference_ladder.png"/>
-          <p:cNvPicPr>
-            <a:picLocks noChangeAspect="1"/>
-          </p:cNvPicPr>
-          <p:nvPr/>
-        </p:nvPicPr>
-        <p:blipFill>
-          <a:blip r:embed="rId2"/>
-          <a:stretch>
-            <a:fillRect/>
-          </a:stretch>
-        </p:blipFill>
-        <p:spPr>
-          <a:xfrm>
-            <a:off x="911580" y="1847088"/>
-            <a:ext cx="10368534" cy="3822192"/>
-          </a:xfrm>
-          <a:prstGeom prst="rect">
-            <a:avLst/>
-          </a:prstGeom>
-        </p:spPr>
-      </p:pic>
-      <p:sp>
-        <p:nvSpPr>
-          <p:cNvPr id="6" name="TextBox 5"/>
+              <a:t>The backend takes several model families. Speed and accuracy trade against each other, and the choice is yours per use case.</a:t>
+            </a:r>
+          </a:p>
+        </p:txBody>
+      </p:sp>
+      <p:sp>
+        <p:nvSpPr>
+          <p:cNvPr id="7" name="TextBox 6"/>
           <p:cNvSpPr txBox="1"/>
           <p:nvPr/>
         </p:nvSpPr>
         <p:spPr>
           <a:xfrm>
-            <a:off x="658368" y="5797296"/>
-            <a:ext cx="10874959" cy="502920"/>
+            <a:off x="658368" y="2103120"/>
+            <a:ext cx="5186019" cy="347472"/>
           </a:xfrm>
           <a:prstGeom prst="rect">
             <a:avLst/>
@@ -7779,34 +7227,33 @@
           <a:noFill/>
         </p:spPr>
         <p:txBody>
-          <a:bodyPr wrap="square">
+          <a:bodyPr wrap="none">
             <a:spAutoFit/>
           </a:bodyPr>
           <a:lstStyle/>
           <a:p>
-            <a:pPr algn="ctr"/>
-            <a:r>
-              <a:rPr sz="1150" b="0" i="1">
-                <a:solidFill>
-                  <a:srgbClr val="6B727B"/>
-                </a:solidFill>
-                <a:latin typeface="Segoe UI"/>
-              </a:rPr>
-              <a:t>Colour is status, not just result. The mobile-class backbone was measured at about 8x and deliberately not adopted — its confidence does not predict accuracy, which would break the 3D confidence gate.</a:t>
-            </a:r>
-          </a:p>
-        </p:txBody>
-      </p:sp>
-      <p:sp>
-        <p:nvSpPr>
-          <p:cNvPr id="7" name="TextBox 6"/>
+            <a:r>
+              <a:rPr sz="1500" b="1" i="0">
+                <a:solidFill>
+                  <a:srgbClr val="6B7F9E"/>
+                </a:solidFill>
+                <a:latin typeface="Segoe UI"/>
+              </a:rPr>
+              <a:t>What you get to choose</a:t>
+            </a:r>
+          </a:p>
+        </p:txBody>
+      </p:sp>
+      <p:sp>
+        <p:nvSpPr>
+          <p:cNvPr id="8" name="TextBox 7"/>
           <p:cNvSpPr txBox="1"/>
           <p:nvPr/>
         </p:nvSpPr>
         <p:spPr>
           <a:xfrm>
-            <a:off x="658368" y="6382512"/>
-            <a:ext cx="10874959" cy="292608"/>
+            <a:off x="6347307" y="2103120"/>
+            <a:ext cx="5186019" cy="347472"/>
           </a:xfrm>
           <a:prstGeom prst="rect">
             <a:avLst/>
@@ -7820,6 +7267,40 @@
           <a:lstStyle/>
           <a:p>
             <a:r>
+              <a:rPr sz="1500" b="1" i="0">
+                <a:solidFill>
+                  <a:srgbClr val="B3593F"/>
+                </a:solidFill>
+                <a:latin typeface="Segoe UI"/>
+              </a:rPr>
+              <a:t>What the choice costs</a:t>
+            </a:r>
+          </a:p>
+        </p:txBody>
+      </p:sp>
+      <p:sp>
+        <p:nvSpPr>
+          <p:cNvPr id="9" name="TextBox 8"/>
+          <p:cNvSpPr txBox="1"/>
+          <p:nvPr/>
+        </p:nvSpPr>
+        <p:spPr>
+          <a:xfrm>
+            <a:off x="658368" y="6382512"/>
+            <a:ext cx="10874959" cy="292608"/>
+          </a:xfrm>
+          <a:prstGeom prst="rect">
+            <a:avLst/>
+          </a:prstGeom>
+          <a:noFill/>
+        </p:spPr>
+        <p:txBody>
+          <a:bodyPr wrap="none">
+            <a:spAutoFit/>
+          </a:bodyPr>
+          <a:lstStyle/>
+          <a:p>
+            <a:r>
               <a:rPr sz="900" b="0" i="0">
                 <a:solidFill>
                   <a:srgbClr val="6B727B"/>
@@ -7833,7 +7314,7 @@
       </p:sp>
       <p:sp>
         <p:nvSpPr>
-          <p:cNvPr id="8" name="TextBox 7"/>
+          <p:cNvPr id="10" name="TextBox 9"/>
           <p:cNvSpPr txBox="1"/>
           <p:nvPr/>
         </p:nvSpPr>
@@ -7912,14 +7393,184 @@
                 </a:solidFill>
                 <a:latin typeface="Segoe UI"/>
               </a:rPr>
-              <a:t>One OS setting was worth six more milliseconds</a:t>
-            </a:r>
-          </a:p>
-        </p:txBody>
-      </p:sp>
-      <p:sp>
-        <p:nvSpPr>
-          <p:cNvPr id="3" name="Rectangle 2"/>
+              <a:t>What this buys, and what it costs</a:t>
+            </a:r>
+          </a:p>
+        </p:txBody>
+      </p:sp>
+      <p:sp>
+        <p:nvSpPr>
+          <p:cNvPr id="3" name="Content Placeholder 2"/>
+          <p:cNvSpPr>
+            <a:spLocks noGrp="1"/>
+          </p:cNvSpPr>
+          <p:nvPr>
+            <p:ph idx="1" sz="half"/>
+          </p:nvPr>
+        </p:nvSpPr>
+        <p:spPr>
+          <a:xfrm>
+            <a:off x="658368" y="2487168"/>
+            <a:ext cx="5186019" cy="3593592"/>
+          </a:xfrm>
+        </p:spPr>
+        <p:txBody>
+          <a:bodyPr wrap="square"/>
+          <a:lstStyle/>
+          <a:p>
+            <a:pPr>
+              <a:spcAft>
+                <a:spcPts val="1100"/>
+              </a:spcAft>
+            </a:pPr>
+            <a:r>
+              <a:rPr sz="1350" b="0" i="0">
+                <a:solidFill>
+                  <a:srgbClr val="1E242B"/>
+                </a:solidFill>
+                <a:latin typeface="Segoe UI"/>
+              </a:rPr>
+              <a:t>A second closed loop driven by machine vision, alongside the fast ROI reflex — decisions can now depend on where the paw actually is</a:t>
+            </a:r>
+          </a:p>
+          <a:p>
+            <a:pPr>
+              <a:spcAft>
+                <a:spcPts val="1100"/>
+              </a:spcAft>
+            </a:pPr>
+            <a:r>
+              <a:rPr sz="1350" b="0" i="0">
+                <a:solidFill>
+                  <a:srgbClr val="1E242B"/>
+                </a:solidFill>
+                <a:latin typeface="Segoe UI"/>
+              </a:rPr>
+              <a:t>A live 2D pose overlay per camera view while the session runs</a:t>
+            </a:r>
+          </a:p>
+          <a:p>
+            <a:pPr>
+              <a:spcAft>
+                <a:spcPts val="1100"/>
+              </a:spcAft>
+            </a:pPr>
+            <a:r>
+              <a:rPr sz="1350" b="0" i="0">
+                <a:solidFill>
+                  <a:srgbClr val="1E242B"/>
+                </a:solidFill>
+                <a:latin typeface="Segoe UI"/>
+              </a:rPr>
+              <a:t>Signals visualised during acquisition instead of plotted afterwards</a:t>
+            </a:r>
+          </a:p>
+          <a:p>
+            <a:pPr>
+              <a:spcAft>
+                <a:spcPts val="1100"/>
+              </a:spcAft>
+            </a:pPr>
+            <a:r>
+              <a:rPr sz="1350" b="0" i="0">
+                <a:solidFill>
+                  <a:srgbClr val="1E242B"/>
+                </a:solidFill>
+                <a:latin typeface="Segoe UI"/>
+              </a:rPr>
+              <a:t>Experiments composed from reusable trial sets, with reproducible draws</a:t>
+            </a:r>
+          </a:p>
+        </p:txBody>
+      </p:sp>
+      <p:sp>
+        <p:nvSpPr>
+          <p:cNvPr id="4" name="Content Placeholder 3"/>
+          <p:cNvSpPr>
+            <a:spLocks noGrp="1"/>
+          </p:cNvSpPr>
+          <p:nvPr>
+            <p:ph idx="2" sz="half"/>
+          </p:nvPr>
+        </p:nvSpPr>
+        <p:spPr>
+          <a:xfrm>
+            <a:off x="6347307" y="2487168"/>
+            <a:ext cx="5186019" cy="3593592"/>
+          </a:xfrm>
+        </p:spPr>
+        <p:txBody>
+          <a:bodyPr wrap="square"/>
+          <a:lstStyle/>
+          <a:p>
+            <a:pPr>
+              <a:spcAft>
+                <a:spcPts val="1100"/>
+              </a:spcAft>
+            </a:pPr>
+            <a:r>
+              <a:rPr sz="1350" b="0" i="0">
+                <a:solidFill>
+                  <a:srgbClr val="1E242B"/>
+                </a:solidFill>
+                <a:latin typeface="Segoe UI"/>
+              </a:rPr>
+              <a:t>A working CUDA GPU. Live inference refuses to start without one, by design, rather than silently running slow</a:t>
+            </a:r>
+          </a:p>
+          <a:p>
+            <a:pPr>
+              <a:spcAft>
+                <a:spcPts val="1100"/>
+              </a:spcAft>
+            </a:pPr>
+            <a:r>
+              <a:rPr sz="1350" b="0" i="0">
+                <a:solidFill>
+                  <a:srgbClr val="1E242B"/>
+                </a:solidFill>
+                <a:latin typeface="Segoe UI"/>
+              </a:rPr>
+              <a:t>Two settings the installer applies: real-time scheduling for the reflex loop and the performance CPU governor</a:t>
+            </a:r>
+          </a:p>
+          <a:p>
+            <a:pPr>
+              <a:spcAft>
+                <a:spcPts val="1100"/>
+              </a:spcAft>
+            </a:pPr>
+            <a:r>
+              <a:rPr sz="1350" b="0" i="0">
+                <a:solidFill>
+                  <a:srgbClr val="1E242B"/>
+                </a:solidFill>
+                <a:latin typeface="Segoe UI"/>
+              </a:rPr>
+              <a:t>Calibration that matches the geometry the cameras actually record, or 3D is wrong beneath a correct-looking 2D overlay</a:t>
+            </a:r>
+          </a:p>
+          <a:p>
+            <a:pPr>
+              <a:spcAft>
+                <a:spcPts val="1100"/>
+              </a:spcAft>
+            </a:pPr>
+            <a:r>
+              <a:rPr sz="1350" b="0" i="0">
+                <a:solidFill>
+                  <a:srgbClr val="1E242B"/>
+                </a:solidFill>
+                <a:latin typeface="Segoe UI"/>
+              </a:rPr>
+              <a:t>Unfiltered signal recording costs disk — the FSR stream alone adds roughly 166 rows a second</a:t>
+            </a:r>
+          </a:p>
+        </p:txBody>
+      </p:sp>
+      <p:sp>
+        <p:nvSpPr>
+          <p:cNvPr id="5" name="Rectangle 4"/>
           <p:cNvSpPr/>
           <p:nvPr/>
         </p:nvSpPr>
@@ -7963,7 +7614,7 @@
       </p:sp>
       <p:sp>
         <p:nvSpPr>
-          <p:cNvPr id="4" name="TextBox 3"/>
+          <p:cNvPr id="6" name="TextBox 5"/>
           <p:cNvSpPr txBox="1"/>
           <p:nvPr/>
         </p:nvSpPr>
@@ -7990,45 +7641,21 @@
                 </a:solidFill>
                 <a:latin typeface="Segoe UI"/>
               </a:rPr>
-              <a:t>Same hardware, same model, same batch. Only the CPU governor changed.</a:t>
-            </a:r>
-          </a:p>
-        </p:txBody>
-      </p:sp>
-      <p:pic>
-        <p:nvPicPr>
-          <p:cNvPr id="5" name="Picture 4" descr="inference_latency.png"/>
-          <p:cNvPicPr>
-            <a:picLocks noChangeAspect="1"/>
-          </p:cNvPicPr>
-          <p:nvPr/>
-        </p:nvPicPr>
-        <p:blipFill>
-          <a:blip r:embed="rId2"/>
-          <a:stretch>
-            <a:fillRect/>
-          </a:stretch>
-        </p:blipFill>
-        <p:spPr>
-          <a:xfrm>
-            <a:off x="1417038" y="1847088"/>
-            <a:ext cx="9357619" cy="3822192"/>
-          </a:xfrm>
-          <a:prstGeom prst="rect">
-            <a:avLst/>
-          </a:prstGeom>
-        </p:spPr>
-      </p:pic>
-      <p:sp>
-        <p:nvSpPr>
-          <p:cNvPr id="6" name="TextBox 5"/>
+              <a:t>The speed work was not the point. This is what it enabled.</a:t>
+            </a:r>
+          </a:p>
+        </p:txBody>
+      </p:sp>
+      <p:sp>
+        <p:nvSpPr>
+          <p:cNvPr id="7" name="TextBox 6"/>
           <p:cNvSpPr txBox="1"/>
           <p:nvPr/>
         </p:nvSpPr>
         <p:spPr>
           <a:xfrm>
-            <a:off x="658368" y="5797296"/>
-            <a:ext cx="10874959" cy="502920"/>
+            <a:off x="658368" y="2103120"/>
+            <a:ext cx="5186019" cy="347472"/>
           </a:xfrm>
           <a:prstGeom prst="rect">
             <a:avLst/>
@@ -8036,34 +7663,33 @@
           <a:noFill/>
         </p:spPr>
         <p:txBody>
-          <a:bodyPr wrap="square">
+          <a:bodyPr wrap="none">
             <a:spAutoFit/>
           </a:bodyPr>
           <a:lstStyle/>
           <a:p>
-            <a:pPr algn="ctr"/>
-            <a:r>
-              <a:rPr sz="1150" b="0" i="1">
-                <a:solidFill>
-                  <a:srgbClr val="6B727B"/>
-                </a:solidFill>
-                <a:latin typeface="Segoe UI"/>
-              </a:rPr>
-              <a:t>powersave held the P-cores near 2700 MHz against a 5000 MHz ceiling. The installer now sets performance, because the default cost more than half the win.</a:t>
-            </a:r>
-          </a:p>
-        </p:txBody>
-      </p:sp>
-      <p:sp>
-        <p:nvSpPr>
-          <p:cNvPr id="7" name="TextBox 6"/>
+            <a:r>
+              <a:rPr sz="1500" b="1" i="0">
+                <a:solidFill>
+                  <a:srgbClr val="6B7F9E"/>
+                </a:solidFill>
+                <a:latin typeface="Segoe UI"/>
+              </a:rPr>
+              <a:t>New abilities</a:t>
+            </a:r>
+          </a:p>
+        </p:txBody>
+      </p:sp>
+      <p:sp>
+        <p:nvSpPr>
+          <p:cNvPr id="8" name="TextBox 7"/>
           <p:cNvSpPr txBox="1"/>
           <p:nvPr/>
         </p:nvSpPr>
         <p:spPr>
           <a:xfrm>
-            <a:off x="658368" y="6382512"/>
-            <a:ext cx="10874959" cy="292608"/>
+            <a:off x="6347307" y="2103120"/>
+            <a:ext cx="5186019" cy="347472"/>
           </a:xfrm>
           <a:prstGeom prst="rect">
             <a:avLst/>
@@ -8077,6 +7703,40 @@
           <a:lstStyle/>
           <a:p>
             <a:r>
+              <a:rPr sz="1500" b="1" i="0">
+                <a:solidFill>
+                  <a:srgbClr val="B3593F"/>
+                </a:solidFill>
+                <a:latin typeface="Segoe UI"/>
+              </a:rPr>
+              <a:t>What it asks of you</a:t>
+            </a:r>
+          </a:p>
+        </p:txBody>
+      </p:sp>
+      <p:sp>
+        <p:nvSpPr>
+          <p:cNvPr id="9" name="TextBox 8"/>
+          <p:cNvSpPr txBox="1"/>
+          <p:nvPr/>
+        </p:nvSpPr>
+        <p:spPr>
+          <a:xfrm>
+            <a:off x="658368" y="6382512"/>
+            <a:ext cx="10874959" cy="292608"/>
+          </a:xfrm>
+          <a:prstGeom prst="rect">
+            <a:avLst/>
+          </a:prstGeom>
+          <a:noFill/>
+        </p:spPr>
+        <p:txBody>
+          <a:bodyPr wrap="none">
+            <a:spAutoFit/>
+          </a:bodyPr>
+          <a:lstStyle/>
+          <a:p>
+            <a:r>
               <a:rPr sz="900" b="0" i="0">
                 <a:solidFill>
                   <a:srgbClr val="6B727B"/>
@@ -8090,7 +7750,7 @@
       </p:sp>
       <p:sp>
         <p:nvSpPr>
-          <p:cNvPr id="8" name="TextBox 7"/>
+          <p:cNvPr id="10" name="TextBox 9"/>
           <p:cNvSpPr txBox="1"/>
           <p:nvPr/>
         </p:nvSpPr>
@@ -8169,99 +7829,14 @@
                 </a:solidFill>
                 <a:latin typeface="Segoe UI"/>
               </a:rPr>
-              <a:t>Running below camera rate is safe by design</a:t>
-            </a:r>
-          </a:p>
-        </p:txBody>
-      </p:sp>
-      <p:sp>
-        <p:nvSpPr>
-          <p:cNvPr id="3" name="Content Placeholder 2"/>
-          <p:cNvSpPr>
-            <a:spLocks noGrp="1"/>
-          </p:cNvSpPr>
-          <p:nvPr>
-            <p:ph idx="1"/>
-          </p:nvPr>
-        </p:nvSpPr>
-        <p:spPr>
-          <a:xfrm>
-            <a:off x="658368" y="2057400"/>
-            <a:ext cx="10874959" cy="4023360"/>
-          </a:xfrm>
-        </p:spPr>
-        <p:txBody>
-          <a:bodyPr wrap="square"/>
-          <a:lstStyle/>
-          <a:p>
-            <a:pPr>
-              <a:spcAft>
-                <a:spcPts val="1300"/>
-              </a:spcAft>
-            </a:pPr>
-            <a:r>
-              <a:rPr sz="1500" b="0" i="0">
-                <a:solidFill>
-                  <a:srgbClr val="1E242B"/>
-                </a:solidFill>
-                <a:latin typeface="Segoe UI"/>
-              </a:rPr>
-              <a:t>Non-blocking backpressure — the 150 fps capture loop hands frames to inference on a separate queue from recording, so a slow pose stage can never stall acquisition or cost a recorded frame. Slowness costs inference work only</a:t>
-            </a:r>
-          </a:p>
-          <a:p>
-            <a:pPr>
-              <a:spcAft>
-                <a:spcPts val="1300"/>
-              </a:spcAft>
-            </a:pPr>
-            <a:r>
-              <a:rPr sz="1500" b="0" i="0">
-                <a:solidFill>
-                  <a:srgbClr val="1E242B"/>
-                </a:solidFill>
-                <a:latin typeface="Segoe UI"/>
-              </a:rPr>
-              <a:t>Freshness drain — inference always takes the newest queued frame and drops stale ones, so latency never grows into a backlog</a:t>
-            </a:r>
-          </a:p>
-          <a:p>
-            <a:pPr>
-              <a:spcAft>
-                <a:spcPts val="1300"/>
-              </a:spcAft>
-            </a:pPr>
-            <a:r>
-              <a:rPr sz="1500" b="0" i="0">
-                <a:solidFill>
-                  <a:srgbClr val="1E242B"/>
-                </a:solidFill>
-                <a:latin typeface="Segoe UI"/>
-              </a:rPr>
-              <a:t>That drain removed up to a full predict period of buffer-sitting: end-to-end went from 17.6 to 13.9 ms, and frames the loop could not hand over fell from 35.2% to 0.7%</a:t>
-            </a:r>
-          </a:p>
-          <a:p>
-            <a:pPr>
-              <a:spcAft>
-                <a:spcPts val="1300"/>
-              </a:spcAft>
-            </a:pPr>
-            <a:r>
-              <a:rPr sz="1500" b="0" i="0">
-                <a:solidFill>
-                  <a:srgbClr val="1E242B"/>
-                </a:solidFill>
-                <a:latin typeface="Segoe UI"/>
-              </a:rPr>
-              <a:t>Both are always on, and neither depends on which backend or model is configured</a:t>
-            </a:r>
-          </a:p>
-        </p:txBody>
-      </p:sp>
-      <p:sp>
-        <p:nvSpPr>
-          <p:cNvPr id="4" name="Rectangle 3"/>
+              <a:t>Everything lands on one timebase</a:t>
+            </a:r>
+          </a:p>
+        </p:txBody>
+      </p:sp>
+      <p:sp>
+        <p:nvSpPr>
+          <p:cNvPr id="3" name="Rectangle 2"/>
           <p:cNvSpPr/>
           <p:nvPr/>
         </p:nvSpPr>
@@ -8305,7 +7880,7 @@
       </p:sp>
       <p:sp>
         <p:nvSpPr>
-          <p:cNvPr id="5" name="TextBox 4"/>
+          <p:cNvPr id="4" name="TextBox 3"/>
           <p:cNvSpPr txBox="1"/>
           <p:nvPr/>
         </p:nvSpPr>
@@ -8332,11 +7907,35 @@
                 </a:solidFill>
                 <a:latin typeface="Segoe UI"/>
               </a:rPr>
-              <a:t>The pose tier is allowed to be slower than the cameras, because it cannot hold them up.</a:t>
-            </a:r>
-          </a:p>
-        </p:txBody>
-      </p:sp>
+              <a:t>Cameras, tones, pellet events and laser output are not separately timestamped and hoped to agree.</a:t>
+            </a:r>
+          </a:p>
+        </p:txBody>
+      </p:sp>
+      <p:pic>
+        <p:nvPicPr>
+          <p:cNvPr id="5" name="Picture 4" descr="synchronization.png"/>
+          <p:cNvPicPr>
+            <a:picLocks noChangeAspect="1"/>
+          </p:cNvPicPr>
+          <p:nvPr/>
+        </p:nvPicPr>
+        <p:blipFill>
+          <a:blip r:embed="rId2"/>
+          <a:stretch>
+            <a:fillRect/>
+          </a:stretch>
+        </p:blipFill>
+        <p:spPr>
+          <a:xfrm>
+            <a:off x="658368" y="1847088"/>
+            <a:ext cx="10874959" cy="3663144"/>
+          </a:xfrm>
+          <a:prstGeom prst="rect">
+            <a:avLst/>
+          </a:prstGeom>
+        </p:spPr>
+      </p:pic>
       <p:sp>
         <p:nvSpPr>
           <p:cNvPr id="6" name="TextBox 5"/>
@@ -8345,8 +7944,8 @@
         </p:nvSpPr>
         <p:spPr>
           <a:xfrm>
-            <a:off x="658368" y="6382512"/>
-            <a:ext cx="10874959" cy="292608"/>
+            <a:off x="658368" y="5638248"/>
+            <a:ext cx="10874959" cy="502920"/>
           </a:xfrm>
           <a:prstGeom prst="rect">
             <a:avLst/>
@@ -8354,6 +7953,41 @@
           <a:noFill/>
         </p:spPr>
         <p:txBody>
+          <a:bodyPr wrap="square">
+            <a:spAutoFit/>
+          </a:bodyPr>
+          <a:lstStyle/>
+          <a:p>
+            <a:pPr algn="ctr"/>
+            <a:r>
+              <a:rPr sz="1150" b="0" i="1">
+                <a:solidFill>
+                  <a:srgbClr val="6B727B"/>
+                </a:solidFill>
+                <a:latin typeface="Segoe UI"/>
+              </a:rPr>
+              <a:t>Camera frame edges are matched to NI-DAQ samples with a signed offset, a resolution, and a confidence — all written into alignment.json.</a:t>
+            </a:r>
+          </a:p>
+        </p:txBody>
+      </p:sp>
+      <p:sp>
+        <p:nvSpPr>
+          <p:cNvPr id="7" name="TextBox 6"/>
+          <p:cNvSpPr txBox="1"/>
+          <p:nvPr/>
+        </p:nvSpPr>
+        <p:spPr>
+          <a:xfrm>
+            <a:off x="658368" y="6382512"/>
+            <a:ext cx="10874959" cy="292608"/>
+          </a:xfrm>
+          <a:prstGeom prst="rect">
+            <a:avLst/>
+          </a:prstGeom>
+          <a:noFill/>
+        </p:spPr>
+        <p:txBody>
           <a:bodyPr wrap="none">
             <a:spAutoFit/>
           </a:bodyPr>
@@ -8373,7 +8007,7 @@
       </p:sp>
       <p:sp>
         <p:nvSpPr>
-          <p:cNvPr id="7" name="TextBox 6"/>
+          <p:cNvPr id="8" name="TextBox 7"/>
           <p:cNvSpPr txBox="1"/>
           <p:nvPr/>
         </p:nvSpPr>

--- a/docs/presentation/reachAQ-overview.pptx
+++ b/docs/presentation/reachAQ-overview.pptx
@@ -4,21 +4,25 @@
   <p:sldMasterIdLst>
     <p:sldMasterId id="2147483648" r:id="rId1"/>
   </p:sldMasterIdLst>
+  <p:notesMasterIdLst>
+    <p:notesMasterId r:id="rId15"/>
+  </p:notesMasterIdLst>
   <p:sldIdLst>
-    <p:sldId id="256" r:id="rId7"/>
-    <p:sldId id="257" r:id="rId8"/>
-    <p:sldId id="258" r:id="rId10"/>
-    <p:sldId id="259" r:id="rId11"/>
-    <p:sldId id="260" r:id="rId12"/>
-    <p:sldId id="261" r:id="rId13"/>
-    <p:sldId id="262" r:id="rId14"/>
-    <p:sldId id="263" r:id="rId15"/>
-    <p:sldId id="264" r:id="rId16"/>
-    <p:sldId id="265" r:id="rId17"/>
-    <p:sldId id="266" r:id="rId18"/>
-    <p:sldId id="267" r:id="rId19"/>
+    <p:sldId id="256" r:id="rId2"/>
+    <p:sldId id="257" r:id="rId3"/>
+    <p:sldId id="258" r:id="rId4"/>
+    <p:sldId id="259" r:id="rId5"/>
+    <p:sldId id="260" r:id="rId6"/>
+    <p:sldId id="268" r:id="rId7"/>
+    <p:sldId id="261" r:id="rId8"/>
+    <p:sldId id="262" r:id="rId9"/>
+    <p:sldId id="263" r:id="rId10"/>
+    <p:sldId id="264" r:id="rId11"/>
+    <p:sldId id="265" r:id="rId12"/>
+    <p:sldId id="266" r:id="rId13"/>
+    <p:sldId id="267" r:id="rId14"/>
   </p:sldIdLst>
-  <p:sldSz cx="12191695" cy="6858000" type="screen4x3"/>
+  <p:sldSz cx="12192000" cy="6858000"/>
   <p:notesSz cx="6858000" cy="9144000"/>
   <p:defaultTextStyle>
     <a:defPPr>
@@ -115,11 +119,27 @@
       </a:defRPr>
     </a:lvl9pPr>
   </p:defaultTextStyle>
+  <p:extLst>
+    <p:ext uri="{EFAFB233-063F-42B5-8137-9DF3F51BA10A}">
+      <p15:sldGuideLst xmlns:p15="http://schemas.microsoft.com/office/powerpoint/2012/main">
+        <p15:guide id="1" orient="horz" pos="2160">
+          <p15:clr>
+            <a:srgbClr val="A4A3A4"/>
+          </p15:clr>
+        </p15:guide>
+        <p15:guide id="2" pos="2880">
+          <p15:clr>
+            <a:srgbClr val="A4A3A4"/>
+          </p15:clr>
+        </p15:guide>
+      </p15:sldGuideLst>
+    </p:ext>
+  </p:extLst>
 </p:presentation>
 </file>
 
 <file path=ppt/notesMasters/notesMaster1.xml><?xml version="1.0" encoding="utf-8"?>
-<p:notesMaster xmlns:a="http://schemas.openxmlformats.org/drawingml/2006/main" xmlns:p="http://schemas.openxmlformats.org/presentationml/2006/main" xmlns:r="http://schemas.openxmlformats.org/officeDocument/2006/relationships">
+<p:notesMaster xmlns:a="http://schemas.openxmlformats.org/drawingml/2006/main" xmlns:r="http://schemas.openxmlformats.org/officeDocument/2006/relationships" xmlns:p="http://schemas.openxmlformats.org/presentationml/2006/main">
   <p:cSld>
     <p:bg>
       <p:bgRef idx="1001">
@@ -153,7 +173,7 @@
         <p:spPr>
           <a:xfrm>
             <a:off x="0" y="0"/>
-            <a:ext cx="2971800" cy="457200"/>
+            <a:ext cx="2971800" cy="458788"/>
           </a:xfrm>
           <a:prstGeom prst="rect">
             <a:avLst/>
@@ -184,7 +204,7 @@
         <p:spPr>
           <a:xfrm>
             <a:off x="3884613" y="0"/>
-            <a:ext cx="2971800" cy="457200"/>
+            <a:ext cx="2971800" cy="458788"/>
           </a:xfrm>
           <a:prstGeom prst="rect">
             <a:avLst/>
@@ -198,9 +218,9 @@
             </a:lvl1pPr>
           </a:lstStyle>
           <a:p>
-            <a:fld id="{0F89C1C7-3DCD-1040-A9CF-14679D8B5DDD}" type="datetimeFigureOut">
+            <a:fld id="{10329099-FACA-4BB4-BBB5-3A5F10C2A243}" type="datetimeFigureOut">
               <a:rPr lang="en-US" smtClean="0"/>
-              <a:t>10/17/16</a:t>
+              <a:t>9/18/2026</a:t>
             </a:fld>
             <a:endParaRPr lang="en-US"/>
           </a:p>
@@ -218,8 +238,8 @@
         </p:nvSpPr>
         <p:spPr>
           <a:xfrm>
-            <a:off x="1143000" y="685800"/>
-            <a:ext cx="4572000" cy="3429000"/>
+            <a:off x="685800" y="1143000"/>
+            <a:ext cx="5486400" cy="3086100"/>
           </a:xfrm>
           <a:prstGeom prst="rect">
             <a:avLst/>
@@ -251,8 +271,8 @@
         </p:nvSpPr>
         <p:spPr>
           <a:xfrm>
-            <a:off x="685800" y="4343400"/>
-            <a:ext cx="5486400" cy="4114800"/>
+            <a:off x="685800" y="4400550"/>
+            <a:ext cx="5486400" cy="3600450"/>
           </a:xfrm>
           <a:prstGeom prst="rect">
             <a:avLst/>
@@ -264,38 +284,37 @@
           <a:p>
             <a:pPr lvl="0"/>
             <a:r>
-              <a:rPr lang="en-US" smtClean="0"/>
+              <a:rPr lang="en-US"/>
               <a:t>Click to edit Master text styles</a:t>
             </a:r>
           </a:p>
           <a:p>
             <a:pPr lvl="1"/>
             <a:r>
-              <a:rPr lang="en-US" smtClean="0"/>
+              <a:rPr lang="en-US"/>
               <a:t>Second level</a:t>
             </a:r>
           </a:p>
           <a:p>
             <a:pPr lvl="2"/>
             <a:r>
-              <a:rPr lang="en-US" smtClean="0"/>
+              <a:rPr lang="en-US"/>
               <a:t>Third level</a:t>
             </a:r>
           </a:p>
           <a:p>
             <a:pPr lvl="3"/>
             <a:r>
-              <a:rPr lang="en-US" smtClean="0"/>
+              <a:rPr lang="en-US"/>
               <a:t>Fourth level</a:t>
             </a:r>
           </a:p>
           <a:p>
             <a:pPr lvl="4"/>
             <a:r>
-              <a:rPr lang="en-US" smtClean="0"/>
+              <a:rPr lang="en-US"/>
               <a:t>Fifth level</a:t>
             </a:r>
-            <a:endParaRPr lang="en-US"/>
           </a:p>
         </p:txBody>
       </p:sp>
@@ -312,7 +331,7 @@
         <p:spPr>
           <a:xfrm>
             <a:off x="0" y="8685213"/>
-            <a:ext cx="2971800" cy="457200"/>
+            <a:ext cx="2971800" cy="458787"/>
           </a:xfrm>
           <a:prstGeom prst="rect">
             <a:avLst/>
@@ -343,7 +362,7 @@
         <p:spPr>
           <a:xfrm>
             <a:off x="3884613" y="8685213"/>
-            <a:ext cx="2971800" cy="457200"/>
+            <a:ext cx="2971800" cy="458787"/>
           </a:xfrm>
           <a:prstGeom prst="rect">
             <a:avLst/>
@@ -357,7 +376,7 @@
             </a:lvl1pPr>
           </a:lstStyle>
           <a:p>
-            <a:fld id="{BB5E49A5-4136-284D-997B-48E1D791AD67}" type="slidenum">
+            <a:fld id="{790C4488-60B0-4D06-81BB-CDA9EE800E65}" type="slidenum">
               <a:rPr lang="en-US" smtClean="0"/>
               <a:t>‹#›</a:t>
             </a:fld>
@@ -368,13 +387,13 @@
     </p:spTree>
     <p:extLst>
       <p:ext uri="{BB962C8B-B14F-4D97-AF65-F5344CB8AC3E}">
-        <p14:creationId xmlns:p14="http://schemas.microsoft.com/office/powerpoint/2010/main" val="2623252185"/>
+        <p14:creationId xmlns:p14="http://schemas.microsoft.com/office/powerpoint/2010/main" val="4082774063"/>
       </p:ext>
     </p:extLst>
   </p:cSld>
   <p:clrMap bg1="lt1" tx1="dk1" bg2="lt2" tx2="dk2" accent1="accent1" accent2="accent2" accent3="accent3" accent4="accent4" accent5="accent5" accent6="accent6" hlink="hlink" folHlink="folHlink"/>
   <p:notesStyle>
-    <a:lvl1pPr marL="0" algn="l" defTabSz="457200" rtl="0" eaLnBrk="1" latinLnBrk="0" hangingPunct="1">
+    <a:lvl1pPr marL="0" algn="l" defTabSz="914400" rtl="0" eaLnBrk="1" latinLnBrk="0" hangingPunct="1">
       <a:defRPr sz="1200" kern="1200">
         <a:solidFill>
           <a:schemeClr val="tx1"/>
@@ -384,7 +403,7 @@
         <a:cs typeface="+mn-cs"/>
       </a:defRPr>
     </a:lvl1pPr>
-    <a:lvl2pPr marL="457200" algn="l" defTabSz="457200" rtl="0" eaLnBrk="1" latinLnBrk="0" hangingPunct="1">
+    <a:lvl2pPr marL="457200" algn="l" defTabSz="914400" rtl="0" eaLnBrk="1" latinLnBrk="0" hangingPunct="1">
       <a:defRPr sz="1200" kern="1200">
         <a:solidFill>
           <a:schemeClr val="tx1"/>
@@ -394,7 +413,7 @@
         <a:cs typeface="+mn-cs"/>
       </a:defRPr>
     </a:lvl2pPr>
-    <a:lvl3pPr marL="914400" algn="l" defTabSz="457200" rtl="0" eaLnBrk="1" latinLnBrk="0" hangingPunct="1">
+    <a:lvl3pPr marL="914400" algn="l" defTabSz="914400" rtl="0" eaLnBrk="1" latinLnBrk="0" hangingPunct="1">
       <a:defRPr sz="1200" kern="1200">
         <a:solidFill>
           <a:schemeClr val="tx1"/>
@@ -404,7 +423,7 @@
         <a:cs typeface="+mn-cs"/>
       </a:defRPr>
     </a:lvl3pPr>
-    <a:lvl4pPr marL="1371600" algn="l" defTabSz="457200" rtl="0" eaLnBrk="1" latinLnBrk="0" hangingPunct="1">
+    <a:lvl4pPr marL="1371600" algn="l" defTabSz="914400" rtl="0" eaLnBrk="1" latinLnBrk="0" hangingPunct="1">
       <a:defRPr sz="1200" kern="1200">
         <a:solidFill>
           <a:schemeClr val="tx1"/>
@@ -414,7 +433,7 @@
         <a:cs typeface="+mn-cs"/>
       </a:defRPr>
     </a:lvl4pPr>
-    <a:lvl5pPr marL="1828800" algn="l" defTabSz="457200" rtl="0" eaLnBrk="1" latinLnBrk="0" hangingPunct="1">
+    <a:lvl5pPr marL="1828800" algn="l" defTabSz="914400" rtl="0" eaLnBrk="1" latinLnBrk="0" hangingPunct="1">
       <a:defRPr sz="1200" kern="1200">
         <a:solidFill>
           <a:schemeClr val="tx1"/>
@@ -424,7 +443,7 @@
         <a:cs typeface="+mn-cs"/>
       </a:defRPr>
     </a:lvl5pPr>
-    <a:lvl6pPr marL="2286000" algn="l" defTabSz="457200" rtl="0" eaLnBrk="1" latinLnBrk="0" hangingPunct="1">
+    <a:lvl6pPr marL="2286000" algn="l" defTabSz="914400" rtl="0" eaLnBrk="1" latinLnBrk="0" hangingPunct="1">
       <a:defRPr sz="1200" kern="1200">
         <a:solidFill>
           <a:schemeClr val="tx1"/>
@@ -434,7 +453,7 @@
         <a:cs typeface="+mn-cs"/>
       </a:defRPr>
     </a:lvl6pPr>
-    <a:lvl7pPr marL="2743200" algn="l" defTabSz="457200" rtl="0" eaLnBrk="1" latinLnBrk="0" hangingPunct="1">
+    <a:lvl7pPr marL="2743200" algn="l" defTabSz="914400" rtl="0" eaLnBrk="1" latinLnBrk="0" hangingPunct="1">
       <a:defRPr sz="1200" kern="1200">
         <a:solidFill>
           <a:schemeClr val="tx1"/>
@@ -444,7 +463,7 @@
         <a:cs typeface="+mn-cs"/>
       </a:defRPr>
     </a:lvl7pPr>
-    <a:lvl8pPr marL="3200400" algn="l" defTabSz="457200" rtl="0" eaLnBrk="1" latinLnBrk="0" hangingPunct="1">
+    <a:lvl8pPr marL="3200400" algn="l" defTabSz="914400" rtl="0" eaLnBrk="1" latinLnBrk="0" hangingPunct="1">
       <a:defRPr sz="1200" kern="1200">
         <a:solidFill>
           <a:schemeClr val="tx1"/>
@@ -454,7 +473,7 @@
         <a:cs typeface="+mn-cs"/>
       </a:defRPr>
     </a:lvl8pPr>
-    <a:lvl9pPr marL="3657600" algn="l" defTabSz="457200" rtl="0" eaLnBrk="1" latinLnBrk="0" hangingPunct="1">
+    <a:lvl9pPr marL="3657600" algn="l" defTabSz="914400" rtl="0" eaLnBrk="1" latinLnBrk="0" hangingPunct="1">
       <a:defRPr sz="1200" kern="1200">
         <a:solidFill>
           <a:schemeClr val="tx1"/>
@@ -469,7 +488,7 @@
 </file>
 
 <file path=ppt/notesSlides/notesSlide1.xml><?xml version="1.0" encoding="utf-8"?>
-<p:notes xmlns:a="http://schemas.openxmlformats.org/drawingml/2006/main" xmlns:p="http://schemas.openxmlformats.org/presentationml/2006/main" xmlns:r="http://schemas.openxmlformats.org/officeDocument/2006/relationships">
+<p:notes xmlns:a="http://schemas.openxmlformats.org/drawingml/2006/main" xmlns:r="http://schemas.openxmlformats.org/officeDocument/2006/relationships" xmlns:p="http://schemas.openxmlformats.org/presentationml/2006/main">
   <p:cSld>
     <p:spTree>
       <p:nvGrpSpPr>
@@ -489,7 +508,7 @@
         <p:nvSpPr>
           <p:cNvPr id="2" name="Slide Image Placeholder 1"/>
           <p:cNvSpPr>
-            <a:spLocks noGrp="1"/>
+            <a:spLocks noGrp="1" noRot="1" noChangeAspect="1"/>
           </p:cNvSpPr>
           <p:nvPr>
             <p:ph type="sldImg" idx="2"/>
@@ -504,7 +523,7 @@
             <a:spLocks noGrp="1"/>
           </p:cNvSpPr>
           <p:nvPr>
-            <p:ph type="body" idx="3" sz="quarter"/>
+            <p:ph type="body" sz="quarter" idx="3"/>
           </p:nvPr>
         </p:nvSpPr>
         <p:spPr/>
@@ -525,7 +544,7 @@
             <a:spLocks noGrp="1"/>
           </p:cNvSpPr>
           <p:nvPr>
-            <p:ph type="sldNum" idx="5" sz="quarter"/>
+            <p:ph type="sldNum" sz="quarter" idx="5"/>
           </p:nvPr>
         </p:nvSpPr>
         <p:spPr/>
@@ -539,7 +558,7 @@
 </file>
 
 <file path=ppt/notesSlides/notesSlide10.xml><?xml version="1.0" encoding="utf-8"?>
-<p:notes xmlns:a="http://schemas.openxmlformats.org/drawingml/2006/main" xmlns:p="http://schemas.openxmlformats.org/presentationml/2006/main" xmlns:r="http://schemas.openxmlformats.org/officeDocument/2006/relationships">
+<p:notes xmlns:a="http://schemas.openxmlformats.org/drawingml/2006/main" xmlns:r="http://schemas.openxmlformats.org/officeDocument/2006/relationships" xmlns:p="http://schemas.openxmlformats.org/presentationml/2006/main">
   <p:cSld>
     <p:spTree>
       <p:nvGrpSpPr>
@@ -559,7 +578,7 @@
         <p:nvSpPr>
           <p:cNvPr id="2" name="Slide Image Placeholder 1"/>
           <p:cNvSpPr>
-            <a:spLocks noGrp="1"/>
+            <a:spLocks noGrp="1" noRot="1" noChangeAspect="1"/>
           </p:cNvSpPr>
           <p:nvPr>
             <p:ph type="sldImg" idx="2"/>
@@ -574,7 +593,7 @@
             <a:spLocks noGrp="1"/>
           </p:cNvSpPr>
           <p:nvPr>
-            <p:ph type="body" idx="3" sz="quarter"/>
+            <p:ph type="body" sz="quarter" idx="3"/>
           </p:nvPr>
         </p:nvSpPr>
         <p:spPr/>
@@ -583,7 +602,7 @@
           <a:lstStyle/>
           <a:p>
             <a:r>
-              <a:t>The pinning behaviour is the part worth dwelling on. It is what stops an edit to a shared phase from quietly changing an experiment that was already validated.</a:t>
+              <a:t>The point for a new user is that this replaces post-hoc plotting. A decimated FSR trace is useless for behavioural analysis, so samples are forwarded unthrottled and an armed session gains roughly 166 rows a second. Worth flagging out loud: there is no microphone channel in the system today.</a:t>
             </a:r>
           </a:p>
         </p:txBody>
@@ -595,7 +614,7 @@
             <a:spLocks noGrp="1"/>
           </p:cNvSpPr>
           <p:nvPr>
-            <p:ph type="sldNum" idx="5" sz="quarter"/>
+            <p:ph type="sldNum" sz="quarter" idx="5"/>
           </p:nvPr>
         </p:nvSpPr>
         <p:spPr/>
@@ -609,7 +628,7 @@
 </file>
 
 <file path=ppt/notesSlides/notesSlide11.xml><?xml version="1.0" encoding="utf-8"?>
-<p:notes xmlns:a="http://schemas.openxmlformats.org/drawingml/2006/main" xmlns:p="http://schemas.openxmlformats.org/presentationml/2006/main" xmlns:r="http://schemas.openxmlformats.org/officeDocument/2006/relationships">
+<p:notes xmlns:a="http://schemas.openxmlformats.org/drawingml/2006/main" xmlns:r="http://schemas.openxmlformats.org/officeDocument/2006/relationships" xmlns:p="http://schemas.openxmlformats.org/presentationml/2006/main">
   <p:cSld>
     <p:spTree>
       <p:nvGrpSpPr>
@@ -629,7 +648,7 @@
         <p:nvSpPr>
           <p:cNvPr id="2" name="Slide Image Placeholder 1"/>
           <p:cNvSpPr>
-            <a:spLocks noGrp="1"/>
+            <a:spLocks noGrp="1" noRot="1" noChangeAspect="1"/>
           </p:cNvSpPr>
           <p:nvPr>
             <p:ph type="sldImg" idx="2"/>
@@ -644,7 +663,7 @@
             <a:spLocks noGrp="1"/>
           </p:cNvSpPr>
           <p:nvPr>
-            <p:ph type="body" idx="3" sz="quarter"/>
+            <p:ph type="body" sz="quarter" idx="3"/>
           </p:nvPr>
         </p:nvSpPr>
         <p:spPr/>
@@ -653,7 +672,7 @@
           <a:lstStyle/>
           <a:p>
             <a:r>
-              <a:t>Run order — launch with --demo or toggle Tools &gt; Demo Mode while idle; show both camera panels carrying their own overlay; show the NI-DAQ signal stream; drive the pellet device by hand; open the protocol editor and the experiment sidebar; start a recording and let trials run; stop and show the session directory with its DEMO marker. Point at the red banner — it is there so nobody mistakes a demo session for data.</a:t>
+              <a:t>The pinning behaviour is the part worth dwelling on. It is what stops an edit to a shared phase from quietly changing an experiment that was already validated.</a:t>
             </a:r>
           </a:p>
         </p:txBody>
@@ -665,7 +684,7 @@
             <a:spLocks noGrp="1"/>
           </p:cNvSpPr>
           <p:nvPr>
-            <p:ph type="sldNum" idx="5" sz="quarter"/>
+            <p:ph type="sldNum" sz="quarter" idx="5"/>
           </p:nvPr>
         </p:nvSpPr>
         <p:spPr/>
@@ -678,8 +697,8 @@
 </p:notes>
 </file>
 
-<file path=ppt/notesSlides/notesSlide2.xml><?xml version="1.0" encoding="utf-8"?>
-<p:notes xmlns:a="http://schemas.openxmlformats.org/drawingml/2006/main" xmlns:p="http://schemas.openxmlformats.org/presentationml/2006/main" xmlns:r="http://schemas.openxmlformats.org/officeDocument/2006/relationships">
+<file path=ppt/notesSlides/notesSlide12.xml><?xml version="1.0" encoding="utf-8"?>
+<p:notes xmlns:a="http://schemas.openxmlformats.org/drawingml/2006/main" xmlns:r="http://schemas.openxmlformats.org/officeDocument/2006/relationships" xmlns:p="http://schemas.openxmlformats.org/presentationml/2006/main">
   <p:cSld>
     <p:spTree>
       <p:nvGrpSpPr>
@@ -699,7 +718,7 @@
         <p:nvSpPr>
           <p:cNvPr id="2" name="Slide Image Placeholder 1"/>
           <p:cNvSpPr>
-            <a:spLocks noGrp="1"/>
+            <a:spLocks noGrp="1" noRot="1" noChangeAspect="1"/>
           </p:cNvSpPr>
           <p:nvPr>
             <p:ph type="sldImg" idx="2"/>
@@ -714,7 +733,7 @@
             <a:spLocks noGrp="1"/>
           </p:cNvSpPr>
           <p:nvPr>
-            <p:ph type="body" idx="3" sz="quarter"/>
+            <p:ph type="body" sz="quarter" idx="3"/>
           </p:nvPr>
         </p:nvSpPr>
         <p:spPr/>
@@ -723,7 +742,7 @@
           <a:lstStyle/>
           <a:p>
             <a:r>
-              <a:t>Say plainly that we did not start over. reachAQ changed the hardware target, added stimulation and signal visualisation, and made the pose stream fast enough to act on. Everything underneath is auto-trainer's design.</a:t>
+              <a:t>Run order — launch with --demo or toggle Tools &gt; Demo Mode while idle; show both camera panels carrying their own overlay; show the NI-DAQ signal stream; drive the pellet device by hand; open the protocol editor and the experiment sidebar; start a recording and let trials run; stop and show the session directory with its DEMO marker. Point at the red banner — it is there so nobody mistakes a demo session for data.</a:t>
             </a:r>
           </a:p>
         </p:txBody>
@@ -735,7 +754,7 @@
             <a:spLocks noGrp="1"/>
           </p:cNvSpPr>
           <p:nvPr>
-            <p:ph type="sldNum" idx="5" sz="quarter"/>
+            <p:ph type="sldNum" sz="quarter" idx="5"/>
           </p:nvPr>
         </p:nvSpPr>
         <p:spPr/>
@@ -748,8 +767,8 @@
 </p:notes>
 </file>
 
-<file path=ppt/notesSlides/notesSlide3.xml><?xml version="1.0" encoding="utf-8"?>
-<p:notes xmlns:a="http://schemas.openxmlformats.org/drawingml/2006/main" xmlns:p="http://schemas.openxmlformats.org/presentationml/2006/main" xmlns:r="http://schemas.openxmlformats.org/officeDocument/2006/relationships">
+<file path=ppt/notesSlides/notesSlide2.xml><?xml version="1.0" encoding="utf-8"?>
+<p:notes xmlns:a="http://schemas.openxmlformats.org/drawingml/2006/main" xmlns:r="http://schemas.openxmlformats.org/officeDocument/2006/relationships" xmlns:p="http://schemas.openxmlformats.org/presentationml/2006/main">
   <p:cSld>
     <p:spTree>
       <p:nvGrpSpPr>
@@ -769,7 +788,7 @@
         <p:nvSpPr>
           <p:cNvPr id="2" name="Slide Image Placeholder 1"/>
           <p:cNvSpPr>
-            <a:spLocks noGrp="1"/>
+            <a:spLocks noGrp="1" noRot="1" noChangeAspect="1"/>
           </p:cNvSpPr>
           <p:nvPr>
             <p:ph type="sldImg" idx="2"/>
@@ -784,7 +803,7 @@
             <a:spLocks noGrp="1"/>
           </p:cNvSpPr>
           <p:nvPr>
-            <p:ph type="body" idx="3" sz="quarter"/>
+            <p:ph type="body" sz="quarter" idx="3"/>
           </p:nvPr>
         </p:nvSpPr>
         <p:spPr/>
@@ -793,7 +812,7 @@
           <a:lstStyle/>
           <a:p>
             <a:r>
-              <a:t>This slide exists so the later numbers have something to be measured against. The user-facing consequence is the line that matters: before, pose was a recording product; now it is a control input. Keep 5 ms described as a budget and a tail figure, never an average.</a:t>
+              <a:t>Say plainly that we did not start over. reachAQ changed the hardware target, added stimulation and signal visualisation, and made the pose stream fast enough to act on. Everything underneath is auto-trainer's design.</a:t>
             </a:r>
           </a:p>
         </p:txBody>
@@ -805,7 +824,7 @@
             <a:spLocks noGrp="1"/>
           </p:cNvSpPr>
           <p:nvPr>
-            <p:ph type="sldNum" idx="5" sz="quarter"/>
+            <p:ph type="sldNum" sz="quarter" idx="5"/>
           </p:nvPr>
         </p:nvSpPr>
         <p:spPr/>
@@ -818,8 +837,8 @@
 </p:notes>
 </file>
 
-<file path=ppt/notesSlides/notesSlide4.xml><?xml version="1.0" encoding="utf-8"?>
-<p:notes xmlns:a="http://schemas.openxmlformats.org/drawingml/2006/main" xmlns:p="http://schemas.openxmlformats.org/presentationml/2006/main" xmlns:r="http://schemas.openxmlformats.org/officeDocument/2006/relationships">
+<file path=ppt/notesSlides/notesSlide3.xml><?xml version="1.0" encoding="utf-8"?>
+<p:notes xmlns:a="http://schemas.openxmlformats.org/drawingml/2006/main" xmlns:r="http://schemas.openxmlformats.org/officeDocument/2006/relationships" xmlns:p="http://schemas.openxmlformats.org/presentationml/2006/main">
   <p:cSld>
     <p:spTree>
       <p:nvGrpSpPr>
@@ -839,7 +858,7 @@
         <p:nvSpPr>
           <p:cNvPr id="2" name="Slide Image Placeholder 1"/>
           <p:cNvSpPr>
-            <a:spLocks noGrp="1"/>
+            <a:spLocks noGrp="1" noRot="1" noChangeAspect="1"/>
           </p:cNvSpPr>
           <p:nvPr>
             <p:ph type="sldImg" idx="2"/>
@@ -854,7 +873,7 @@
             <a:spLocks noGrp="1"/>
           </p:cNvSpPr>
           <p:nvPr>
-            <p:ph type="body" idx="3" sz="quarter"/>
+            <p:ph type="body" sz="quarter" idx="3"/>
           </p:nvPr>
         </p:nvSpPr>
         <p:spPr/>
@@ -863,7 +882,16 @@
           <a:lstStyle/>
           <a:p>
             <a:r>
-              <a:t>This is the words-before-the-graph slide. Technical detail for the members who want it: partial batch and the lean predict path need the PyTorch engine, because the TensorFlow graph fixes its batch size; the ROI crop from 256 to 128 px is opt-in and worth about 2.6x on the forward pass; the decode rewrite and the freshness drain are always on and model-independent. The freshness drain alone took end-to-end from 17.6 to 13.9 ms and cut frames the loop could not hand over from 35.2% to 0.7%.</a:t>
+              <a:rPr dirty="0"/>
+              <a:t>This slide exists so the later numbers have something to be measured against. The user-facing consequence is the line that matters: before, pose was a recording product; now it is a control input. Keep 5 </a:t>
+            </a:r>
+            <a:r>
+              <a:rPr dirty="0" err="1"/>
+              <a:t>ms</a:t>
+            </a:r>
+            <a:r>
+              <a:rPr dirty="0"/>
+              <a:t> described as a budget and a tail figure, never an average.</a:t>
             </a:r>
           </a:p>
         </p:txBody>
@@ -875,7 +903,7 @@
             <a:spLocks noGrp="1"/>
           </p:cNvSpPr>
           <p:nvPr>
-            <p:ph type="sldNum" idx="5" sz="quarter"/>
+            <p:ph type="sldNum" sz="quarter" idx="5"/>
           </p:nvPr>
         </p:nvSpPr>
         <p:spPr/>
@@ -888,8 +916,8 @@
 </p:notes>
 </file>
 
-<file path=ppt/notesSlides/notesSlide5.xml><?xml version="1.0" encoding="utf-8"?>
-<p:notes xmlns:a="http://schemas.openxmlformats.org/drawingml/2006/main" xmlns:p="http://schemas.openxmlformats.org/presentationml/2006/main" xmlns:r="http://schemas.openxmlformats.org/officeDocument/2006/relationships">
+<file path=ppt/notesSlides/notesSlide4.xml><?xml version="1.0" encoding="utf-8"?>
+<p:notes xmlns:a="http://schemas.openxmlformats.org/drawingml/2006/main" xmlns:r="http://schemas.openxmlformats.org/officeDocument/2006/relationships" xmlns:p="http://schemas.openxmlformats.org/presentationml/2006/main">
   <p:cSld>
     <p:spTree>
       <p:nvGrpSpPr>
@@ -909,7 +937,7 @@
         <p:nvSpPr>
           <p:cNvPr id="2" name="Slide Image Placeholder 1"/>
           <p:cNvSpPr>
-            <a:spLocks noGrp="1"/>
+            <a:spLocks noGrp="1" noRot="1" noChangeAspect="1"/>
           </p:cNvSpPr>
           <p:nvPr>
             <p:ph type="sldImg" idx="2"/>
@@ -924,7 +952,7 @@
             <a:spLocks noGrp="1"/>
           </p:cNvSpPr>
           <p:nvPr>
-            <p:ph type="body" idx="3" sz="quarter"/>
+            <p:ph type="body" sz="quarter" idx="3"/>
           </p:nvPr>
         </p:nvSpPr>
         <p:spPr/>
@@ -932,9 +960,175 @@
           <a:bodyPr/>
           <a:lstStyle/>
           <a:p>
-            <a:r>
-              <a:t>Left: under a 16-process load the reflex loop's worst case went from 6.05 ms, which breaks the budget, to 0.155 ms with zero missed deadlines and the full 900 Hz cadence restored. No PREEMPT_RT kernel and no core pinning — both measured, both declined. Right: the three pose-stream changes, each shown against its own before. Units differ between rows, which is why they are labelled per row rather than sharing an axis. All figures are rig measurements on this hardware, not claims about other cards.</a:t>
-            </a:r>
+            <a:pPr rtl="0"/>
+            <a:r>
+              <a:rPr dirty="0"/>
+              <a:t>This is the words-before-the-graph slide. Technical detail for the members who want it: partial batch and the lean predict path need the </a:t>
+            </a:r>
+            <a:r>
+              <a:rPr dirty="0" err="1"/>
+              <a:t>PyTorch</a:t>
+            </a:r>
+            <a:r>
+              <a:rPr dirty="0"/>
+              <a:t> engine, because the TensorFlow graph fixes its batch size; the ROI crop from 256 to 128 </a:t>
+            </a:r>
+            <a:r>
+              <a:rPr dirty="0" err="1"/>
+              <a:t>px</a:t>
+            </a:r>
+            <a:r>
+              <a:rPr dirty="0"/>
+              <a:t> is opt-in and worth about 2.6x on the forward pass; the decode rewrite and the freshness drain are always on and model-independent. The freshness drain alone took end-to-end from 17.6 to 13.9 </a:t>
+            </a:r>
+            <a:r>
+              <a:rPr dirty="0" err="1"/>
+              <a:t>ms</a:t>
+            </a:r>
+            <a:r>
+              <a:rPr dirty="0"/>
+              <a:t> and cut frames the loop could not hand over from 35.2% to 0.7%.</a:t>
+            </a:r>
+            <a:br>
+              <a:rPr lang="en-US" dirty="0"/>
+            </a:br>
+            <a:br>
+              <a:rPr lang="en-US" dirty="0"/>
+            </a:br>
+            <a:r>
+              <a:rPr lang="en-US" b="1" dirty="0"/>
+              <a:t>CUDA graph capture.</a:t>
+            </a:r>
+            <a:r>
+              <a:rPr lang="en-US" dirty="0"/>
+              <a:t> A forward pass is hundreds of tiny kernel launches, and at this model and batch size the GPU finishes each one faster than the CPU can queue the next — so you're paying driver overhead, not compute. Capturing the sequence once and replaying it as a single submission removes that overhead: 7.4 → 3.6 </a:t>
+            </a:r>
+            <a:r>
+              <a:rPr lang="en-US" dirty="0" err="1"/>
+              <a:t>ms</a:t>
+            </a:r>
+            <a:r>
+              <a:rPr lang="en-US" dirty="0"/>
+              <a:t> per call. It only works because live inference always runs the same fixed shape into the same buffers, which is exactly what capture requires.</a:t>
+            </a:r>
+          </a:p>
+          <a:p>
+            <a:pPr rtl="0"/>
+            <a:r>
+              <a:rPr lang="en-US" b="1" dirty="0"/>
+              <a:t>SCHED_FIFO.</a:t>
+            </a:r>
+            <a:r>
+              <a:rPr lang="en-US" dirty="0"/>
+              <a:t> The reflex detector's own compute never exceeded 0.09 </a:t>
+            </a:r>
+            <a:r>
+              <a:rPr lang="en-US" dirty="0" err="1"/>
+              <a:t>ms</a:t>
+            </a:r>
+            <a:r>
+              <a:rPr lang="en-US" dirty="0"/>
+              <a:t>, so the 6.05 </a:t>
+            </a:r>
+            <a:r>
+              <a:rPr lang="en-US" dirty="0" err="1"/>
+              <a:t>ms</a:t>
+            </a:r>
+            <a:r>
+              <a:rPr lang="en-US" dirty="0"/>
+              <a:t> worst case under load was entirely the scheduler not getting around to running it. </a:t>
+            </a:r>
+            <a:r>
+              <a:rPr lang="en-US" sz="1200" kern="1200" dirty="0">
+                <a:solidFill>
+                  <a:schemeClr val="tx1"/>
+                </a:solidFill>
+                <a:latin typeface="+mn-lt"/>
+                <a:ea typeface="+mn-ea"/>
+                <a:cs typeface="+mn-cs"/>
+              </a:rPr>
+              <a:t>SCHED_FIFO</a:t>
+            </a:r>
+            <a:r>
+              <a:rPr lang="en-US" dirty="0"/>
+              <a:t> makes that thread preempt normal work immediately rather than waiting its turn, taking the worst case to 0.155 </a:t>
+            </a:r>
+            <a:r>
+              <a:rPr lang="en-US" dirty="0" err="1"/>
+              <a:t>ms</a:t>
+            </a:r>
+            <a:r>
+              <a:rPr lang="en-US" dirty="0"/>
+              <a:t> with zero missed deadlines. A PREEMPT_RT kernel was measured and declined — stock Linux already </a:t>
+            </a:r>
+            <a:r>
+              <a:rPr lang="en-US" dirty="0" err="1"/>
+              <a:t>honours</a:t>
+            </a:r>
+            <a:r>
+              <a:rPr lang="en-US" dirty="0"/>
+              <a:t> the preemption.</a:t>
+            </a:r>
+          </a:p>
+          <a:p>
+            <a:pPr rtl="0"/>
+            <a:r>
+              <a:rPr lang="en-US" b="1" dirty="0"/>
+              <a:t>Performance governor.</a:t>
+            </a:r>
+            <a:r>
+              <a:rPr lang="en-US" dirty="0"/>
+              <a:t> The default </a:t>
+            </a:r>
+            <a:r>
+              <a:rPr lang="en-US" sz="1200" kern="1200" dirty="0" err="1">
+                <a:solidFill>
+                  <a:schemeClr val="tx1"/>
+                </a:solidFill>
+                <a:latin typeface="+mn-lt"/>
+                <a:ea typeface="+mn-ea"/>
+                <a:cs typeface="+mn-cs"/>
+              </a:rPr>
+              <a:t>powersave</a:t>
+            </a:r>
+            <a:r>
+              <a:rPr lang="en-US" dirty="0"/>
+              <a:t> governor held the P-cores near 2700 MHz against a 5000 MHz ceiling, so the machine was quietly running at about half clock under sustained load. Setting </a:t>
+            </a:r>
+            <a:r>
+              <a:rPr lang="en-US" sz="1200" kern="1200" dirty="0">
+                <a:solidFill>
+                  <a:schemeClr val="tx1"/>
+                </a:solidFill>
+                <a:latin typeface="+mn-lt"/>
+                <a:ea typeface="+mn-ea"/>
+                <a:cs typeface="+mn-cs"/>
+              </a:rPr>
+              <a:t>performance</a:t>
+            </a:r>
+            <a:r>
+              <a:rPr lang="en-US" dirty="0"/>
+              <a:t> took live inference from 12.55 to 10.79 </a:t>
+            </a:r>
+            <a:r>
+              <a:rPr lang="en-US" dirty="0" err="1"/>
+              <a:t>ms</a:t>
+            </a:r>
+            <a:r>
+              <a:rPr lang="en-US" dirty="0"/>
+              <a:t> p50, and 17.58 to 11.53 </a:t>
+            </a:r>
+            <a:r>
+              <a:rPr lang="en-US" dirty="0" err="1"/>
+              <a:t>ms</a:t>
+            </a:r>
+            <a:r>
+              <a:rPr lang="en-US" dirty="0"/>
+              <a:t> p99 — six milliseconds of tail from one configuration line.</a:t>
+            </a:r>
+          </a:p>
+          <a:p>
+            <a:endParaRPr dirty="0"/>
           </a:p>
         </p:txBody>
       </p:sp>
@@ -945,7 +1139,7 @@
             <a:spLocks noGrp="1"/>
           </p:cNvSpPr>
           <p:nvPr>
-            <p:ph type="sldNum" idx="5" sz="quarter"/>
+            <p:ph type="sldNum" sz="quarter" idx="5"/>
           </p:nvPr>
         </p:nvSpPr>
         <p:spPr/>
@@ -958,8 +1152,273 @@
 </p:notes>
 </file>
 
+<file path=ppt/notesSlides/notesSlide5.xml><?xml version="1.0" encoding="utf-8"?>
+<p:notes xmlns:a="http://schemas.openxmlformats.org/drawingml/2006/main" xmlns:r="http://schemas.openxmlformats.org/officeDocument/2006/relationships" xmlns:p="http://schemas.openxmlformats.org/presentationml/2006/main">
+  <p:cSld>
+    <p:spTree>
+      <p:nvGrpSpPr>
+        <p:cNvPr id="1" name="">
+          <a:extLst>
+            <a:ext uri="{FF2B5EF4-FFF2-40B4-BE49-F238E27FC236}">
+              <a16:creationId xmlns:a16="http://schemas.microsoft.com/office/drawing/2014/main" id="{034DB464-7B35-5069-842D-68AB1207E221}"/>
+            </a:ext>
+          </a:extLst>
+        </p:cNvPr>
+        <p:cNvGrpSpPr/>
+        <p:nvPr/>
+      </p:nvGrpSpPr>
+      <p:grpSpPr>
+        <a:xfrm>
+          <a:off x="0" y="0"/>
+          <a:ext cx="0" cy="0"/>
+          <a:chOff x="0" y="0"/>
+          <a:chExt cx="0" cy="0"/>
+        </a:xfrm>
+      </p:grpSpPr>
+      <p:sp>
+        <p:nvSpPr>
+          <p:cNvPr id="2" name="Slide Image Placeholder 1">
+            <a:extLst>
+              <a:ext uri="{FF2B5EF4-FFF2-40B4-BE49-F238E27FC236}">
+                <a16:creationId xmlns:a16="http://schemas.microsoft.com/office/drawing/2014/main" id="{0C84A0B9-5363-A7FC-661D-A3FDAC38337A}"/>
+              </a:ext>
+            </a:extLst>
+          </p:cNvPr>
+          <p:cNvSpPr>
+            <a:spLocks noGrp="1" noRot="1" noChangeAspect="1"/>
+          </p:cNvSpPr>
+          <p:nvPr>
+            <p:ph type="sldImg" idx="2"/>
+          </p:nvPr>
+        </p:nvSpPr>
+        <p:spPr/>
+      </p:sp>
+      <p:sp>
+        <p:nvSpPr>
+          <p:cNvPr id="3" name="Notes Placeholder 2">
+            <a:extLst>
+              <a:ext uri="{FF2B5EF4-FFF2-40B4-BE49-F238E27FC236}">
+                <a16:creationId xmlns:a16="http://schemas.microsoft.com/office/drawing/2014/main" id="{79339940-D33F-3606-1E0C-59FE6D4EC69D}"/>
+              </a:ext>
+            </a:extLst>
+          </p:cNvPr>
+          <p:cNvSpPr>
+            <a:spLocks noGrp="1"/>
+          </p:cNvSpPr>
+          <p:nvPr>
+            <p:ph type="body" sz="quarter" idx="3"/>
+          </p:nvPr>
+        </p:nvSpPr>
+        <p:spPr/>
+        <p:txBody>
+          <a:bodyPr/>
+          <a:lstStyle/>
+          <a:p>
+            <a:pPr rtl="0"/>
+            <a:r>
+              <a:rPr dirty="0"/>
+              <a:t>This is the words-before-the-graph slide. Technical detail for the members who want it: partial batch and the lean predict path need the </a:t>
+            </a:r>
+            <a:r>
+              <a:rPr dirty="0" err="1"/>
+              <a:t>PyTorch</a:t>
+            </a:r>
+            <a:r>
+              <a:rPr dirty="0"/>
+              <a:t> engine, because the TensorFlow graph fixes its batch size; the ROI crop from 256 to 128 </a:t>
+            </a:r>
+            <a:r>
+              <a:rPr dirty="0" err="1"/>
+              <a:t>px</a:t>
+            </a:r>
+            <a:r>
+              <a:rPr dirty="0"/>
+              <a:t> is opt-in and worth about 2.6x on the forward pass; the decode rewrite and the freshness drain are always on and model-independent. The freshness drain alone took end-to-end from 17.6 to 13.9 </a:t>
+            </a:r>
+            <a:r>
+              <a:rPr dirty="0" err="1"/>
+              <a:t>ms</a:t>
+            </a:r>
+            <a:r>
+              <a:rPr dirty="0"/>
+              <a:t> and cut frames the loop could not hand over from 35.2% to 0.7%.</a:t>
+            </a:r>
+            <a:br>
+              <a:rPr lang="en-US" dirty="0"/>
+            </a:br>
+            <a:br>
+              <a:rPr lang="en-US" dirty="0"/>
+            </a:br>
+            <a:r>
+              <a:rPr lang="en-US" b="1" dirty="0"/>
+              <a:t>CUDA graph capture.</a:t>
+            </a:r>
+            <a:r>
+              <a:rPr lang="en-US" dirty="0"/>
+              <a:t> A forward pass is hundreds of tiny kernel launches, and at this model and batch size the GPU finishes each one faster than the CPU can queue the next — so you're paying driver overhead, not compute. Capturing the sequence once and replaying it as a single submission removes that overhead: 7.4 → 3.6 </a:t>
+            </a:r>
+            <a:r>
+              <a:rPr lang="en-US" dirty="0" err="1"/>
+              <a:t>ms</a:t>
+            </a:r>
+            <a:r>
+              <a:rPr lang="en-US" dirty="0"/>
+              <a:t> per call. It only works because live inference always runs the same fixed shape into the same buffers, which is exactly what capture requires.</a:t>
+            </a:r>
+          </a:p>
+          <a:p>
+            <a:pPr rtl="0"/>
+            <a:r>
+              <a:rPr lang="en-US" b="1" dirty="0"/>
+              <a:t>SCHED_FIFO.</a:t>
+            </a:r>
+            <a:r>
+              <a:rPr lang="en-US" dirty="0"/>
+              <a:t> The reflex detector's own compute never exceeded 0.09 </a:t>
+            </a:r>
+            <a:r>
+              <a:rPr lang="en-US" dirty="0" err="1"/>
+              <a:t>ms</a:t>
+            </a:r>
+            <a:r>
+              <a:rPr lang="en-US" dirty="0"/>
+              <a:t>, so the 6.05 </a:t>
+            </a:r>
+            <a:r>
+              <a:rPr lang="en-US" dirty="0" err="1"/>
+              <a:t>ms</a:t>
+            </a:r>
+            <a:r>
+              <a:rPr lang="en-US" dirty="0"/>
+              <a:t> worst case under load was entirely the scheduler not getting around to running it. </a:t>
+            </a:r>
+            <a:r>
+              <a:rPr lang="en-US" sz="1200" kern="1200" dirty="0">
+                <a:solidFill>
+                  <a:schemeClr val="tx1"/>
+                </a:solidFill>
+                <a:latin typeface="+mn-lt"/>
+                <a:ea typeface="+mn-ea"/>
+                <a:cs typeface="+mn-cs"/>
+              </a:rPr>
+              <a:t>SCHED_FIFO</a:t>
+            </a:r>
+            <a:r>
+              <a:rPr lang="en-US" dirty="0"/>
+              <a:t> makes that thread preempt normal work immediately rather than waiting its turn, taking the worst case to 0.155 </a:t>
+            </a:r>
+            <a:r>
+              <a:rPr lang="en-US" dirty="0" err="1"/>
+              <a:t>ms</a:t>
+            </a:r>
+            <a:r>
+              <a:rPr lang="en-US" dirty="0"/>
+              <a:t> with zero missed deadlines. A PREEMPT_RT kernel was measured and declined — stock Linux already </a:t>
+            </a:r>
+            <a:r>
+              <a:rPr lang="en-US" dirty="0" err="1"/>
+              <a:t>honours</a:t>
+            </a:r>
+            <a:r>
+              <a:rPr lang="en-US" dirty="0"/>
+              <a:t> the preemption.</a:t>
+            </a:r>
+          </a:p>
+          <a:p>
+            <a:pPr rtl="0"/>
+            <a:r>
+              <a:rPr lang="en-US" b="1" dirty="0"/>
+              <a:t>Performance governor.</a:t>
+            </a:r>
+            <a:r>
+              <a:rPr lang="en-US" dirty="0"/>
+              <a:t> The default </a:t>
+            </a:r>
+            <a:r>
+              <a:rPr lang="en-US" sz="1200" kern="1200" dirty="0" err="1">
+                <a:solidFill>
+                  <a:schemeClr val="tx1"/>
+                </a:solidFill>
+                <a:latin typeface="+mn-lt"/>
+                <a:ea typeface="+mn-ea"/>
+                <a:cs typeface="+mn-cs"/>
+              </a:rPr>
+              <a:t>powersave</a:t>
+            </a:r>
+            <a:r>
+              <a:rPr lang="en-US" dirty="0"/>
+              <a:t> governor held the P-cores near 2700 MHz against a 5000 MHz ceiling, so the machine was quietly running at about half clock under sustained load. Setting </a:t>
+            </a:r>
+            <a:r>
+              <a:rPr lang="en-US" sz="1200" kern="1200" dirty="0">
+                <a:solidFill>
+                  <a:schemeClr val="tx1"/>
+                </a:solidFill>
+                <a:latin typeface="+mn-lt"/>
+                <a:ea typeface="+mn-ea"/>
+                <a:cs typeface="+mn-cs"/>
+              </a:rPr>
+              <a:t>performance</a:t>
+            </a:r>
+            <a:r>
+              <a:rPr lang="en-US" dirty="0"/>
+              <a:t> took live inference from 12.55 to 10.79 </a:t>
+            </a:r>
+            <a:r>
+              <a:rPr lang="en-US" dirty="0" err="1"/>
+              <a:t>ms</a:t>
+            </a:r>
+            <a:r>
+              <a:rPr lang="en-US" dirty="0"/>
+              <a:t> p50, and 17.58 to 11.53 </a:t>
+            </a:r>
+            <a:r>
+              <a:rPr lang="en-US" dirty="0" err="1"/>
+              <a:t>ms</a:t>
+            </a:r>
+            <a:r>
+              <a:rPr lang="en-US" dirty="0"/>
+              <a:t> p99 — six milliseconds of tail from one configuration line.</a:t>
+            </a:r>
+          </a:p>
+          <a:p>
+            <a:endParaRPr dirty="0"/>
+          </a:p>
+        </p:txBody>
+      </p:sp>
+      <p:sp>
+        <p:nvSpPr>
+          <p:cNvPr id="4" name="Slide Number Placeholder 3">
+            <a:extLst>
+              <a:ext uri="{FF2B5EF4-FFF2-40B4-BE49-F238E27FC236}">
+                <a16:creationId xmlns:a16="http://schemas.microsoft.com/office/drawing/2014/main" id="{8F0119C2-B437-7304-85A0-2247BCE0D16E}"/>
+              </a:ext>
+            </a:extLst>
+          </p:cNvPr>
+          <p:cNvSpPr>
+            <a:spLocks noGrp="1"/>
+          </p:cNvSpPr>
+          <p:nvPr>
+            <p:ph type="sldNum" sz="quarter" idx="5"/>
+          </p:nvPr>
+        </p:nvSpPr>
+        <p:spPr/>
+      </p:sp>
+    </p:spTree>
+    <p:extLst>
+      <p:ext uri="{BB962C8B-B14F-4D97-AF65-F5344CB8AC3E}">
+        <p14:creationId xmlns:p14="http://schemas.microsoft.com/office/powerpoint/2010/main" val="3556180873"/>
+      </p:ext>
+    </p:extLst>
+  </p:cSld>
+  <p:clrMapOvr>
+    <a:masterClrMapping/>
+  </p:clrMapOvr>
+</p:notes>
+</file>
+
 <file path=ppt/notesSlides/notesSlide6.xml><?xml version="1.0" encoding="utf-8"?>
-<p:notes xmlns:a="http://schemas.openxmlformats.org/drawingml/2006/main" xmlns:p="http://schemas.openxmlformats.org/presentationml/2006/main" xmlns:r="http://schemas.openxmlformats.org/officeDocument/2006/relationships">
+<p:notes xmlns:a="http://schemas.openxmlformats.org/drawingml/2006/main" xmlns:r="http://schemas.openxmlformats.org/officeDocument/2006/relationships" xmlns:p="http://schemas.openxmlformats.org/presentationml/2006/main">
   <p:cSld>
     <p:spTree>
       <p:nvGrpSpPr>
@@ -979,7 +1438,7 @@
         <p:nvSpPr>
           <p:cNvPr id="2" name="Slide Image Placeholder 1"/>
           <p:cNvSpPr>
-            <a:spLocks noGrp="1"/>
+            <a:spLocks noGrp="1" noRot="1" noChangeAspect="1"/>
           </p:cNvSpPr>
           <p:nvPr>
             <p:ph type="sldImg" idx="2"/>
@@ -994,7 +1453,7 @@
             <a:spLocks noGrp="1"/>
           </p:cNvSpPr>
           <p:nvPr>
-            <p:ph type="body" idx="3" sz="quarter"/>
+            <p:ph type="body" sz="quarter" idx="3"/>
           </p:nvPr>
         </p:nvSpPr>
         <p:spPr/>
@@ -1003,7 +1462,7 @@
           <a:lstStyle/>
           <a:p>
             <a:r>
-              <a:t>The honest framing is a menu, not a winner. A user optimising for a tight closed loop picks differently from one optimising for keypoint accuracy in later analysis. The per-backbone threshold matters: a cspnext_s never scores above 0.33, so a single global threshold would hold the reach flag permanently false.</a:t>
+              <a:t>Left: under a 16-process load the reflex loop's worst case went from 6.05 ms, which breaks the budget, to 0.155 ms with zero missed deadlines and the full 900 Hz cadence restored. No PREEMPT_RT kernel and no core pinning — both measured, both declined. Right: the three pose-stream changes, each shown against its own before. Units differ between rows, which is why they are labelled per row rather than sharing an axis. All figures are rig measurements on this hardware, not claims about other cards.</a:t>
             </a:r>
           </a:p>
         </p:txBody>
@@ -1015,7 +1474,7 @@
             <a:spLocks noGrp="1"/>
           </p:cNvSpPr>
           <p:nvPr>
-            <p:ph type="sldNum" idx="5" sz="quarter"/>
+            <p:ph type="sldNum" sz="quarter" idx="5"/>
           </p:nvPr>
         </p:nvSpPr>
         <p:spPr/>
@@ -1029,7 +1488,7 @@
 </file>
 
 <file path=ppt/notesSlides/notesSlide7.xml><?xml version="1.0" encoding="utf-8"?>
-<p:notes xmlns:a="http://schemas.openxmlformats.org/drawingml/2006/main" xmlns:p="http://schemas.openxmlformats.org/presentationml/2006/main" xmlns:r="http://schemas.openxmlformats.org/officeDocument/2006/relationships">
+<p:notes xmlns:a="http://schemas.openxmlformats.org/drawingml/2006/main" xmlns:r="http://schemas.openxmlformats.org/officeDocument/2006/relationships" xmlns:p="http://schemas.openxmlformats.org/presentationml/2006/main">
   <p:cSld>
     <p:spTree>
       <p:nvGrpSpPr>
@@ -1049,7 +1508,7 @@
         <p:nvSpPr>
           <p:cNvPr id="2" name="Slide Image Placeholder 1"/>
           <p:cNvSpPr>
-            <a:spLocks noGrp="1"/>
+            <a:spLocks noGrp="1" noRot="1" noChangeAspect="1"/>
           </p:cNvSpPr>
           <p:nvPr>
             <p:ph type="sldImg" idx="2"/>
@@ -1064,7 +1523,7 @@
             <a:spLocks noGrp="1"/>
           </p:cNvSpPr>
           <p:nvPr>
-            <p:ph type="body" idx="3" sz="quarter"/>
+            <p:ph type="body" sz="quarter" idx="3"/>
           </p:nvPr>
         </p:nvSpPr>
         <p:spPr/>
@@ -1073,7 +1532,7 @@
           <a:lstStyle/>
           <a:p>
             <a:r>
-              <a:t>If asked about flags: a default rig gets the always-on wins, the decode rewrite and the freshness drain, plus the Tier 1 scheduling. The partial batch and lean predict path need the PyTorch backend selected, and the ROI crop is opt-in.</a:t>
+              <a:t>The honest framing is a menu, not a winner. A user optimising for a tight closed loop picks differently from one optimising for keypoint accuracy in later analysis. The per-backbone threshold matters: a cspnext_s never scores above 0.33, so a single global threshold would hold the reach flag permanently false.</a:t>
             </a:r>
           </a:p>
         </p:txBody>
@@ -1085,7 +1544,7 @@
             <a:spLocks noGrp="1"/>
           </p:cNvSpPr>
           <p:nvPr>
-            <p:ph type="sldNum" idx="5" sz="quarter"/>
+            <p:ph type="sldNum" sz="quarter" idx="5"/>
           </p:nvPr>
         </p:nvSpPr>
         <p:spPr/>
@@ -1099,7 +1558,7 @@
 </file>
 
 <file path=ppt/notesSlides/notesSlide8.xml><?xml version="1.0" encoding="utf-8"?>
-<p:notes xmlns:a="http://schemas.openxmlformats.org/drawingml/2006/main" xmlns:p="http://schemas.openxmlformats.org/presentationml/2006/main" xmlns:r="http://schemas.openxmlformats.org/officeDocument/2006/relationships">
+<p:notes xmlns:a="http://schemas.openxmlformats.org/drawingml/2006/main" xmlns:r="http://schemas.openxmlformats.org/officeDocument/2006/relationships" xmlns:p="http://schemas.openxmlformats.org/presentationml/2006/main">
   <p:cSld>
     <p:spTree>
       <p:nvGrpSpPr>
@@ -1119,7 +1578,7 @@
         <p:nvSpPr>
           <p:cNvPr id="2" name="Slide Image Placeholder 1"/>
           <p:cNvSpPr>
-            <a:spLocks noGrp="1"/>
+            <a:spLocks noGrp="1" noRot="1" noChangeAspect="1"/>
           </p:cNvSpPr>
           <p:nvPr>
             <p:ph type="sldImg" idx="2"/>
@@ -1134,7 +1593,7 @@
             <a:spLocks noGrp="1"/>
           </p:cNvSpPr>
           <p:nvPr>
-            <p:ph type="body" idx="3" sz="quarter"/>
+            <p:ph type="body" sz="quarter" idx="3"/>
           </p:nvPr>
         </p:nvSpPr>
         <p:spPr/>
@@ -1143,7 +1602,7 @@
           <a:lstStyle/>
           <a:p>
             <a:r>
-              <a:t>Four sync modes: auto, backplane, external, independent. Compatible PXI cards share PXI_CLK10, a backplane start trigger and a routed master sample clock. Devices resolve by product and serial, so a changed NI-DAQmx alias never silently rebinds to the wrong card. Tone confirmation cross-checks commanded tones against the pulses actually observed.</a:t>
+              <a:t>If asked about flags: a default rig gets the always-on wins, the decode rewrite and the freshness drain, plus the Tier 1 scheduling. The partial batch and lean predict path need the PyTorch backend selected, and the ROI crop is opt-in.</a:t>
             </a:r>
           </a:p>
         </p:txBody>
@@ -1155,7 +1614,7 @@
             <a:spLocks noGrp="1"/>
           </p:cNvSpPr>
           <p:nvPr>
-            <p:ph type="sldNum" idx="5" sz="quarter"/>
+            <p:ph type="sldNum" sz="quarter" idx="5"/>
           </p:nvPr>
         </p:nvSpPr>
         <p:spPr/>
@@ -1169,7 +1628,7 @@
 </file>
 
 <file path=ppt/notesSlides/notesSlide9.xml><?xml version="1.0" encoding="utf-8"?>
-<p:notes xmlns:a="http://schemas.openxmlformats.org/drawingml/2006/main" xmlns:p="http://schemas.openxmlformats.org/presentationml/2006/main" xmlns:r="http://schemas.openxmlformats.org/officeDocument/2006/relationships">
+<p:notes xmlns:a="http://schemas.openxmlformats.org/drawingml/2006/main" xmlns:r="http://schemas.openxmlformats.org/officeDocument/2006/relationships" xmlns:p="http://schemas.openxmlformats.org/presentationml/2006/main">
   <p:cSld>
     <p:spTree>
       <p:nvGrpSpPr>
@@ -1189,7 +1648,7 @@
         <p:nvSpPr>
           <p:cNvPr id="2" name="Slide Image Placeholder 1"/>
           <p:cNvSpPr>
-            <a:spLocks noGrp="1"/>
+            <a:spLocks noGrp="1" noRot="1" noChangeAspect="1"/>
           </p:cNvSpPr>
           <p:nvPr>
             <p:ph type="sldImg" idx="2"/>
@@ -1204,7 +1663,7 @@
             <a:spLocks noGrp="1"/>
           </p:cNvSpPr>
           <p:nvPr>
-            <p:ph type="body" idx="3" sz="quarter"/>
+            <p:ph type="body" sz="quarter" idx="3"/>
           </p:nvPr>
         </p:nvSpPr>
         <p:spPr/>
@@ -1213,7 +1672,7 @@
           <a:lstStyle/>
           <a:p>
             <a:r>
-              <a:t>The point for a new user is that this replaces post-hoc plotting. A decimated FSR trace is useless for behavioural analysis, so samples are forwarded unthrottled and an armed session gains roughly 166 rows a second. Worth flagging out loud: there is no microphone channel in the system today.</a:t>
+              <a:t>Four sync modes: auto, backplane, external, independent. Compatible PXI cards share PXI_CLK10, a backplane start trigger and a routed master sample clock. Devices resolve by product and serial, so a changed NI-DAQmx alias never silently rebinds to the wrong card. Tone confirmation cross-checks commanded tones against the pulses actually observed.</a:t>
             </a:r>
           </a:p>
         </p:txBody>
@@ -1225,7 +1684,7 @@
             <a:spLocks noGrp="1"/>
           </p:cNvSpPr>
           <p:nvPr>
-            <p:ph type="sldNum" idx="5" sz="quarter"/>
+            <p:ph type="sldNum" sz="quarter" idx="5"/>
           </p:nvPr>
         </p:nvSpPr>
         <p:spPr/>
@@ -1276,10 +1735,9 @@
           <a:lstStyle/>
           <a:p>
             <a:r>
-              <a:rPr lang="en-US" smtClean="0"/>
+              <a:rPr lang="en-US"/>
               <a:t>Click to edit Master title style</a:t>
             </a:r>
-            <a:endParaRPr lang="en-US"/>
           </a:p>
         </p:txBody>
       </p:sp>
@@ -1395,10 +1853,9 @@
           </a:lstStyle>
           <a:p>
             <a:r>
-              <a:rPr lang="en-US" smtClean="0"/>
+              <a:rPr lang="en-US"/>
               <a:t>Click to edit Master subtitle style</a:t>
             </a:r>
-            <a:endParaRPr lang="en-US"/>
           </a:p>
         </p:txBody>
       </p:sp>
@@ -1419,7 +1876,7 @@
           <a:p>
             <a:fld id="{5BCAD085-E8A6-8845-BD4E-CB4CCA059FC4}" type="datetimeFigureOut">
               <a:rPr lang="en-US" smtClean="0"/>
-              <a:t>1/27/13</a:t>
+              <a:t>9/18/2026</a:t>
             </a:fld>
             <a:endParaRPr lang="en-US"/>
           </a:p>
@@ -1513,10 +1970,9 @@
           <a:lstStyle/>
           <a:p>
             <a:r>
-              <a:rPr lang="en-US" smtClean="0"/>
+              <a:rPr lang="en-US"/>
               <a:t>Click to edit Master title style</a:t>
             </a:r>
-            <a:endParaRPr lang="en-US"/>
           </a:p>
         </p:txBody>
       </p:sp>
@@ -1537,38 +1993,37 @@
           <a:p>
             <a:pPr lvl="0"/>
             <a:r>
-              <a:rPr lang="en-US" smtClean="0"/>
+              <a:rPr lang="en-US"/>
               <a:t>Click to edit Master text styles</a:t>
             </a:r>
           </a:p>
           <a:p>
             <a:pPr lvl="1"/>
             <a:r>
-              <a:rPr lang="en-US" smtClean="0"/>
+              <a:rPr lang="en-US"/>
               <a:t>Second level</a:t>
             </a:r>
           </a:p>
           <a:p>
             <a:pPr lvl="2"/>
             <a:r>
-              <a:rPr lang="en-US" smtClean="0"/>
+              <a:rPr lang="en-US"/>
               <a:t>Third level</a:t>
             </a:r>
           </a:p>
           <a:p>
             <a:pPr lvl="3"/>
             <a:r>
-              <a:rPr lang="en-US" smtClean="0"/>
+              <a:rPr lang="en-US"/>
               <a:t>Fourth level</a:t>
             </a:r>
           </a:p>
           <a:p>
             <a:pPr lvl="4"/>
             <a:r>
-              <a:rPr lang="en-US" smtClean="0"/>
+              <a:rPr lang="en-US"/>
               <a:t>Fifth level</a:t>
             </a:r>
-            <a:endParaRPr lang="en-US"/>
           </a:p>
         </p:txBody>
       </p:sp>
@@ -1589,7 +2044,7 @@
           <a:p>
             <a:fld id="{5BCAD085-E8A6-8845-BD4E-CB4CCA059FC4}" type="datetimeFigureOut">
               <a:rPr lang="en-US" smtClean="0"/>
-              <a:t>1/27/13</a:t>
+              <a:t>9/18/2026</a:t>
             </a:fld>
             <a:endParaRPr lang="en-US"/>
           </a:p>
@@ -1688,10 +2143,9 @@
           <a:lstStyle/>
           <a:p>
             <a:r>
-              <a:rPr lang="en-US" smtClean="0"/>
+              <a:rPr lang="en-US"/>
               <a:t>Click to edit Master title style</a:t>
             </a:r>
-            <a:endParaRPr lang="en-US"/>
           </a:p>
         </p:txBody>
       </p:sp>
@@ -1717,38 +2171,37 @@
           <a:p>
             <a:pPr lvl="0"/>
             <a:r>
-              <a:rPr lang="en-US" smtClean="0"/>
+              <a:rPr lang="en-US"/>
               <a:t>Click to edit Master text styles</a:t>
             </a:r>
           </a:p>
           <a:p>
             <a:pPr lvl="1"/>
             <a:r>
-              <a:rPr lang="en-US" smtClean="0"/>
+              <a:rPr lang="en-US"/>
               <a:t>Second level</a:t>
             </a:r>
           </a:p>
           <a:p>
             <a:pPr lvl="2"/>
             <a:r>
-              <a:rPr lang="en-US" smtClean="0"/>
+              <a:rPr lang="en-US"/>
               <a:t>Third level</a:t>
             </a:r>
           </a:p>
           <a:p>
             <a:pPr lvl="3"/>
             <a:r>
-              <a:rPr lang="en-US" smtClean="0"/>
+              <a:rPr lang="en-US"/>
               <a:t>Fourth level</a:t>
             </a:r>
           </a:p>
           <a:p>
             <a:pPr lvl="4"/>
             <a:r>
-              <a:rPr lang="en-US" smtClean="0"/>
+              <a:rPr lang="en-US"/>
               <a:t>Fifth level</a:t>
             </a:r>
-            <a:endParaRPr lang="en-US"/>
           </a:p>
         </p:txBody>
       </p:sp>
@@ -1769,7 +2222,7 @@
           <a:p>
             <a:fld id="{5BCAD085-E8A6-8845-BD4E-CB4CCA059FC4}" type="datetimeFigureOut">
               <a:rPr lang="en-US" smtClean="0"/>
-              <a:t>1/27/13</a:t>
+              <a:t>9/18/2026</a:t>
             </a:fld>
             <a:endParaRPr lang="en-US"/>
           </a:p>
@@ -1863,10 +2316,9 @@
           <a:lstStyle/>
           <a:p>
             <a:r>
-              <a:rPr lang="en-US" smtClean="0"/>
+              <a:rPr lang="en-US"/>
               <a:t>Click to edit Master title style</a:t>
             </a:r>
-            <a:endParaRPr lang="en-US"/>
           </a:p>
         </p:txBody>
       </p:sp>
@@ -1887,38 +2339,37 @@
           <a:p>
             <a:pPr lvl="0"/>
             <a:r>
-              <a:rPr lang="en-US" smtClean="0"/>
+              <a:rPr lang="en-US"/>
               <a:t>Click to edit Master text styles</a:t>
             </a:r>
           </a:p>
           <a:p>
             <a:pPr lvl="1"/>
             <a:r>
-              <a:rPr lang="en-US" smtClean="0"/>
+              <a:rPr lang="en-US"/>
               <a:t>Second level</a:t>
             </a:r>
           </a:p>
           <a:p>
             <a:pPr lvl="2"/>
             <a:r>
-              <a:rPr lang="en-US" smtClean="0"/>
+              <a:rPr lang="en-US"/>
               <a:t>Third level</a:t>
             </a:r>
           </a:p>
           <a:p>
             <a:pPr lvl="3"/>
             <a:r>
-              <a:rPr lang="en-US" smtClean="0"/>
+              <a:rPr lang="en-US"/>
               <a:t>Fourth level</a:t>
             </a:r>
           </a:p>
           <a:p>
             <a:pPr lvl="4"/>
             <a:r>
-              <a:rPr lang="en-US" smtClean="0"/>
+              <a:rPr lang="en-US"/>
               <a:t>Fifth level</a:t>
             </a:r>
-            <a:endParaRPr lang="en-US"/>
           </a:p>
         </p:txBody>
       </p:sp>
@@ -1939,7 +2390,7 @@
           <a:p>
             <a:fld id="{5BCAD085-E8A6-8845-BD4E-CB4CCA059FC4}" type="datetimeFigureOut">
               <a:rPr lang="en-US" smtClean="0"/>
-              <a:t>1/27/13</a:t>
+              <a:t>9/18/2026</a:t>
             </a:fld>
             <a:endParaRPr lang="en-US"/>
           </a:p>
@@ -2042,10 +2493,9 @@
           </a:lstStyle>
           <a:p>
             <a:r>
-              <a:rPr lang="en-US" smtClean="0"/>
+              <a:rPr lang="en-US"/>
               <a:t>Click to edit Master title style</a:t>
             </a:r>
-            <a:endParaRPr lang="en-US"/>
           </a:p>
         </p:txBody>
       </p:sp>
@@ -2162,7 +2612,7 @@
           <a:p>
             <a:pPr lvl="0"/>
             <a:r>
-              <a:rPr lang="en-US" smtClean="0"/>
+              <a:rPr lang="en-US"/>
               <a:t>Click to edit Master text styles</a:t>
             </a:r>
           </a:p>
@@ -2185,7 +2635,7 @@
           <a:p>
             <a:fld id="{5BCAD085-E8A6-8845-BD4E-CB4CCA059FC4}" type="datetimeFigureOut">
               <a:rPr lang="en-US" smtClean="0"/>
-              <a:t>1/27/13</a:t>
+              <a:t>9/18/2026</a:t>
             </a:fld>
             <a:endParaRPr lang="en-US"/>
           </a:p>
@@ -2279,10 +2729,9 @@
           <a:lstStyle/>
           <a:p>
             <a:r>
-              <a:rPr lang="en-US" smtClean="0"/>
+              <a:rPr lang="en-US"/>
               <a:t>Click to edit Master title style</a:t>
             </a:r>
-            <a:endParaRPr lang="en-US"/>
           </a:p>
         </p:txBody>
       </p:sp>
@@ -2336,38 +2785,37 @@
           <a:p>
             <a:pPr lvl="0"/>
             <a:r>
-              <a:rPr lang="en-US" smtClean="0"/>
+              <a:rPr lang="en-US"/>
               <a:t>Click to edit Master text styles</a:t>
             </a:r>
           </a:p>
           <a:p>
             <a:pPr lvl="1"/>
             <a:r>
-              <a:rPr lang="en-US" smtClean="0"/>
+              <a:rPr lang="en-US"/>
               <a:t>Second level</a:t>
             </a:r>
           </a:p>
           <a:p>
             <a:pPr lvl="2"/>
             <a:r>
-              <a:rPr lang="en-US" smtClean="0"/>
+              <a:rPr lang="en-US"/>
               <a:t>Third level</a:t>
             </a:r>
           </a:p>
           <a:p>
             <a:pPr lvl="3"/>
             <a:r>
-              <a:rPr lang="en-US" smtClean="0"/>
+              <a:rPr lang="en-US"/>
               <a:t>Fourth level</a:t>
             </a:r>
           </a:p>
           <a:p>
             <a:pPr lvl="4"/>
             <a:r>
-              <a:rPr lang="en-US" smtClean="0"/>
+              <a:rPr lang="en-US"/>
               <a:t>Fifth level</a:t>
             </a:r>
-            <a:endParaRPr lang="en-US"/>
           </a:p>
         </p:txBody>
       </p:sp>
@@ -2421,38 +2869,37 @@
           <a:p>
             <a:pPr lvl="0"/>
             <a:r>
-              <a:rPr lang="en-US" smtClean="0"/>
+              <a:rPr lang="en-US"/>
               <a:t>Click to edit Master text styles</a:t>
             </a:r>
           </a:p>
           <a:p>
             <a:pPr lvl="1"/>
             <a:r>
-              <a:rPr lang="en-US" smtClean="0"/>
+              <a:rPr lang="en-US"/>
               <a:t>Second level</a:t>
             </a:r>
           </a:p>
           <a:p>
             <a:pPr lvl="2"/>
             <a:r>
-              <a:rPr lang="en-US" smtClean="0"/>
+              <a:rPr lang="en-US"/>
               <a:t>Third level</a:t>
             </a:r>
           </a:p>
           <a:p>
             <a:pPr lvl="3"/>
             <a:r>
-              <a:rPr lang="en-US" smtClean="0"/>
+              <a:rPr lang="en-US"/>
               <a:t>Fourth level</a:t>
             </a:r>
           </a:p>
           <a:p>
             <a:pPr lvl="4"/>
             <a:r>
-              <a:rPr lang="en-US" smtClean="0"/>
+              <a:rPr lang="en-US"/>
               <a:t>Fifth level</a:t>
             </a:r>
-            <a:endParaRPr lang="en-US"/>
           </a:p>
         </p:txBody>
       </p:sp>
@@ -2473,7 +2920,7 @@
           <a:p>
             <a:fld id="{5BCAD085-E8A6-8845-BD4E-CB4CCA059FC4}" type="datetimeFigureOut">
               <a:rPr lang="en-US" smtClean="0"/>
-              <a:t>1/27/13</a:t>
+              <a:t>9/18/2026</a:t>
             </a:fld>
             <a:endParaRPr lang="en-US"/>
           </a:p>
@@ -2571,10 +3018,9 @@
           </a:lstStyle>
           <a:p>
             <a:r>
-              <a:rPr lang="en-US" smtClean="0"/>
+              <a:rPr lang="en-US"/>
               <a:t>Click to edit Master title style</a:t>
             </a:r>
-            <a:endParaRPr lang="en-US"/>
           </a:p>
         </p:txBody>
       </p:sp>
@@ -2637,7 +3083,7 @@
           <a:p>
             <a:pPr lvl="0"/>
             <a:r>
-              <a:rPr lang="en-US" smtClean="0"/>
+              <a:rPr lang="en-US"/>
               <a:t>Click to edit Master text styles</a:t>
             </a:r>
           </a:p>
@@ -2693,38 +3139,37 @@
           <a:p>
             <a:pPr lvl="0"/>
             <a:r>
-              <a:rPr lang="en-US" smtClean="0"/>
+              <a:rPr lang="en-US"/>
               <a:t>Click to edit Master text styles</a:t>
             </a:r>
           </a:p>
           <a:p>
             <a:pPr lvl="1"/>
             <a:r>
-              <a:rPr lang="en-US" smtClean="0"/>
+              <a:rPr lang="en-US"/>
               <a:t>Second level</a:t>
             </a:r>
           </a:p>
           <a:p>
             <a:pPr lvl="2"/>
             <a:r>
-              <a:rPr lang="en-US" smtClean="0"/>
+              <a:rPr lang="en-US"/>
               <a:t>Third level</a:t>
             </a:r>
           </a:p>
           <a:p>
             <a:pPr lvl="3"/>
             <a:r>
-              <a:rPr lang="en-US" smtClean="0"/>
+              <a:rPr lang="en-US"/>
               <a:t>Fourth level</a:t>
             </a:r>
           </a:p>
           <a:p>
             <a:pPr lvl="4"/>
             <a:r>
-              <a:rPr lang="en-US" smtClean="0"/>
+              <a:rPr lang="en-US"/>
               <a:t>Fifth level</a:t>
             </a:r>
-            <a:endParaRPr lang="en-US"/>
           </a:p>
         </p:txBody>
       </p:sp>
@@ -2787,7 +3232,7 @@
           <a:p>
             <a:pPr lvl="0"/>
             <a:r>
-              <a:rPr lang="en-US" smtClean="0"/>
+              <a:rPr lang="en-US"/>
               <a:t>Click to edit Master text styles</a:t>
             </a:r>
           </a:p>
@@ -2843,38 +3288,37 @@
           <a:p>
             <a:pPr lvl="0"/>
             <a:r>
-              <a:rPr lang="en-US" smtClean="0"/>
+              <a:rPr lang="en-US"/>
               <a:t>Click to edit Master text styles</a:t>
             </a:r>
           </a:p>
           <a:p>
             <a:pPr lvl="1"/>
             <a:r>
-              <a:rPr lang="en-US" smtClean="0"/>
+              <a:rPr lang="en-US"/>
               <a:t>Second level</a:t>
             </a:r>
           </a:p>
           <a:p>
             <a:pPr lvl="2"/>
             <a:r>
-              <a:rPr lang="en-US" smtClean="0"/>
+              <a:rPr lang="en-US"/>
               <a:t>Third level</a:t>
             </a:r>
           </a:p>
           <a:p>
             <a:pPr lvl="3"/>
             <a:r>
-              <a:rPr lang="en-US" smtClean="0"/>
+              <a:rPr lang="en-US"/>
               <a:t>Fourth level</a:t>
             </a:r>
           </a:p>
           <a:p>
             <a:pPr lvl="4"/>
             <a:r>
-              <a:rPr lang="en-US" smtClean="0"/>
+              <a:rPr lang="en-US"/>
               <a:t>Fifth level</a:t>
             </a:r>
-            <a:endParaRPr lang="en-US"/>
           </a:p>
         </p:txBody>
       </p:sp>
@@ -2895,7 +3339,7 @@
           <a:p>
             <a:fld id="{5BCAD085-E8A6-8845-BD4E-CB4CCA059FC4}" type="datetimeFigureOut">
               <a:rPr lang="en-US" smtClean="0"/>
-              <a:t>1/27/13</a:t>
+              <a:t>9/18/2026</a:t>
             </a:fld>
             <a:endParaRPr lang="en-US"/>
           </a:p>
@@ -2989,10 +3433,9 @@
           <a:lstStyle/>
           <a:p>
             <a:r>
-              <a:rPr lang="en-US" smtClean="0"/>
+              <a:rPr lang="en-US"/>
               <a:t>Click to edit Master title style</a:t>
             </a:r>
-            <a:endParaRPr lang="en-US"/>
           </a:p>
         </p:txBody>
       </p:sp>
@@ -3013,7 +3456,7 @@
           <a:p>
             <a:fld id="{5BCAD085-E8A6-8845-BD4E-CB4CCA059FC4}" type="datetimeFigureOut">
               <a:rPr lang="en-US" smtClean="0"/>
-              <a:t>1/27/13</a:t>
+              <a:t>9/18/2026</a:t>
             </a:fld>
             <a:endParaRPr lang="en-US"/>
           </a:p>
@@ -3108,7 +3551,7 @@
           <a:p>
             <a:fld id="{5BCAD085-E8A6-8845-BD4E-CB4CCA059FC4}" type="datetimeFigureOut">
               <a:rPr lang="en-US" smtClean="0"/>
-              <a:t>1/27/13</a:t>
+              <a:t>9/18/2026</a:t>
             </a:fld>
             <a:endParaRPr lang="en-US"/>
           </a:p>
@@ -3211,10 +3654,9 @@
           </a:lstStyle>
           <a:p>
             <a:r>
-              <a:rPr lang="en-US" smtClean="0"/>
+              <a:rPr lang="en-US"/>
               <a:t>Click to edit Master title style</a:t>
             </a:r>
-            <a:endParaRPr lang="en-US"/>
           </a:p>
         </p:txBody>
       </p:sp>
@@ -3268,38 +3710,37 @@
           <a:p>
             <a:pPr lvl="0"/>
             <a:r>
-              <a:rPr lang="en-US" smtClean="0"/>
+              <a:rPr lang="en-US"/>
               <a:t>Click to edit Master text styles</a:t>
             </a:r>
           </a:p>
           <a:p>
             <a:pPr lvl="1"/>
             <a:r>
-              <a:rPr lang="en-US" smtClean="0"/>
+              <a:rPr lang="en-US"/>
               <a:t>Second level</a:t>
             </a:r>
           </a:p>
           <a:p>
             <a:pPr lvl="2"/>
             <a:r>
-              <a:rPr lang="en-US" smtClean="0"/>
+              <a:rPr lang="en-US"/>
               <a:t>Third level</a:t>
             </a:r>
           </a:p>
           <a:p>
             <a:pPr lvl="3"/>
             <a:r>
-              <a:rPr lang="en-US" smtClean="0"/>
+              <a:rPr lang="en-US"/>
               <a:t>Fourth level</a:t>
             </a:r>
           </a:p>
           <a:p>
             <a:pPr lvl="4"/>
             <a:r>
-              <a:rPr lang="en-US" smtClean="0"/>
+              <a:rPr lang="en-US"/>
               <a:t>Fifth level</a:t>
             </a:r>
-            <a:endParaRPr lang="en-US"/>
           </a:p>
         </p:txBody>
       </p:sp>
@@ -3362,7 +3803,7 @@
           <a:p>
             <a:pPr lvl="0"/>
             <a:r>
-              <a:rPr lang="en-US" smtClean="0"/>
+              <a:rPr lang="en-US"/>
               <a:t>Click to edit Master text styles</a:t>
             </a:r>
           </a:p>
@@ -3385,7 +3826,7 @@
           <a:p>
             <a:fld id="{5BCAD085-E8A6-8845-BD4E-CB4CCA059FC4}" type="datetimeFigureOut">
               <a:rPr lang="en-US" smtClean="0"/>
-              <a:t>1/27/13</a:t>
+              <a:t>9/18/2026</a:t>
             </a:fld>
             <a:endParaRPr lang="en-US"/>
           </a:p>
@@ -3488,10 +3929,9 @@
           </a:lstStyle>
           <a:p>
             <a:r>
-              <a:rPr lang="en-US" smtClean="0"/>
+              <a:rPr lang="en-US"/>
               <a:t>Click to edit Master title style</a:t>
             </a:r>
-            <a:endParaRPr lang="en-US"/>
           </a:p>
         </p:txBody>
       </p:sp>
@@ -3615,7 +4055,7 @@
           <a:p>
             <a:pPr lvl="0"/>
             <a:r>
-              <a:rPr lang="en-US" smtClean="0"/>
+              <a:rPr lang="en-US"/>
               <a:t>Click to edit Master text styles</a:t>
             </a:r>
           </a:p>
@@ -3638,7 +4078,7 @@
           <a:p>
             <a:fld id="{5BCAD085-E8A6-8845-BD4E-CB4CCA059FC4}" type="datetimeFigureOut">
               <a:rPr lang="en-US" smtClean="0"/>
-              <a:t>1/27/13</a:t>
+              <a:t>9/18/2026</a:t>
             </a:fld>
             <a:endParaRPr lang="en-US"/>
           </a:p>
@@ -3747,10 +4187,9 @@
           <a:lstStyle/>
           <a:p>
             <a:r>
-              <a:rPr lang="en-US" smtClean="0"/>
+              <a:rPr lang="en-US"/>
               <a:t>Click to edit Master title style</a:t>
             </a:r>
-            <a:endParaRPr lang="en-US"/>
           </a:p>
         </p:txBody>
       </p:sp>
@@ -3781,38 +4220,37 @@
           <a:p>
             <a:pPr lvl="0"/>
             <a:r>
-              <a:rPr lang="en-US" smtClean="0"/>
+              <a:rPr lang="en-US"/>
               <a:t>Click to edit Master text styles</a:t>
             </a:r>
           </a:p>
           <a:p>
             <a:pPr lvl="1"/>
             <a:r>
-              <a:rPr lang="en-US" smtClean="0"/>
+              <a:rPr lang="en-US"/>
               <a:t>Second level</a:t>
             </a:r>
           </a:p>
           <a:p>
             <a:pPr lvl="2"/>
             <a:r>
-              <a:rPr lang="en-US" smtClean="0"/>
+              <a:rPr lang="en-US"/>
               <a:t>Third level</a:t>
             </a:r>
           </a:p>
           <a:p>
             <a:pPr lvl="3"/>
             <a:r>
-              <a:rPr lang="en-US" smtClean="0"/>
+              <a:rPr lang="en-US"/>
               <a:t>Fourth level</a:t>
             </a:r>
           </a:p>
           <a:p>
             <a:pPr lvl="4"/>
             <a:r>
-              <a:rPr lang="en-US" smtClean="0"/>
+              <a:rPr lang="en-US"/>
               <a:t>Fifth level</a:t>
             </a:r>
-            <a:endParaRPr lang="en-US"/>
           </a:p>
         </p:txBody>
       </p:sp>
@@ -3851,7 +4289,7 @@
           <a:p>
             <a:fld id="{5BCAD085-E8A6-8845-BD4E-CB4CCA059FC4}" type="datetimeFigureOut">
               <a:rPr lang="en-US" smtClean="0"/>
-              <a:t>1/27/13</a:t>
+              <a:t>9/18/2026</a:t>
             </a:fld>
             <a:endParaRPr lang="en-US"/>
           </a:p>
@@ -4210,7 +4648,7 @@
 </file>
 
 <file path=ppt/slides/slide1.xml><?xml version="1.0" encoding="utf-8"?>
-<p:sld xmlns:a="http://schemas.openxmlformats.org/drawingml/2006/main" xmlns:p="http://schemas.openxmlformats.org/presentationml/2006/main" xmlns:r="http://schemas.openxmlformats.org/officeDocument/2006/relationships">
+<p:sld xmlns:a="http://schemas.openxmlformats.org/drawingml/2006/main" xmlns:r="http://schemas.openxmlformats.org/officeDocument/2006/relationships" xmlns:p="http://schemas.openxmlformats.org/presentationml/2006/main">
   <p:cSld>
     <p:spTree>
       <p:nvGrpSpPr>
@@ -4218,7 +4656,14 @@
         <p:cNvGrpSpPr/>
         <p:nvPr/>
       </p:nvGrpSpPr>
-      <p:grpSpPr/>
+      <p:grpSpPr>
+        <a:xfrm>
+          <a:off x="0" y="0"/>
+          <a:ext cx="0" cy="0"/>
+          <a:chOff x="0" y="0"/>
+          <a:chExt cx="0" cy="0"/>
+        </a:xfrm>
+      </p:grpSpPr>
       <p:sp>
         <p:nvSpPr>
           <p:cNvPr id="2" name="Title 1"/>
@@ -4326,6 +4771,7 @@
           <a:lstStyle/>
           <a:p>
             <a:pPr algn="ctr"/>
+            <a:endParaRPr/>
           </a:p>
         </p:txBody>
       </p:sp>
@@ -4338,7 +4784,7 @@
 </file>
 
 <file path=ppt/slides/slide10.xml><?xml version="1.0" encoding="utf-8"?>
-<p:sld xmlns:a="http://schemas.openxmlformats.org/drawingml/2006/main" xmlns:p="http://schemas.openxmlformats.org/presentationml/2006/main" xmlns:r="http://schemas.openxmlformats.org/officeDocument/2006/relationships">
+<p:sld xmlns:a="http://schemas.openxmlformats.org/drawingml/2006/main" xmlns:r="http://schemas.openxmlformats.org/officeDocument/2006/relationships" xmlns:p="http://schemas.openxmlformats.org/presentationml/2006/main">
   <p:cSld>
     <p:spTree>
       <p:nvGrpSpPr>
@@ -4346,7 +4792,14 @@
         <p:cNvGrpSpPr/>
         <p:nvPr/>
       </p:nvGrpSpPr>
-      <p:grpSpPr/>
+      <p:grpSpPr>
+        <a:xfrm>
+          <a:off x="0" y="0"/>
+          <a:ext cx="0" cy="0"/>
+          <a:chOff x="0" y="0"/>
+          <a:chExt cx="0" cy="0"/>
+        </a:xfrm>
+      </p:grpSpPr>
       <p:sp>
         <p:nvSpPr>
           <p:cNvPr id="2" name="Title 1"/>
@@ -4375,115 +4828,14 @@
                 </a:solidFill>
                 <a:latin typeface="Segoe UI"/>
               </a:rPr>
-              <a:t>Signals you can watch while the session runs</a:t>
-            </a:r>
-          </a:p>
-        </p:txBody>
-      </p:sp>
-      <p:sp>
-        <p:nvSpPr>
-          <p:cNvPr id="3" name="Content Placeholder 2"/>
-          <p:cNvSpPr>
-            <a:spLocks noGrp="1"/>
-          </p:cNvSpPr>
-          <p:nvPr>
-            <p:ph idx="1"/>
-          </p:nvPr>
-        </p:nvSpPr>
-        <p:spPr>
-          <a:xfrm>
-            <a:off x="658368" y="2057400"/>
-            <a:ext cx="10874959" cy="4023360"/>
-          </a:xfrm>
-        </p:spPr>
-        <p:txBody>
-          <a:bodyPr wrap="square"/>
-          <a:lstStyle/>
-          <a:p>
-            <a:pPr>
-              <a:spcAft>
-                <a:spcPts val="1300"/>
-              </a:spcAft>
-            </a:pPr>
-            <a:r>
-              <a:rPr sz="1500" b="0" i="0">
-                <a:solidFill>
-                  <a:srgbClr val="1E242B"/>
-                </a:solidFill>
-                <a:latin typeface="Segoe UI"/>
-              </a:rPr>
-              <a:t>Tones 1, 2 and 3 as logic traces, with the commanded onset checked against the pulse the DAQ actually saw</a:t>
-            </a:r>
-          </a:p>
-          <a:p>
-            <a:pPr>
-              <a:spcAft>
-                <a:spcPts val="1300"/>
-              </a:spcAft>
-            </a:pPr>
-            <a:r>
-              <a:rPr sz="1500" b="0" i="0">
-                <a:solidFill>
-                  <a:srgbClr val="1E242B"/>
-                </a:solidFill>
-                <a:latin typeface="Segoe UI"/>
-              </a:rPr>
-              <a:t>Pellet FSR pressure — two sensors at about 83 Hz each, from firmware 2.1.0, on their own stream rather than mixed into the device log</a:t>
-            </a:r>
-          </a:p>
-          <a:p>
-            <a:pPr>
-              <a:spcAft>
-                <a:spcPts val="1300"/>
-              </a:spcAft>
-            </a:pPr>
-            <a:r>
-              <a:rPr sz="1500" b="0" i="0">
-                <a:solidFill>
-                  <a:srgbClr val="1E242B"/>
-                </a:solidFill>
-                <a:latin typeface="Segoe UI"/>
-              </a:rPr>
-              <a:t>Laser analog command alongside the diode readback, so what was asked for and what came out are on the same axis</a:t>
-            </a:r>
-          </a:p>
-          <a:p>
-            <a:pPr>
-              <a:spcAft>
-                <a:spcPts val="1300"/>
-              </a:spcAft>
-            </a:pPr>
-            <a:r>
-              <a:rPr sz="1500" b="0" i="0">
-                <a:solidFill>
-                  <a:srgbClr val="1E242B"/>
-                </a:solidFill>
-                <a:latin typeface="Segoe UI"/>
-              </a:rPr>
-              <a:t>Camera frame pulses and the barcode line, which are what tie video to samples</a:t>
-            </a:r>
-          </a:p>
-          <a:p>
-            <a:pPr>
-              <a:spcAft>
-                <a:spcPts val="1300"/>
-              </a:spcAft>
-            </a:pPr>
-            <a:r>
-              <a:rPr sz="1500" b="0" i="0">
-                <a:solidFill>
-                  <a:srgbClr val="1E242B"/>
-                </a:solidFill>
-                <a:latin typeface="Segoe UI"/>
-              </a:rPr>
-              <a:t>Closed-loop state: what the pose gate answered, when the cue fired, and whether the trial was cancelled</a:t>
-            </a:r>
-          </a:p>
-        </p:txBody>
-      </p:sp>
-      <p:sp>
-        <p:nvSpPr>
-          <p:cNvPr id="4" name="Rectangle 3"/>
+              <a:t>Everything lands on one timebase</a:t>
+            </a:r>
+          </a:p>
+        </p:txBody>
+      </p:sp>
+      <p:sp>
+        <p:nvSpPr>
+          <p:cNvPr id="3" name="Rectangle 2"/>
           <p:cNvSpPr/>
           <p:nvPr/>
         </p:nvSpPr>
@@ -4522,12 +4874,13 @@
           <a:lstStyle/>
           <a:p>
             <a:pPr algn="ctr"/>
-          </a:p>
-        </p:txBody>
-      </p:sp>
-      <p:sp>
-        <p:nvSpPr>
-          <p:cNvPr id="5" name="TextBox 4"/>
+            <a:endParaRPr/>
+          </a:p>
+        </p:txBody>
+      </p:sp>
+      <p:sp>
+        <p:nvSpPr>
+          <p:cNvPr id="4" name="TextBox 3"/>
           <p:cNvSpPr txBox="1"/>
           <p:nvPr/>
         </p:nvSpPr>
@@ -4548,17 +4901,41 @@
           <a:lstStyle/>
           <a:p>
             <a:r>
-              <a:rPr sz="1400" b="0" i="1">
+              <a:rPr sz="1400" b="0" i="1" dirty="0">
                 <a:solidFill>
                   <a:srgbClr val="6B727B"/>
                 </a:solidFill>
                 <a:latin typeface="Segoe UI"/>
               </a:rPr>
-              <a:t>Everything is acquired continuously at 10 kHz and recorded unfiltered. The plot selection only changes what is drawn.</a:t>
-            </a:r>
-          </a:p>
-        </p:txBody>
-      </p:sp>
+              <a:t>Cameras, tones, pellet events and laser output are not separately timestamped and hoped to agree.</a:t>
+            </a:r>
+          </a:p>
+        </p:txBody>
+      </p:sp>
+      <p:pic>
+        <p:nvPicPr>
+          <p:cNvPr id="5" name="Picture 4" descr="synchronization.png"/>
+          <p:cNvPicPr>
+            <a:picLocks noChangeAspect="1"/>
+          </p:cNvPicPr>
+          <p:nvPr/>
+        </p:nvPicPr>
+        <p:blipFill>
+          <a:blip r:embed="rId3"/>
+          <a:stretch>
+            <a:fillRect/>
+          </a:stretch>
+        </p:blipFill>
+        <p:spPr>
+          <a:xfrm>
+            <a:off x="658368" y="1847088"/>
+            <a:ext cx="10874959" cy="3663144"/>
+          </a:xfrm>
+          <a:prstGeom prst="rect">
+            <a:avLst/>
+          </a:prstGeom>
+        </p:spPr>
+      </p:pic>
       <p:sp>
         <p:nvSpPr>
           <p:cNvPr id="6" name="TextBox 5"/>
@@ -4567,8 +4944,8 @@
         </p:nvSpPr>
         <p:spPr>
           <a:xfrm>
-            <a:off x="658368" y="6382512"/>
-            <a:ext cx="10874959" cy="292608"/>
+            <a:off x="658368" y="5638248"/>
+            <a:ext cx="10874959" cy="502920"/>
           </a:xfrm>
           <a:prstGeom prst="rect">
             <a:avLst/>
@@ -4576,19 +4953,20 @@
           <a:noFill/>
         </p:spPr>
         <p:txBody>
-          <a:bodyPr wrap="none">
+          <a:bodyPr wrap="square">
             <a:spAutoFit/>
           </a:bodyPr>
           <a:lstStyle/>
           <a:p>
-            <a:r>
-              <a:rPr sz="900" b="0" i="0">
+            <a:pPr algn="ctr"/>
+            <a:r>
+              <a:rPr sz="1150" b="0" i="1">
                 <a:solidFill>
                   <a:srgbClr val="6B727B"/>
                 </a:solidFill>
                 <a:latin typeface="Segoe UI"/>
               </a:rPr>
-              <a:t>reachAQ</a:t>
+              <a:t>Camera frame edges are matched to NI-DAQ samples with a signed offset, a resolution, and a confidence — all written into alignment.json.</a:t>
             </a:r>
           </a:p>
         </p:txBody>
@@ -4601,8 +4979,8 @@
         </p:nvSpPr>
         <p:spPr>
           <a:xfrm>
-            <a:off x="10893247" y="6382512"/>
-            <a:ext cx="640080" cy="292608"/>
+            <a:off x="658368" y="6382512"/>
+            <a:ext cx="10874959" cy="292608"/>
           </a:xfrm>
           <a:prstGeom prst="rect">
             <a:avLst/>
@@ -4615,6 +4993,40 @@
           </a:bodyPr>
           <a:lstStyle/>
           <a:p>
+            <a:r>
+              <a:rPr sz="900" b="0" i="0">
+                <a:solidFill>
+                  <a:srgbClr val="6B727B"/>
+                </a:solidFill>
+                <a:latin typeface="Segoe UI"/>
+              </a:rPr>
+              <a:t>reachAQ</a:t>
+            </a:r>
+          </a:p>
+        </p:txBody>
+      </p:sp>
+      <p:sp>
+        <p:nvSpPr>
+          <p:cNvPr id="8" name="TextBox 7"/>
+          <p:cNvSpPr txBox="1"/>
+          <p:nvPr/>
+        </p:nvSpPr>
+        <p:spPr>
+          <a:xfrm>
+            <a:off x="10893247" y="6382512"/>
+            <a:ext cx="640080" cy="292608"/>
+          </a:xfrm>
+          <a:prstGeom prst="rect">
+            <a:avLst/>
+          </a:prstGeom>
+          <a:noFill/>
+        </p:spPr>
+        <p:txBody>
+          <a:bodyPr wrap="none">
+            <a:spAutoFit/>
+          </a:bodyPr>
+          <a:lstStyle/>
+          <a:p>
             <a:pPr algn="r"/>
             <a:r>
               <a:rPr sz="900" b="0" i="0">
@@ -4623,7 +5035,7 @@
                 </a:solidFill>
                 <a:latin typeface="Segoe UI"/>
               </a:rPr>
-              <a:t>10</a:t>
+              <a:t>9</a:t>
             </a:r>
           </a:p>
         </p:txBody>
@@ -4637,7 +5049,7 @@
 </file>
 
 <file path=ppt/slides/slide11.xml><?xml version="1.0" encoding="utf-8"?>
-<p:sld xmlns:a="http://schemas.openxmlformats.org/drawingml/2006/main" xmlns:p="http://schemas.openxmlformats.org/presentationml/2006/main" xmlns:r="http://schemas.openxmlformats.org/officeDocument/2006/relationships">
+<p:sld xmlns:a="http://schemas.openxmlformats.org/drawingml/2006/main" xmlns:r="http://schemas.openxmlformats.org/officeDocument/2006/relationships" xmlns:p="http://schemas.openxmlformats.org/presentationml/2006/main">
   <p:cSld>
     <p:spTree>
       <p:nvGrpSpPr>
@@ -4645,7 +5057,14 @@
         <p:cNvGrpSpPr/>
         <p:nvPr/>
       </p:nvGrpSpPr>
-      <p:grpSpPr/>
+      <p:grpSpPr>
+        <a:xfrm>
+          <a:off x="0" y="0"/>
+          <a:ext cx="0" cy="0"/>
+          <a:chOff x="0" y="0"/>
+          <a:chExt cx="0" cy="0"/>
+        </a:xfrm>
+      </p:grpSpPr>
       <p:sp>
         <p:nvSpPr>
           <p:cNvPr id="2" name="Title 1"/>
@@ -4674,7 +5093,7 @@
                 </a:solidFill>
                 <a:latin typeface="Segoe UI"/>
               </a:rPr>
-              <a:t>Experiments are composed, not copied</a:t>
+              <a:t>Signals you can watch while the session runs</a:t>
             </a:r>
           </a:p>
         </p:txBody>
@@ -4705,13 +5124,13 @@
               </a:spcAft>
             </a:pPr>
             <a:r>
-              <a:rPr sz="1500" b="0" i="0">
-                <a:solidFill>
-                  <a:srgbClr val="1E242B"/>
-                </a:solidFill>
-                <a:latin typeface="Segoe UI"/>
-              </a:rPr>
-              <a:t>A trial set is a reusable group of trials, saved on its own — trial content only, no epochs or blocks</a:t>
+              <a:rPr sz="1500" b="0" i="0" dirty="0">
+                <a:solidFill>
+                  <a:srgbClr val="1E242B"/>
+                </a:solidFill>
+                <a:latin typeface="Segoe UI"/>
+              </a:rPr>
+              <a:t>Tones 1, 2 and 3 as logic traces, with the commanded onset checked against the pulse the DAQ actually saw</a:t>
             </a:r>
           </a:p>
           <a:p>
@@ -4721,13 +5140,13 @@
               </a:spcAft>
             </a:pPr>
             <a:r>
-              <a:rPr sz="1500" b="0" i="0">
-                <a:solidFill>
-                  <a:srgbClr val="1E242B"/>
-                </a:solidFill>
-                <a:latin typeface="Segoe UI"/>
-              </a:rPr>
-              <a:t>An experiment is an ordered list of set appearances; each entry pins the set revision it was built against, can repeat, and can shuffle trial order within an appearance</a:t>
+              <a:rPr sz="1500" b="0" i="0" dirty="0">
+                <a:solidFill>
+                  <a:srgbClr val="1E242B"/>
+                </a:solidFill>
+                <a:latin typeface="Segoe UI"/>
+              </a:rPr>
+              <a:t>Laser analog command alongside the diode readback, so what was asked for and what came out are on the same axis</a:t>
             </a:r>
           </a:p>
           <a:p>
@@ -4737,14 +5156,101 @@
               </a:spcAft>
             </a:pPr>
             <a:r>
-              <a:rPr sz="1500" b="0" i="0">
-                <a:solidFill>
-                  <a:srgbClr val="1E242B"/>
-                </a:solidFill>
-                <a:latin typeface="Segoe UI"/>
-              </a:rPr>
-              <a:t>Compiling flattens it into an ordinary protocol document, so the runner, the schedule and session evidence see nothing new</a:t>
-            </a:r>
+              <a:rPr sz="1500" b="0" i="0" dirty="0">
+                <a:solidFill>
+                  <a:srgbClr val="1E242B"/>
+                </a:solidFill>
+                <a:latin typeface="Segoe UI"/>
+              </a:rPr>
+              <a:t>Camera frame pulses and the </a:t>
+            </a:r>
+            <a:r>
+              <a:rPr lang="en-US" sz="1500" b="0" i="0" dirty="0">
+                <a:solidFill>
+                  <a:srgbClr val="1E242B"/>
+                </a:solidFill>
+                <a:latin typeface="Segoe UI"/>
+              </a:rPr>
+              <a:t>unique </a:t>
+            </a:r>
+            <a:r>
+              <a:rPr sz="1500" b="0" i="0" dirty="0">
+                <a:solidFill>
+                  <a:srgbClr val="1E242B"/>
+                </a:solidFill>
+                <a:latin typeface="Segoe UI"/>
+              </a:rPr>
+              <a:t>barcode </a:t>
+            </a:r>
+            <a:r>
+              <a:rPr lang="en-US" sz="1500" b="0" i="0" dirty="0">
+                <a:solidFill>
+                  <a:srgbClr val="1E242B"/>
+                </a:solidFill>
+                <a:latin typeface="Segoe UI"/>
+              </a:rPr>
+              <a:t>signal</a:t>
+            </a:r>
+            <a:r>
+              <a:rPr sz="1500" b="0" i="0" dirty="0">
+                <a:solidFill>
+                  <a:srgbClr val="1E242B"/>
+                </a:solidFill>
+                <a:latin typeface="Segoe UI"/>
+              </a:rPr>
+              <a:t>, which </a:t>
+            </a:r>
+            <a:r>
+              <a:rPr lang="en-US" sz="1500" dirty="0">
+                <a:solidFill>
+                  <a:srgbClr val="1E242B"/>
+                </a:solidFill>
+                <a:latin typeface="Segoe UI"/>
+              </a:rPr>
+              <a:t>ties acquisition data </a:t>
+            </a:r>
+            <a:r>
+              <a:rPr sz="1500" b="0" i="0" dirty="0">
+                <a:solidFill>
+                  <a:srgbClr val="1E242B"/>
+                </a:solidFill>
+                <a:latin typeface="Segoe UI"/>
+              </a:rPr>
+              <a:t>to </a:t>
+            </a:r>
+            <a:r>
+              <a:rPr lang="en-US" sz="1500" b="0" i="0" dirty="0">
+                <a:solidFill>
+                  <a:srgbClr val="1E242B"/>
+                </a:solidFill>
+                <a:latin typeface="Segoe UI"/>
+              </a:rPr>
+              <a:t>external </a:t>
+            </a:r>
+            <a:r>
+              <a:rPr sz="1500" b="0" i="0" dirty="0">
+                <a:solidFill>
+                  <a:srgbClr val="1E242B"/>
+                </a:solidFill>
+                <a:latin typeface="Segoe UI"/>
+              </a:rPr>
+              <a:t>samples</a:t>
+            </a:r>
+            <a:r>
+              <a:rPr lang="en-US" sz="1500" b="0" i="0" dirty="0">
+                <a:solidFill>
+                  <a:srgbClr val="1E242B"/>
+                </a:solidFill>
+                <a:latin typeface="Segoe UI"/>
+              </a:rPr>
+              <a:t> for alignment</a:t>
+            </a:r>
+            <a:endParaRPr sz="1500" b="0" i="0" dirty="0">
+              <a:solidFill>
+                <a:srgbClr val="1E242B"/>
+              </a:solidFill>
+              <a:latin typeface="Segoe UI"/>
+            </a:endParaRPr>
           </a:p>
           <a:p>
             <a:pPr>
@@ -4753,13 +5259,13 @@
               </a:spcAft>
             </a:pPr>
             <a:r>
-              <a:rPr sz="1500" b="0" i="0">
-                <a:solidFill>
-                  <a:srgbClr val="1E242B"/>
-                </a:solidFill>
-                <a:latin typeface="Segoe UI"/>
-              </a:rPr>
-              <a:t>Each appearance becomes a named epoch, and the Sources column names the set every value came from</a:t>
+              <a:rPr sz="1500" b="0" i="0" dirty="0">
+                <a:solidFill>
+                  <a:srgbClr val="1E242B"/>
+                </a:solidFill>
+                <a:latin typeface="Segoe UI"/>
+              </a:rPr>
+              <a:t>Closed-loop state: what the pose gate answered, when the cue fired, and whether the trial was cancelled</a:t>
             </a:r>
           </a:p>
           <a:p>
@@ -4769,29 +5275,13 @@
               </a:spcAft>
             </a:pPr>
             <a:r>
-              <a:rPr sz="1500" b="0" i="0">
-                <a:solidFill>
-                  <a:srgbClr val="1E242B"/>
-                </a:solidFill>
-                <a:latin typeface="Segoe UI"/>
-              </a:rPr>
-              <a:t>Shuffle seeds are stored on the entry, so a compile can always be repeated exactly</a:t>
-            </a:r>
-          </a:p>
-          <a:p>
-            <a:pPr>
-              <a:spcAft>
-                <a:spcPts val="1300"/>
-              </a:spcAft>
-            </a:pPr>
-            <a:r>
-              <a:rPr sz="1500" b="0" i="0">
-                <a:solidFill>
-                  <a:srgbClr val="1E242B"/>
-                </a:solidFill>
-                <a:latin typeface="Segoe UI"/>
-              </a:rPr>
-              <a:t>Editing a set never repins an existing row; a stale pin is visible, and a compile against a changed set is refused rather than silently different</a:t>
+              <a:rPr lang="en-US" sz="1500" b="0" i="0" dirty="0">
+                <a:solidFill>
+                  <a:srgbClr val="1E242B"/>
+                </a:solidFill>
+                <a:latin typeface="Segoe UI"/>
+              </a:rPr>
+              <a:t>Tunnel FSR pressure — two sensors, on their own stream rather than mixed into the device log</a:t>
             </a:r>
           </a:p>
         </p:txBody>
@@ -4837,19 +5327,20 @@
           <a:lstStyle/>
           <a:p>
             <a:pPr algn="ctr"/>
-          </a:p>
-        </p:txBody>
-      </p:sp>
-      <p:sp>
-        <p:nvSpPr>
-          <p:cNvPr id="5" name="TextBox 4"/>
+            <a:endParaRPr/>
+          </a:p>
+        </p:txBody>
+      </p:sp>
+      <p:sp>
+        <p:nvSpPr>
+          <p:cNvPr id="6" name="TextBox 5"/>
           <p:cNvSpPr txBox="1"/>
           <p:nvPr/>
         </p:nvSpPr>
         <p:spPr>
           <a:xfrm>
-            <a:off x="658368" y="1371600"/>
-            <a:ext cx="10874959" cy="457200"/>
+            <a:off x="658368" y="6382512"/>
+            <a:ext cx="10874959" cy="292608"/>
           </a:xfrm>
           <a:prstGeom prst="rect">
             <a:avLst/>
@@ -4857,33 +5348,33 @@
           <a:noFill/>
         </p:spPr>
         <p:txBody>
-          <a:bodyPr wrap="square">
+          <a:bodyPr wrap="none">
             <a:spAutoFit/>
           </a:bodyPr>
           <a:lstStyle/>
           <a:p>
             <a:r>
-              <a:rPr sz="1400" b="0" i="1">
+              <a:rPr sz="900" b="0" i="0">
                 <a:solidFill>
                   <a:srgbClr val="6B727B"/>
                 </a:solidFill>
                 <a:latin typeface="Segoe UI"/>
               </a:rPr>
-              <a:t>A phase shared by several experiments is written once.</a:t>
-            </a:r>
-          </a:p>
-        </p:txBody>
-      </p:sp>
-      <p:sp>
-        <p:nvSpPr>
-          <p:cNvPr id="6" name="TextBox 5"/>
+              <a:t>reachAQ</a:t>
+            </a:r>
+          </a:p>
+        </p:txBody>
+      </p:sp>
+      <p:sp>
+        <p:nvSpPr>
+          <p:cNvPr id="7" name="TextBox 6"/>
           <p:cNvSpPr txBox="1"/>
           <p:nvPr/>
         </p:nvSpPr>
         <p:spPr>
           <a:xfrm>
-            <a:off x="658368" y="6382512"/>
-            <a:ext cx="10874959" cy="292608"/>
+            <a:off x="10893247" y="6382512"/>
+            <a:ext cx="640080" cy="292608"/>
           </a:xfrm>
           <a:prstGeom prst="rect">
             <a:avLst/>
@@ -4896,6 +5387,7 @@
           </a:bodyPr>
           <a:lstStyle/>
           <a:p>
+            <a:pPr algn="r"/>
             <a:r>
               <a:rPr sz="900" b="0" i="0">
                 <a:solidFill>
@@ -4903,42 +5395,7 @@
                 </a:solidFill>
                 <a:latin typeface="Segoe UI"/>
               </a:rPr>
-              <a:t>reachAQ</a:t>
-            </a:r>
-          </a:p>
-        </p:txBody>
-      </p:sp>
-      <p:sp>
-        <p:nvSpPr>
-          <p:cNvPr id="7" name="TextBox 6"/>
-          <p:cNvSpPr txBox="1"/>
-          <p:nvPr/>
-        </p:nvSpPr>
-        <p:spPr>
-          <a:xfrm>
-            <a:off x="10893247" y="6382512"/>
-            <a:ext cx="640080" cy="292608"/>
-          </a:xfrm>
-          <a:prstGeom prst="rect">
-            <a:avLst/>
-          </a:prstGeom>
-          <a:noFill/>
-        </p:spPr>
-        <p:txBody>
-          <a:bodyPr wrap="none">
-            <a:spAutoFit/>
-          </a:bodyPr>
-          <a:lstStyle/>
-          <a:p>
-            <a:pPr algn="r"/>
-            <a:r>
-              <a:rPr sz="900" b="0" i="0">
-                <a:solidFill>
-                  <a:srgbClr val="6B727B"/>
-                </a:solidFill>
-                <a:latin typeface="Segoe UI"/>
-              </a:rPr>
-              <a:t>11</a:t>
+              <a:t>10</a:t>
             </a:r>
           </a:p>
         </p:txBody>
@@ -4952,7 +5409,7 @@
 </file>
 
 <file path=ppt/slides/slide12.xml><?xml version="1.0" encoding="utf-8"?>
-<p:sld xmlns:a="http://schemas.openxmlformats.org/drawingml/2006/main" xmlns:p="http://schemas.openxmlformats.org/presentationml/2006/main" xmlns:r="http://schemas.openxmlformats.org/officeDocument/2006/relationships">
+<p:sld xmlns:a="http://schemas.openxmlformats.org/drawingml/2006/main" xmlns:r="http://schemas.openxmlformats.org/officeDocument/2006/relationships" xmlns:p="http://schemas.openxmlformats.org/presentationml/2006/main">
   <p:cSld>
     <p:spTree>
       <p:nvGrpSpPr>
@@ -4960,7 +5417,14 @@
         <p:cNvGrpSpPr/>
         <p:nvPr/>
       </p:nvGrpSpPr>
-      <p:grpSpPr/>
+      <p:grpSpPr>
+        <a:xfrm>
+          <a:off x="0" y="0"/>
+          <a:ext cx="0" cy="0"/>
+          <a:chOff x="0" y="0"/>
+          <a:chExt cx="0" cy="0"/>
+        </a:xfrm>
+      </p:grpSpPr>
       <p:sp>
         <p:nvSpPr>
           <p:cNvPr id="2" name="Title 1"/>
@@ -4983,20 +5447,149 @@
           <a:p>
             <a:pPr algn="l"/>
             <a:r>
-              <a:rPr sz="3000" b="1" i="0">
-                <a:solidFill>
-                  <a:srgbClr val="1E242B"/>
-                </a:solidFill>
-                <a:latin typeface="Segoe UI"/>
-              </a:rPr>
-              <a:t>Demo — recorded video, everything else live</a:t>
-            </a:r>
-          </a:p>
-        </p:txBody>
-      </p:sp>
-      <p:sp>
-        <p:nvSpPr>
-          <p:cNvPr id="3" name="Rectangle 2"/>
+              <a:rPr lang="en-US" sz="3000" b="1" i="0" dirty="0">
+                <a:solidFill>
+                  <a:srgbClr val="1E242B"/>
+                </a:solidFill>
+                <a:latin typeface="Segoe UI"/>
+              </a:rPr>
+              <a:t> Build experiments from reusable blocks</a:t>
+            </a:r>
+          </a:p>
+        </p:txBody>
+      </p:sp>
+      <p:sp>
+        <p:nvSpPr>
+          <p:cNvPr id="3" name="Content Placeholder 2"/>
+          <p:cNvSpPr>
+            <a:spLocks noGrp="1"/>
+          </p:cNvSpPr>
+          <p:nvPr>
+            <p:ph idx="1"/>
+          </p:nvPr>
+        </p:nvSpPr>
+        <p:spPr>
+          <a:xfrm>
+            <a:off x="601218" y="1587500"/>
+            <a:ext cx="10874959" cy="4023360"/>
+          </a:xfrm>
+        </p:spPr>
+        <p:txBody>
+          <a:bodyPr wrap="square"/>
+          <a:lstStyle/>
+          <a:p>
+            <a:pPr>
+              <a:spcAft>
+                <a:spcPts val="1300"/>
+              </a:spcAft>
+            </a:pPr>
+            <a:r>
+              <a:rPr lang="en-US" sz="1500" b="0" i="0" dirty="0">
+                <a:solidFill>
+                  <a:srgbClr val="1E242B"/>
+                </a:solidFill>
+                <a:latin typeface="Segoe UI"/>
+              </a:rPr>
+              <a:t>A trial set is a named group of trials you can drop into any experiment, instead of pasting the same block into every protocol</a:t>
+            </a:r>
+          </a:p>
+          <a:p>
+            <a:pPr>
+              <a:spcAft>
+                <a:spcPts val="1300"/>
+              </a:spcAft>
+            </a:pPr>
+            <a:r>
+              <a:rPr lang="en-US" sz="1500" b="0" i="0" dirty="0">
+                <a:solidFill>
+                  <a:srgbClr val="1E242B"/>
+                </a:solidFill>
+                <a:latin typeface="Segoe UI"/>
+              </a:rPr>
+              <a:t>Assemble an experiment by stacking sets in the order you want — repeat one several times, shuffle the trials inside each appearance, move entries up and down</a:t>
+            </a:r>
+          </a:p>
+          <a:p>
+            <a:pPr>
+              <a:spcAft>
+                <a:spcPts val="1300"/>
+              </a:spcAft>
+            </a:pPr>
+            <a:r>
+              <a:rPr lang="en-US" sz="1500" b="0" i="0" dirty="0">
+                <a:solidFill>
+                  <a:srgbClr val="1E242B"/>
+                </a:solidFill>
+                <a:latin typeface="Segoe UI"/>
+              </a:rPr>
+              <a:t>Nothing downstream changes. Every run is reproducible. </a:t>
+            </a:r>
+          </a:p>
+          <a:p>
+            <a:pPr>
+              <a:spcAft>
+                <a:spcPts val="1300"/>
+              </a:spcAft>
+            </a:pPr>
+            <a:r>
+              <a:rPr lang="en-US" sz="1500" b="0" i="0" dirty="0">
+                <a:solidFill>
+                  <a:srgbClr val="1E242B"/>
+                </a:solidFill>
+                <a:latin typeface="Segoe UI"/>
+              </a:rPr>
+              <a:t>Improve a shared set without breaking anything. An experiment holds the version it was built against, so editing a set never silently rewrites an experiment you already validated </a:t>
+            </a:r>
+          </a:p>
+          <a:p>
+            <a:pPr>
+              <a:spcAft>
+                <a:spcPts val="1300"/>
+              </a:spcAft>
+            </a:pPr>
+            <a:r>
+              <a:rPr lang="en-US" sz="1500" b="0" i="0" dirty="0">
+                <a:solidFill>
+                  <a:srgbClr val="1E242B"/>
+                </a:solidFill>
+                <a:latin typeface="Segoe UI"/>
+              </a:rPr>
+              <a:t>Trace all trials and settings in the session log</a:t>
+            </a:r>
+            <a:endParaRPr lang="en-US" sz="1500" dirty="0">
+              <a:solidFill>
+                <a:srgbClr val="1E242B"/>
+              </a:solidFill>
+              <a:latin typeface="Segoe UI"/>
+            </a:endParaRPr>
+          </a:p>
+          <a:p>
+            <a:pPr>
+              <a:spcAft>
+                <a:spcPts val="1300"/>
+              </a:spcAft>
+            </a:pPr>
+            <a:r>
+              <a:rPr lang="en-US" sz="1500" b="0" i="0" dirty="0">
+                <a:solidFill>
+                  <a:srgbClr val="1E242B"/>
+                </a:solidFill>
+                <a:latin typeface="Segoe UI"/>
+              </a:rPr>
+              <a:t>WIP</a:t>
+            </a:r>
+            <a:endParaRPr sz="1500" b="0" i="0" dirty="0">
+              <a:solidFill>
+                <a:srgbClr val="1E242B"/>
+              </a:solidFill>
+              <a:latin typeface="Segoe UI"/>
+            </a:endParaRPr>
+          </a:p>
+        </p:txBody>
+      </p:sp>
+      <p:sp>
+        <p:nvSpPr>
+          <p:cNvPr id="4" name="Rectangle 3"/>
           <p:cNvSpPr/>
           <p:nvPr/>
         </p:nvSpPr>
@@ -5035,19 +5628,20 @@
           <a:lstStyle/>
           <a:p>
             <a:pPr algn="ctr"/>
-          </a:p>
-        </p:txBody>
-      </p:sp>
-      <p:sp>
-        <p:nvSpPr>
-          <p:cNvPr id="4" name="TextBox 3"/>
+            <a:endParaRPr/>
+          </a:p>
+        </p:txBody>
+      </p:sp>
+      <p:sp>
+        <p:nvSpPr>
+          <p:cNvPr id="6" name="TextBox 5"/>
           <p:cNvSpPr txBox="1"/>
           <p:nvPr/>
         </p:nvSpPr>
         <p:spPr>
           <a:xfrm>
-            <a:off x="658368" y="1371600"/>
-            <a:ext cx="10874959" cy="457200"/>
+            <a:off x="658368" y="6382512"/>
+            <a:ext cx="10874959" cy="292608"/>
           </a:xfrm>
           <a:prstGeom prst="rect">
             <a:avLst/>
@@ -5055,57 +5649,33 @@
           <a:noFill/>
         </p:spPr>
         <p:txBody>
-          <a:bodyPr wrap="square">
+          <a:bodyPr wrap="none">
             <a:spAutoFit/>
           </a:bodyPr>
           <a:lstStyle/>
           <a:p>
             <a:r>
-              <a:rPr sz="1400" b="0" i="1">
+              <a:rPr sz="900" b="0" i="0">
                 <a:solidFill>
                   <a:srgbClr val="6B727B"/>
                 </a:solidFill>
                 <a:latin typeface="Segoe UI"/>
               </a:rPr>
-              <a:t>No animal today, so the camera frames are played from a recorded session. Exactly one stage is substituted.</a:t>
-            </a:r>
-          </a:p>
-        </p:txBody>
-      </p:sp>
-      <p:pic>
-        <p:nvPicPr>
-          <p:cNvPr id="5" name="Picture 4" descr="live_overlay.png"/>
-          <p:cNvPicPr>
-            <a:picLocks noChangeAspect="1"/>
-          </p:cNvPicPr>
-          <p:nvPr/>
-        </p:nvPicPr>
-        <p:blipFill>
-          <a:blip r:embed="rId2"/>
-          <a:stretch>
-            <a:fillRect/>
-          </a:stretch>
-        </p:blipFill>
-        <p:spPr>
-          <a:xfrm>
-            <a:off x="1202283" y="1847088"/>
-            <a:ext cx="9787128" cy="3822192"/>
-          </a:xfrm>
-          <a:prstGeom prst="rect">
-            <a:avLst/>
-          </a:prstGeom>
-        </p:spPr>
-      </p:pic>
-      <p:sp>
-        <p:nvSpPr>
-          <p:cNvPr id="6" name="TextBox 5"/>
+              <a:t>reachAQ</a:t>
+            </a:r>
+          </a:p>
+        </p:txBody>
+      </p:sp>
+      <p:sp>
+        <p:nvSpPr>
+          <p:cNvPr id="7" name="TextBox 6"/>
           <p:cNvSpPr txBox="1"/>
           <p:nvPr/>
         </p:nvSpPr>
         <p:spPr>
           <a:xfrm>
-            <a:off x="658368" y="5797296"/>
-            <a:ext cx="10874959" cy="502920"/>
+            <a:off x="10893247" y="6382512"/>
+            <a:ext cx="640080" cy="292608"/>
           </a:xfrm>
           <a:prstGeom prst="rect">
             <a:avLst/>
@@ -5113,46 +5683,12 @@
           <a:noFill/>
         </p:spPr>
         <p:txBody>
-          <a:bodyPr wrap="square">
-            <a:spAutoFit/>
-          </a:bodyPr>
-          <a:lstStyle/>
-          <a:p>
-            <a:pPr algn="ctr"/>
-            <a:r>
-              <a:rPr sz="1150" b="0" i="1">
-                <a:solidFill>
-                  <a:srgbClr val="6B727B"/>
-                </a:solidFill>
-                <a:latin typeface="Segoe UI"/>
-              </a:rPr>
-              <a:t>Live 2D pose, per view, computed on the GPU from the played frames. Captured from the running application on the rig.</a:t>
-            </a:r>
-          </a:p>
-        </p:txBody>
-      </p:sp>
-      <p:sp>
-        <p:nvSpPr>
-          <p:cNvPr id="7" name="TextBox 6"/>
-          <p:cNvSpPr txBox="1"/>
-          <p:nvPr/>
-        </p:nvSpPr>
-        <p:spPr>
-          <a:xfrm>
-            <a:off x="658368" y="6382512"/>
-            <a:ext cx="10874959" cy="292608"/>
-          </a:xfrm>
-          <a:prstGeom prst="rect">
-            <a:avLst/>
-          </a:prstGeom>
-          <a:noFill/>
-        </p:spPr>
-        <p:txBody>
           <a:bodyPr wrap="none">
             <a:spAutoFit/>
           </a:bodyPr>
           <a:lstStyle/>
           <a:p>
+            <a:pPr algn="r"/>
             <a:r>
               <a:rPr sz="900" b="0" i="0">
                 <a:solidFill>
@@ -5160,42 +5696,7 @@
                 </a:solidFill>
                 <a:latin typeface="Segoe UI"/>
               </a:rPr>
-              <a:t>reachAQ</a:t>
-            </a:r>
-          </a:p>
-        </p:txBody>
-      </p:sp>
-      <p:sp>
-        <p:nvSpPr>
-          <p:cNvPr id="8" name="TextBox 7"/>
-          <p:cNvSpPr txBox="1"/>
-          <p:nvPr/>
-        </p:nvSpPr>
-        <p:spPr>
-          <a:xfrm>
-            <a:off x="10893247" y="6382512"/>
-            <a:ext cx="640080" cy="292608"/>
-          </a:xfrm>
-          <a:prstGeom prst="rect">
-            <a:avLst/>
-          </a:prstGeom>
-          <a:noFill/>
-        </p:spPr>
-        <p:txBody>
-          <a:bodyPr wrap="none">
-            <a:spAutoFit/>
-          </a:bodyPr>
-          <a:lstStyle/>
-          <a:p>
-            <a:pPr algn="r"/>
-            <a:r>
-              <a:rPr sz="900" b="0" i="0">
-                <a:solidFill>
-                  <a:srgbClr val="6B727B"/>
-                </a:solidFill>
-                <a:latin typeface="Segoe UI"/>
-              </a:rPr>
-              <a:t>12</a:t>
+              <a:t>11</a:t>
             </a:r>
           </a:p>
         </p:txBody>
@@ -5208,8 +5709,8 @@
 </p:sld>
 </file>
 
-<file path=ppt/slides/slide2.xml><?xml version="1.0" encoding="utf-8"?>
-<p:sld xmlns:a="http://schemas.openxmlformats.org/drawingml/2006/main" xmlns:p="http://schemas.openxmlformats.org/presentationml/2006/main" xmlns:r="http://schemas.openxmlformats.org/officeDocument/2006/relationships">
+<file path=ppt/slides/slide13.xml><?xml version="1.0" encoding="utf-8"?>
+<p:sld xmlns:a="http://schemas.openxmlformats.org/drawingml/2006/main" xmlns:r="http://schemas.openxmlformats.org/officeDocument/2006/relationships" xmlns:p="http://schemas.openxmlformats.org/presentationml/2006/main">
   <p:cSld>
     <p:spTree>
       <p:nvGrpSpPr>
@@ -5217,7 +5718,14 @@
         <p:cNvGrpSpPr/>
         <p:nvPr/>
       </p:nvGrpSpPr>
-      <p:grpSpPr/>
+      <p:grpSpPr>
+        <a:xfrm>
+          <a:off x="0" y="0"/>
+          <a:ext cx="0" cy="0"/>
+          <a:chOff x="0" y="0"/>
+          <a:chExt cx="0" cy="0"/>
+        </a:xfrm>
+      </p:grpSpPr>
       <p:sp>
         <p:nvSpPr>
           <p:cNvPr id="2" name="Title 1"/>
@@ -5240,222 +5748,20 @@
           <a:p>
             <a:pPr algn="l"/>
             <a:r>
-              <a:rPr sz="3000" b="1" i="0">
-                <a:solidFill>
-                  <a:srgbClr val="1E242B"/>
-                </a:solidFill>
-                <a:latin typeface="Segoe UI"/>
-              </a:rPr>
-              <a:t>What changed from reach-training</a:t>
-            </a:r>
-          </a:p>
-        </p:txBody>
-      </p:sp>
-      <p:sp>
-        <p:nvSpPr>
-          <p:cNvPr id="3" name="Content Placeholder 2"/>
-          <p:cNvSpPr>
-            <a:spLocks noGrp="1"/>
-          </p:cNvSpPr>
-          <p:nvPr>
-            <p:ph idx="1" sz="half"/>
-          </p:nvPr>
-        </p:nvSpPr>
-        <p:spPr>
-          <a:xfrm>
-            <a:off x="658368" y="2487168"/>
-            <a:ext cx="5186019" cy="3593592"/>
-          </a:xfrm>
-        </p:spPr>
-        <p:txBody>
-          <a:bodyPr wrap="square"/>
-          <a:lstStyle/>
-          <a:p>
-            <a:pPr>
-              <a:spcAft>
-                <a:spcPts val="1100"/>
-              </a:spcAft>
-            </a:pPr>
-            <a:r>
-              <a:rPr sz="1350" b="0" i="0">
-                <a:solidFill>
-                  <a:srgbClr val="1E242B"/>
-                </a:solidFill>
-                <a:latin typeface="Segoe UI"/>
-              </a:rPr>
-              <a:t>Reach detected by a brightness threshold inside a drawn ROI</a:t>
-            </a:r>
-          </a:p>
-          <a:p>
-            <a:pPr>
-              <a:spcAft>
-                <a:spcPts val="1100"/>
-              </a:spcAft>
-            </a:pPr>
-            <a:r>
-              <a:rPr sz="1350" b="0" i="0">
-                <a:solidFill>
-                  <a:srgbClr val="1E242B"/>
-                </a:solidFill>
-                <a:latin typeface="Segoe UI"/>
-              </a:rPr>
-              <a:t>Pellet arm driven by an Arduino over USB serial</a:t>
-            </a:r>
-          </a:p>
-          <a:p>
-            <a:pPr>
-              <a:spcAft>
-                <a:spcPts val="1100"/>
-              </a:spcAft>
-            </a:pPr>
-            <a:r>
-              <a:rPr sz="1350" b="0" i="0">
-                <a:solidFill>
-                  <a:srgbClr val="1E242B"/>
-                </a:solidFill>
-                <a:latin typeface="Segoe UI"/>
-              </a:rPr>
-              <a:t>Timing owned by a Python loop on the host</a:t>
-            </a:r>
-          </a:p>
-          <a:p>
-            <a:pPr>
-              <a:spcAft>
-                <a:spcPts val="1100"/>
-              </a:spcAft>
-            </a:pPr>
-            <a:r>
-              <a:rPr sz="1350" b="0" i="0">
-                <a:solidFill>
-                  <a:srgbClr val="1E242B"/>
-                </a:solidFill>
-                <a:latin typeface="Segoe UI"/>
-              </a:rPr>
-              <a:t>Signals inspected afterwards, from files</a:t>
-            </a:r>
-          </a:p>
-          <a:p>
-            <a:pPr>
-              <a:spcAft>
-                <a:spcPts val="1100"/>
-              </a:spcAft>
-            </a:pPr>
-            <a:r>
-              <a:rPr sz="1350" b="0" i="0">
-                <a:solidFill>
-                  <a:srgbClr val="1E242B"/>
-                </a:solidFill>
-                <a:latin typeface="Segoe UI"/>
-              </a:rPr>
-              <a:t>One flat protocol per experiment, delays drawn live</a:t>
-            </a:r>
-          </a:p>
-        </p:txBody>
-      </p:sp>
-      <p:sp>
-        <p:nvSpPr>
-          <p:cNvPr id="4" name="Content Placeholder 3"/>
-          <p:cNvSpPr>
-            <a:spLocks noGrp="1"/>
-          </p:cNvSpPr>
-          <p:nvPr>
-            <p:ph idx="2" sz="half"/>
-          </p:nvPr>
-        </p:nvSpPr>
-        <p:spPr>
-          <a:xfrm>
-            <a:off x="6347307" y="2487168"/>
-            <a:ext cx="5186019" cy="3593592"/>
-          </a:xfrm>
-        </p:spPr>
-        <p:txBody>
-          <a:bodyPr wrap="square"/>
-          <a:lstStyle/>
-          <a:p>
-            <a:pPr>
-              <a:spcAft>
-                <a:spcPts val="1100"/>
-              </a:spcAft>
-            </a:pPr>
-            <a:r>
-              <a:rPr sz="1350" b="0" i="0">
-                <a:solidFill>
-                  <a:srgbClr val="1E242B"/>
-                </a:solidFill>
-                <a:latin typeface="Segoe UI"/>
-              </a:rPr>
-              <a:t>Two closed loops — a fast ROI reflex, and machine vision on the pose stream</a:t>
-            </a:r>
-          </a:p>
-          <a:p>
-            <a:pPr>
-              <a:spcAft>
-                <a:spcPts val="1100"/>
-              </a:spcAft>
-            </a:pPr>
-            <a:r>
-              <a:rPr sz="1350" b="0" i="0">
-                <a:solidFill>
-                  <a:srgbClr val="1E242B"/>
-                </a:solidFill>
-                <a:latin typeface="Segoe UI"/>
-              </a:rPr>
-              <a:t>Pellet arm on a CAN bus, with firmware capability checks and FSR pressure</a:t>
-            </a:r>
-          </a:p>
-          <a:p>
-            <a:pPr>
-              <a:spcAft>
-                <a:spcPts val="1100"/>
-              </a:spcAft>
-            </a:pPr>
-            <a:r>
-              <a:rPr sz="1350" b="0" i="0">
-                <a:solidFill>
-                  <a:srgbClr val="1E242B"/>
-                </a:solidFill>
-                <a:latin typeface="Segoe UI"/>
-              </a:rPr>
-              <a:t>Timing owned by hardware-timed NI-DAQ tasks and a real-time stim loop</a:t>
-            </a:r>
-          </a:p>
-          <a:p>
-            <a:pPr>
-              <a:spcAft>
-                <a:spcPts val="1100"/>
-              </a:spcAft>
-            </a:pPr>
-            <a:r>
-              <a:rPr sz="1350" b="0" i="0">
-                <a:solidFill>
-                  <a:srgbClr val="1E242B"/>
-                </a:solidFill>
-                <a:latin typeface="Segoe UI"/>
-              </a:rPr>
-              <a:t>Signals plotted live during the session, and recorded unfiltered</a:t>
-            </a:r>
-          </a:p>
-          <a:p>
-            <a:pPr>
-              <a:spcAft>
-                <a:spcPts val="1100"/>
-              </a:spcAft>
-            </a:pPr>
-            <a:r>
-              <a:rPr sz="1350" b="0" i="0">
-                <a:solidFill>
-                  <a:srgbClr val="1E242B"/>
-                </a:solidFill>
-                <a:latin typeface="Segoe UI"/>
-              </a:rPr>
-              <a:t>Experiments composed from reusable trial sets, with reproducible draws</a:t>
-            </a:r>
-          </a:p>
-        </p:txBody>
-      </p:sp>
-      <p:sp>
-        <p:nvSpPr>
-          <p:cNvPr id="5" name="Rectangle 4"/>
+              <a:rPr sz="3000" b="1" i="0" dirty="0">
+                <a:solidFill>
+                  <a:srgbClr val="1E242B"/>
+                </a:solidFill>
+                <a:latin typeface="Segoe UI"/>
+              </a:rPr>
+              <a:t>Demo</a:t>
+            </a:r>
+          </a:p>
+        </p:txBody>
+      </p:sp>
+      <p:sp>
+        <p:nvSpPr>
+          <p:cNvPr id="3" name="Rectangle 2"/>
           <p:cNvSpPr/>
           <p:nvPr/>
         </p:nvSpPr>
@@ -5494,19 +5800,20 @@
           <a:lstStyle/>
           <a:p>
             <a:pPr algn="ctr"/>
-          </a:p>
-        </p:txBody>
-      </p:sp>
-      <p:sp>
-        <p:nvSpPr>
-          <p:cNvPr id="6" name="TextBox 5"/>
+            <a:endParaRPr/>
+          </a:p>
+        </p:txBody>
+      </p:sp>
+      <p:sp>
+        <p:nvSpPr>
+          <p:cNvPr id="7" name="TextBox 6"/>
           <p:cNvSpPr txBox="1"/>
           <p:nvPr/>
         </p:nvSpPr>
         <p:spPr>
           <a:xfrm>
-            <a:off x="658368" y="1371600"/>
-            <a:ext cx="10874959" cy="457200"/>
+            <a:off x="658368" y="6382512"/>
+            <a:ext cx="10874959" cy="292608"/>
           </a:xfrm>
           <a:prstGeom prst="rect">
             <a:avLst/>
@@ -5514,33 +5821,33 @@
           <a:noFill/>
         </p:spPr>
         <p:txBody>
-          <a:bodyPr wrap="square">
+          <a:bodyPr wrap="none">
             <a:spAutoFit/>
           </a:bodyPr>
           <a:lstStyle/>
           <a:p>
             <a:r>
-              <a:rPr sz="1400" b="0" i="1">
+              <a:rPr sz="900" b="0" i="0">
                 <a:solidFill>
                   <a:srgbClr val="6B727B"/>
                 </a:solidFill>
                 <a:latin typeface="Segoe UI"/>
               </a:rPr>
-              <a:t>Same experiment. The difference is what the system can do while the reach is still happening.</a:t>
-            </a:r>
-          </a:p>
-        </p:txBody>
-      </p:sp>
-      <p:sp>
-        <p:nvSpPr>
-          <p:cNvPr id="7" name="TextBox 6"/>
+              <a:t>reachAQ</a:t>
+            </a:r>
+          </a:p>
+        </p:txBody>
+      </p:sp>
+      <p:sp>
+        <p:nvSpPr>
+          <p:cNvPr id="8" name="TextBox 7"/>
           <p:cNvSpPr txBox="1"/>
           <p:nvPr/>
         </p:nvSpPr>
         <p:spPr>
           <a:xfrm>
-            <a:off x="658368" y="2103120"/>
-            <a:ext cx="5186019" cy="347472"/>
+            <a:off x="10893247" y="6382512"/>
+            <a:ext cx="640080" cy="292608"/>
           </a:xfrm>
           <a:prstGeom prst="rect">
             <a:avLst/>
@@ -5553,74 +5860,7 @@
           </a:bodyPr>
           <a:lstStyle/>
           <a:p>
-            <a:r>
-              <a:rPr sz="1500" b="1" i="0">
-                <a:solidFill>
-                  <a:srgbClr val="6B7F9E"/>
-                </a:solidFill>
-                <a:latin typeface="Segoe UI"/>
-              </a:rPr>
-              <a:t>reach-training</a:t>
-            </a:r>
-          </a:p>
-        </p:txBody>
-      </p:sp>
-      <p:sp>
-        <p:nvSpPr>
-          <p:cNvPr id="8" name="TextBox 7"/>
-          <p:cNvSpPr txBox="1"/>
-          <p:nvPr/>
-        </p:nvSpPr>
-        <p:spPr>
-          <a:xfrm>
-            <a:off x="6347307" y="2103120"/>
-            <a:ext cx="5186019" cy="347472"/>
-          </a:xfrm>
-          <a:prstGeom prst="rect">
-            <a:avLst/>
-          </a:prstGeom>
-          <a:noFill/>
-        </p:spPr>
-        <p:txBody>
-          <a:bodyPr wrap="none">
-            <a:spAutoFit/>
-          </a:bodyPr>
-          <a:lstStyle/>
-          <a:p>
-            <a:r>
-              <a:rPr sz="1500" b="1" i="0">
-                <a:solidFill>
-                  <a:srgbClr val="B3593F"/>
-                </a:solidFill>
-                <a:latin typeface="Segoe UI"/>
-              </a:rPr>
-              <a:t>reachAQ</a:t>
-            </a:r>
-          </a:p>
-        </p:txBody>
-      </p:sp>
-      <p:sp>
-        <p:nvSpPr>
-          <p:cNvPr id="9" name="TextBox 8"/>
-          <p:cNvSpPr txBox="1"/>
-          <p:nvPr/>
-        </p:nvSpPr>
-        <p:spPr>
-          <a:xfrm>
-            <a:off x="658368" y="6382512"/>
-            <a:ext cx="10874959" cy="292608"/>
-          </a:xfrm>
-          <a:prstGeom prst="rect">
-            <a:avLst/>
-          </a:prstGeom>
-          <a:noFill/>
-        </p:spPr>
-        <p:txBody>
-          <a:bodyPr wrap="none">
-            <a:spAutoFit/>
-          </a:bodyPr>
-          <a:lstStyle/>
-          <a:p>
+            <a:pPr algn="r"/>
             <a:r>
               <a:rPr sz="900" b="0" i="0">
                 <a:solidFill>
@@ -5628,42 +5868,7 @@
                 </a:solidFill>
                 <a:latin typeface="Segoe UI"/>
               </a:rPr>
-              <a:t>reachAQ</a:t>
-            </a:r>
-          </a:p>
-        </p:txBody>
-      </p:sp>
-      <p:sp>
-        <p:nvSpPr>
-          <p:cNvPr id="10" name="TextBox 9"/>
-          <p:cNvSpPr txBox="1"/>
-          <p:nvPr/>
-        </p:nvSpPr>
-        <p:spPr>
-          <a:xfrm>
-            <a:off x="10893247" y="6382512"/>
-            <a:ext cx="640080" cy="292608"/>
-          </a:xfrm>
-          <a:prstGeom prst="rect">
-            <a:avLst/>
-          </a:prstGeom>
-          <a:noFill/>
-        </p:spPr>
-        <p:txBody>
-          <a:bodyPr wrap="none">
-            <a:spAutoFit/>
-          </a:bodyPr>
-          <a:lstStyle/>
-          <a:p>
-            <a:pPr algn="r"/>
-            <a:r>
-              <a:rPr sz="900" b="0" i="0">
-                <a:solidFill>
-                  <a:srgbClr val="6B727B"/>
-                </a:solidFill>
-                <a:latin typeface="Segoe UI"/>
-              </a:rPr>
-              <a:t>2</a:t>
+              <a:t>12</a:t>
             </a:r>
           </a:p>
         </p:txBody>
@@ -5676,8 +5881,8 @@
 </p:sld>
 </file>
 
-<file path=ppt/slides/slide3.xml><?xml version="1.0" encoding="utf-8"?>
-<p:sld xmlns:a="http://schemas.openxmlformats.org/drawingml/2006/main" xmlns:p="http://schemas.openxmlformats.org/presentationml/2006/main" xmlns:r="http://schemas.openxmlformats.org/officeDocument/2006/relationships">
+<file path=ppt/slides/slide2.xml><?xml version="1.0" encoding="utf-8"?>
+<p:sld xmlns:a="http://schemas.openxmlformats.org/drawingml/2006/main" xmlns:r="http://schemas.openxmlformats.org/officeDocument/2006/relationships" xmlns:p="http://schemas.openxmlformats.org/presentationml/2006/main">
   <p:cSld>
     <p:spTree>
       <p:nvGrpSpPr>
@@ -5685,7 +5890,14 @@
         <p:cNvGrpSpPr/>
         <p:nvPr/>
       </p:nvGrpSpPr>
-      <p:grpSpPr/>
+      <p:grpSpPr>
+        <a:xfrm>
+          <a:off x="0" y="0"/>
+          <a:ext cx="0" cy="0"/>
+          <a:chOff x="0" y="0"/>
+          <a:chExt cx="0" cy="0"/>
+        </a:xfrm>
+      </p:grpSpPr>
       <p:sp>
         <p:nvSpPr>
           <p:cNvPr id="2" name="Title 1"/>
@@ -5714,7 +5926,7 @@
                 </a:solidFill>
                 <a:latin typeface="Segoe UI"/>
               </a:rPr>
-              <a:t>What came from auto-trainer</a:t>
+              <a:t>What changed from reach-training</a:t>
             </a:r>
           </a:p>
         </p:txBody>
@@ -5726,13 +5938,13 @@
             <a:spLocks noGrp="1"/>
           </p:cNvSpPr>
           <p:nvPr>
-            <p:ph idx="1"/>
-          </p:nvPr>
-        </p:nvSpPr>
-        <p:spPr>
-          <a:xfrm>
-            <a:off x="658368" y="2057400"/>
-            <a:ext cx="10874959" cy="4023360"/>
+            <p:ph sz="half" idx="1"/>
+          </p:nvPr>
+        </p:nvSpPr>
+        <p:spPr>
+          <a:xfrm>
+            <a:off x="658368" y="2487168"/>
+            <a:ext cx="5186019" cy="3593592"/>
           </a:xfrm>
         </p:spPr>
         <p:txBody>
@@ -5741,88 +5953,234 @@
           <a:p>
             <a:pPr>
               <a:spcAft>
-                <a:spcPts val="1300"/>
+                <a:spcPts val="1100"/>
               </a:spcAft>
             </a:pPr>
             <a:r>
-              <a:rPr sz="1500" b="0" i="0">
-                <a:solidFill>
-                  <a:srgbClr val="1E242B"/>
-                </a:solidFill>
-                <a:latin typeface="Segoe UI"/>
-              </a:rPr>
-              <a:t>The modular package split — core, video, device, inference, behavior, model, pyside — which is why hardware can be swapped without touching the rest</a:t>
+              <a:rPr sz="1350" b="0" i="0" dirty="0">
+                <a:solidFill>
+                  <a:srgbClr val="1E242B"/>
+                </a:solidFill>
+                <a:latin typeface="Segoe UI"/>
+              </a:rPr>
+              <a:t>Reach detected by a brightness threshold inside a drawn ROI</a:t>
             </a:r>
           </a:p>
           <a:p>
             <a:pPr>
               <a:spcAft>
-                <a:spcPts val="1300"/>
+                <a:spcPts val="1100"/>
               </a:spcAft>
             </a:pPr>
             <a:r>
-              <a:rPr sz="1500" b="0" i="0">
-                <a:solidFill>
-                  <a:srgbClr val="1E242B"/>
-                </a:solidFill>
-                <a:latin typeface="Segoe UI"/>
-              </a:rPr>
-              <a:t>Per-process video capture with a shared synchronized frame index, so frame N means the same instant on every camera</a:t>
+              <a:rPr sz="1350" b="0" i="0" dirty="0">
+                <a:solidFill>
+                  <a:srgbClr val="1E242B"/>
+                </a:solidFill>
+                <a:latin typeface="Segoe UI"/>
+              </a:rPr>
+              <a:t>Pellet arm driven by an Arduino over USB serial</a:t>
             </a:r>
           </a:p>
           <a:p>
             <a:pPr>
               <a:spcAft>
-                <a:spcPts val="1300"/>
+                <a:spcPts val="1100"/>
               </a:spcAft>
             </a:pPr>
             <a:r>
-              <a:rPr sz="1500" b="0" i="0">
-                <a:solidFill>
-                  <a:srgbClr val="1E242B"/>
-                </a:solidFill>
-                <a:latin typeface="Segoe UI"/>
-              </a:rPr>
-              <a:t>Pose inference and FLIR stereo calibration, already integrated into the application rather than run afterwards</a:t>
+              <a:rPr sz="1350" b="0" i="0" dirty="0">
+                <a:solidFill>
+                  <a:srgbClr val="1E242B"/>
+                </a:solidFill>
+                <a:latin typeface="Segoe UI"/>
+              </a:rPr>
+              <a:t>Timing owned by a Python loop on the host</a:t>
             </a:r>
           </a:p>
           <a:p>
             <a:pPr>
               <a:spcAft>
-                <a:spcPts val="1300"/>
+                <a:spcPts val="1100"/>
               </a:spcAft>
             </a:pPr>
             <a:r>
-              <a:rPr sz="1500" b="0" i="0">
-                <a:solidFill>
-                  <a:srgbClr val="1E242B"/>
-                </a:solidFill>
-                <a:latin typeface="Segoe UI"/>
-              </a:rPr>
-              <a:t>The CAN device abstraction, and the project, session and metadata structure that makes a recording self-describing</a:t>
+              <a:rPr sz="1350" b="0" i="0" dirty="0">
+                <a:solidFill>
+                  <a:srgbClr val="1E242B"/>
+                </a:solidFill>
+                <a:latin typeface="Segoe UI"/>
+              </a:rPr>
+              <a:t>Signals inspected afterwards, from files</a:t>
             </a:r>
           </a:p>
           <a:p>
             <a:pPr>
               <a:spcAft>
-                <a:spcPts val="1300"/>
+                <a:spcPts val="1100"/>
               </a:spcAft>
             </a:pPr>
             <a:r>
-              <a:rPr sz="1500" b="0" i="0">
-                <a:solidFill>
-                  <a:srgbClr val="1E242B"/>
-                </a:solidFill>
-                <a:latin typeface="Segoe UI"/>
-              </a:rPr>
-              <a:t>The PySide6 UI layer and its panel patterns</a:t>
-            </a:r>
-          </a:p>
-        </p:txBody>
-      </p:sp>
-      <p:sp>
-        <p:nvSpPr>
-          <p:cNvPr id="4" name="Rectangle 3"/>
+              <a:rPr sz="1350" b="0" i="0" dirty="0">
+                <a:solidFill>
+                  <a:srgbClr val="1E242B"/>
+                </a:solidFill>
+                <a:latin typeface="Segoe UI"/>
+              </a:rPr>
+              <a:t>One flat protocol per experiment, </a:t>
+            </a:r>
+            <a:r>
+              <a:rPr lang="en-US" sz="1350" b="0" i="0" dirty="0">
+                <a:solidFill>
+                  <a:srgbClr val="1E242B"/>
+                </a:solidFill>
+                <a:latin typeface="Segoe UI"/>
+              </a:rPr>
+              <a:t>configurable behavior queried per trial; no </a:t>
+            </a:r>
+            <a:r>
+              <a:rPr lang="en-US" sz="1350" dirty="0">
+                <a:solidFill>
+                  <a:srgbClr val="1E242B"/>
+                </a:solidFill>
+                <a:latin typeface="Segoe UI"/>
+              </a:rPr>
+              <a:t>need for manual intervention</a:t>
+            </a:r>
+            <a:endParaRPr sz="1350" b="0" i="0" dirty="0">
+              <a:solidFill>
+                <a:srgbClr val="1E242B"/>
+              </a:solidFill>
+              <a:latin typeface="Segoe UI"/>
+            </a:endParaRPr>
+          </a:p>
+        </p:txBody>
+      </p:sp>
+      <p:sp>
+        <p:nvSpPr>
+          <p:cNvPr id="4" name="Content Placeholder 3"/>
+          <p:cNvSpPr>
+            <a:spLocks noGrp="1"/>
+          </p:cNvSpPr>
+          <p:nvPr>
+            <p:ph sz="half" idx="2"/>
+          </p:nvPr>
+        </p:nvSpPr>
+        <p:spPr>
+          <a:xfrm>
+            <a:off x="6347307" y="2487168"/>
+            <a:ext cx="5186019" cy="3593592"/>
+          </a:xfrm>
+        </p:spPr>
+        <p:txBody>
+          <a:bodyPr wrap="square"/>
+          <a:lstStyle/>
+          <a:p>
+            <a:pPr>
+              <a:spcAft>
+                <a:spcPts val="1100"/>
+              </a:spcAft>
+            </a:pPr>
+            <a:r>
+              <a:rPr sz="1350" b="0" i="0" dirty="0">
+                <a:solidFill>
+                  <a:srgbClr val="1E242B"/>
+                </a:solidFill>
+                <a:latin typeface="Segoe UI"/>
+              </a:rPr>
+              <a:t>Two closed loops — a fast ROI reflex, and machine vision on the pose stream</a:t>
+            </a:r>
+          </a:p>
+          <a:p>
+            <a:pPr>
+              <a:spcAft>
+                <a:spcPts val="1100"/>
+              </a:spcAft>
+            </a:pPr>
+            <a:r>
+              <a:rPr sz="1350" b="0" i="0" dirty="0">
+                <a:solidFill>
+                  <a:srgbClr val="1E242B"/>
+                </a:solidFill>
+                <a:latin typeface="Segoe UI"/>
+              </a:rPr>
+              <a:t>Pellet arm on a CAN bus, with firmware capability checks </a:t>
+            </a:r>
+            <a:r>
+              <a:rPr lang="en-US" sz="1350" b="0" i="0" dirty="0">
+                <a:solidFill>
+                  <a:srgbClr val="1E242B"/>
+                </a:solidFill>
+                <a:latin typeface="Segoe UI"/>
+              </a:rPr>
+              <a:t>various added sensors</a:t>
+            </a:r>
+            <a:endParaRPr sz="1350" b="0" i="0" dirty="0">
+              <a:solidFill>
+                <a:srgbClr val="1E242B"/>
+              </a:solidFill>
+              <a:latin typeface="Segoe UI"/>
+            </a:endParaRPr>
+          </a:p>
+          <a:p>
+            <a:pPr>
+              <a:spcAft>
+                <a:spcPts val="1100"/>
+              </a:spcAft>
+            </a:pPr>
+            <a:r>
+              <a:rPr sz="1350" b="0" i="0" dirty="0">
+                <a:solidFill>
+                  <a:srgbClr val="1E242B"/>
+                </a:solidFill>
+                <a:latin typeface="Segoe UI"/>
+              </a:rPr>
+              <a:t>Timing owned by hardware-timed NI-DAQ tasks </a:t>
+            </a:r>
+            <a:endParaRPr lang="en-US" sz="1350" b="0" i="0" dirty="0">
+              <a:solidFill>
+                <a:srgbClr val="1E242B"/>
+              </a:solidFill>
+              <a:latin typeface="Segoe UI"/>
+            </a:endParaRPr>
+          </a:p>
+          <a:p>
+            <a:pPr>
+              <a:spcAft>
+                <a:spcPts val="1100"/>
+              </a:spcAft>
+            </a:pPr>
+            <a:r>
+              <a:rPr sz="1350" b="0" i="0" dirty="0">
+                <a:solidFill>
+                  <a:srgbClr val="1E242B"/>
+                </a:solidFill>
+                <a:latin typeface="Segoe UI"/>
+              </a:rPr>
+              <a:t>Signals plotted live during the session, and recorded unfiltered</a:t>
+            </a:r>
+          </a:p>
+          <a:p>
+            <a:pPr>
+              <a:spcAft>
+                <a:spcPts val="1100"/>
+              </a:spcAft>
+            </a:pPr>
+            <a:r>
+              <a:rPr sz="1350" b="0" i="0" dirty="0">
+                <a:solidFill>
+                  <a:srgbClr val="1E242B"/>
+                </a:solidFill>
+                <a:latin typeface="Segoe UI"/>
+              </a:rPr>
+              <a:t>Experiments composed from reusable trial sets, with reproducible draws</a:t>
+            </a:r>
+          </a:p>
+        </p:txBody>
+      </p:sp>
+      <p:sp>
+        <p:nvSpPr>
+          <p:cNvPr id="5" name="Rectangle 4"/>
           <p:cNvSpPr/>
           <p:nvPr/>
         </p:nvSpPr>
@@ -5861,12 +6219,13 @@
           <a:lstStyle/>
           <a:p>
             <a:pPr algn="ctr"/>
-          </a:p>
-        </p:txBody>
-      </p:sp>
-      <p:sp>
-        <p:nvSpPr>
-          <p:cNvPr id="5" name="TextBox 4"/>
+            <a:endParaRPr/>
+          </a:p>
+        </p:txBody>
+      </p:sp>
+      <p:sp>
+        <p:nvSpPr>
+          <p:cNvPr id="6" name="TextBox 5"/>
           <p:cNvSpPr txBox="1"/>
           <p:nvPr/>
         </p:nvSpPr>
@@ -5893,21 +6252,21 @@
                 </a:solidFill>
                 <a:latin typeface="Segoe UI"/>
               </a:rPr>
-              <a:t>reachAQ is built on auto-trainer, not beside it. The architecture and most of the runtime are theirs.</a:t>
-            </a:r>
-          </a:p>
-        </p:txBody>
-      </p:sp>
-      <p:sp>
-        <p:nvSpPr>
-          <p:cNvPr id="6" name="TextBox 5"/>
+              <a:t>Same experiment. The difference is what the system can do while the reach is still happening.</a:t>
+            </a:r>
+          </a:p>
+        </p:txBody>
+      </p:sp>
+      <p:sp>
+        <p:nvSpPr>
+          <p:cNvPr id="7" name="TextBox 6"/>
           <p:cNvSpPr txBox="1"/>
           <p:nvPr/>
         </p:nvSpPr>
         <p:spPr>
           <a:xfrm>
-            <a:off x="658368" y="6382512"/>
-            <a:ext cx="10874959" cy="292608"/>
+            <a:off x="658368" y="2103120"/>
+            <a:ext cx="5186019" cy="347472"/>
           </a:xfrm>
           <a:prstGeom prst="rect">
             <a:avLst/>
@@ -5921,27 +6280,27 @@
           <a:lstStyle/>
           <a:p>
             <a:r>
-              <a:rPr sz="900" b="0" i="0">
-                <a:solidFill>
-                  <a:srgbClr val="6B727B"/>
-                </a:solidFill>
-                <a:latin typeface="Segoe UI"/>
-              </a:rPr>
-              <a:t>reachAQ</a:t>
-            </a:r>
-          </a:p>
-        </p:txBody>
-      </p:sp>
-      <p:sp>
-        <p:nvSpPr>
-          <p:cNvPr id="7" name="TextBox 6"/>
+              <a:rPr sz="1500" b="1" i="0">
+                <a:solidFill>
+                  <a:srgbClr val="6B7F9E"/>
+                </a:solidFill>
+                <a:latin typeface="Segoe UI"/>
+              </a:rPr>
+              <a:t>reach-training</a:t>
+            </a:r>
+          </a:p>
+        </p:txBody>
+      </p:sp>
+      <p:sp>
+        <p:nvSpPr>
+          <p:cNvPr id="8" name="TextBox 7"/>
           <p:cNvSpPr txBox="1"/>
           <p:nvPr/>
         </p:nvSpPr>
         <p:spPr>
           <a:xfrm>
-            <a:off x="10893247" y="6382512"/>
-            <a:ext cx="640080" cy="292608"/>
+            <a:off x="6347307" y="2103120"/>
+            <a:ext cx="5186019" cy="347472"/>
           </a:xfrm>
           <a:prstGeom prst="rect">
             <a:avLst/>
@@ -5954,6 +6313,74 @@
           </a:bodyPr>
           <a:lstStyle/>
           <a:p>
+            <a:r>
+              <a:rPr sz="1500" b="1" i="0">
+                <a:solidFill>
+                  <a:srgbClr val="B3593F"/>
+                </a:solidFill>
+                <a:latin typeface="Segoe UI"/>
+              </a:rPr>
+              <a:t>reachAQ</a:t>
+            </a:r>
+          </a:p>
+        </p:txBody>
+      </p:sp>
+      <p:sp>
+        <p:nvSpPr>
+          <p:cNvPr id="9" name="TextBox 8"/>
+          <p:cNvSpPr txBox="1"/>
+          <p:nvPr/>
+        </p:nvSpPr>
+        <p:spPr>
+          <a:xfrm>
+            <a:off x="658368" y="6382512"/>
+            <a:ext cx="10874959" cy="292608"/>
+          </a:xfrm>
+          <a:prstGeom prst="rect">
+            <a:avLst/>
+          </a:prstGeom>
+          <a:noFill/>
+        </p:spPr>
+        <p:txBody>
+          <a:bodyPr wrap="none">
+            <a:spAutoFit/>
+          </a:bodyPr>
+          <a:lstStyle/>
+          <a:p>
+            <a:r>
+              <a:rPr sz="900" b="0" i="0">
+                <a:solidFill>
+                  <a:srgbClr val="6B727B"/>
+                </a:solidFill>
+                <a:latin typeface="Segoe UI"/>
+              </a:rPr>
+              <a:t>reachAQ</a:t>
+            </a:r>
+          </a:p>
+        </p:txBody>
+      </p:sp>
+      <p:sp>
+        <p:nvSpPr>
+          <p:cNvPr id="10" name="TextBox 9"/>
+          <p:cNvSpPr txBox="1"/>
+          <p:nvPr/>
+        </p:nvSpPr>
+        <p:spPr>
+          <a:xfrm>
+            <a:off x="10893247" y="6382512"/>
+            <a:ext cx="640080" cy="292608"/>
+          </a:xfrm>
+          <a:prstGeom prst="rect">
+            <a:avLst/>
+          </a:prstGeom>
+          <a:noFill/>
+        </p:spPr>
+        <p:txBody>
+          <a:bodyPr wrap="none">
+            <a:spAutoFit/>
+          </a:bodyPr>
+          <a:lstStyle/>
+          <a:p>
             <a:pPr algn="r"/>
             <a:r>
               <a:rPr sz="900" b="0" i="0">
@@ -5962,7 +6389,7 @@
                 </a:solidFill>
                 <a:latin typeface="Segoe UI"/>
               </a:rPr>
-              <a:t>3</a:t>
+              <a:t>2</a:t>
             </a:r>
           </a:p>
         </p:txBody>
@@ -5975,8 +6402,8 @@
 </p:sld>
 </file>
 
-<file path=ppt/slides/slide4.xml><?xml version="1.0" encoding="utf-8"?>
-<p:sld xmlns:a="http://schemas.openxmlformats.org/drawingml/2006/main" xmlns:p="http://schemas.openxmlformats.org/presentationml/2006/main" xmlns:r="http://schemas.openxmlformats.org/officeDocument/2006/relationships">
+<file path=ppt/slides/slide3.xml><?xml version="1.0" encoding="utf-8"?>
+<p:sld xmlns:a="http://schemas.openxmlformats.org/drawingml/2006/main" xmlns:r="http://schemas.openxmlformats.org/officeDocument/2006/relationships" xmlns:p="http://schemas.openxmlformats.org/presentationml/2006/main">
   <p:cSld>
     <p:spTree>
       <p:nvGrpSpPr>
@@ -5984,7 +6411,14 @@
         <p:cNvGrpSpPr/>
         <p:nvPr/>
       </p:nvGrpSpPr>
-      <p:grpSpPr/>
+      <p:grpSpPr>
+        <a:xfrm>
+          <a:off x="0" y="0"/>
+          <a:ext cx="0" cy="0"/>
+          <a:chOff x="0" y="0"/>
+          <a:chExt cx="0" cy="0"/>
+        </a:xfrm>
+      </p:grpSpPr>
       <p:sp>
         <p:nvSpPr>
           <p:cNvPr id="2" name="Title 1"/>
@@ -6013,7 +6447,7 @@
                 </a:solidFill>
                 <a:latin typeface="Segoe UI"/>
               </a:rPr>
-              <a:t>Why pose could not close a loop before</a:t>
+              <a:t>What came from auto-trainer</a:t>
             </a:r>
           </a:p>
         </p:txBody>
@@ -6025,13 +6459,13 @@
             <a:spLocks noGrp="1"/>
           </p:cNvSpPr>
           <p:nvPr>
-            <p:ph idx="1" sz="half"/>
-          </p:nvPr>
-        </p:nvSpPr>
-        <p:spPr>
-          <a:xfrm>
-            <a:off x="658368" y="2487168"/>
-            <a:ext cx="5186019" cy="3593592"/>
+            <p:ph idx="1"/>
+          </p:nvPr>
+        </p:nvSpPr>
+        <p:spPr>
+          <a:xfrm>
+            <a:off x="658368" y="2057400"/>
+            <a:ext cx="10874959" cy="4023360"/>
           </a:xfrm>
         </p:spPr>
         <p:txBody>
@@ -6040,125 +6474,142 @@
           <a:p>
             <a:pPr>
               <a:spcAft>
-                <a:spcPts val="1100"/>
+                <a:spcPts val="1300"/>
               </a:spcAft>
             </a:pPr>
             <a:r>
-              <a:rPr sz="1350" b="0" i="0">
-                <a:solidFill>
-                  <a:srgbClr val="1E242B"/>
-                </a:solidFill>
-                <a:latin typeface="Segoe UI"/>
-              </a:rPr>
-              <a:t>Reach cameras run at 150 fps — a 6.667 ms per-frame budget for the pose stream</a:t>
+              <a:rPr sz="1500" b="0" i="0" dirty="0">
+                <a:solidFill>
+                  <a:srgbClr val="1E242B"/>
+                </a:solidFill>
+                <a:latin typeface="Segoe UI"/>
+              </a:rPr>
+              <a:t>The modular package split — core, video, device, inference, behavior, model, </a:t>
+            </a:r>
+            <a:r>
+              <a:rPr sz="1500" b="0" i="0" dirty="0" err="1">
+                <a:solidFill>
+                  <a:srgbClr val="1E242B"/>
+                </a:solidFill>
+                <a:latin typeface="Segoe UI"/>
+              </a:rPr>
+              <a:t>pyside</a:t>
+            </a:r>
+            <a:r>
+              <a:rPr sz="1500" b="0" i="0" dirty="0">
+                <a:solidFill>
+                  <a:srgbClr val="1E242B"/>
+                </a:solidFill>
+                <a:latin typeface="Segoe UI"/>
+              </a:rPr>
+              <a:t> — which is why hardware can be swapped without touching the rest</a:t>
             </a:r>
           </a:p>
           <a:p>
             <a:pPr>
               <a:spcAft>
-                <a:spcPts val="1100"/>
+                <a:spcPts val="1300"/>
               </a:spcAft>
             </a:pPr>
             <a:r>
-              <a:rPr sz="1350" b="0" i="0">
-                <a:solidFill>
-                  <a:srgbClr val="1E242B"/>
-                </a:solidFill>
-                <a:latin typeface="Segoe UI"/>
-              </a:rPr>
-              <a:t>The stim camera runs at 900 Hz — a 5 ms budget for the reflex that fires the laser. That is a design target and a tail figure, not an average</a:t>
+              <a:rPr sz="1500" b="0" i="0" dirty="0">
+                <a:solidFill>
+                  <a:srgbClr val="1E242B"/>
+                </a:solidFill>
+                <a:latin typeface="Segoe UI"/>
+              </a:rPr>
+              <a:t>Per-process video capture with a shared synchronized frame index, so frame N means the same instant on every camera</a:t>
             </a:r>
           </a:p>
           <a:p>
             <a:pPr>
               <a:spcAft>
-                <a:spcPts val="1100"/>
+                <a:spcPts val="1300"/>
               </a:spcAft>
             </a:pPr>
             <a:r>
-              <a:rPr sz="1350" b="0" i="0">
-                <a:solidFill>
-                  <a:srgbClr val="1E242B"/>
-                </a:solidFill>
-                <a:latin typeface="Segoe UI"/>
-              </a:rPr>
-              <a:t>The reflex detector's own compute is under 0.1 ms, so its problem was never arithmetic — it was the OS delivering it on time</a:t>
-            </a:r>
-          </a:p>
-        </p:txBody>
-      </p:sp>
-      <p:sp>
-        <p:nvSpPr>
-          <p:cNvPr id="4" name="Content Placeholder 3"/>
-          <p:cNvSpPr>
-            <a:spLocks noGrp="1"/>
-          </p:cNvSpPr>
-          <p:nvPr>
-            <p:ph idx="2" sz="half"/>
-          </p:nvPr>
-        </p:nvSpPr>
-        <p:spPr>
-          <a:xfrm>
-            <a:off x="6347307" y="2487168"/>
-            <a:ext cx="5186019" cy="3593592"/>
-          </a:xfrm>
-        </p:spPr>
-        <p:txBody>
-          <a:bodyPr wrap="square"/>
-          <a:lstStyle/>
+              <a:rPr sz="1500" b="0" i="0" dirty="0">
+                <a:solidFill>
+                  <a:srgbClr val="1E242B"/>
+                </a:solidFill>
+                <a:latin typeface="Segoe UI"/>
+              </a:rPr>
+              <a:t>Pose inference and FLIR stereo calibration, already integrated into the application rather than run afterwards</a:t>
+            </a:r>
+          </a:p>
           <a:p>
             <a:pPr>
               <a:spcAft>
-                <a:spcPts val="1100"/>
+                <a:spcPts val="1300"/>
               </a:spcAft>
             </a:pPr>
             <a:r>
-              <a:rPr sz="1350" b="0" i="0">
-                <a:solidFill>
-                  <a:srgbClr val="1E242B"/>
-                </a:solidFill>
-                <a:latin typeface="Segoe UI"/>
-              </a:rPr>
-              <a:t>DeepLabCut on TensorFlow with ResNet-50 cost 54.8 ms per batch — about 18 Hz</a:t>
+              <a:rPr sz="1500" b="0" i="0" dirty="0">
+                <a:solidFill>
+                  <a:srgbClr val="1E242B"/>
+                </a:solidFill>
+                <a:latin typeface="Segoe UI"/>
+              </a:rPr>
+              <a:t>The CAN </a:t>
+            </a:r>
+            <a:r>
+              <a:rPr lang="en-US" sz="1500" b="0" i="0" dirty="0">
+                <a:solidFill>
+                  <a:srgbClr val="1E242B"/>
+                </a:solidFill>
+                <a:latin typeface="Segoe UI"/>
+              </a:rPr>
+              <a:t>abstraction layer</a:t>
+            </a:r>
+            <a:r>
+              <a:rPr sz="1500" b="0" i="0" dirty="0">
+                <a:solidFill>
+                  <a:srgbClr val="1E242B"/>
+                </a:solidFill>
+                <a:latin typeface="Segoe UI"/>
+              </a:rPr>
+              <a:t>, and </a:t>
+            </a:r>
+            <a:r>
+              <a:rPr lang="en-US" sz="1500" dirty="0">
+                <a:solidFill>
+                  <a:srgbClr val="1E242B"/>
+                </a:solidFill>
+                <a:latin typeface="Segoe UI"/>
+              </a:rPr>
+              <a:t>general</a:t>
+            </a:r>
+            <a:r>
+              <a:rPr sz="1500" b="0" i="0" dirty="0">
+                <a:solidFill>
+                  <a:srgbClr val="1E242B"/>
+                </a:solidFill>
+                <a:latin typeface="Segoe UI"/>
+              </a:rPr>
+              <a:t> project, session and metadata structure that makes a recording self-describing</a:t>
             </a:r>
           </a:p>
           <a:p>
             <a:pPr>
               <a:spcAft>
-                <a:spcPts val="1100"/>
+                <a:spcPts val="1300"/>
               </a:spcAft>
             </a:pPr>
             <a:r>
-              <a:rPr sz="1350" b="0" i="0">
-                <a:solidFill>
-                  <a:srgbClr val="1E242B"/>
-                </a:solidFill>
-                <a:latin typeface="Segoe UI"/>
-              </a:rPr>
-              <a:t>That was the largest single latency term in the system, and roughly eight times over the frame budget</a:t>
-            </a:r>
-          </a:p>
-          <a:p>
-            <a:pPr>
-              <a:spcAft>
-                <a:spcPts val="1100"/>
-              </a:spcAft>
-            </a:pPr>
-            <a:r>
-              <a:rPr sz="1350" b="0" i="0">
-                <a:solidFill>
-                  <a:srgbClr val="1E242B"/>
-                </a:solidFill>
-                <a:latin typeface="Segoe UI"/>
-              </a:rPr>
-              <a:t>Pose could describe behaviour afterwards, but nothing could be decided from it while the reach was happening</a:t>
-            </a:r>
-          </a:p>
-        </p:txBody>
-      </p:sp>
-      <p:sp>
-        <p:nvSpPr>
-          <p:cNvPr id="5" name="Rectangle 4"/>
+              <a:rPr sz="1500" b="0" i="0" dirty="0">
+                <a:solidFill>
+                  <a:srgbClr val="1E242B"/>
+                </a:solidFill>
+                <a:latin typeface="Segoe UI"/>
+              </a:rPr>
+              <a:t>The PySide6 UI layer and its panel patterns</a:t>
+            </a:r>
+          </a:p>
+        </p:txBody>
+      </p:sp>
+      <p:sp>
+        <p:nvSpPr>
+          <p:cNvPr id="4" name="Rectangle 3"/>
           <p:cNvSpPr/>
           <p:nvPr/>
         </p:nvSpPr>
@@ -6197,12 +6648,13 @@
           <a:lstStyle/>
           <a:p>
             <a:pPr algn="ctr"/>
-          </a:p>
-        </p:txBody>
-      </p:sp>
-      <p:sp>
-        <p:nvSpPr>
-          <p:cNvPr id="6" name="TextBox 5"/>
+            <a:endParaRPr/>
+          </a:p>
+        </p:txBody>
+      </p:sp>
+      <p:sp>
+        <p:nvSpPr>
+          <p:cNvPr id="5" name="TextBox 4"/>
           <p:cNvSpPr txBox="1"/>
           <p:nvPr/>
         </p:nvSpPr>
@@ -6229,21 +6681,21 @@
                 </a:solidFill>
                 <a:latin typeface="Segoe UI"/>
               </a:rPr>
-              <a:t>Two cameras, two deadlines. The pose path missed its by a factor of eight.</a:t>
-            </a:r>
-          </a:p>
-        </p:txBody>
-      </p:sp>
-      <p:sp>
-        <p:nvSpPr>
-          <p:cNvPr id="7" name="TextBox 6"/>
+              <a:t>reachAQ is built on auto-trainer, not beside it. The architecture and most of the runtime are theirs.</a:t>
+            </a:r>
+          </a:p>
+        </p:txBody>
+      </p:sp>
+      <p:sp>
+        <p:nvSpPr>
+          <p:cNvPr id="6" name="TextBox 5"/>
           <p:cNvSpPr txBox="1"/>
           <p:nvPr/>
         </p:nvSpPr>
         <p:spPr>
           <a:xfrm>
-            <a:off x="658368" y="2103120"/>
-            <a:ext cx="5186019" cy="347472"/>
+            <a:off x="658368" y="6382512"/>
+            <a:ext cx="10874959" cy="292608"/>
           </a:xfrm>
           <a:prstGeom prst="rect">
             <a:avLst/>
@@ -6257,27 +6709,27 @@
           <a:lstStyle/>
           <a:p>
             <a:r>
-              <a:rPr sz="1500" b="1" i="0">
-                <a:solidFill>
-                  <a:srgbClr val="6B7F9E"/>
-                </a:solidFill>
-                <a:latin typeface="Segoe UI"/>
-              </a:rPr>
-              <a:t>What has to be fast</a:t>
-            </a:r>
-          </a:p>
-        </p:txBody>
-      </p:sp>
-      <p:sp>
-        <p:nvSpPr>
-          <p:cNvPr id="8" name="TextBox 7"/>
+              <a:rPr sz="900" b="0" i="0">
+                <a:solidFill>
+                  <a:srgbClr val="6B727B"/>
+                </a:solidFill>
+                <a:latin typeface="Segoe UI"/>
+              </a:rPr>
+              <a:t>reachAQ</a:t>
+            </a:r>
+          </a:p>
+        </p:txBody>
+      </p:sp>
+      <p:sp>
+        <p:nvSpPr>
+          <p:cNvPr id="7" name="TextBox 6"/>
           <p:cNvSpPr txBox="1"/>
           <p:nvPr/>
         </p:nvSpPr>
         <p:spPr>
           <a:xfrm>
-            <a:off x="6347307" y="2103120"/>
-            <a:ext cx="5186019" cy="347472"/>
+            <a:off x="10893247" y="6382512"/>
+            <a:ext cx="640080" cy="292608"/>
           </a:xfrm>
           <a:prstGeom prst="rect">
             <a:avLst/>
@@ -6290,40 +6742,7 @@
           </a:bodyPr>
           <a:lstStyle/>
           <a:p>
-            <a:r>
-              <a:rPr sz="1500" b="1" i="0">
-                <a:solidFill>
-                  <a:srgbClr val="B3593F"/>
-                </a:solidFill>
-                <a:latin typeface="Segoe UI"/>
-              </a:rPr>
-              <a:t>Where it started</a:t>
-            </a:r>
-          </a:p>
-        </p:txBody>
-      </p:sp>
-      <p:sp>
-        <p:nvSpPr>
-          <p:cNvPr id="9" name="TextBox 8"/>
-          <p:cNvSpPr txBox="1"/>
-          <p:nvPr/>
-        </p:nvSpPr>
-        <p:spPr>
-          <a:xfrm>
-            <a:off x="658368" y="6382512"/>
-            <a:ext cx="10874959" cy="292608"/>
-          </a:xfrm>
-          <a:prstGeom prst="rect">
-            <a:avLst/>
-          </a:prstGeom>
-          <a:noFill/>
-        </p:spPr>
-        <p:txBody>
-          <a:bodyPr wrap="none">
-            <a:spAutoFit/>
-          </a:bodyPr>
-          <a:lstStyle/>
-          <a:p>
+            <a:pPr algn="r"/>
             <a:r>
               <a:rPr sz="900" b="0" i="0">
                 <a:solidFill>
@@ -6331,42 +6750,7 @@
                 </a:solidFill>
                 <a:latin typeface="Segoe UI"/>
               </a:rPr>
-              <a:t>reachAQ</a:t>
-            </a:r>
-          </a:p>
-        </p:txBody>
-      </p:sp>
-      <p:sp>
-        <p:nvSpPr>
-          <p:cNvPr id="10" name="TextBox 9"/>
-          <p:cNvSpPr txBox="1"/>
-          <p:nvPr/>
-        </p:nvSpPr>
-        <p:spPr>
-          <a:xfrm>
-            <a:off x="10893247" y="6382512"/>
-            <a:ext cx="640080" cy="292608"/>
-          </a:xfrm>
-          <a:prstGeom prst="rect">
-            <a:avLst/>
-          </a:prstGeom>
-          <a:noFill/>
-        </p:spPr>
-        <p:txBody>
-          <a:bodyPr wrap="none">
-            <a:spAutoFit/>
-          </a:bodyPr>
-          <a:lstStyle/>
-          <a:p>
-            <a:pPr algn="r"/>
-            <a:r>
-              <a:rPr sz="900" b="0" i="0">
-                <a:solidFill>
-                  <a:srgbClr val="6B727B"/>
-                </a:solidFill>
-                <a:latin typeface="Segoe UI"/>
-              </a:rPr>
-              <a:t>4</a:t>
+              <a:t>3</a:t>
             </a:r>
           </a:p>
         </p:txBody>
@@ -6379,8 +6763,8 @@
 </p:sld>
 </file>
 
-<file path=ppt/slides/slide5.xml><?xml version="1.0" encoding="utf-8"?>
-<p:sld xmlns:a="http://schemas.openxmlformats.org/drawingml/2006/main" xmlns:p="http://schemas.openxmlformats.org/presentationml/2006/main" xmlns:r="http://schemas.openxmlformats.org/officeDocument/2006/relationships">
+<file path=ppt/slides/slide4.xml><?xml version="1.0" encoding="utf-8"?>
+<p:sld xmlns:a="http://schemas.openxmlformats.org/drawingml/2006/main" xmlns:r="http://schemas.openxmlformats.org/officeDocument/2006/relationships" xmlns:p="http://schemas.openxmlformats.org/presentationml/2006/main">
   <p:cSld>
     <p:spTree>
       <p:nvGrpSpPr>
@@ -6388,7 +6772,14 @@
         <p:cNvGrpSpPr/>
         <p:nvPr/>
       </p:nvGrpSpPr>
-      <p:grpSpPr/>
+      <p:grpSpPr>
+        <a:xfrm>
+          <a:off x="0" y="0"/>
+          <a:ext cx="0" cy="0"/>
+          <a:chOff x="0" y="0"/>
+          <a:chExt cx="0" cy="0"/>
+        </a:xfrm>
+      </p:grpSpPr>
       <p:sp>
         <p:nvSpPr>
           <p:cNvPr id="2" name="Title 1"/>
@@ -6417,7 +6808,7 @@
                 </a:solidFill>
                 <a:latin typeface="Segoe UI"/>
               </a:rPr>
-              <a:t>What we changed</a:t>
+              <a:t>Why pose could not close a loop before</a:t>
             </a:r>
           </a:p>
         </p:txBody>
@@ -6429,13 +6820,13 @@
             <a:spLocks noGrp="1"/>
           </p:cNvSpPr>
           <p:nvPr>
-            <p:ph idx="1"/>
-          </p:nvPr>
-        </p:nvSpPr>
-        <p:spPr>
-          <a:xfrm>
-            <a:off x="658368" y="2057400"/>
-            <a:ext cx="10874959" cy="4023360"/>
+            <p:ph sz="half" idx="1"/>
+          </p:nvPr>
+        </p:nvSpPr>
+        <p:spPr>
+          <a:xfrm>
+            <a:off x="658368" y="2487168"/>
+            <a:ext cx="5186019" cy="3593592"/>
           </a:xfrm>
         </p:spPr>
         <p:txBody>
@@ -6444,104 +6835,293 @@
           <a:p>
             <a:pPr>
               <a:spcAft>
-                <a:spcPts val="1300"/>
+                <a:spcPts val="1100"/>
               </a:spcAft>
             </a:pPr>
             <a:r>
-              <a:rPr sz="1500" b="0" i="0">
-                <a:solidFill>
-                  <a:srgbClr val="1E242B"/>
-                </a:solidFill>
-                <a:latin typeface="Segoe UI"/>
-              </a:rPr>
-              <a:t>Split the work in two. The reflex loop keeps its millisecond deadline; the pose stream is allowed to run slower than the cameras, because it informs behaviour rather than firing hardware</a:t>
+              <a:rPr sz="1350" b="0" i="0" dirty="0">
+                <a:solidFill>
+                  <a:srgbClr val="1E242B"/>
+                </a:solidFill>
+                <a:latin typeface="Segoe UI"/>
+              </a:rPr>
+              <a:t>Reach cameras run at 150 fps — a 6.667 </a:t>
+            </a:r>
+            <a:r>
+              <a:rPr sz="1350" b="0" i="0" dirty="0" err="1">
+                <a:solidFill>
+                  <a:srgbClr val="1E242B"/>
+                </a:solidFill>
+                <a:latin typeface="Segoe UI"/>
+              </a:rPr>
+              <a:t>ms</a:t>
+            </a:r>
+            <a:r>
+              <a:rPr sz="1350" b="0" i="0" dirty="0">
+                <a:solidFill>
+                  <a:srgbClr val="1E242B"/>
+                </a:solidFill>
+                <a:latin typeface="Segoe UI"/>
+              </a:rPr>
+              <a:t> per-frame budget for the pose stream</a:t>
             </a:r>
           </a:p>
           <a:p>
             <a:pPr>
               <a:spcAft>
-                <a:spcPts val="1300"/>
+                <a:spcPts val="1100"/>
               </a:spcAft>
             </a:pPr>
             <a:r>
-              <a:rPr sz="1500" b="0" i="0">
-                <a:solidFill>
-                  <a:srgbClr val="1E242B"/>
-                </a:solidFill>
-                <a:latin typeface="Segoe UI"/>
-              </a:rPr>
-              <a:t>Gave the reflex loop real-time scheduling (SCHED_FIFO) and a performance CPU governor, so a busy machine cannot delay it</a:t>
-            </a:r>
+              <a:rPr sz="1350" b="0" i="0" dirty="0">
+                <a:solidFill>
+                  <a:srgbClr val="1E242B"/>
+                </a:solidFill>
+                <a:latin typeface="Segoe UI"/>
+              </a:rPr>
+              <a:t>The stim camera runs at 900 Hz — a 5 </a:t>
+            </a:r>
+            <a:r>
+              <a:rPr sz="1350" b="0" i="0" dirty="0" err="1">
+                <a:solidFill>
+                  <a:srgbClr val="1E242B"/>
+                </a:solidFill>
+                <a:latin typeface="Segoe UI"/>
+              </a:rPr>
+              <a:t>ms</a:t>
+            </a:r>
+            <a:r>
+              <a:rPr sz="1350" b="0" i="0" dirty="0">
+                <a:solidFill>
+                  <a:srgbClr val="1E242B"/>
+                </a:solidFill>
+                <a:latin typeface="Segoe UI"/>
+              </a:rPr>
+              <a:t> </a:t>
+            </a:r>
+            <a:r>
+              <a:rPr lang="en-US" sz="1350" b="0" i="0" dirty="0">
+                <a:solidFill>
+                  <a:srgbClr val="1E242B"/>
+                </a:solidFill>
+                <a:latin typeface="Segoe UI"/>
+              </a:rPr>
+              <a:t>target</a:t>
+            </a:r>
+            <a:r>
+              <a:rPr sz="1350" b="0" i="0" dirty="0">
+                <a:solidFill>
+                  <a:srgbClr val="1E242B"/>
+                </a:solidFill>
+                <a:latin typeface="Segoe UI"/>
+              </a:rPr>
+              <a:t> for the reflex that fires the laser. </a:t>
+            </a:r>
+            <a:endParaRPr lang="en-US" sz="1350" b="0" i="0" dirty="0">
+              <a:solidFill>
+                <a:srgbClr val="1E242B"/>
+              </a:solidFill>
+              <a:latin typeface="Segoe UI"/>
+            </a:endParaRPr>
           </a:p>
           <a:p>
             <a:pPr>
               <a:spcAft>
-                <a:spcPts val="1300"/>
+                <a:spcPts val="1100"/>
               </a:spcAft>
             </a:pPr>
             <a:r>
-              <a:rPr sz="1500" b="0" i="0">
-                <a:solidFill>
-                  <a:srgbClr val="1E242B"/>
-                </a:solidFill>
-                <a:latin typeface="Segoe UI"/>
-              </a:rPr>
-              <a:t>Stopped padding the inference batch — run the 2 real frames instead of a padded 6 — and rewrote the CPU decode to use argmax and numpy instead of a sort and pandas</a:t>
-            </a:r>
-          </a:p>
+              <a:rPr sz="1350" b="0" i="0" dirty="0">
+                <a:solidFill>
+                  <a:srgbClr val="1E242B"/>
+                </a:solidFill>
+                <a:latin typeface="Segoe UI"/>
+              </a:rPr>
+              <a:t>The reflex detector's own compute is under 0.1 </a:t>
+            </a:r>
+            <a:r>
+              <a:rPr sz="1350" b="0" i="0" dirty="0" err="1">
+                <a:solidFill>
+                  <a:srgbClr val="1E242B"/>
+                </a:solidFill>
+                <a:latin typeface="Segoe UI"/>
+              </a:rPr>
+              <a:t>ms</a:t>
+            </a:r>
+            <a:r>
+              <a:rPr sz="1350" b="0" i="0" dirty="0">
+                <a:solidFill>
+                  <a:srgbClr val="1E242B"/>
+                </a:solidFill>
+                <a:latin typeface="Segoe UI"/>
+              </a:rPr>
+              <a:t>, so its problem was never arithmetic — it was the OS delivering it on time</a:t>
+            </a:r>
+          </a:p>
+        </p:txBody>
+      </p:sp>
+      <p:sp>
+        <p:nvSpPr>
+          <p:cNvPr id="4" name="Content Placeholder 3"/>
+          <p:cNvSpPr>
+            <a:spLocks noGrp="1"/>
+          </p:cNvSpPr>
+          <p:nvPr>
+            <p:ph sz="half" idx="2"/>
+          </p:nvPr>
+        </p:nvSpPr>
+        <p:spPr>
+          <a:xfrm>
+            <a:off x="6347307" y="2487168"/>
+            <a:ext cx="5186019" cy="3593592"/>
+          </a:xfrm>
+        </p:spPr>
+        <p:txBody>
+          <a:bodyPr wrap="square"/>
+          <a:lstStyle/>
           <a:p>
             <a:pPr>
               <a:spcAft>
-                <a:spcPts val="1300"/>
+                <a:spcPts val="1100"/>
               </a:spcAft>
             </a:pPr>
             <a:r>
-              <a:rPr sz="1500" b="0" i="0">
-                <a:solidFill>
-                  <a:srgbClr val="1E242B"/>
-                </a:solidFill>
-                <a:latin typeface="Segoe UI"/>
-              </a:rPr>
-              <a:t>Captured the CUDA graph for the live batch and replayed it, instead of re-submitting the same work every call</a:t>
+              <a:rPr sz="1350" b="0" i="0" dirty="0" err="1">
+                <a:solidFill>
+                  <a:srgbClr val="1E242B"/>
+                </a:solidFill>
+                <a:latin typeface="Segoe UI"/>
+              </a:rPr>
+              <a:t>DeepLabCut</a:t>
+            </a:r>
+            <a:r>
+              <a:rPr sz="1350" b="0" i="0" dirty="0">
+                <a:solidFill>
+                  <a:srgbClr val="1E242B"/>
+                </a:solidFill>
+                <a:latin typeface="Segoe UI"/>
+              </a:rPr>
+              <a:t> on TensorFlow with ResNet-50 cost</a:t>
+            </a:r>
+            <a:r>
+              <a:rPr lang="en-US" sz="1350" dirty="0">
+                <a:solidFill>
+                  <a:srgbClr val="1E242B"/>
+                </a:solidFill>
+                <a:latin typeface="Segoe UI"/>
+              </a:rPr>
+              <a:t> between 25 and </a:t>
+            </a:r>
+            <a:r>
+              <a:rPr sz="1350" b="0" i="0" dirty="0">
+                <a:solidFill>
+                  <a:srgbClr val="1E242B"/>
+                </a:solidFill>
+                <a:latin typeface="Segoe UI"/>
+              </a:rPr>
+              <a:t>5</a:t>
+            </a:r>
+            <a:r>
+              <a:rPr lang="en-US" sz="1350" b="0" i="0" dirty="0">
+                <a:solidFill>
+                  <a:srgbClr val="1E242B"/>
+                </a:solidFill>
+                <a:latin typeface="Segoe UI"/>
+              </a:rPr>
+              <a:t>5</a:t>
+            </a:r>
+            <a:r>
+              <a:rPr sz="1350" b="0" i="0" dirty="0">
+                <a:solidFill>
+                  <a:srgbClr val="1E242B"/>
+                </a:solidFill>
+                <a:latin typeface="Segoe UI"/>
+              </a:rPr>
+              <a:t> </a:t>
+            </a:r>
+            <a:r>
+              <a:rPr sz="1350" b="0" i="0" dirty="0" err="1">
+                <a:solidFill>
+                  <a:srgbClr val="1E242B"/>
+                </a:solidFill>
+                <a:latin typeface="Segoe UI"/>
+              </a:rPr>
+              <a:t>ms</a:t>
+            </a:r>
+            <a:r>
+              <a:rPr sz="1350" b="0" i="0" dirty="0">
+                <a:solidFill>
+                  <a:srgbClr val="1E242B"/>
+                </a:solidFill>
+                <a:latin typeface="Segoe UI"/>
+              </a:rPr>
+              <a:t> per batch — about 1</a:t>
+            </a:r>
+            <a:r>
+              <a:rPr lang="en-US" sz="1350" dirty="0">
+                <a:solidFill>
+                  <a:srgbClr val="1E242B"/>
+                </a:solidFill>
+                <a:latin typeface="Segoe UI"/>
+              </a:rPr>
+              <a:t>8</a:t>
+            </a:r>
+            <a:r>
+              <a:rPr lang="en-US" sz="1350" b="0" i="0" dirty="0">
+                <a:solidFill>
+                  <a:srgbClr val="1E242B"/>
+                </a:solidFill>
+                <a:latin typeface="Segoe UI"/>
+              </a:rPr>
+              <a:t>-40</a:t>
+            </a:r>
+            <a:r>
+              <a:rPr sz="1350" b="0" i="0" dirty="0">
+                <a:solidFill>
+                  <a:srgbClr val="1E242B"/>
+                </a:solidFill>
+                <a:latin typeface="Segoe UI"/>
+              </a:rPr>
+              <a:t> Hz</a:t>
             </a:r>
           </a:p>
           <a:p>
             <a:pPr>
               <a:spcAft>
-                <a:spcPts val="1300"/>
+                <a:spcPts val="1100"/>
               </a:spcAft>
             </a:pPr>
             <a:r>
-              <a:rPr sz="1500" b="0" i="0">
-                <a:solidFill>
-                  <a:srgbClr val="1E242B"/>
-                </a:solidFill>
-                <a:latin typeface="Segoe UI"/>
-              </a:rPr>
-              <a:t>Made the pose stage unable to hurt acquisition: it takes frames on a separate non-blocking queue, always takes the newest and drops stale ones, so latency never grows into a backlog</a:t>
+              <a:rPr sz="1350" b="0" i="0" dirty="0">
+                <a:solidFill>
+                  <a:srgbClr val="1E242B"/>
+                </a:solidFill>
+                <a:latin typeface="Segoe UI"/>
+              </a:rPr>
+              <a:t>That was the largest single latency term in the system, and roughly eight times over the frame budget</a:t>
             </a:r>
           </a:p>
           <a:p>
             <a:pPr>
               <a:spcAft>
-                <a:spcPts val="1300"/>
+                <a:spcPts val="1100"/>
               </a:spcAft>
             </a:pPr>
             <a:r>
-              <a:rPr sz="1500" b="0" i="0">
-                <a:solidFill>
-                  <a:srgbClr val="1E242B"/>
-                </a:solidFill>
-                <a:latin typeface="Segoe UI"/>
-              </a:rPr>
-              <a:t>Tried the usual accelerators and kept none of them — fp16, torch.compile and ONNX Runtime all measured at or below parity on this card, and TensorRT's real 1.3x was not worth a second inference path</a:t>
-            </a:r>
-          </a:p>
-        </p:txBody>
-      </p:sp>
-      <p:sp>
-        <p:nvSpPr>
-          <p:cNvPr id="4" name="Rectangle 3"/>
+              <a:rPr sz="1350" b="0" i="0" dirty="0">
+                <a:solidFill>
+                  <a:srgbClr val="1E242B"/>
+                </a:solidFill>
+                <a:latin typeface="Segoe UI"/>
+              </a:rPr>
+              <a:t>Pose could describe behavior afterwards, but nothing could be decided from it while the reach was happening</a:t>
+            </a:r>
+          </a:p>
+        </p:txBody>
+      </p:sp>
+      <p:sp>
+        <p:nvSpPr>
+          <p:cNvPr id="5" name="Rectangle 4"/>
           <p:cNvSpPr/>
           <p:nvPr/>
         </p:nvSpPr>
@@ -6580,12 +7160,13 @@
           <a:lstStyle/>
           <a:p>
             <a:pPr algn="ctr"/>
-          </a:p>
-        </p:txBody>
-      </p:sp>
-      <p:sp>
-        <p:nvSpPr>
-          <p:cNvPr id="5" name="TextBox 4"/>
+            <a:endParaRPr/>
+          </a:p>
+        </p:txBody>
+      </p:sp>
+      <p:sp>
+        <p:nvSpPr>
+          <p:cNvPr id="6" name="TextBox 5"/>
           <p:cNvSpPr txBox="1"/>
           <p:nvPr/>
         </p:nvSpPr>
@@ -6612,21 +7193,21 @@
                 </a:solidFill>
                 <a:latin typeface="Segoe UI"/>
               </a:rPr>
-              <a:t>The wins came from removing our own overhead and letting each tier meet its own deadline — not from a faster runtime.</a:t>
-            </a:r>
-          </a:p>
-        </p:txBody>
-      </p:sp>
-      <p:sp>
-        <p:nvSpPr>
-          <p:cNvPr id="6" name="TextBox 5"/>
+              <a:t>Two cameras, two deadlines. The pose path missed its by a factor of eight.</a:t>
+            </a:r>
+          </a:p>
+        </p:txBody>
+      </p:sp>
+      <p:sp>
+        <p:nvSpPr>
+          <p:cNvPr id="7" name="TextBox 6"/>
           <p:cNvSpPr txBox="1"/>
           <p:nvPr/>
         </p:nvSpPr>
         <p:spPr>
           <a:xfrm>
-            <a:off x="658368" y="6382512"/>
-            <a:ext cx="10874959" cy="292608"/>
+            <a:off x="658368" y="2103120"/>
+            <a:ext cx="5186019" cy="347472"/>
           </a:xfrm>
           <a:prstGeom prst="rect">
             <a:avLst/>
@@ -6640,27 +7221,27 @@
           <a:lstStyle/>
           <a:p>
             <a:r>
-              <a:rPr sz="900" b="0" i="0">
-                <a:solidFill>
-                  <a:srgbClr val="6B727B"/>
-                </a:solidFill>
-                <a:latin typeface="Segoe UI"/>
-              </a:rPr>
-              <a:t>reachAQ</a:t>
-            </a:r>
-          </a:p>
-        </p:txBody>
-      </p:sp>
-      <p:sp>
-        <p:nvSpPr>
-          <p:cNvPr id="7" name="TextBox 6"/>
+              <a:rPr sz="1500" b="1" i="0">
+                <a:solidFill>
+                  <a:srgbClr val="6B7F9E"/>
+                </a:solidFill>
+                <a:latin typeface="Segoe UI"/>
+              </a:rPr>
+              <a:t>What has to be fast</a:t>
+            </a:r>
+          </a:p>
+        </p:txBody>
+      </p:sp>
+      <p:sp>
+        <p:nvSpPr>
+          <p:cNvPr id="8" name="TextBox 7"/>
           <p:cNvSpPr txBox="1"/>
           <p:nvPr/>
         </p:nvSpPr>
         <p:spPr>
           <a:xfrm>
-            <a:off x="10893247" y="6382512"/>
-            <a:ext cx="640080" cy="292608"/>
+            <a:off x="6347307" y="2103120"/>
+            <a:ext cx="5186019" cy="347472"/>
           </a:xfrm>
           <a:prstGeom prst="rect">
             <a:avLst/>
@@ -6673,6 +7254,74 @@
           </a:bodyPr>
           <a:lstStyle/>
           <a:p>
+            <a:r>
+              <a:rPr sz="1500" b="1" i="0">
+                <a:solidFill>
+                  <a:srgbClr val="B3593F"/>
+                </a:solidFill>
+                <a:latin typeface="Segoe UI"/>
+              </a:rPr>
+              <a:t>Where it started</a:t>
+            </a:r>
+          </a:p>
+        </p:txBody>
+      </p:sp>
+      <p:sp>
+        <p:nvSpPr>
+          <p:cNvPr id="9" name="TextBox 8"/>
+          <p:cNvSpPr txBox="1"/>
+          <p:nvPr/>
+        </p:nvSpPr>
+        <p:spPr>
+          <a:xfrm>
+            <a:off x="658368" y="6382512"/>
+            <a:ext cx="10874959" cy="292608"/>
+          </a:xfrm>
+          <a:prstGeom prst="rect">
+            <a:avLst/>
+          </a:prstGeom>
+          <a:noFill/>
+        </p:spPr>
+        <p:txBody>
+          <a:bodyPr wrap="none">
+            <a:spAutoFit/>
+          </a:bodyPr>
+          <a:lstStyle/>
+          <a:p>
+            <a:r>
+              <a:rPr sz="900" b="0" i="0">
+                <a:solidFill>
+                  <a:srgbClr val="6B727B"/>
+                </a:solidFill>
+                <a:latin typeface="Segoe UI"/>
+              </a:rPr>
+              <a:t>reachAQ</a:t>
+            </a:r>
+          </a:p>
+        </p:txBody>
+      </p:sp>
+      <p:sp>
+        <p:nvSpPr>
+          <p:cNvPr id="10" name="TextBox 9"/>
+          <p:cNvSpPr txBox="1"/>
+          <p:nvPr/>
+        </p:nvSpPr>
+        <p:spPr>
+          <a:xfrm>
+            <a:off x="10893247" y="6382512"/>
+            <a:ext cx="640080" cy="292608"/>
+          </a:xfrm>
+          <a:prstGeom prst="rect">
+            <a:avLst/>
+          </a:prstGeom>
+          <a:noFill/>
+        </p:spPr>
+        <p:txBody>
+          <a:bodyPr wrap="none">
+            <a:spAutoFit/>
+          </a:bodyPr>
+          <a:lstStyle/>
+          <a:p>
             <a:pPr algn="r"/>
             <a:r>
               <a:rPr sz="900" b="0" i="0">
@@ -6681,7 +7330,7 @@
                 </a:solidFill>
                 <a:latin typeface="Segoe UI"/>
               </a:rPr>
-              <a:t>5</a:t>
+              <a:t>4</a:t>
             </a:r>
           </a:p>
         </p:txBody>
@@ -6694,8 +7343,8 @@
 </p:sld>
 </file>
 
-<file path=ppt/slides/slide6.xml><?xml version="1.0" encoding="utf-8"?>
-<p:sld xmlns:a="http://schemas.openxmlformats.org/drawingml/2006/main" xmlns:p="http://schemas.openxmlformats.org/presentationml/2006/main" xmlns:r="http://schemas.openxmlformats.org/officeDocument/2006/relationships">
+<file path=ppt/slides/slide5.xml><?xml version="1.0" encoding="utf-8"?>
+<p:sld xmlns:a="http://schemas.openxmlformats.org/drawingml/2006/main" xmlns:r="http://schemas.openxmlformats.org/officeDocument/2006/relationships" xmlns:p="http://schemas.openxmlformats.org/presentationml/2006/main">
   <p:cSld>
     <p:spTree>
       <p:nvGrpSpPr>
@@ -6703,7 +7352,14 @@
         <p:cNvGrpSpPr/>
         <p:nvPr/>
       </p:nvGrpSpPr>
-      <p:grpSpPr/>
+      <p:grpSpPr>
+        <a:xfrm>
+          <a:off x="0" y="0"/>
+          <a:ext cx="0" cy="0"/>
+          <a:chOff x="0" y="0"/>
+          <a:chExt cx="0" cy="0"/>
+        </a:xfrm>
+      </p:grpSpPr>
       <p:sp>
         <p:nvSpPr>
           <p:cNvPr id="2" name="Title 1"/>
@@ -6726,20 +7382,131 @@
           <a:p>
             <a:pPr algn="l"/>
             <a:r>
-              <a:rPr sz="3000" b="1" i="0">
-                <a:solidFill>
-                  <a:srgbClr val="1E242B"/>
-                </a:solidFill>
-                <a:latin typeface="Segoe UI"/>
-              </a:rPr>
-              <a:t>What it measured</a:t>
-            </a:r>
-          </a:p>
-        </p:txBody>
-      </p:sp>
-      <p:sp>
-        <p:nvSpPr>
-          <p:cNvPr id="3" name="Rectangle 2"/>
+              <a:rPr sz="3000" b="1" i="0" dirty="0">
+                <a:solidFill>
+                  <a:srgbClr val="1E242B"/>
+                </a:solidFill>
+                <a:latin typeface="Segoe UI"/>
+              </a:rPr>
+              <a:t>What we changed</a:t>
+            </a:r>
+          </a:p>
+        </p:txBody>
+      </p:sp>
+      <p:sp>
+        <p:nvSpPr>
+          <p:cNvPr id="3" name="Content Placeholder 2"/>
+          <p:cNvSpPr>
+            <a:spLocks noGrp="1"/>
+          </p:cNvSpPr>
+          <p:nvPr>
+            <p:ph idx="1"/>
+          </p:nvPr>
+        </p:nvSpPr>
+        <p:spPr>
+          <a:xfrm>
+            <a:off x="658368" y="2057400"/>
+            <a:ext cx="10874959" cy="4023360"/>
+          </a:xfrm>
+        </p:spPr>
+        <p:txBody>
+          <a:bodyPr wrap="square">
+            <a:normAutofit/>
+          </a:bodyPr>
+          <a:lstStyle/>
+          <a:p>
+            <a:pPr>
+              <a:spcAft>
+                <a:spcPts val="1300"/>
+              </a:spcAft>
+            </a:pPr>
+            <a:r>
+              <a:rPr lang="en-US" sz="1500" b="0" i="0" dirty="0">
+                <a:solidFill>
+                  <a:srgbClr val="1E242B"/>
+                </a:solidFill>
+                <a:latin typeface="Segoe UI"/>
+              </a:rPr>
+              <a:t>Split the work by how tight a deadline each loop can guarantee, not by what it is allowed to do. </a:t>
+            </a:r>
+          </a:p>
+          <a:p>
+            <a:pPr lvl="1">
+              <a:spcAft>
+                <a:spcPts val="1300"/>
+              </a:spcAft>
+            </a:pPr>
+            <a:r>
+              <a:rPr lang="en-US" sz="1100" b="1" i="0" dirty="0">
+                <a:solidFill>
+                  <a:srgbClr val="1E242B"/>
+                </a:solidFill>
+                <a:latin typeface="Segoe UI"/>
+              </a:rPr>
+              <a:t>The ROI detector on the stim camera holds a millisecond deadline</a:t>
+            </a:r>
+          </a:p>
+          <a:p>
+            <a:pPr lvl="1">
+              <a:spcAft>
+                <a:spcPts val="1300"/>
+              </a:spcAft>
+            </a:pPr>
+            <a:r>
+              <a:rPr lang="en-US" sz="1100" b="1" i="0" dirty="0">
+                <a:solidFill>
+                  <a:srgbClr val="1E242B"/>
+                </a:solidFill>
+                <a:latin typeface="Segoe UI"/>
+              </a:rPr>
+              <a:t>The pose stream drives hardware too, bounded timewise by end-to-end inference speed</a:t>
+            </a:r>
+          </a:p>
+          <a:p>
+            <a:pPr>
+              <a:spcAft>
+                <a:spcPts val="1300"/>
+              </a:spcAft>
+            </a:pPr>
+            <a:r>
+              <a:rPr lang="en-US" sz="1500" b="1" i="0" dirty="0">
+                <a:solidFill>
+                  <a:srgbClr val="1E242B"/>
+                </a:solidFill>
+                <a:latin typeface="Segoe UI"/>
+              </a:rPr>
+              <a:t>Reflex loop</a:t>
+            </a:r>
+            <a:r>
+              <a:rPr lang="en-US" sz="1500" b="0" i="0" dirty="0">
+                <a:solidFill>
+                  <a:srgbClr val="1E242B"/>
+                </a:solidFill>
+                <a:latin typeface="Segoe UI"/>
+              </a:rPr>
+              <a:t>: real-time scheduling (SCHED_FIFO) and a performance CPU governor, so a busy machine cannot delay it. Its own compute was never the problem — under 0.1 </a:t>
+            </a:r>
+            <a:r>
+              <a:rPr lang="en-US" sz="1500" b="0" i="0" dirty="0" err="1">
+                <a:solidFill>
+                  <a:srgbClr val="1E242B"/>
+                </a:solidFill>
+                <a:latin typeface="Segoe UI"/>
+              </a:rPr>
+              <a:t>ms</a:t>
+            </a:r>
+            <a:endParaRPr lang="en-US" sz="1500" b="0" i="0" dirty="0">
+              <a:solidFill>
+                <a:srgbClr val="1E242B"/>
+              </a:solidFill>
+              <a:latin typeface="Segoe UI"/>
+            </a:endParaRPr>
+          </a:p>
+        </p:txBody>
+      </p:sp>
+      <p:sp>
+        <p:nvSpPr>
+          <p:cNvPr id="4" name="Rectangle 3"/>
           <p:cNvSpPr/>
           <p:nvPr/>
         </p:nvSpPr>
@@ -6778,12 +7545,13 @@
           <a:lstStyle/>
           <a:p>
             <a:pPr algn="ctr"/>
-          </a:p>
-        </p:txBody>
-      </p:sp>
-      <p:sp>
-        <p:nvSpPr>
-          <p:cNvPr id="4" name="TextBox 3"/>
+            <a:endParaRPr/>
+          </a:p>
+        </p:txBody>
+      </p:sp>
+      <p:sp>
+        <p:nvSpPr>
+          <p:cNvPr id="5" name="TextBox 4"/>
           <p:cNvSpPr txBox="1"/>
           <p:nvPr/>
         </p:nvSpPr>
@@ -6804,41 +7572,17 @@
           <a:lstStyle/>
           <a:p>
             <a:r>
-              <a:rPr sz="1400" b="0" i="1">
+              <a:rPr sz="1400" b="0" i="1" dirty="0">
                 <a:solidFill>
                   <a:srgbClr val="6B727B"/>
                 </a:solidFill>
                 <a:latin typeface="Segoe UI"/>
               </a:rPr>
-              <a:t>Same rig, same load, before and after each change.</a:t>
-            </a:r>
-          </a:p>
-        </p:txBody>
-      </p:sp>
-      <p:pic>
-        <p:nvPicPr>
-          <p:cNvPr id="5" name="Picture 4" descr="measurements.png"/>
-          <p:cNvPicPr>
-            <a:picLocks noChangeAspect="1"/>
-          </p:cNvPicPr>
-          <p:nvPr/>
-        </p:nvPicPr>
-        <p:blipFill>
-          <a:blip r:embed="rId2"/>
-          <a:stretch>
-            <a:fillRect/>
-          </a:stretch>
-        </p:blipFill>
-        <p:spPr>
-          <a:xfrm>
-            <a:off x="975777" y="1847088"/>
-            <a:ext cx="10240140" cy="3822192"/>
-          </a:xfrm>
-          <a:prstGeom prst="rect">
-            <a:avLst/>
-          </a:prstGeom>
-        </p:spPr>
-      </p:pic>
+              <a:t>The wins came from removing our own overhead and letting each tier meet its own deadline — not from a faster runtime.</a:t>
+            </a:r>
+          </a:p>
+        </p:txBody>
+      </p:sp>
       <p:sp>
         <p:nvSpPr>
           <p:cNvPr id="6" name="TextBox 5"/>
@@ -6847,8 +7591,8 @@
         </p:nvSpPr>
         <p:spPr>
           <a:xfrm>
-            <a:off x="658368" y="5797296"/>
-            <a:ext cx="10874959" cy="502920"/>
+            <a:off x="658368" y="6382512"/>
+            <a:ext cx="10874959" cy="292608"/>
           </a:xfrm>
           <a:prstGeom prst="rect">
             <a:avLst/>
@@ -6856,20 +7600,19 @@
           <a:noFill/>
         </p:spPr>
         <p:txBody>
-          <a:bodyPr wrap="square">
+          <a:bodyPr wrap="none">
             <a:spAutoFit/>
           </a:bodyPr>
           <a:lstStyle/>
           <a:p>
-            <a:pPr algn="ctr"/>
-            <a:r>
-              <a:rPr sz="1150" b="0" i="1">
+            <a:r>
+              <a:rPr sz="900" b="0" i="0">
                 <a:solidFill>
                   <a:srgbClr val="6B727B"/>
                 </a:solidFill>
                 <a:latin typeface="Segoe UI"/>
               </a:rPr>
-              <a:t>Measured on an NVIDIA T1000 — a low-end Turing card with no tensor cores, which is why fp16 lost here and why a tensor-core GPU would shift several of these numbers.</a:t>
+              <a:t>reachAQ</a:t>
             </a:r>
           </a:p>
         </p:txBody>
@@ -6882,8 +7625,8 @@
         </p:nvSpPr>
         <p:spPr>
           <a:xfrm>
-            <a:off x="658368" y="6382512"/>
-            <a:ext cx="10874959" cy="292608"/>
+            <a:off x="10893247" y="6382512"/>
+            <a:ext cx="640080" cy="292608"/>
           </a:xfrm>
           <a:prstGeom prst="rect">
             <a:avLst/>
@@ -6896,6 +7639,7 @@
           </a:bodyPr>
           <a:lstStyle/>
           <a:p>
+            <a:pPr algn="r"/>
             <a:r>
               <a:rPr sz="900" b="0" i="0">
                 <a:solidFill>
@@ -6903,42 +7647,7 @@
                 </a:solidFill>
                 <a:latin typeface="Segoe UI"/>
               </a:rPr>
-              <a:t>reachAQ</a:t>
-            </a:r>
-          </a:p>
-        </p:txBody>
-      </p:sp>
-      <p:sp>
-        <p:nvSpPr>
-          <p:cNvPr id="8" name="TextBox 7"/>
-          <p:cNvSpPr txBox="1"/>
-          <p:nvPr/>
-        </p:nvSpPr>
-        <p:spPr>
-          <a:xfrm>
-            <a:off x="10893247" y="6382512"/>
-            <a:ext cx="640080" cy="292608"/>
-          </a:xfrm>
-          <a:prstGeom prst="rect">
-            <a:avLst/>
-          </a:prstGeom>
-          <a:noFill/>
-        </p:spPr>
-        <p:txBody>
-          <a:bodyPr wrap="none">
-            <a:spAutoFit/>
-          </a:bodyPr>
-          <a:lstStyle/>
-          <a:p>
-            <a:pPr algn="r"/>
-            <a:r>
-              <a:rPr sz="900" b="0" i="0">
-                <a:solidFill>
-                  <a:srgbClr val="6B727B"/>
-                </a:solidFill>
-                <a:latin typeface="Segoe UI"/>
-              </a:rPr>
-              <a:t>6</a:t>
+              <a:t>5</a:t>
             </a:r>
           </a:p>
         </p:txBody>
@@ -6948,22 +7657,120 @@
   <p:clrMapOvr>
     <a:masterClrMapping/>
   </p:clrMapOvr>
+  <p:timing>
+    <p:tnLst>
+      <p:par>
+        <p:cTn id="1" dur="indefinite" restart="never" nodeType="tmRoot">
+          <p:childTnLst>
+            <p:seq concurrent="1" nextAc="seek">
+              <p:cTn id="2" dur="indefinite" nodeType="mainSeq">
+                <p:childTnLst>
+                  <p:par>
+                    <p:cTn id="3" fill="hold">
+                      <p:stCondLst>
+                        <p:cond delay="indefinite"/>
+                      </p:stCondLst>
+                      <p:childTnLst>
+                        <p:par>
+                          <p:cTn id="4" fill="hold">
+                            <p:stCondLst>
+                              <p:cond delay="0"/>
+                            </p:stCondLst>
+                            <p:childTnLst>
+                              <p:par>
+                                <p:cTn id="5" presetID="1" presetClass="entr" presetSubtype="0" fill="hold" nodeType="clickEffect">
+                                  <p:stCondLst>
+                                    <p:cond delay="0"/>
+                                  </p:stCondLst>
+                                  <p:childTnLst>
+                                    <p:set>
+                                      <p:cBhvr>
+                                        <p:cTn id="6" dur="1" fill="hold">
+                                          <p:stCondLst>
+                                            <p:cond delay="0"/>
+                                          </p:stCondLst>
+                                        </p:cTn>
+                                        <p:tgtEl>
+                                          <p:spTgt spid="3">
+                                            <p:txEl>
+                                              <p:pRg st="3" end="3"/>
+                                            </p:txEl>
+                                          </p:spTgt>
+                                        </p:tgtEl>
+                                        <p:attrNameLst>
+                                          <p:attrName>style.visibility</p:attrName>
+                                        </p:attrNameLst>
+                                      </p:cBhvr>
+                                      <p:to>
+                                        <p:strVal val="visible"/>
+                                      </p:to>
+                                    </p:set>
+                                  </p:childTnLst>
+                                </p:cTn>
+                              </p:par>
+                            </p:childTnLst>
+                          </p:cTn>
+                        </p:par>
+                      </p:childTnLst>
+                    </p:cTn>
+                  </p:par>
+                </p:childTnLst>
+              </p:cTn>
+              <p:prevCondLst>
+                <p:cond evt="onPrev" delay="0">
+                  <p:tgtEl>
+                    <p:sldTgt/>
+                  </p:tgtEl>
+                </p:cond>
+              </p:prevCondLst>
+              <p:nextCondLst>
+                <p:cond evt="onNext" delay="0">
+                  <p:tgtEl>
+                    <p:sldTgt/>
+                  </p:tgtEl>
+                </p:cond>
+              </p:nextCondLst>
+            </p:seq>
+          </p:childTnLst>
+        </p:cTn>
+      </p:par>
+    </p:tnLst>
+  </p:timing>
 </p:sld>
 </file>
 
-<file path=ppt/slides/slide7.xml><?xml version="1.0" encoding="utf-8"?>
-<p:sld xmlns:a="http://schemas.openxmlformats.org/drawingml/2006/main" xmlns:p="http://schemas.openxmlformats.org/presentationml/2006/main" xmlns:r="http://schemas.openxmlformats.org/officeDocument/2006/relationships">
+<file path=ppt/slides/slide6.xml><?xml version="1.0" encoding="utf-8"?>
+<p:sld xmlns:a="http://schemas.openxmlformats.org/drawingml/2006/main" xmlns:r="http://schemas.openxmlformats.org/officeDocument/2006/relationships" xmlns:p="http://schemas.openxmlformats.org/presentationml/2006/main">
   <p:cSld>
     <p:spTree>
       <p:nvGrpSpPr>
-        <p:cNvPr id="1" name=""/>
+        <p:cNvPr id="1" name="">
+          <a:extLst>
+            <a:ext uri="{FF2B5EF4-FFF2-40B4-BE49-F238E27FC236}">
+              <a16:creationId xmlns:a16="http://schemas.microsoft.com/office/drawing/2014/main" id="{1E7FB802-38A2-F07B-54CB-EBCF024D0EA5}"/>
+            </a:ext>
+          </a:extLst>
+        </p:cNvPr>
         <p:cNvGrpSpPr/>
         <p:nvPr/>
       </p:nvGrpSpPr>
-      <p:grpSpPr/>
-      <p:sp>
-        <p:nvSpPr>
-          <p:cNvPr id="2" name="Title 1"/>
+      <p:grpSpPr>
+        <a:xfrm>
+          <a:off x="0" y="0"/>
+          <a:ext cx="0" cy="0"/>
+          <a:chOff x="0" y="0"/>
+          <a:chExt cx="0" cy="0"/>
+        </a:xfrm>
+      </p:grpSpPr>
+      <p:sp>
+        <p:nvSpPr>
+          <p:cNvPr id="2" name="Title 1">
+            <a:extLst>
+              <a:ext uri="{FF2B5EF4-FFF2-40B4-BE49-F238E27FC236}">
+                <a16:creationId xmlns:a16="http://schemas.microsoft.com/office/drawing/2014/main" id="{25CA8790-A2BD-2F36-1285-988F23783599}"/>
+              </a:ext>
+            </a:extLst>
+          </p:cNvPr>
           <p:cNvSpPr>
             <a:spLocks noGrp="1"/>
           </p:cNvSpPr>
@@ -6983,158 +7790,246 @@
           <a:p>
             <a:pPr algn="l"/>
             <a:r>
-              <a:rPr sz="3000" b="1" i="0">
-                <a:solidFill>
-                  <a:srgbClr val="1E242B"/>
-                </a:solidFill>
-                <a:latin typeface="Segoe UI"/>
-              </a:rPr>
-              <a:t>Pick the model that fits the experiment</a:t>
-            </a:r>
-          </a:p>
-        </p:txBody>
-      </p:sp>
-      <p:sp>
-        <p:nvSpPr>
-          <p:cNvPr id="3" name="Content Placeholder 2"/>
-          <p:cNvSpPr>
-            <a:spLocks noGrp="1"/>
-          </p:cNvSpPr>
-          <p:nvPr>
-            <p:ph idx="1" sz="half"/>
-          </p:nvPr>
-        </p:nvSpPr>
-        <p:spPr>
-          <a:xfrm>
-            <a:off x="658368" y="2487168"/>
-            <a:ext cx="5186019" cy="3593592"/>
-          </a:xfrm>
-        </p:spPr>
-        <p:txBody>
-          <a:bodyPr wrap="square"/>
+              <a:rPr sz="3000" b="1" i="0" dirty="0">
+                <a:solidFill>
+                  <a:srgbClr val="1E242B"/>
+                </a:solidFill>
+                <a:latin typeface="Segoe UI"/>
+              </a:rPr>
+              <a:t>What we changed</a:t>
+            </a:r>
+          </a:p>
+        </p:txBody>
+      </p:sp>
+      <p:sp>
+        <p:nvSpPr>
+          <p:cNvPr id="3" name="Content Placeholder 2">
+            <a:extLst>
+              <a:ext uri="{FF2B5EF4-FFF2-40B4-BE49-F238E27FC236}">
+                <a16:creationId xmlns:a16="http://schemas.microsoft.com/office/drawing/2014/main" id="{5DE6C640-5D44-C199-6471-E0E2B876F949}"/>
+              </a:ext>
+            </a:extLst>
+          </p:cNvPr>
+          <p:cNvSpPr>
+            <a:spLocks noGrp="1"/>
+          </p:cNvSpPr>
+          <p:nvPr>
+            <p:ph idx="1"/>
+          </p:nvPr>
+        </p:nvSpPr>
+        <p:spPr>
+          <a:xfrm>
+            <a:off x="658368" y="2057400"/>
+            <a:ext cx="10874959" cy="4023360"/>
+          </a:xfrm>
+        </p:spPr>
+        <p:txBody>
+          <a:bodyPr wrap="square">
+            <a:normAutofit lnSpcReduction="10000"/>
+          </a:bodyPr>
           <a:lstStyle/>
           <a:p>
             <a:pPr>
               <a:spcAft>
-                <a:spcPts val="1100"/>
+                <a:spcPts val="1300"/>
               </a:spcAft>
             </a:pPr>
             <a:r>
-              <a:rPr sz="1350" b="0" i="0">
-                <a:solidFill>
-                  <a:srgbClr val="1E242B"/>
-                </a:solidFill>
-                <a:latin typeface="Segoe UI"/>
-              </a:rPr>
-              <a:t>YOLO — the current default, and the one the CUDA-graph path accelerates</a:t>
+              <a:rPr lang="en-US" sz="1500" b="0" i="0" dirty="0">
+                <a:solidFill>
+                  <a:srgbClr val="1E242B"/>
+                </a:solidFill>
+                <a:latin typeface="Segoe UI"/>
+              </a:rPr>
+              <a:t>Split the work by how tight a deadline each loop can guarantee, not by what it is allowed to do. </a:t>
+            </a:r>
+          </a:p>
+          <a:p>
+            <a:pPr lvl="1">
+              <a:spcAft>
+                <a:spcPts val="1300"/>
+              </a:spcAft>
+            </a:pPr>
+            <a:r>
+              <a:rPr lang="en-US" sz="1100" b="1" i="0" dirty="0">
+                <a:solidFill>
+                  <a:srgbClr val="1E242B"/>
+                </a:solidFill>
+                <a:latin typeface="Segoe UI"/>
+              </a:rPr>
+              <a:t>The ROI detector on the stim camera holds a millisecond deadline</a:t>
+            </a:r>
+          </a:p>
+          <a:p>
+            <a:pPr lvl="1">
+              <a:spcAft>
+                <a:spcPts val="1300"/>
+              </a:spcAft>
+            </a:pPr>
+            <a:r>
+              <a:rPr lang="en-US" sz="1100" b="1" i="0" dirty="0">
+                <a:solidFill>
+                  <a:srgbClr val="1E242B"/>
+                </a:solidFill>
+                <a:latin typeface="Segoe UI"/>
+              </a:rPr>
+              <a:t>The pose stream drives hardware too, bounded timewise by end-to-end inference speed</a:t>
             </a:r>
           </a:p>
           <a:p>
             <a:pPr>
               <a:spcAft>
-                <a:spcPts val="1100"/>
+                <a:spcPts val="1300"/>
               </a:spcAft>
             </a:pPr>
             <a:r>
-              <a:rPr sz="1350" b="0" i="0">
-                <a:solidFill>
-                  <a:srgbClr val="1E242B"/>
-                </a:solidFill>
-                <a:latin typeface="Segoe UI"/>
-              </a:rPr>
-              <a:t>cspnext and rtmpose — top-down pose families with measured confidence thresholds per backbone</a:t>
+              <a:rPr lang="en-US" sz="1500" b="1" dirty="0">
+                <a:solidFill>
+                  <a:srgbClr val="1E242B"/>
+                </a:solidFill>
+                <a:latin typeface="Segoe UI"/>
+              </a:rPr>
+              <a:t>Pose stream</a:t>
+            </a:r>
+            <a:r>
+              <a:rPr lang="en-US" sz="1500" dirty="0">
+                <a:solidFill>
+                  <a:srgbClr val="1E242B"/>
+                </a:solidFill>
+                <a:latin typeface="Segoe UI"/>
+              </a:rPr>
+              <a:t>: moved off </a:t>
+            </a:r>
+            <a:r>
+              <a:rPr lang="en-US" sz="1500" dirty="0" err="1">
+                <a:solidFill>
+                  <a:srgbClr val="1E242B"/>
+                </a:solidFill>
+                <a:latin typeface="Segoe UI"/>
+              </a:rPr>
+              <a:t>DeepLabCut's</a:t>
+            </a:r>
+            <a:r>
+              <a:rPr lang="en-US" sz="1500" dirty="0">
+                <a:solidFill>
+                  <a:srgbClr val="1E242B"/>
+                </a:solidFill>
+                <a:latin typeface="Segoe UI"/>
+              </a:rPr>
+              <a:t> TensorFlow path onto the </a:t>
+            </a:r>
+            <a:r>
+              <a:rPr lang="en-US" sz="1500" dirty="0" err="1">
+                <a:solidFill>
+                  <a:srgbClr val="1E242B"/>
+                </a:solidFill>
+                <a:latin typeface="Segoe UI"/>
+              </a:rPr>
+              <a:t>PyTorch</a:t>
+            </a:r>
+            <a:r>
+              <a:rPr lang="en-US" sz="1500" dirty="0">
+                <a:solidFill>
+                  <a:srgbClr val="1E242B"/>
+                </a:solidFill>
+                <a:latin typeface="Segoe UI"/>
+              </a:rPr>
+              <a:t> engine. It is what makes everything below possible</a:t>
             </a:r>
           </a:p>
           <a:p>
             <a:pPr>
               <a:spcAft>
-                <a:spcPts val="1100"/>
+                <a:spcPts val="1300"/>
               </a:spcAft>
             </a:pPr>
             <a:r>
-              <a:rPr sz="1350" b="0" i="0">
-                <a:solidFill>
-                  <a:srgbClr val="1E242B"/>
-                </a:solidFill>
-                <a:latin typeface="Segoe UI"/>
-              </a:rPr>
-              <a:t>DeepLabCut ResNet-50 — the accuracy reference, and where this started</a:t>
-            </a:r>
-          </a:p>
-        </p:txBody>
-      </p:sp>
-      <p:sp>
-        <p:nvSpPr>
-          <p:cNvPr id="4" name="Content Placeholder 3"/>
-          <p:cNvSpPr>
-            <a:spLocks noGrp="1"/>
-          </p:cNvSpPr>
-          <p:nvPr>
-            <p:ph idx="2" sz="half"/>
-          </p:nvPr>
-        </p:nvSpPr>
-        <p:spPr>
-          <a:xfrm>
-            <a:off x="6347307" y="2487168"/>
-            <a:ext cx="5186019" cy="3593592"/>
-          </a:xfrm>
-        </p:spPr>
-        <p:txBody>
-          <a:bodyPr wrap="square"/>
-          <a:lstStyle/>
+              <a:rPr lang="en-US" sz="1500" dirty="0">
+                <a:solidFill>
+                  <a:srgbClr val="1E242B"/>
+                </a:solidFill>
+                <a:latin typeface="Segoe UI"/>
+              </a:rPr>
+              <a:t>Gave the reflex loop real-time scheduling (SCHED_FIFO) and a performance CPU governor, so a busy machine cannot delay it</a:t>
+            </a:r>
+          </a:p>
           <a:p>
             <a:pPr>
               <a:spcAft>
-                <a:spcPts val="1100"/>
+                <a:spcPts val="1300"/>
               </a:spcAft>
             </a:pPr>
             <a:r>
-              <a:rPr sz="1350" b="0" i="0">
-                <a:solidFill>
-                  <a:srgbClr val="1E242B"/>
-                </a:solidFill>
-                <a:latin typeface="Segoe UI"/>
-              </a:rPr>
-              <a:t>Faster backbones hold camera rate: cspnext_s sustains 150 fps at 7.66 ms sensor-to-pose; cspnext_m runs near 103 fps</a:t>
+              <a:rPr lang="en-US" sz="1500" dirty="0">
+                <a:solidFill>
+                  <a:srgbClr val="1E242B"/>
+                </a:solidFill>
+                <a:latin typeface="Segoe UI"/>
+              </a:rPr>
+              <a:t>Stopped padding the inference batch — run the 2 real frames instead of a padded 6 — and rewrote the CPU decode to use argmax and </a:t>
+            </a:r>
+            <a:r>
+              <a:rPr lang="en-US" sz="1500" dirty="0" err="1">
+                <a:solidFill>
+                  <a:srgbClr val="1E242B"/>
+                </a:solidFill>
+                <a:latin typeface="Segoe UI"/>
+              </a:rPr>
+              <a:t>numpy</a:t>
+            </a:r>
+            <a:r>
+              <a:rPr lang="en-US" sz="1500" dirty="0">
+                <a:solidFill>
+                  <a:srgbClr val="1E242B"/>
+                </a:solidFill>
+                <a:latin typeface="Segoe UI"/>
+              </a:rPr>
+              <a:t> instead of a sort and pandas</a:t>
             </a:r>
           </a:p>
           <a:p>
             <a:pPr>
               <a:spcAft>
-                <a:spcPts val="1100"/>
+                <a:spcPts val="1300"/>
               </a:spcAft>
             </a:pPr>
             <a:r>
-              <a:rPr sz="1350" b="0" i="0">
-                <a:solidFill>
-                  <a:srgbClr val="1E242B"/>
-                </a:solidFill>
-                <a:latin typeface="Segoe UI"/>
-              </a:rPr>
-              <a:t>ResNet-50 runs below camera rate on this GPU — fine for a behaviour stream, not for closing a loop</a:t>
+              <a:rPr lang="en-US" sz="1500" dirty="0">
+                <a:solidFill>
+                  <a:srgbClr val="1E242B"/>
+                </a:solidFill>
+                <a:latin typeface="Segoe UI"/>
+              </a:rPr>
+              <a:t>Captured the CUDA graph for the live batch and replayed it, instead of re-submitting the same work every call</a:t>
             </a:r>
           </a:p>
           <a:p>
             <a:pPr>
               <a:spcAft>
-                <a:spcPts val="1100"/>
+                <a:spcPts val="1300"/>
               </a:spcAft>
             </a:pPr>
             <a:r>
-              <a:rPr sz="1350" b="0" i="0">
-                <a:solidFill>
-                  <a:srgbClr val="1E242B"/>
-                </a:solidFill>
-                <a:latin typeface="Segoe UI"/>
-              </a:rPr>
-              <a:t>Confidence does not mean the same thing across families, so the gate threshold is measured per backbone rather than set globally</a:t>
-            </a:r>
-          </a:p>
-        </p:txBody>
-      </p:sp>
-      <p:sp>
-        <p:nvSpPr>
-          <p:cNvPr id="5" name="Rectangle 4"/>
+              <a:rPr lang="en-US" sz="1500" dirty="0">
+                <a:solidFill>
+                  <a:srgbClr val="1E242B"/>
+                </a:solidFill>
+                <a:latin typeface="Segoe UI"/>
+              </a:rPr>
+              <a:t>Made the pose stage unable to hurt acquisition: it takes frames on a separate non-blocking queue, always takes the newest and drops stale ones, so latency never grows into a backlog</a:t>
+            </a:r>
+          </a:p>
+        </p:txBody>
+      </p:sp>
+      <p:sp>
+        <p:nvSpPr>
+          <p:cNvPr id="4" name="Rectangle 3">
+            <a:extLst>
+              <a:ext uri="{FF2B5EF4-FFF2-40B4-BE49-F238E27FC236}">
+                <a16:creationId xmlns:a16="http://schemas.microsoft.com/office/drawing/2014/main" id="{7F5C2B88-554B-24AF-4A86-4BA878CFF01C}"/>
+              </a:ext>
+            </a:extLst>
+          </p:cNvPr>
           <p:cNvSpPr/>
           <p:nvPr/>
         </p:nvSpPr>
@@ -7173,12 +8068,19 @@
           <a:lstStyle/>
           <a:p>
             <a:pPr algn="ctr"/>
-          </a:p>
-        </p:txBody>
-      </p:sp>
-      <p:sp>
-        <p:nvSpPr>
-          <p:cNvPr id="6" name="TextBox 5"/>
+            <a:endParaRPr/>
+          </a:p>
+        </p:txBody>
+      </p:sp>
+      <p:sp>
+        <p:nvSpPr>
+          <p:cNvPr id="5" name="TextBox 4">
+            <a:extLst>
+              <a:ext uri="{FF2B5EF4-FFF2-40B4-BE49-F238E27FC236}">
+                <a16:creationId xmlns:a16="http://schemas.microsoft.com/office/drawing/2014/main" id="{AE4D265A-BD12-FA44-E8C5-805B218164E1}"/>
+              </a:ext>
+            </a:extLst>
+          </p:cNvPr>
           <p:cNvSpPr txBox="1"/>
           <p:nvPr/>
         </p:nvSpPr>
@@ -7199,27 +8101,33 @@
           <a:lstStyle/>
           <a:p>
             <a:r>
-              <a:rPr sz="1400" b="0" i="1">
+              <a:rPr sz="1400" b="0" i="1" dirty="0">
                 <a:solidFill>
                   <a:srgbClr val="6B727B"/>
                 </a:solidFill>
                 <a:latin typeface="Segoe UI"/>
               </a:rPr>
-              <a:t>The backend takes several model families. Speed and accuracy trade against each other, and the choice is yours per use case.</a:t>
-            </a:r>
-          </a:p>
-        </p:txBody>
-      </p:sp>
-      <p:sp>
-        <p:nvSpPr>
-          <p:cNvPr id="7" name="TextBox 6"/>
+              <a:t>The wins came from removing our own overhead and letting each tier meet its own deadline — not from a faster runtime.</a:t>
+            </a:r>
+          </a:p>
+        </p:txBody>
+      </p:sp>
+      <p:sp>
+        <p:nvSpPr>
+          <p:cNvPr id="6" name="TextBox 5">
+            <a:extLst>
+              <a:ext uri="{FF2B5EF4-FFF2-40B4-BE49-F238E27FC236}">
+                <a16:creationId xmlns:a16="http://schemas.microsoft.com/office/drawing/2014/main" id="{449ECFE3-EA46-9E03-A2D1-F916A4C24E08}"/>
+              </a:ext>
+            </a:extLst>
+          </p:cNvPr>
           <p:cNvSpPr txBox="1"/>
           <p:nvPr/>
         </p:nvSpPr>
         <p:spPr>
           <a:xfrm>
-            <a:off x="658368" y="2103120"/>
-            <a:ext cx="5186019" cy="347472"/>
+            <a:off x="658368" y="6382512"/>
+            <a:ext cx="10874959" cy="292608"/>
           </a:xfrm>
           <a:prstGeom prst="rect">
             <a:avLst/>
@@ -7233,27 +8141,33 @@
           <a:lstStyle/>
           <a:p>
             <a:r>
-              <a:rPr sz="1500" b="1" i="0">
-                <a:solidFill>
-                  <a:srgbClr val="6B7F9E"/>
-                </a:solidFill>
-                <a:latin typeface="Segoe UI"/>
-              </a:rPr>
-              <a:t>What you get to choose</a:t>
-            </a:r>
-          </a:p>
-        </p:txBody>
-      </p:sp>
-      <p:sp>
-        <p:nvSpPr>
-          <p:cNvPr id="8" name="TextBox 7"/>
+              <a:rPr sz="900" b="0" i="0">
+                <a:solidFill>
+                  <a:srgbClr val="6B727B"/>
+                </a:solidFill>
+                <a:latin typeface="Segoe UI"/>
+              </a:rPr>
+              <a:t>reachAQ</a:t>
+            </a:r>
+          </a:p>
+        </p:txBody>
+      </p:sp>
+      <p:sp>
+        <p:nvSpPr>
+          <p:cNvPr id="7" name="TextBox 6">
+            <a:extLst>
+              <a:ext uri="{FF2B5EF4-FFF2-40B4-BE49-F238E27FC236}">
+                <a16:creationId xmlns:a16="http://schemas.microsoft.com/office/drawing/2014/main" id="{FF8A8F00-3549-F9AD-3D18-1CE800E77814}"/>
+              </a:ext>
+            </a:extLst>
+          </p:cNvPr>
           <p:cNvSpPr txBox="1"/>
           <p:nvPr/>
         </p:nvSpPr>
         <p:spPr>
           <a:xfrm>
-            <a:off x="6347307" y="2103120"/>
-            <a:ext cx="5186019" cy="347472"/>
+            <a:off x="10893247" y="6382512"/>
+            <a:ext cx="640080" cy="292608"/>
           </a:xfrm>
           <a:prstGeom prst="rect">
             <a:avLst/>
@@ -7266,40 +8180,7 @@
           </a:bodyPr>
           <a:lstStyle/>
           <a:p>
-            <a:r>
-              <a:rPr sz="1500" b="1" i="0">
-                <a:solidFill>
-                  <a:srgbClr val="B3593F"/>
-                </a:solidFill>
-                <a:latin typeface="Segoe UI"/>
-              </a:rPr>
-              <a:t>What the choice costs</a:t>
-            </a:r>
-          </a:p>
-        </p:txBody>
-      </p:sp>
-      <p:sp>
-        <p:nvSpPr>
-          <p:cNvPr id="9" name="TextBox 8"/>
-          <p:cNvSpPr txBox="1"/>
-          <p:nvPr/>
-        </p:nvSpPr>
-        <p:spPr>
-          <a:xfrm>
-            <a:off x="658368" y="6382512"/>
-            <a:ext cx="10874959" cy="292608"/>
-          </a:xfrm>
-          <a:prstGeom prst="rect">
-            <a:avLst/>
-          </a:prstGeom>
-          <a:noFill/>
-        </p:spPr>
-        <p:txBody>
-          <a:bodyPr wrap="none">
-            <a:spAutoFit/>
-          </a:bodyPr>
-          <a:lstStyle/>
-          <a:p>
+            <a:pPr algn="r"/>
             <a:r>
               <a:rPr sz="900" b="0" i="0">
                 <a:solidFill>
@@ -7307,56 +8188,229 @@
                 </a:solidFill>
                 <a:latin typeface="Segoe UI"/>
               </a:rPr>
-              <a:t>reachAQ</a:t>
-            </a:r>
-          </a:p>
-        </p:txBody>
-      </p:sp>
-      <p:sp>
-        <p:nvSpPr>
-          <p:cNvPr id="10" name="TextBox 9"/>
-          <p:cNvSpPr txBox="1"/>
-          <p:nvPr/>
-        </p:nvSpPr>
-        <p:spPr>
-          <a:xfrm>
-            <a:off x="10893247" y="6382512"/>
-            <a:ext cx="640080" cy="292608"/>
-          </a:xfrm>
-          <a:prstGeom prst="rect">
-            <a:avLst/>
-          </a:prstGeom>
-          <a:noFill/>
-        </p:spPr>
-        <p:txBody>
-          <a:bodyPr wrap="none">
-            <a:spAutoFit/>
-          </a:bodyPr>
-          <a:lstStyle/>
-          <a:p>
-            <a:pPr algn="r"/>
-            <a:r>
-              <a:rPr sz="900" b="0" i="0">
-                <a:solidFill>
-                  <a:srgbClr val="6B727B"/>
-                </a:solidFill>
-                <a:latin typeface="Segoe UI"/>
-              </a:rPr>
-              <a:t>7</a:t>
+              <a:t>5</a:t>
             </a:r>
           </a:p>
         </p:txBody>
       </p:sp>
     </p:spTree>
+    <p:extLst>
+      <p:ext uri="{BB962C8B-B14F-4D97-AF65-F5344CB8AC3E}">
+        <p14:creationId xmlns:p14="http://schemas.microsoft.com/office/powerpoint/2010/main" val="1810192810"/>
+      </p:ext>
+    </p:extLst>
   </p:cSld>
   <p:clrMapOvr>
     <a:masterClrMapping/>
   </p:clrMapOvr>
+  <p:timing>
+    <p:tnLst>
+      <p:par>
+        <p:cTn id="1" dur="indefinite" restart="never" nodeType="tmRoot">
+          <p:childTnLst>
+            <p:seq concurrent="1" nextAc="seek">
+              <p:cTn id="2" dur="indefinite" nodeType="mainSeq">
+                <p:childTnLst>
+                  <p:par>
+                    <p:cTn id="3" fill="hold">
+                      <p:stCondLst>
+                        <p:cond delay="indefinite"/>
+                      </p:stCondLst>
+                      <p:childTnLst>
+                        <p:par>
+                          <p:cTn id="4" fill="hold">
+                            <p:stCondLst>
+                              <p:cond delay="0"/>
+                            </p:stCondLst>
+                            <p:childTnLst>
+                              <p:par>
+                                <p:cTn id="5" presetID="1" presetClass="entr" presetSubtype="0" fill="hold" nodeType="clickEffect">
+                                  <p:stCondLst>
+                                    <p:cond delay="0"/>
+                                  </p:stCondLst>
+                                  <p:childTnLst>
+                                    <p:set>
+                                      <p:cBhvr>
+                                        <p:cTn id="6" dur="1" fill="hold">
+                                          <p:stCondLst>
+                                            <p:cond delay="0"/>
+                                          </p:stCondLst>
+                                        </p:cTn>
+                                        <p:tgtEl>
+                                          <p:spTgt spid="3">
+                                            <p:txEl>
+                                              <p:pRg st="3" end="3"/>
+                                            </p:txEl>
+                                          </p:spTgt>
+                                        </p:tgtEl>
+                                        <p:attrNameLst>
+                                          <p:attrName>style.visibility</p:attrName>
+                                        </p:attrNameLst>
+                                      </p:cBhvr>
+                                      <p:to>
+                                        <p:strVal val="visible"/>
+                                      </p:to>
+                                    </p:set>
+                                  </p:childTnLst>
+                                </p:cTn>
+                              </p:par>
+                              <p:par>
+                                <p:cTn id="7" presetID="1" presetClass="entr" presetSubtype="0" fill="hold" nodeType="withEffect">
+                                  <p:stCondLst>
+                                    <p:cond delay="0"/>
+                                  </p:stCondLst>
+                                  <p:childTnLst>
+                                    <p:set>
+                                      <p:cBhvr>
+                                        <p:cTn id="8" dur="1" fill="hold">
+                                          <p:stCondLst>
+                                            <p:cond delay="0"/>
+                                          </p:stCondLst>
+                                        </p:cTn>
+                                        <p:tgtEl>
+                                          <p:spTgt spid="3">
+                                            <p:txEl>
+                                              <p:pRg st="4" end="4"/>
+                                            </p:txEl>
+                                          </p:spTgt>
+                                        </p:tgtEl>
+                                        <p:attrNameLst>
+                                          <p:attrName>style.visibility</p:attrName>
+                                        </p:attrNameLst>
+                                      </p:cBhvr>
+                                      <p:to>
+                                        <p:strVal val="visible"/>
+                                      </p:to>
+                                    </p:set>
+                                  </p:childTnLst>
+                                </p:cTn>
+                              </p:par>
+                              <p:par>
+                                <p:cTn id="9" presetID="1" presetClass="entr" presetSubtype="0" fill="hold" nodeType="withEffect">
+                                  <p:stCondLst>
+                                    <p:cond delay="0"/>
+                                  </p:stCondLst>
+                                  <p:childTnLst>
+                                    <p:set>
+                                      <p:cBhvr>
+                                        <p:cTn id="10" dur="1" fill="hold">
+                                          <p:stCondLst>
+                                            <p:cond delay="0"/>
+                                          </p:stCondLst>
+                                        </p:cTn>
+                                        <p:tgtEl>
+                                          <p:spTgt spid="3">
+                                            <p:txEl>
+                                              <p:pRg st="5" end="5"/>
+                                            </p:txEl>
+                                          </p:spTgt>
+                                        </p:tgtEl>
+                                        <p:attrNameLst>
+                                          <p:attrName>style.visibility</p:attrName>
+                                        </p:attrNameLst>
+                                      </p:cBhvr>
+                                      <p:to>
+                                        <p:strVal val="visible"/>
+                                      </p:to>
+                                    </p:set>
+                                  </p:childTnLst>
+                                </p:cTn>
+                              </p:par>
+                              <p:par>
+                                <p:cTn id="11" presetID="1" presetClass="entr" presetSubtype="0" fill="hold" nodeType="withEffect">
+                                  <p:stCondLst>
+                                    <p:cond delay="0"/>
+                                  </p:stCondLst>
+                                  <p:childTnLst>
+                                    <p:set>
+                                      <p:cBhvr>
+                                        <p:cTn id="12" dur="1" fill="hold">
+                                          <p:stCondLst>
+                                            <p:cond delay="0"/>
+                                          </p:stCondLst>
+                                        </p:cTn>
+                                        <p:tgtEl>
+                                          <p:spTgt spid="3">
+                                            <p:txEl>
+                                              <p:pRg st="6" end="6"/>
+                                            </p:txEl>
+                                          </p:spTgt>
+                                        </p:tgtEl>
+                                        <p:attrNameLst>
+                                          <p:attrName>style.visibility</p:attrName>
+                                        </p:attrNameLst>
+                                      </p:cBhvr>
+                                      <p:to>
+                                        <p:strVal val="visible"/>
+                                      </p:to>
+                                    </p:set>
+                                  </p:childTnLst>
+                                </p:cTn>
+                              </p:par>
+                              <p:par>
+                                <p:cTn id="13" presetID="1" presetClass="entr" presetSubtype="0" fill="hold" nodeType="withEffect">
+                                  <p:stCondLst>
+                                    <p:cond delay="0"/>
+                                  </p:stCondLst>
+                                  <p:childTnLst>
+                                    <p:set>
+                                      <p:cBhvr>
+                                        <p:cTn id="14" dur="1" fill="hold">
+                                          <p:stCondLst>
+                                            <p:cond delay="0"/>
+                                          </p:stCondLst>
+                                        </p:cTn>
+                                        <p:tgtEl>
+                                          <p:spTgt spid="3">
+                                            <p:txEl>
+                                              <p:pRg st="7" end="7"/>
+                                            </p:txEl>
+                                          </p:spTgt>
+                                        </p:tgtEl>
+                                        <p:attrNameLst>
+                                          <p:attrName>style.visibility</p:attrName>
+                                        </p:attrNameLst>
+                                      </p:cBhvr>
+                                      <p:to>
+                                        <p:strVal val="visible"/>
+                                      </p:to>
+                                    </p:set>
+                                  </p:childTnLst>
+                                </p:cTn>
+                              </p:par>
+                            </p:childTnLst>
+                          </p:cTn>
+                        </p:par>
+                      </p:childTnLst>
+                    </p:cTn>
+                  </p:par>
+                </p:childTnLst>
+              </p:cTn>
+              <p:prevCondLst>
+                <p:cond evt="onPrev" delay="0">
+                  <p:tgtEl>
+                    <p:sldTgt/>
+                  </p:tgtEl>
+                </p:cond>
+              </p:prevCondLst>
+              <p:nextCondLst>
+                <p:cond evt="onNext" delay="0">
+                  <p:tgtEl>
+                    <p:sldTgt/>
+                  </p:tgtEl>
+                </p:cond>
+              </p:nextCondLst>
+            </p:seq>
+          </p:childTnLst>
+        </p:cTn>
+      </p:par>
+    </p:tnLst>
+  </p:timing>
 </p:sld>
 </file>
 
-<file path=ppt/slides/slide8.xml><?xml version="1.0" encoding="utf-8"?>
-<p:sld xmlns:a="http://schemas.openxmlformats.org/drawingml/2006/main" xmlns:p="http://schemas.openxmlformats.org/presentationml/2006/main" xmlns:r="http://schemas.openxmlformats.org/officeDocument/2006/relationships">
+<file path=ppt/slides/slide7.xml><?xml version="1.0" encoding="utf-8"?>
+<p:sld xmlns:a="http://schemas.openxmlformats.org/drawingml/2006/main" xmlns:r="http://schemas.openxmlformats.org/officeDocument/2006/relationships" xmlns:p="http://schemas.openxmlformats.org/presentationml/2006/main">
   <p:cSld>
     <p:spTree>
       <p:nvGrpSpPr>
@@ -7364,7 +8418,14 @@
         <p:cNvGrpSpPr/>
         <p:nvPr/>
       </p:nvGrpSpPr>
-      <p:grpSpPr/>
+      <p:grpSpPr>
+        <a:xfrm>
+          <a:off x="0" y="0"/>
+          <a:ext cx="0" cy="0"/>
+          <a:chOff x="0" y="0"/>
+          <a:chExt cx="0" cy="0"/>
+        </a:xfrm>
+      </p:grpSpPr>
       <p:sp>
         <p:nvSpPr>
           <p:cNvPr id="2" name="Title 1"/>
@@ -7393,184 +8454,14 @@
                 </a:solidFill>
                 <a:latin typeface="Segoe UI"/>
               </a:rPr>
-              <a:t>What this buys, and what it costs</a:t>
-            </a:r>
-          </a:p>
-        </p:txBody>
-      </p:sp>
-      <p:sp>
-        <p:nvSpPr>
-          <p:cNvPr id="3" name="Content Placeholder 2"/>
-          <p:cNvSpPr>
-            <a:spLocks noGrp="1"/>
-          </p:cNvSpPr>
-          <p:nvPr>
-            <p:ph idx="1" sz="half"/>
-          </p:nvPr>
-        </p:nvSpPr>
-        <p:spPr>
-          <a:xfrm>
-            <a:off x="658368" y="2487168"/>
-            <a:ext cx="5186019" cy="3593592"/>
-          </a:xfrm>
-        </p:spPr>
-        <p:txBody>
-          <a:bodyPr wrap="square"/>
-          <a:lstStyle/>
-          <a:p>
-            <a:pPr>
-              <a:spcAft>
-                <a:spcPts val="1100"/>
-              </a:spcAft>
-            </a:pPr>
-            <a:r>
-              <a:rPr sz="1350" b="0" i="0">
-                <a:solidFill>
-                  <a:srgbClr val="1E242B"/>
-                </a:solidFill>
-                <a:latin typeface="Segoe UI"/>
-              </a:rPr>
-              <a:t>A second closed loop driven by machine vision, alongside the fast ROI reflex — decisions can now depend on where the paw actually is</a:t>
-            </a:r>
-          </a:p>
-          <a:p>
-            <a:pPr>
-              <a:spcAft>
-                <a:spcPts val="1100"/>
-              </a:spcAft>
-            </a:pPr>
-            <a:r>
-              <a:rPr sz="1350" b="0" i="0">
-                <a:solidFill>
-                  <a:srgbClr val="1E242B"/>
-                </a:solidFill>
-                <a:latin typeface="Segoe UI"/>
-              </a:rPr>
-              <a:t>A live 2D pose overlay per camera view while the session runs</a:t>
-            </a:r>
-          </a:p>
-          <a:p>
-            <a:pPr>
-              <a:spcAft>
-                <a:spcPts val="1100"/>
-              </a:spcAft>
-            </a:pPr>
-            <a:r>
-              <a:rPr sz="1350" b="0" i="0">
-                <a:solidFill>
-                  <a:srgbClr val="1E242B"/>
-                </a:solidFill>
-                <a:latin typeface="Segoe UI"/>
-              </a:rPr>
-              <a:t>Signals visualised during acquisition instead of plotted afterwards</a:t>
-            </a:r>
-          </a:p>
-          <a:p>
-            <a:pPr>
-              <a:spcAft>
-                <a:spcPts val="1100"/>
-              </a:spcAft>
-            </a:pPr>
-            <a:r>
-              <a:rPr sz="1350" b="0" i="0">
-                <a:solidFill>
-                  <a:srgbClr val="1E242B"/>
-                </a:solidFill>
-                <a:latin typeface="Segoe UI"/>
-              </a:rPr>
-              <a:t>Experiments composed from reusable trial sets, with reproducible draws</a:t>
-            </a:r>
-          </a:p>
-        </p:txBody>
-      </p:sp>
-      <p:sp>
-        <p:nvSpPr>
-          <p:cNvPr id="4" name="Content Placeholder 3"/>
-          <p:cNvSpPr>
-            <a:spLocks noGrp="1"/>
-          </p:cNvSpPr>
-          <p:nvPr>
-            <p:ph idx="2" sz="half"/>
-          </p:nvPr>
-        </p:nvSpPr>
-        <p:spPr>
-          <a:xfrm>
-            <a:off x="6347307" y="2487168"/>
-            <a:ext cx="5186019" cy="3593592"/>
-          </a:xfrm>
-        </p:spPr>
-        <p:txBody>
-          <a:bodyPr wrap="square"/>
-          <a:lstStyle/>
-          <a:p>
-            <a:pPr>
-              <a:spcAft>
-                <a:spcPts val="1100"/>
-              </a:spcAft>
-            </a:pPr>
-            <a:r>
-              <a:rPr sz="1350" b="0" i="0">
-                <a:solidFill>
-                  <a:srgbClr val="1E242B"/>
-                </a:solidFill>
-                <a:latin typeface="Segoe UI"/>
-              </a:rPr>
-              <a:t>A working CUDA GPU. Live inference refuses to start without one, by design, rather than silently running slow</a:t>
-            </a:r>
-          </a:p>
-          <a:p>
-            <a:pPr>
-              <a:spcAft>
-                <a:spcPts val="1100"/>
-              </a:spcAft>
-            </a:pPr>
-            <a:r>
-              <a:rPr sz="1350" b="0" i="0">
-                <a:solidFill>
-                  <a:srgbClr val="1E242B"/>
-                </a:solidFill>
-                <a:latin typeface="Segoe UI"/>
-              </a:rPr>
-              <a:t>Two settings the installer applies: real-time scheduling for the reflex loop and the performance CPU governor</a:t>
-            </a:r>
-          </a:p>
-          <a:p>
-            <a:pPr>
-              <a:spcAft>
-                <a:spcPts val="1100"/>
-              </a:spcAft>
-            </a:pPr>
-            <a:r>
-              <a:rPr sz="1350" b="0" i="0">
-                <a:solidFill>
-                  <a:srgbClr val="1E242B"/>
-                </a:solidFill>
-                <a:latin typeface="Segoe UI"/>
-              </a:rPr>
-              <a:t>Calibration that matches the geometry the cameras actually record, or 3D is wrong beneath a correct-looking 2D overlay</a:t>
-            </a:r>
-          </a:p>
-          <a:p>
-            <a:pPr>
-              <a:spcAft>
-                <a:spcPts val="1100"/>
-              </a:spcAft>
-            </a:pPr>
-            <a:r>
-              <a:rPr sz="1350" b="0" i="0">
-                <a:solidFill>
-                  <a:srgbClr val="1E242B"/>
-                </a:solidFill>
-                <a:latin typeface="Segoe UI"/>
-              </a:rPr>
-              <a:t>Unfiltered signal recording costs disk — the FSR stream alone adds roughly 166 rows a second</a:t>
-            </a:r>
-          </a:p>
-        </p:txBody>
-      </p:sp>
-      <p:sp>
-        <p:nvSpPr>
-          <p:cNvPr id="5" name="Rectangle 4"/>
+              <a:t>What it measured</a:t>
+            </a:r>
+          </a:p>
+        </p:txBody>
+      </p:sp>
+      <p:sp>
+        <p:nvSpPr>
+          <p:cNvPr id="3" name="Rectangle 2"/>
           <p:cNvSpPr/>
           <p:nvPr/>
         </p:nvSpPr>
@@ -7609,12 +8500,13 @@
           <a:lstStyle/>
           <a:p>
             <a:pPr algn="ctr"/>
-          </a:p>
-        </p:txBody>
-      </p:sp>
-      <p:sp>
-        <p:nvSpPr>
-          <p:cNvPr id="6" name="TextBox 5"/>
+            <a:endParaRPr/>
+          </a:p>
+        </p:txBody>
+      </p:sp>
+      <p:sp>
+        <p:nvSpPr>
+          <p:cNvPr id="4" name="TextBox 3"/>
           <p:cNvSpPr txBox="1"/>
           <p:nvPr/>
         </p:nvSpPr>
@@ -7641,21 +8533,45 @@
                 </a:solidFill>
                 <a:latin typeface="Segoe UI"/>
               </a:rPr>
-              <a:t>The speed work was not the point. This is what it enabled.</a:t>
-            </a:r>
-          </a:p>
-        </p:txBody>
-      </p:sp>
-      <p:sp>
-        <p:nvSpPr>
-          <p:cNvPr id="7" name="TextBox 6"/>
+              <a:t>Same rig, same load, before and after each change.</a:t>
+            </a:r>
+          </a:p>
+        </p:txBody>
+      </p:sp>
+      <p:pic>
+        <p:nvPicPr>
+          <p:cNvPr id="5" name="Picture 4" descr="measurements.png"/>
+          <p:cNvPicPr>
+            <a:picLocks noChangeAspect="1"/>
+          </p:cNvPicPr>
+          <p:nvPr/>
+        </p:nvPicPr>
+        <p:blipFill>
+          <a:blip r:embed="rId3"/>
+          <a:stretch>
+            <a:fillRect/>
+          </a:stretch>
+        </p:blipFill>
+        <p:spPr>
+          <a:xfrm>
+            <a:off x="975777" y="1847088"/>
+            <a:ext cx="10240140" cy="3822192"/>
+          </a:xfrm>
+          <a:prstGeom prst="rect">
+            <a:avLst/>
+          </a:prstGeom>
+        </p:spPr>
+      </p:pic>
+      <p:sp>
+        <p:nvSpPr>
+          <p:cNvPr id="6" name="TextBox 5"/>
           <p:cNvSpPr txBox="1"/>
           <p:nvPr/>
         </p:nvSpPr>
         <p:spPr>
           <a:xfrm>
-            <a:off x="658368" y="2103120"/>
-            <a:ext cx="5186019" cy="347472"/>
+            <a:off x="658368" y="5797296"/>
+            <a:ext cx="10874959" cy="269304"/>
           </a:xfrm>
           <a:prstGeom prst="rect">
             <a:avLst/>
@@ -7663,33 +8579,34 @@
           <a:noFill/>
         </p:spPr>
         <p:txBody>
-          <a:bodyPr wrap="none">
+          <a:bodyPr wrap="square">
             <a:spAutoFit/>
           </a:bodyPr>
           <a:lstStyle/>
           <a:p>
-            <a:r>
-              <a:rPr sz="1500" b="1" i="0">
-                <a:solidFill>
-                  <a:srgbClr val="6B7F9E"/>
-                </a:solidFill>
-                <a:latin typeface="Segoe UI"/>
-              </a:rPr>
-              <a:t>New abilities</a:t>
-            </a:r>
-          </a:p>
-        </p:txBody>
-      </p:sp>
-      <p:sp>
-        <p:nvSpPr>
-          <p:cNvPr id="8" name="TextBox 7"/>
+            <a:pPr algn="ctr"/>
+            <a:r>
+              <a:rPr sz="1150" b="0" i="1" dirty="0">
+                <a:solidFill>
+                  <a:srgbClr val="6B727B"/>
+                </a:solidFill>
+                <a:latin typeface="Segoe UI"/>
+              </a:rPr>
+              <a:t>Measured on an NVIDIA T1000 — a low-end Turing card with no tensor cores, which is why a tensor-core GPU would shift several of these numbers.</a:t>
+            </a:r>
+          </a:p>
+        </p:txBody>
+      </p:sp>
+      <p:sp>
+        <p:nvSpPr>
+          <p:cNvPr id="7" name="TextBox 6"/>
           <p:cNvSpPr txBox="1"/>
           <p:nvPr/>
         </p:nvSpPr>
         <p:spPr>
           <a:xfrm>
-            <a:off x="6347307" y="2103120"/>
-            <a:ext cx="5186019" cy="347472"/>
+            <a:off x="658368" y="6382512"/>
+            <a:ext cx="10874959" cy="292608"/>
           </a:xfrm>
           <a:prstGeom prst="rect">
             <a:avLst/>
@@ -7703,27 +8620,27 @@
           <a:lstStyle/>
           <a:p>
             <a:r>
-              <a:rPr sz="1500" b="1" i="0">
-                <a:solidFill>
-                  <a:srgbClr val="B3593F"/>
-                </a:solidFill>
-                <a:latin typeface="Segoe UI"/>
-              </a:rPr>
-              <a:t>What it asks of you</a:t>
-            </a:r>
-          </a:p>
-        </p:txBody>
-      </p:sp>
-      <p:sp>
-        <p:nvSpPr>
-          <p:cNvPr id="9" name="TextBox 8"/>
+              <a:rPr sz="900" b="0" i="0">
+                <a:solidFill>
+                  <a:srgbClr val="6B727B"/>
+                </a:solidFill>
+                <a:latin typeface="Segoe UI"/>
+              </a:rPr>
+              <a:t>reachAQ</a:t>
+            </a:r>
+          </a:p>
+        </p:txBody>
+      </p:sp>
+      <p:sp>
+        <p:nvSpPr>
+          <p:cNvPr id="8" name="TextBox 7"/>
           <p:cNvSpPr txBox="1"/>
           <p:nvPr/>
         </p:nvSpPr>
         <p:spPr>
           <a:xfrm>
-            <a:off x="658368" y="6382512"/>
-            <a:ext cx="10874959" cy="292608"/>
+            <a:off x="10893247" y="6382512"/>
+            <a:ext cx="640080" cy="292608"/>
           </a:xfrm>
           <a:prstGeom prst="rect">
             <a:avLst/>
@@ -7736,6 +8653,7 @@
           </a:bodyPr>
           <a:lstStyle/>
           <a:p>
+            <a:pPr algn="r"/>
             <a:r>
               <a:rPr sz="900" b="0" i="0">
                 <a:solidFill>
@@ -7743,42 +8661,7 @@
                 </a:solidFill>
                 <a:latin typeface="Segoe UI"/>
               </a:rPr>
-              <a:t>reachAQ</a:t>
-            </a:r>
-          </a:p>
-        </p:txBody>
-      </p:sp>
-      <p:sp>
-        <p:nvSpPr>
-          <p:cNvPr id="10" name="TextBox 9"/>
-          <p:cNvSpPr txBox="1"/>
-          <p:nvPr/>
-        </p:nvSpPr>
-        <p:spPr>
-          <a:xfrm>
-            <a:off x="10893247" y="6382512"/>
-            <a:ext cx="640080" cy="292608"/>
-          </a:xfrm>
-          <a:prstGeom prst="rect">
-            <a:avLst/>
-          </a:prstGeom>
-          <a:noFill/>
-        </p:spPr>
-        <p:txBody>
-          <a:bodyPr wrap="none">
-            <a:spAutoFit/>
-          </a:bodyPr>
-          <a:lstStyle/>
-          <a:p>
-            <a:pPr algn="r"/>
-            <a:r>
-              <a:rPr sz="900" b="0" i="0">
-                <a:solidFill>
-                  <a:srgbClr val="6B727B"/>
-                </a:solidFill>
-                <a:latin typeface="Segoe UI"/>
-              </a:rPr>
-              <a:t>8</a:t>
+              <a:t>6</a:t>
             </a:r>
           </a:p>
         </p:txBody>
@@ -7791,8 +8674,8 @@
 </p:sld>
 </file>
 
-<file path=ppt/slides/slide9.xml><?xml version="1.0" encoding="utf-8"?>
-<p:sld xmlns:a="http://schemas.openxmlformats.org/drawingml/2006/main" xmlns:p="http://schemas.openxmlformats.org/presentationml/2006/main" xmlns:r="http://schemas.openxmlformats.org/officeDocument/2006/relationships">
+<file path=ppt/slides/slide8.xml><?xml version="1.0" encoding="utf-8"?>
+<p:sld xmlns:a="http://schemas.openxmlformats.org/drawingml/2006/main" xmlns:r="http://schemas.openxmlformats.org/officeDocument/2006/relationships" xmlns:p="http://schemas.openxmlformats.org/presentationml/2006/main">
   <p:cSld>
     <p:spTree>
       <p:nvGrpSpPr>
@@ -7800,7 +8683,14 @@
         <p:cNvGrpSpPr/>
         <p:nvPr/>
       </p:nvGrpSpPr>
-      <p:grpSpPr/>
+      <p:grpSpPr>
+        <a:xfrm>
+          <a:off x="0" y="0"/>
+          <a:ext cx="0" cy="0"/>
+          <a:chOff x="0" y="0"/>
+          <a:chExt cx="0" cy="0"/>
+        </a:xfrm>
+      </p:grpSpPr>
       <p:sp>
         <p:nvSpPr>
           <p:cNvPr id="2" name="Title 1"/>
@@ -7829,14 +8719,299 @@
                 </a:solidFill>
                 <a:latin typeface="Segoe UI"/>
               </a:rPr>
-              <a:t>Everything lands on one timebase</a:t>
-            </a:r>
-          </a:p>
-        </p:txBody>
-      </p:sp>
-      <p:sp>
-        <p:nvSpPr>
-          <p:cNvPr id="3" name="Rectangle 2"/>
+              <a:t>Pick the model that fits the experiment</a:t>
+            </a:r>
+          </a:p>
+        </p:txBody>
+      </p:sp>
+      <p:sp>
+        <p:nvSpPr>
+          <p:cNvPr id="3" name="Content Placeholder 2"/>
+          <p:cNvSpPr>
+            <a:spLocks noGrp="1"/>
+          </p:cNvSpPr>
+          <p:nvPr>
+            <p:ph sz="half" idx="1"/>
+          </p:nvPr>
+        </p:nvSpPr>
+        <p:spPr>
+          <a:xfrm>
+            <a:off x="658368" y="2487168"/>
+            <a:ext cx="5186019" cy="3593592"/>
+          </a:xfrm>
+        </p:spPr>
+        <p:txBody>
+          <a:bodyPr wrap="square"/>
+          <a:lstStyle/>
+          <a:p>
+            <a:pPr>
+              <a:spcAft>
+                <a:spcPts val="1100"/>
+              </a:spcAft>
+            </a:pPr>
+            <a:r>
+              <a:rPr sz="1350" b="0" i="0" dirty="0">
+                <a:solidFill>
+                  <a:srgbClr val="1E242B"/>
+                </a:solidFill>
+                <a:latin typeface="Segoe UI"/>
+              </a:rPr>
+              <a:t>YOLO — the current default, and the one the CUDA-graph path accelerates</a:t>
+            </a:r>
+          </a:p>
+          <a:p>
+            <a:pPr>
+              <a:spcAft>
+                <a:spcPts val="1100"/>
+              </a:spcAft>
+            </a:pPr>
+            <a:r>
+              <a:rPr sz="1350" b="0" i="0" dirty="0" err="1">
+                <a:solidFill>
+                  <a:srgbClr val="1E242B"/>
+                </a:solidFill>
+                <a:latin typeface="Segoe UI"/>
+              </a:rPr>
+              <a:t>cspnext</a:t>
+            </a:r>
+            <a:r>
+              <a:rPr sz="1350" b="0" i="0" dirty="0">
+                <a:solidFill>
+                  <a:srgbClr val="1E242B"/>
+                </a:solidFill>
+                <a:latin typeface="Segoe UI"/>
+              </a:rPr>
+              <a:t> and </a:t>
+            </a:r>
+            <a:r>
+              <a:rPr sz="1350" b="0" i="0" dirty="0" err="1">
+                <a:solidFill>
+                  <a:srgbClr val="1E242B"/>
+                </a:solidFill>
+                <a:latin typeface="Segoe UI"/>
+              </a:rPr>
+              <a:t>rtmpose</a:t>
+            </a:r>
+            <a:r>
+              <a:rPr sz="1350" b="0" i="0" dirty="0">
+                <a:solidFill>
+                  <a:srgbClr val="1E242B"/>
+                </a:solidFill>
+                <a:latin typeface="Segoe UI"/>
+              </a:rPr>
+              <a:t> — top-down pose families with measured confidence thresholds </a:t>
+            </a:r>
+            <a:endParaRPr lang="en-US" sz="1350" b="0" i="0" dirty="0">
+              <a:solidFill>
+                <a:srgbClr val="1E242B"/>
+              </a:solidFill>
+              <a:latin typeface="Segoe UI"/>
+            </a:endParaRPr>
+          </a:p>
+          <a:p>
+            <a:pPr>
+              <a:spcAft>
+                <a:spcPts val="1100"/>
+              </a:spcAft>
+            </a:pPr>
+            <a:r>
+              <a:rPr sz="1350" b="0" i="0" dirty="0" err="1">
+                <a:solidFill>
+                  <a:srgbClr val="1E242B"/>
+                </a:solidFill>
+                <a:latin typeface="Segoe UI"/>
+              </a:rPr>
+              <a:t>DeepLabCut</a:t>
+            </a:r>
+            <a:r>
+              <a:rPr sz="1350" b="0" i="0" dirty="0">
+                <a:solidFill>
+                  <a:srgbClr val="1E242B"/>
+                </a:solidFill>
+                <a:latin typeface="Segoe UI"/>
+              </a:rPr>
+              <a:t> ResNet-50 — the accuracy reference, and where this started</a:t>
+            </a:r>
+          </a:p>
+        </p:txBody>
+      </p:sp>
+      <p:sp>
+        <p:nvSpPr>
+          <p:cNvPr id="4" name="Content Placeholder 3"/>
+          <p:cNvSpPr>
+            <a:spLocks noGrp="1"/>
+          </p:cNvSpPr>
+          <p:nvPr>
+            <p:ph sz="half" idx="2"/>
+          </p:nvPr>
+        </p:nvSpPr>
+        <p:spPr>
+          <a:xfrm>
+            <a:off x="6347307" y="2487168"/>
+            <a:ext cx="5186019" cy="3593592"/>
+          </a:xfrm>
+        </p:spPr>
+        <p:txBody>
+          <a:bodyPr wrap="square"/>
+          <a:lstStyle/>
+          <a:p>
+            <a:pPr>
+              <a:spcAft>
+                <a:spcPts val="1100"/>
+              </a:spcAft>
+            </a:pPr>
+            <a:r>
+              <a:rPr sz="1350" b="0" i="0" dirty="0">
+                <a:solidFill>
+                  <a:srgbClr val="1E242B"/>
+                </a:solidFill>
+                <a:latin typeface="Segoe UI"/>
+              </a:rPr>
+              <a:t>Faster backbones hold camera rate: </a:t>
+            </a:r>
+            <a:r>
+              <a:rPr sz="1350" b="0" i="0" dirty="0" err="1">
+                <a:solidFill>
+                  <a:srgbClr val="1E242B"/>
+                </a:solidFill>
+                <a:latin typeface="Segoe UI"/>
+              </a:rPr>
+              <a:t>cspnext_s</a:t>
+            </a:r>
+            <a:r>
+              <a:rPr sz="1350" b="0" i="0" dirty="0">
+                <a:solidFill>
+                  <a:srgbClr val="1E242B"/>
+                </a:solidFill>
+                <a:latin typeface="Segoe UI"/>
+              </a:rPr>
+              <a:t> sustains 150 fps at 7.66 </a:t>
+            </a:r>
+            <a:r>
+              <a:rPr sz="1350" b="0" i="0" dirty="0" err="1">
+                <a:solidFill>
+                  <a:srgbClr val="1E242B"/>
+                </a:solidFill>
+                <a:latin typeface="Segoe UI"/>
+              </a:rPr>
+              <a:t>ms</a:t>
+            </a:r>
+            <a:r>
+              <a:rPr sz="1350" b="0" i="0" dirty="0">
+                <a:solidFill>
+                  <a:srgbClr val="1E242B"/>
+                </a:solidFill>
+                <a:latin typeface="Segoe UI"/>
+              </a:rPr>
+              <a:t> sensor-to-pose; </a:t>
+            </a:r>
+            <a:r>
+              <a:rPr sz="1350" b="0" i="0" dirty="0" err="1">
+                <a:solidFill>
+                  <a:srgbClr val="1E242B"/>
+                </a:solidFill>
+                <a:latin typeface="Segoe UI"/>
+              </a:rPr>
+              <a:t>cspnext_m</a:t>
+            </a:r>
+            <a:r>
+              <a:rPr sz="1350" b="0" i="0" dirty="0">
+                <a:solidFill>
+                  <a:srgbClr val="1E242B"/>
+                </a:solidFill>
+                <a:latin typeface="Segoe UI"/>
+              </a:rPr>
+              <a:t> runs near 103 fps</a:t>
+            </a:r>
+            <a:r>
+              <a:rPr lang="en-US" sz="1350" b="0" i="0" dirty="0">
+                <a:solidFill>
+                  <a:srgbClr val="1E242B"/>
+                </a:solidFill>
+                <a:latin typeface="Segoe UI"/>
+              </a:rPr>
+              <a:t>; custom YOLO11n runs ~5ms</a:t>
+            </a:r>
+            <a:endParaRPr sz="1350" b="0" i="0" dirty="0">
+              <a:solidFill>
+                <a:srgbClr val="1E242B"/>
+              </a:solidFill>
+              <a:latin typeface="Segoe UI"/>
+            </a:endParaRPr>
+          </a:p>
+          <a:p>
+            <a:pPr>
+              <a:spcAft>
+                <a:spcPts val="1100"/>
+              </a:spcAft>
+            </a:pPr>
+            <a:r>
+              <a:rPr sz="1350" b="0" i="0" dirty="0">
+                <a:solidFill>
+                  <a:srgbClr val="1E242B"/>
+                </a:solidFill>
+                <a:latin typeface="Segoe UI"/>
+              </a:rPr>
+              <a:t>ResNet-50 runs below camera rate on this GPU — fine for a behavior stream, not for closing a loop</a:t>
+            </a:r>
+          </a:p>
+          <a:p>
+            <a:pPr>
+              <a:spcAft>
+                <a:spcPts val="1100"/>
+              </a:spcAft>
+            </a:pPr>
+            <a:r>
+              <a:rPr sz="1350" b="0" i="0" dirty="0">
+                <a:solidFill>
+                  <a:srgbClr val="1E242B"/>
+                </a:solidFill>
+                <a:latin typeface="Segoe UI"/>
+              </a:rPr>
+              <a:t>Confidence does not mean the same thing across </a:t>
+            </a:r>
+            <a:r>
+              <a:rPr lang="en-US" sz="1350" b="0" i="0" dirty="0">
+                <a:solidFill>
+                  <a:srgbClr val="1E242B"/>
+                </a:solidFill>
+                <a:latin typeface="Segoe UI"/>
+              </a:rPr>
+              <a:t>model </a:t>
+            </a:r>
+            <a:r>
+              <a:rPr sz="1350" b="0" i="0" dirty="0">
+                <a:solidFill>
+                  <a:srgbClr val="1E242B"/>
+                </a:solidFill>
+                <a:latin typeface="Segoe UI"/>
+              </a:rPr>
+              <a:t>families, so the gat</a:t>
+            </a:r>
+            <a:r>
+              <a:rPr lang="en-US" sz="1350" dirty="0">
+                <a:solidFill>
+                  <a:srgbClr val="1E242B"/>
+                </a:solidFill>
+                <a:latin typeface="Segoe UI"/>
+              </a:rPr>
+              <a:t>ing</a:t>
+            </a:r>
+            <a:r>
+              <a:rPr sz="1350" b="0" i="0" dirty="0">
+                <a:solidFill>
+                  <a:srgbClr val="1E242B"/>
+                </a:solidFill>
+                <a:latin typeface="Segoe UI"/>
+              </a:rPr>
+              <a:t> threshold is measured per backbone rather than set globally</a:t>
+            </a:r>
+          </a:p>
+        </p:txBody>
+      </p:sp>
+      <p:sp>
+        <p:nvSpPr>
+          <p:cNvPr id="5" name="Rectangle 4"/>
           <p:cNvSpPr/>
           <p:nvPr/>
         </p:nvSpPr>
@@ -7875,12 +9050,13 @@
           <a:lstStyle/>
           <a:p>
             <a:pPr algn="ctr"/>
-          </a:p>
-        </p:txBody>
-      </p:sp>
-      <p:sp>
-        <p:nvSpPr>
-          <p:cNvPr id="4" name="TextBox 3"/>
+            <a:endParaRPr/>
+          </a:p>
+        </p:txBody>
+      </p:sp>
+      <p:sp>
+        <p:nvSpPr>
+          <p:cNvPr id="6" name="TextBox 5"/>
           <p:cNvSpPr txBox="1"/>
           <p:nvPr/>
         </p:nvSpPr>
@@ -7907,45 +9083,21 @@
                 </a:solidFill>
                 <a:latin typeface="Segoe UI"/>
               </a:rPr>
-              <a:t>Cameras, tones, pellet events and laser output are not separately timestamped and hoped to agree.</a:t>
-            </a:r>
-          </a:p>
-        </p:txBody>
-      </p:sp>
-      <p:pic>
-        <p:nvPicPr>
-          <p:cNvPr id="5" name="Picture 4" descr="synchronization.png"/>
-          <p:cNvPicPr>
-            <a:picLocks noChangeAspect="1"/>
-          </p:cNvPicPr>
-          <p:nvPr/>
-        </p:nvPicPr>
-        <p:blipFill>
-          <a:blip r:embed="rId2"/>
-          <a:stretch>
-            <a:fillRect/>
-          </a:stretch>
-        </p:blipFill>
-        <p:spPr>
-          <a:xfrm>
-            <a:off x="658368" y="1847088"/>
-            <a:ext cx="10874959" cy="3663144"/>
-          </a:xfrm>
-          <a:prstGeom prst="rect">
-            <a:avLst/>
-          </a:prstGeom>
-        </p:spPr>
-      </p:pic>
-      <p:sp>
-        <p:nvSpPr>
-          <p:cNvPr id="6" name="TextBox 5"/>
+              <a:t>The backend takes several model families. Speed and accuracy trade against each other, and the choice is yours per use case.</a:t>
+            </a:r>
+          </a:p>
+        </p:txBody>
+      </p:sp>
+      <p:sp>
+        <p:nvSpPr>
+          <p:cNvPr id="7" name="TextBox 6"/>
           <p:cNvSpPr txBox="1"/>
           <p:nvPr/>
         </p:nvSpPr>
         <p:spPr>
           <a:xfrm>
-            <a:off x="658368" y="5638248"/>
-            <a:ext cx="10874959" cy="502920"/>
+            <a:off x="658368" y="2103120"/>
+            <a:ext cx="5186019" cy="347472"/>
           </a:xfrm>
           <a:prstGeom prst="rect">
             <a:avLst/>
@@ -7953,34 +9105,33 @@
           <a:noFill/>
         </p:spPr>
         <p:txBody>
-          <a:bodyPr wrap="square">
+          <a:bodyPr wrap="none">
             <a:spAutoFit/>
           </a:bodyPr>
           <a:lstStyle/>
           <a:p>
-            <a:pPr algn="ctr"/>
-            <a:r>
-              <a:rPr sz="1150" b="0" i="1">
-                <a:solidFill>
-                  <a:srgbClr val="6B727B"/>
-                </a:solidFill>
-                <a:latin typeface="Segoe UI"/>
-              </a:rPr>
-              <a:t>Camera frame edges are matched to NI-DAQ samples with a signed offset, a resolution, and a confidence — all written into alignment.json.</a:t>
-            </a:r>
-          </a:p>
-        </p:txBody>
-      </p:sp>
-      <p:sp>
-        <p:nvSpPr>
-          <p:cNvPr id="7" name="TextBox 6"/>
+            <a:r>
+              <a:rPr sz="1500" b="1" i="0">
+                <a:solidFill>
+                  <a:srgbClr val="6B7F9E"/>
+                </a:solidFill>
+                <a:latin typeface="Segoe UI"/>
+              </a:rPr>
+              <a:t>What you get to choose</a:t>
+            </a:r>
+          </a:p>
+        </p:txBody>
+      </p:sp>
+      <p:sp>
+        <p:nvSpPr>
+          <p:cNvPr id="8" name="TextBox 7"/>
           <p:cNvSpPr txBox="1"/>
           <p:nvPr/>
         </p:nvSpPr>
         <p:spPr>
           <a:xfrm>
-            <a:off x="658368" y="6382512"/>
-            <a:ext cx="10874959" cy="292608"/>
+            <a:off x="6347307" y="2103120"/>
+            <a:ext cx="5186019" cy="347472"/>
           </a:xfrm>
           <a:prstGeom prst="rect">
             <a:avLst/>
@@ -7994,27 +9145,27 @@
           <a:lstStyle/>
           <a:p>
             <a:r>
-              <a:rPr sz="900" b="0" i="0">
-                <a:solidFill>
-                  <a:srgbClr val="6B727B"/>
-                </a:solidFill>
-                <a:latin typeface="Segoe UI"/>
-              </a:rPr>
-              <a:t>reachAQ</a:t>
-            </a:r>
-          </a:p>
-        </p:txBody>
-      </p:sp>
-      <p:sp>
-        <p:nvSpPr>
-          <p:cNvPr id="8" name="TextBox 7"/>
+              <a:rPr sz="1500" b="1" i="0">
+                <a:solidFill>
+                  <a:srgbClr val="B3593F"/>
+                </a:solidFill>
+                <a:latin typeface="Segoe UI"/>
+              </a:rPr>
+              <a:t>What the choice costs</a:t>
+            </a:r>
+          </a:p>
+        </p:txBody>
+      </p:sp>
+      <p:sp>
+        <p:nvSpPr>
+          <p:cNvPr id="9" name="TextBox 8"/>
           <p:cNvSpPr txBox="1"/>
           <p:nvPr/>
         </p:nvSpPr>
         <p:spPr>
           <a:xfrm>
-            <a:off x="10893247" y="6382512"/>
-            <a:ext cx="640080" cy="292608"/>
+            <a:off x="658368" y="6382512"/>
+            <a:ext cx="10874959" cy="292608"/>
           </a:xfrm>
           <a:prstGeom prst="rect">
             <a:avLst/>
@@ -8027,6 +9178,40 @@
           </a:bodyPr>
           <a:lstStyle/>
           <a:p>
+            <a:r>
+              <a:rPr sz="900" b="0" i="0">
+                <a:solidFill>
+                  <a:srgbClr val="6B727B"/>
+                </a:solidFill>
+                <a:latin typeface="Segoe UI"/>
+              </a:rPr>
+              <a:t>reachAQ</a:t>
+            </a:r>
+          </a:p>
+        </p:txBody>
+      </p:sp>
+      <p:sp>
+        <p:nvSpPr>
+          <p:cNvPr id="10" name="TextBox 9"/>
+          <p:cNvSpPr txBox="1"/>
+          <p:nvPr/>
+        </p:nvSpPr>
+        <p:spPr>
+          <a:xfrm>
+            <a:off x="10893247" y="6382512"/>
+            <a:ext cx="640080" cy="292608"/>
+          </a:xfrm>
+          <a:prstGeom prst="rect">
+            <a:avLst/>
+          </a:prstGeom>
+          <a:noFill/>
+        </p:spPr>
+        <p:txBody>
+          <a:bodyPr wrap="none">
+            <a:spAutoFit/>
+          </a:bodyPr>
+          <a:lstStyle/>
+          <a:p>
             <a:pPr algn="r"/>
             <a:r>
               <a:rPr sz="900" b="0" i="0">
@@ -8035,7 +9220,551 @@
                 </a:solidFill>
                 <a:latin typeface="Segoe UI"/>
               </a:rPr>
-              <a:t>9</a:t>
+              <a:t>7</a:t>
+            </a:r>
+          </a:p>
+        </p:txBody>
+      </p:sp>
+    </p:spTree>
+  </p:cSld>
+  <p:clrMapOvr>
+    <a:masterClrMapping/>
+  </p:clrMapOvr>
+</p:sld>
+</file>
+
+<file path=ppt/slides/slide9.xml><?xml version="1.0" encoding="utf-8"?>
+<p:sld xmlns:a="http://schemas.openxmlformats.org/drawingml/2006/main" xmlns:r="http://schemas.openxmlformats.org/officeDocument/2006/relationships" xmlns:p="http://schemas.openxmlformats.org/presentationml/2006/main">
+  <p:cSld>
+    <p:spTree>
+      <p:nvGrpSpPr>
+        <p:cNvPr id="1" name=""/>
+        <p:cNvGrpSpPr/>
+        <p:nvPr/>
+      </p:nvGrpSpPr>
+      <p:grpSpPr>
+        <a:xfrm>
+          <a:off x="0" y="0"/>
+          <a:ext cx="0" cy="0"/>
+          <a:chOff x="0" y="0"/>
+          <a:chExt cx="0" cy="0"/>
+        </a:xfrm>
+      </p:grpSpPr>
+      <p:sp>
+        <p:nvSpPr>
+          <p:cNvPr id="2" name="Title 1"/>
+          <p:cNvSpPr>
+            <a:spLocks noGrp="1"/>
+          </p:cNvSpPr>
+          <p:nvPr>
+            <p:ph type="title"/>
+          </p:nvPr>
+        </p:nvSpPr>
+        <p:spPr>
+          <a:xfrm>
+            <a:off x="658368" y="457200"/>
+            <a:ext cx="10874959" cy="868680"/>
+          </a:xfrm>
+        </p:spPr>
+        <p:txBody>
+          <a:bodyPr wrap="square"/>
+          <a:lstStyle/>
+          <a:p>
+            <a:pPr algn="l"/>
+            <a:r>
+              <a:rPr sz="3000" b="1" i="0">
+                <a:solidFill>
+                  <a:srgbClr val="1E242B"/>
+                </a:solidFill>
+                <a:latin typeface="Segoe UI"/>
+              </a:rPr>
+              <a:t>What this buys, and what it costs</a:t>
+            </a:r>
+          </a:p>
+        </p:txBody>
+      </p:sp>
+      <p:sp>
+        <p:nvSpPr>
+          <p:cNvPr id="3" name="Content Placeholder 2"/>
+          <p:cNvSpPr>
+            <a:spLocks noGrp="1"/>
+          </p:cNvSpPr>
+          <p:nvPr>
+            <p:ph sz="half" idx="1"/>
+          </p:nvPr>
+        </p:nvSpPr>
+        <p:spPr>
+          <a:xfrm>
+            <a:off x="658368" y="2487168"/>
+            <a:ext cx="5186019" cy="3593592"/>
+          </a:xfrm>
+        </p:spPr>
+        <p:txBody>
+          <a:bodyPr wrap="square"/>
+          <a:lstStyle/>
+          <a:p>
+            <a:pPr>
+              <a:spcAft>
+                <a:spcPts val="1100"/>
+              </a:spcAft>
+            </a:pPr>
+            <a:r>
+              <a:rPr sz="1350" b="0" i="0" dirty="0">
+                <a:solidFill>
+                  <a:srgbClr val="1E242B"/>
+                </a:solidFill>
+                <a:latin typeface="Segoe UI"/>
+              </a:rPr>
+              <a:t>A second closed loop driven by machine vision, alongside the fast ROI reflex — decisions can now depend on where the paw actually is</a:t>
+            </a:r>
+            <a:r>
+              <a:rPr lang="en-US" sz="1350" b="0" i="0" dirty="0">
+                <a:solidFill>
+                  <a:srgbClr val="1E242B"/>
+                </a:solidFill>
+                <a:latin typeface="Segoe UI"/>
+              </a:rPr>
+              <a:t>, stage of reach, or other behaviors.</a:t>
+            </a:r>
+            <a:endParaRPr sz="1350" b="0" i="0" dirty="0">
+              <a:solidFill>
+                <a:srgbClr val="1E242B"/>
+              </a:solidFill>
+              <a:latin typeface="Segoe UI"/>
+            </a:endParaRPr>
+          </a:p>
+          <a:p>
+            <a:pPr>
+              <a:spcAft>
+                <a:spcPts val="1100"/>
+              </a:spcAft>
+            </a:pPr>
+            <a:r>
+              <a:rPr sz="1350" b="0" i="0" dirty="0">
+                <a:solidFill>
+                  <a:srgbClr val="1E242B"/>
+                </a:solidFill>
+                <a:latin typeface="Segoe UI"/>
+              </a:rPr>
+              <a:t>A live 2D pose overlay per camera view while the session runs</a:t>
+            </a:r>
+          </a:p>
+          <a:p>
+            <a:pPr>
+              <a:spcAft>
+                <a:spcPts val="1100"/>
+              </a:spcAft>
+            </a:pPr>
+            <a:r>
+              <a:rPr sz="1350" b="0" i="0" dirty="0">
+                <a:solidFill>
+                  <a:srgbClr val="1E242B"/>
+                </a:solidFill>
+                <a:latin typeface="Segoe UI"/>
+              </a:rPr>
+              <a:t>Signals visuali</a:t>
+            </a:r>
+            <a:r>
+              <a:rPr lang="en-US" sz="1350" b="0" i="0" dirty="0">
+                <a:solidFill>
+                  <a:srgbClr val="1E242B"/>
+                </a:solidFill>
+                <a:latin typeface="Segoe UI"/>
+              </a:rPr>
+              <a:t>z</a:t>
+            </a:r>
+            <a:r>
+              <a:rPr sz="1350" b="0" i="0" dirty="0">
+                <a:solidFill>
+                  <a:srgbClr val="1E242B"/>
+                </a:solidFill>
+                <a:latin typeface="Segoe UI"/>
+              </a:rPr>
+              <a:t>ed during acquisition instead of plotted afterwards</a:t>
+            </a:r>
+          </a:p>
+          <a:p>
+            <a:pPr>
+              <a:spcAft>
+                <a:spcPts val="1100"/>
+              </a:spcAft>
+            </a:pPr>
+            <a:r>
+              <a:rPr sz="1350" b="0" i="0" dirty="0">
+                <a:solidFill>
+                  <a:srgbClr val="1E242B"/>
+                </a:solidFill>
+                <a:latin typeface="Segoe UI"/>
+              </a:rPr>
+              <a:t>Experiments composed from reusable trial sets, with reproducible draws</a:t>
+            </a:r>
+            <a:endParaRPr lang="en-US" sz="1350" dirty="0">
+              <a:solidFill>
+                <a:srgbClr val="1E242B"/>
+              </a:solidFill>
+              <a:latin typeface="Segoe UI"/>
+            </a:endParaRPr>
+          </a:p>
+          <a:p>
+            <a:pPr>
+              <a:spcAft>
+                <a:spcPts val="1100"/>
+              </a:spcAft>
+            </a:pPr>
+            <a:r>
+              <a:rPr lang="en-US" sz="1350" dirty="0">
+                <a:solidFill>
+                  <a:srgbClr val="1E242B"/>
+                </a:solidFill>
+                <a:latin typeface="Segoe UI"/>
+              </a:rPr>
+              <a:t>Settings and options are highly configurable</a:t>
+            </a:r>
+            <a:endParaRPr sz="1350" b="0" i="0" dirty="0">
+              <a:solidFill>
+                <a:srgbClr val="1E242B"/>
+              </a:solidFill>
+              <a:latin typeface="Segoe UI"/>
+            </a:endParaRPr>
+          </a:p>
+        </p:txBody>
+      </p:sp>
+      <p:sp>
+        <p:nvSpPr>
+          <p:cNvPr id="4" name="Content Placeholder 3"/>
+          <p:cNvSpPr>
+            <a:spLocks noGrp="1"/>
+          </p:cNvSpPr>
+          <p:nvPr>
+            <p:ph sz="half" idx="2"/>
+          </p:nvPr>
+        </p:nvSpPr>
+        <p:spPr>
+          <a:xfrm>
+            <a:off x="6347307" y="2487168"/>
+            <a:ext cx="5186019" cy="3593592"/>
+          </a:xfrm>
+        </p:spPr>
+        <p:txBody>
+          <a:bodyPr wrap="square"/>
+          <a:lstStyle/>
+          <a:p>
+            <a:pPr>
+              <a:spcAft>
+                <a:spcPts val="1100"/>
+              </a:spcAft>
+            </a:pPr>
+            <a:r>
+              <a:rPr sz="1350" b="0" i="0" dirty="0">
+                <a:solidFill>
+                  <a:srgbClr val="1E242B"/>
+                </a:solidFill>
+                <a:latin typeface="Segoe UI"/>
+              </a:rPr>
+              <a:t>A working CUDA GPU. Live inference refuses to start without one, by design, rather than silently running slow</a:t>
+            </a:r>
+          </a:p>
+          <a:p>
+            <a:pPr>
+              <a:spcAft>
+                <a:spcPts val="1100"/>
+              </a:spcAft>
+            </a:pPr>
+            <a:r>
+              <a:rPr sz="1350" b="0" i="0" dirty="0">
+                <a:solidFill>
+                  <a:srgbClr val="1E242B"/>
+                </a:solidFill>
+                <a:latin typeface="Segoe UI"/>
+              </a:rPr>
+              <a:t>Two settings the installer applies: real-time scheduling for the reflex loop and the performance CPU governor</a:t>
+            </a:r>
+          </a:p>
+          <a:p>
+            <a:pPr>
+              <a:spcAft>
+                <a:spcPts val="1100"/>
+              </a:spcAft>
+            </a:pPr>
+            <a:r>
+              <a:rPr sz="1350" b="0" i="0" dirty="0">
+                <a:solidFill>
+                  <a:srgbClr val="1E242B"/>
+                </a:solidFill>
+                <a:latin typeface="Segoe UI"/>
+              </a:rPr>
+              <a:t>Calibration that matches the geometry the cameras actually record, or 3D is wrong beneath a correct-looking 2D overlay</a:t>
+            </a:r>
+          </a:p>
+          <a:p>
+            <a:pPr>
+              <a:spcAft>
+                <a:spcPts val="1100"/>
+              </a:spcAft>
+            </a:pPr>
+            <a:r>
+              <a:rPr sz="1350" b="0" i="0" dirty="0">
+                <a:solidFill>
+                  <a:srgbClr val="1E242B"/>
+                </a:solidFill>
+                <a:latin typeface="Segoe UI"/>
+              </a:rPr>
+              <a:t>Unfiltered signal recording costs disk — the FSR stream alone adds roughly 166 rows a second</a:t>
+            </a:r>
+            <a:br>
+              <a:rPr lang="en-US" sz="1350" b="0" i="0" dirty="0">
+                <a:solidFill>
+                  <a:srgbClr val="1E242B"/>
+                </a:solidFill>
+                <a:latin typeface="Segoe UI"/>
+              </a:rPr>
+            </a:br>
+            <a:br>
+              <a:rPr lang="en-US" sz="1350" b="0" i="0" dirty="0">
+                <a:solidFill>
+                  <a:srgbClr val="1E242B"/>
+                </a:solidFill>
+                <a:latin typeface="Segoe UI"/>
+              </a:rPr>
+            </a:br>
+            <a:br>
+              <a:rPr lang="en-US" sz="1350" b="0" i="0" dirty="0">
+                <a:solidFill>
+                  <a:srgbClr val="1E242B"/>
+                </a:solidFill>
+                <a:latin typeface="Segoe UI"/>
+              </a:rPr>
+            </a:br>
+            <a:r>
+              <a:rPr lang="en-US" sz="1350" b="1" i="0" dirty="0">
+                <a:solidFill>
+                  <a:srgbClr val="1E242B"/>
+                </a:solidFill>
+                <a:latin typeface="Segoe UI"/>
+              </a:rPr>
+              <a:t>** more moving parts means easier to “fail” silently</a:t>
+            </a:r>
+            <a:endParaRPr sz="1350" b="1" i="0" dirty="0">
+              <a:solidFill>
+                <a:srgbClr val="1E242B"/>
+              </a:solidFill>
+              <a:latin typeface="Segoe UI"/>
+            </a:endParaRPr>
+          </a:p>
+        </p:txBody>
+      </p:sp>
+      <p:sp>
+        <p:nvSpPr>
+          <p:cNvPr id="5" name="Rectangle 4"/>
+          <p:cNvSpPr/>
+          <p:nvPr/>
+        </p:nvSpPr>
+        <p:spPr>
+          <a:xfrm>
+            <a:off x="658368" y="1170432"/>
+            <a:ext cx="1005840" cy="38100"/>
+          </a:xfrm>
+          <a:prstGeom prst="rect">
+            <a:avLst/>
+          </a:prstGeom>
+          <a:solidFill>
+            <a:srgbClr val="B3593F"/>
+          </a:solidFill>
+          <a:ln>
+            <a:noFill/>
+          </a:ln>
+          <a:effectLst/>
+        </p:spPr>
+        <p:style>
+          <a:lnRef idx="1">
+            <a:schemeClr val="accent1"/>
+          </a:lnRef>
+          <a:fillRef idx="3">
+            <a:schemeClr val="accent1"/>
+          </a:fillRef>
+          <a:effectRef idx="2">
+            <a:schemeClr val="accent1"/>
+          </a:effectRef>
+          <a:fontRef idx="minor">
+            <a:schemeClr val="lt1"/>
+          </a:fontRef>
+        </p:style>
+        <p:txBody>
+          <a:bodyPr rtlCol="0" anchor="ctr"/>
+          <a:lstStyle/>
+          <a:p>
+            <a:pPr algn="ctr"/>
+            <a:endParaRPr/>
+          </a:p>
+        </p:txBody>
+      </p:sp>
+      <p:sp>
+        <p:nvSpPr>
+          <p:cNvPr id="6" name="TextBox 5"/>
+          <p:cNvSpPr txBox="1"/>
+          <p:nvPr/>
+        </p:nvSpPr>
+        <p:spPr>
+          <a:xfrm>
+            <a:off x="658368" y="1371600"/>
+            <a:ext cx="10874959" cy="457200"/>
+          </a:xfrm>
+          <a:prstGeom prst="rect">
+            <a:avLst/>
+          </a:prstGeom>
+          <a:noFill/>
+        </p:spPr>
+        <p:txBody>
+          <a:bodyPr wrap="square">
+            <a:spAutoFit/>
+          </a:bodyPr>
+          <a:lstStyle/>
+          <a:p>
+            <a:r>
+              <a:rPr sz="1400" b="0" i="1">
+                <a:solidFill>
+                  <a:srgbClr val="6B727B"/>
+                </a:solidFill>
+                <a:latin typeface="Segoe UI"/>
+              </a:rPr>
+              <a:t>The speed work was not the point. This is what it enabled.</a:t>
+            </a:r>
+          </a:p>
+        </p:txBody>
+      </p:sp>
+      <p:sp>
+        <p:nvSpPr>
+          <p:cNvPr id="7" name="TextBox 6"/>
+          <p:cNvSpPr txBox="1"/>
+          <p:nvPr/>
+        </p:nvSpPr>
+        <p:spPr>
+          <a:xfrm>
+            <a:off x="658368" y="2103120"/>
+            <a:ext cx="5186019" cy="347472"/>
+          </a:xfrm>
+          <a:prstGeom prst="rect">
+            <a:avLst/>
+          </a:prstGeom>
+          <a:noFill/>
+        </p:spPr>
+        <p:txBody>
+          <a:bodyPr wrap="none">
+            <a:spAutoFit/>
+          </a:bodyPr>
+          <a:lstStyle/>
+          <a:p>
+            <a:r>
+              <a:rPr sz="1500" b="1" i="0">
+                <a:solidFill>
+                  <a:srgbClr val="6B7F9E"/>
+                </a:solidFill>
+                <a:latin typeface="Segoe UI"/>
+              </a:rPr>
+              <a:t>New abilities</a:t>
+            </a:r>
+          </a:p>
+        </p:txBody>
+      </p:sp>
+      <p:sp>
+        <p:nvSpPr>
+          <p:cNvPr id="8" name="TextBox 7"/>
+          <p:cNvSpPr txBox="1"/>
+          <p:nvPr/>
+        </p:nvSpPr>
+        <p:spPr>
+          <a:xfrm>
+            <a:off x="6347307" y="2103120"/>
+            <a:ext cx="5186019" cy="347472"/>
+          </a:xfrm>
+          <a:prstGeom prst="rect">
+            <a:avLst/>
+          </a:prstGeom>
+          <a:noFill/>
+        </p:spPr>
+        <p:txBody>
+          <a:bodyPr wrap="none">
+            <a:spAutoFit/>
+          </a:bodyPr>
+          <a:lstStyle/>
+          <a:p>
+            <a:r>
+              <a:rPr sz="1500" b="1" i="0">
+                <a:solidFill>
+                  <a:srgbClr val="B3593F"/>
+                </a:solidFill>
+                <a:latin typeface="Segoe UI"/>
+              </a:rPr>
+              <a:t>What it asks of you</a:t>
+            </a:r>
+          </a:p>
+        </p:txBody>
+      </p:sp>
+      <p:sp>
+        <p:nvSpPr>
+          <p:cNvPr id="9" name="TextBox 8"/>
+          <p:cNvSpPr txBox="1"/>
+          <p:nvPr/>
+        </p:nvSpPr>
+        <p:spPr>
+          <a:xfrm>
+            <a:off x="658368" y="6382512"/>
+            <a:ext cx="10874959" cy="292608"/>
+          </a:xfrm>
+          <a:prstGeom prst="rect">
+            <a:avLst/>
+          </a:prstGeom>
+          <a:noFill/>
+        </p:spPr>
+        <p:txBody>
+          <a:bodyPr wrap="none">
+            <a:spAutoFit/>
+          </a:bodyPr>
+          <a:lstStyle/>
+          <a:p>
+            <a:r>
+              <a:rPr sz="900" b="0" i="0">
+                <a:solidFill>
+                  <a:srgbClr val="6B727B"/>
+                </a:solidFill>
+                <a:latin typeface="Segoe UI"/>
+              </a:rPr>
+              <a:t>reachAQ</a:t>
+            </a:r>
+          </a:p>
+        </p:txBody>
+      </p:sp>
+      <p:sp>
+        <p:nvSpPr>
+          <p:cNvPr id="10" name="TextBox 9"/>
+          <p:cNvSpPr txBox="1"/>
+          <p:nvPr/>
+        </p:nvSpPr>
+        <p:spPr>
+          <a:xfrm>
+            <a:off x="10893247" y="6382512"/>
+            <a:ext cx="640080" cy="292608"/>
+          </a:xfrm>
+          <a:prstGeom prst="rect">
+            <a:avLst/>
+          </a:prstGeom>
+          <a:noFill/>
+        </p:spPr>
+        <p:txBody>
+          <a:bodyPr wrap="none">
+            <a:spAutoFit/>
+          </a:bodyPr>
+          <a:lstStyle/>
+          <a:p>
+            <a:pPr algn="r"/>
+            <a:r>
+              <a:rPr sz="900" b="0" i="0">
+                <a:solidFill>
+                  <a:srgbClr val="6B727B"/>
+                </a:solidFill>
+                <a:latin typeface="Segoe UI"/>
+              </a:rPr>
+              <a:t>8</a:t>
             </a:r>
           </a:p>
         </p:txBody>
@@ -8379,44 +10108,44 @@
         <a:sysClr val="window" lastClr="FFFFFF"/>
       </a:lt1>
       <a:dk2>
-        <a:srgbClr val="1F497D"/>
+        <a:srgbClr val="0E2841"/>
       </a:dk2>
       <a:lt2>
-        <a:srgbClr val="EEECE1"/>
+        <a:srgbClr val="E8E8E8"/>
       </a:lt2>
       <a:accent1>
-        <a:srgbClr val="4F81BD"/>
+        <a:srgbClr val="156082"/>
       </a:accent1>
       <a:accent2>
-        <a:srgbClr val="C0504D"/>
+        <a:srgbClr val="E97132"/>
       </a:accent2>
       <a:accent3>
-        <a:srgbClr val="9BBB59"/>
+        <a:srgbClr val="196B24"/>
       </a:accent3>
       <a:accent4>
-        <a:srgbClr val="8064A2"/>
+        <a:srgbClr val="0F9ED5"/>
       </a:accent4>
       <a:accent5>
-        <a:srgbClr val="4BACC6"/>
+        <a:srgbClr val="A02B93"/>
       </a:accent5>
       <a:accent6>
-        <a:srgbClr val="F79646"/>
+        <a:srgbClr val="4EA72E"/>
       </a:accent6>
       <a:hlink>
-        <a:srgbClr val="0000FF"/>
+        <a:srgbClr val="467886"/>
       </a:hlink>
       <a:folHlink>
-        <a:srgbClr val="800080"/>
+        <a:srgbClr val="96607D"/>
       </a:folHlink>
     </a:clrScheme>
     <a:fontScheme name="Office">
       <a:majorFont>
-        <a:latin typeface="Calibri"/>
+        <a:latin typeface="Aptos Display" panose="02110004020202020204"/>
         <a:ea typeface=""/>
         <a:cs typeface=""/>
-        <a:font script="Jpan" typeface="ＭＳ Ｐゴシック"/>
+        <a:font script="Jpan" typeface="游ゴシック Light"/>
         <a:font script="Hang" typeface="맑은 고딕"/>
-        <a:font script="Hans" typeface="宋体"/>
+        <a:font script="Hans" typeface="等线 Light"/>
         <a:font script="Hant" typeface="新細明體"/>
         <a:font script="Arab" typeface="Times New Roman"/>
         <a:font script="Hebr" typeface="Times New Roman"/>
@@ -8444,14 +10173,31 @@
         <a:font script="Viet" typeface="Times New Roman"/>
         <a:font script="Uigh" typeface="Microsoft Uighur"/>
         <a:font script="Geor" typeface="Sylfaen"/>
+        <a:font script="Armn" typeface="Arial"/>
+        <a:font script="Bugi" typeface="Leelawadee UI"/>
+        <a:font script="Bopo" typeface="Microsoft JhengHei"/>
+        <a:font script="Java" typeface="Javanese Text"/>
+        <a:font script="Lisu" typeface="Segoe UI"/>
+        <a:font script="Mymr" typeface="Myanmar Text"/>
+        <a:font script="Nkoo" typeface="Ebrima"/>
+        <a:font script="Olck" typeface="Nirmala UI"/>
+        <a:font script="Osma" typeface="Ebrima"/>
+        <a:font script="Phag" typeface="Phagspa"/>
+        <a:font script="Syrn" typeface="Estrangelo Edessa"/>
+        <a:font script="Syrj" typeface="Estrangelo Edessa"/>
+        <a:font script="Syre" typeface="Estrangelo Edessa"/>
+        <a:font script="Sora" typeface="Nirmala UI"/>
+        <a:font script="Tale" typeface="Microsoft Tai Le"/>
+        <a:font script="Talu" typeface="Microsoft New Tai Lue"/>
+        <a:font script="Tfng" typeface="Ebrima"/>
       </a:majorFont>
       <a:minorFont>
-        <a:latin typeface="Calibri"/>
+        <a:latin typeface="Aptos" panose="02110004020202020204"/>
         <a:ea typeface=""/>
         <a:cs typeface=""/>
-        <a:font script="Jpan" typeface="ＭＳ Ｐゴシック"/>
+        <a:font script="Jpan" typeface="游ゴシック"/>
         <a:font script="Hang" typeface="맑은 고딕"/>
-        <a:font script="Hans" typeface="宋体"/>
+        <a:font script="Hans" typeface="等线"/>
         <a:font script="Hant" typeface="新細明體"/>
         <a:font script="Arab" typeface="Arial"/>
         <a:font script="Hebr" typeface="Arial"/>
@@ -8479,6 +10225,23 @@
         <a:font script="Viet" typeface="Arial"/>
         <a:font script="Uigh" typeface="Microsoft Uighur"/>
         <a:font script="Geor" typeface="Sylfaen"/>
+        <a:font script="Armn" typeface="Arial"/>
+        <a:font script="Bugi" typeface="Leelawadee UI"/>
+        <a:font script="Bopo" typeface="Microsoft JhengHei"/>
+        <a:font script="Java" typeface="Javanese Text"/>
+        <a:font script="Lisu" typeface="Segoe UI"/>
+        <a:font script="Mymr" typeface="Myanmar Text"/>
+        <a:font script="Nkoo" typeface="Ebrima"/>
+        <a:font script="Olck" typeface="Nirmala UI"/>
+        <a:font script="Osma" typeface="Ebrima"/>
+        <a:font script="Phag" typeface="Phagspa"/>
+        <a:font script="Syrn" typeface="Estrangelo Edessa"/>
+        <a:font script="Syrj" typeface="Estrangelo Edessa"/>
+        <a:font script="Syre" typeface="Estrangelo Edessa"/>
+        <a:font script="Sora" typeface="Nirmala UI"/>
+        <a:font script="Tale" typeface="Microsoft Tai Le"/>
+        <a:font script="Talu" typeface="Microsoft New Tai Lue"/>
+        <a:font script="Tfng" typeface="Ebrima"/>
       </a:minorFont>
     </a:fontScheme>
     <a:fmtScheme name="Office">
@@ -8490,180 +10253,136 @@
           <a:gsLst>
             <a:gs pos="0">
               <a:schemeClr val="phClr">
-                <a:tint val="50000"/>
-                <a:satMod val="300000"/>
+                <a:lumMod val="110000"/>
+                <a:satMod val="105000"/>
+                <a:tint val="67000"/>
               </a:schemeClr>
             </a:gs>
-            <a:gs pos="35000">
+            <a:gs pos="50000">
               <a:schemeClr val="phClr">
-                <a:tint val="37000"/>
-                <a:satMod val="300000"/>
+                <a:lumMod val="105000"/>
+                <a:satMod val="103000"/>
+                <a:tint val="73000"/>
               </a:schemeClr>
             </a:gs>
             <a:gs pos="100000">
               <a:schemeClr val="phClr">
-                <a:tint val="15000"/>
-                <a:satMod val="350000"/>
+                <a:lumMod val="105000"/>
+                <a:satMod val="109000"/>
+                <a:tint val="81000"/>
               </a:schemeClr>
             </a:gs>
           </a:gsLst>
-          <a:lin ang="16200000" scaled="1"/>
+          <a:lin ang="5400000" scaled="0"/>
         </a:gradFill>
         <a:gradFill rotWithShape="1">
           <a:gsLst>
             <a:gs pos="0">
               <a:schemeClr val="phClr">
-                <a:tint val="100000"/>
+                <a:satMod val="103000"/>
+                <a:lumMod val="102000"/>
+                <a:tint val="94000"/>
+              </a:schemeClr>
+            </a:gs>
+            <a:gs pos="50000">
+              <a:schemeClr val="phClr">
+                <a:satMod val="110000"/>
+                <a:lumMod val="100000"/>
                 <a:shade val="100000"/>
-                <a:satMod val="130000"/>
               </a:schemeClr>
             </a:gs>
             <a:gs pos="100000">
               <a:schemeClr val="phClr">
-                <a:tint val="50000"/>
-                <a:shade val="100000"/>
-                <a:satMod val="350000"/>
+                <a:lumMod val="99000"/>
+                <a:satMod val="120000"/>
+                <a:shade val="78000"/>
               </a:schemeClr>
             </a:gs>
           </a:gsLst>
-          <a:lin ang="16200000" scaled="0"/>
+          <a:lin ang="5400000" scaled="0"/>
         </a:gradFill>
       </a:fillStyleLst>
       <a:lnStyleLst>
-        <a:ln w="9525" cap="flat" cmpd="sng" algn="ctr">
+        <a:ln w="12700" cap="flat" cmpd="sng" algn="ctr">
           <a:solidFill>
-            <a:schemeClr val="phClr">
-              <a:shade val="95000"/>
-              <a:satMod val="105000"/>
-            </a:schemeClr>
+            <a:schemeClr val="phClr"/>
           </a:solidFill>
           <a:prstDash val="solid"/>
+          <a:miter lim="800000"/>
+        </a:ln>
+        <a:ln w="19050" cap="flat" cmpd="sng" algn="ctr">
+          <a:solidFill>
+            <a:schemeClr val="phClr"/>
+          </a:solidFill>
+          <a:prstDash val="solid"/>
+          <a:miter lim="800000"/>
         </a:ln>
         <a:ln w="25400" cap="flat" cmpd="sng" algn="ctr">
           <a:solidFill>
             <a:schemeClr val="phClr"/>
           </a:solidFill>
           <a:prstDash val="solid"/>
-        </a:ln>
-        <a:ln w="38100" cap="flat" cmpd="sng" algn="ctr">
-          <a:solidFill>
-            <a:schemeClr val="phClr"/>
-          </a:solidFill>
-          <a:prstDash val="solid"/>
+          <a:miter lim="800000"/>
         </a:ln>
       </a:lnStyleLst>
       <a:effectStyleLst>
         <a:effectStyle>
+          <a:effectLst/>
+        </a:effectStyle>
+        <a:effectStyle>
+          <a:effectLst/>
+        </a:effectStyle>
+        <a:effectStyle>
           <a:effectLst>
-            <a:outerShdw blurRad="40000" dist="20000" dir="5400000" rotWithShape="0">
+            <a:outerShdw blurRad="57150" dist="19050" dir="5400000" algn="ctr" rotWithShape="0">
               <a:srgbClr val="000000">
-                <a:alpha val="38000"/>
+                <a:alpha val="63000"/>
               </a:srgbClr>
             </a:outerShdw>
           </a:effectLst>
-        </a:effectStyle>
-        <a:effectStyle>
-          <a:effectLst>
-            <a:outerShdw blurRad="40000" dist="23000" dir="5400000" rotWithShape="0">
-              <a:srgbClr val="000000">
-                <a:alpha val="35000"/>
-              </a:srgbClr>
-            </a:outerShdw>
-          </a:effectLst>
-        </a:effectStyle>
-        <a:effectStyle>
-          <a:effectLst>
-            <a:outerShdw blurRad="40000" dist="23000" dir="5400000" rotWithShape="0">
-              <a:srgbClr val="000000">
-                <a:alpha val="35000"/>
-              </a:srgbClr>
-            </a:outerShdw>
-          </a:effectLst>
-          <a:scene3d>
-            <a:camera prst="orthographicFront">
-              <a:rot lat="0" lon="0" rev="0"/>
-            </a:camera>
-            <a:lightRig rig="threePt" dir="t">
-              <a:rot lat="0" lon="0" rev="1200000"/>
-            </a:lightRig>
-          </a:scene3d>
-          <a:sp3d>
-            <a:bevelT w="63500" h="25400"/>
-          </a:sp3d>
         </a:effectStyle>
       </a:effectStyleLst>
       <a:bgFillStyleLst>
         <a:solidFill>
           <a:schemeClr val="phClr"/>
         </a:solidFill>
+        <a:solidFill>
+          <a:schemeClr val="phClr">
+            <a:tint val="95000"/>
+            <a:satMod val="170000"/>
+          </a:schemeClr>
+        </a:solidFill>
         <a:gradFill rotWithShape="1">
           <a:gsLst>
             <a:gs pos="0">
               <a:schemeClr val="phClr">
-                <a:tint val="40000"/>
-                <a:satMod val="350000"/>
+                <a:tint val="93000"/>
+                <a:satMod val="150000"/>
+                <a:shade val="98000"/>
+                <a:lumMod val="102000"/>
               </a:schemeClr>
             </a:gs>
-            <a:gs pos="40000">
+            <a:gs pos="50000">
               <a:schemeClr val="phClr">
-                <a:tint val="45000"/>
-                <a:shade val="99000"/>
-                <a:satMod val="350000"/>
+                <a:tint val="98000"/>
+                <a:satMod val="130000"/>
+                <a:shade val="90000"/>
+                <a:lumMod val="103000"/>
               </a:schemeClr>
             </a:gs>
             <a:gs pos="100000">
               <a:schemeClr val="phClr">
-                <a:shade val="20000"/>
-                <a:satMod val="255000"/>
+                <a:shade val="63000"/>
+                <a:satMod val="120000"/>
               </a:schemeClr>
             </a:gs>
           </a:gsLst>
-          <a:path path="circle">
-            <a:fillToRect l="50000" t="-80000" r="50000" b="180000"/>
-          </a:path>
-        </a:gradFill>
-        <a:gradFill rotWithShape="1">
-          <a:gsLst>
-            <a:gs pos="0">
-              <a:schemeClr val="phClr">
-                <a:tint val="80000"/>
-                <a:satMod val="300000"/>
-              </a:schemeClr>
-            </a:gs>
-            <a:gs pos="100000">
-              <a:schemeClr val="phClr">
-                <a:shade val="30000"/>
-                <a:satMod val="200000"/>
-              </a:schemeClr>
-            </a:gs>
-          </a:gsLst>
-          <a:path path="circle">
-            <a:fillToRect l="50000" t="50000" r="50000" b="50000"/>
-          </a:path>
+          <a:lin ang="5400000" scaled="0"/>
         </a:gradFill>
       </a:bgFillStyleLst>
     </a:fmtScheme>
   </a:themeElements>
   <a:objectDefaults>
-    <a:spDef>
-      <a:spPr/>
-      <a:bodyPr/>
-      <a:lstStyle/>
-      <a:style>
-        <a:lnRef idx="1">
-          <a:schemeClr val="accent1"/>
-        </a:lnRef>
-        <a:fillRef idx="3">
-          <a:schemeClr val="accent1"/>
-        </a:fillRef>
-        <a:effectRef idx="2">
-          <a:schemeClr val="accent1"/>
-        </a:effectRef>
-        <a:fontRef idx="minor">
-          <a:schemeClr val="lt1"/>
-        </a:fontRef>
-      </a:style>
-    </a:spDef>
     <a:lnDef>
       <a:spPr/>
       <a:bodyPr/>
@@ -8685,5 +10404,10 @@
     </a:lnDef>
   </a:objectDefaults>
   <a:extraClrSchemeLst/>
+  <a:extLst>
+    <a:ext uri="{05A4C25C-085E-4340-85A3-A5531E510DB2}">
+      <thm15:themeFamily xmlns:thm15="http://schemas.microsoft.com/office/thememl/2012/main" name="Office Theme" id="{2E142A2C-CD16-42D6-873A-C26D2A0506FA}" vid="{1BDDFF52-6CD6-40A5-AB3C-68EB2F1E4D0A}"/>
+    </a:ext>
+  </a:extLst>
 </a:theme>
 </file>